--- a/docs/plots/carbo/jx_carbo_linsubhr_dosedisc_grade2.pptx
+++ b/docs/plots/carbo/jx_carbo_linsubhr_dosedisc_grade2.pptx
@@ -3132,557 +3132,560 @@
           <p:spPr>
             <a:xfrm>
               <a:off x="1172049" y="1896563"/>
-              <a:ext cx="7090630" cy="3487990"/>
+              <a:ext cx="7090630" cy="3475963"/>
             </a:xfrm>
             <a:custGeom>
               <a:avLst/>
               <a:pathLst>
-                <a:path w="7090630" h="3487990">
+                <a:path w="7090630" h="3475963">
                   <a:moveTo>
-                    <a:pt x="0" y="2997136"/>
+                    <a:pt x="0" y="2910969"/>
                   </a:moveTo>
                   <a:lnTo>
-                    <a:pt x="71622" y="2992770"/>
-                  </a:lnTo>
-                  <a:lnTo>
-                    <a:pt x="143245" y="2988374"/>
-                  </a:lnTo>
-                  <a:lnTo>
-                    <a:pt x="214867" y="2983950"/>
-                  </a:lnTo>
-                  <a:lnTo>
-                    <a:pt x="286490" y="2979496"/>
-                  </a:lnTo>
-                  <a:lnTo>
-                    <a:pt x="358112" y="2975012"/>
-                  </a:lnTo>
-                  <a:lnTo>
-                    <a:pt x="429735" y="2970499"/>
-                  </a:lnTo>
-                  <a:lnTo>
-                    <a:pt x="501357" y="2965955"/>
-                  </a:lnTo>
-                  <a:lnTo>
-                    <a:pt x="572980" y="2961381"/>
-                  </a:lnTo>
-                  <a:lnTo>
-                    <a:pt x="644602" y="2956777"/>
-                  </a:lnTo>
-                  <a:lnTo>
-                    <a:pt x="716225" y="2952142"/>
-                  </a:lnTo>
-                  <a:lnTo>
-                    <a:pt x="787847" y="2947476"/>
-                  </a:lnTo>
-                  <a:lnTo>
-                    <a:pt x="859470" y="2942779"/>
-                  </a:lnTo>
-                  <a:lnTo>
-                    <a:pt x="931092" y="2938051"/>
-                  </a:lnTo>
-                  <a:lnTo>
-                    <a:pt x="1002715" y="2933292"/>
-                  </a:lnTo>
-                  <a:lnTo>
-                    <a:pt x="1074337" y="2928500"/>
-                  </a:lnTo>
-                  <a:lnTo>
-                    <a:pt x="1145960" y="2923677"/>
-                  </a:lnTo>
-                  <a:lnTo>
-                    <a:pt x="1217582" y="2918821"/>
-                  </a:lnTo>
-                  <a:lnTo>
-                    <a:pt x="1289205" y="2913934"/>
-                  </a:lnTo>
-                  <a:lnTo>
-                    <a:pt x="1360827" y="2909013"/>
-                  </a:lnTo>
-                  <a:lnTo>
-                    <a:pt x="1432450" y="2904060"/>
-                  </a:lnTo>
-                  <a:lnTo>
-                    <a:pt x="1504073" y="2899074"/>
-                  </a:lnTo>
-                  <a:lnTo>
-                    <a:pt x="1575695" y="2894055"/>
-                  </a:lnTo>
-                  <a:lnTo>
-                    <a:pt x="1647318" y="2889002"/>
-                  </a:lnTo>
-                  <a:lnTo>
-                    <a:pt x="1718940" y="2883916"/>
-                  </a:lnTo>
-                  <a:lnTo>
-                    <a:pt x="1790563" y="2878795"/>
-                  </a:lnTo>
-                  <a:lnTo>
-                    <a:pt x="1862185" y="2873641"/>
-                  </a:lnTo>
-                  <a:lnTo>
-                    <a:pt x="1933808" y="2868452"/>
-                  </a:lnTo>
-                  <a:lnTo>
-                    <a:pt x="2005430" y="2863229"/>
-                  </a:lnTo>
-                  <a:lnTo>
-                    <a:pt x="2077053" y="2857971"/>
-                  </a:lnTo>
-                  <a:lnTo>
-                    <a:pt x="2148675" y="2852678"/>
-                  </a:lnTo>
-                  <a:lnTo>
-                    <a:pt x="2220298" y="2847350"/>
-                  </a:lnTo>
-                  <a:lnTo>
-                    <a:pt x="2291920" y="2841986"/>
-                  </a:lnTo>
-                  <a:lnTo>
-                    <a:pt x="2363543" y="2836586"/>
-                  </a:lnTo>
-                  <a:lnTo>
-                    <a:pt x="2435165" y="2831151"/>
-                  </a:lnTo>
-                  <a:lnTo>
-                    <a:pt x="2506788" y="2825679"/>
-                  </a:lnTo>
-                  <a:lnTo>
-                    <a:pt x="2578410" y="2820171"/>
-                  </a:lnTo>
-                  <a:lnTo>
-                    <a:pt x="2650033" y="2814626"/>
-                  </a:lnTo>
-                  <a:lnTo>
-                    <a:pt x="2721655" y="2809044"/>
-                  </a:lnTo>
-                  <a:lnTo>
-                    <a:pt x="2793278" y="2803425"/>
-                  </a:lnTo>
-                  <a:lnTo>
-                    <a:pt x="2864901" y="2797769"/>
-                  </a:lnTo>
-                  <a:lnTo>
-                    <a:pt x="2936523" y="2792075"/>
-                  </a:lnTo>
-                  <a:lnTo>
-                    <a:pt x="3008146" y="2786343"/>
-                  </a:lnTo>
-                  <a:lnTo>
-                    <a:pt x="3079768" y="2768780"/>
-                  </a:lnTo>
-                  <a:lnTo>
-                    <a:pt x="3151391" y="2733554"/>
-                  </a:lnTo>
-                  <a:lnTo>
-                    <a:pt x="3223013" y="2696925"/>
-                  </a:lnTo>
-                  <a:lnTo>
-                    <a:pt x="3294636" y="2658835"/>
-                  </a:lnTo>
-                  <a:lnTo>
-                    <a:pt x="3366258" y="2619228"/>
-                  </a:lnTo>
-                  <a:lnTo>
-                    <a:pt x="3437881" y="2578042"/>
-                  </a:lnTo>
-                  <a:lnTo>
-                    <a:pt x="3509503" y="2535214"/>
-                  </a:lnTo>
-                  <a:lnTo>
-                    <a:pt x="3581126" y="2490680"/>
-                  </a:lnTo>
-                  <a:lnTo>
-                    <a:pt x="3652748" y="2444371"/>
-                  </a:lnTo>
-                  <a:lnTo>
-                    <a:pt x="3724371" y="2396216"/>
-                  </a:lnTo>
-                  <a:lnTo>
-                    <a:pt x="3795993" y="2346142"/>
-                  </a:lnTo>
-                  <a:lnTo>
-                    <a:pt x="3867616" y="2294073"/>
-                  </a:lnTo>
-                  <a:lnTo>
-                    <a:pt x="3939238" y="2239928"/>
-                  </a:lnTo>
-                  <a:lnTo>
-                    <a:pt x="4010861" y="2183625"/>
-                  </a:lnTo>
-                  <a:lnTo>
-                    <a:pt x="4082483" y="2125079"/>
-                  </a:lnTo>
-                  <a:lnTo>
-                    <a:pt x="4154106" y="2064199"/>
-                  </a:lnTo>
-                  <a:lnTo>
-                    <a:pt x="4225729" y="2000893"/>
-                  </a:lnTo>
-                  <a:lnTo>
-                    <a:pt x="4297351" y="1935064"/>
-                  </a:lnTo>
-                  <a:lnTo>
-                    <a:pt x="4368974" y="1866611"/>
-                  </a:lnTo>
-                  <a:lnTo>
-                    <a:pt x="4440596" y="1795430"/>
-                  </a:lnTo>
-                  <a:lnTo>
-                    <a:pt x="4512219" y="1721412"/>
-                  </a:lnTo>
-                  <a:lnTo>
-                    <a:pt x="4583841" y="1644444"/>
-                  </a:lnTo>
-                  <a:lnTo>
-                    <a:pt x="4655464" y="1564409"/>
-                  </a:lnTo>
-                  <a:lnTo>
-                    <a:pt x="4727086" y="1481184"/>
-                  </a:lnTo>
-                  <a:lnTo>
-                    <a:pt x="4798709" y="1394643"/>
-                  </a:lnTo>
-                  <a:lnTo>
-                    <a:pt x="4870331" y="1304652"/>
-                  </a:lnTo>
-                  <a:lnTo>
-                    <a:pt x="4941954" y="1211074"/>
-                  </a:lnTo>
-                  <a:lnTo>
-                    <a:pt x="5013576" y="1113768"/>
-                  </a:lnTo>
-                  <a:lnTo>
-                    <a:pt x="5085199" y="1012583"/>
-                  </a:lnTo>
-                  <a:lnTo>
-                    <a:pt x="5156821" y="907365"/>
-                  </a:lnTo>
-                  <a:lnTo>
-                    <a:pt x="5228444" y="797954"/>
-                  </a:lnTo>
-                  <a:lnTo>
-                    <a:pt x="5300066" y="684183"/>
-                  </a:lnTo>
-                  <a:lnTo>
-                    <a:pt x="5371689" y="565877"/>
-                  </a:lnTo>
-                  <a:lnTo>
-                    <a:pt x="5443311" y="442857"/>
-                  </a:lnTo>
-                  <a:lnTo>
-                    <a:pt x="5514934" y="314933"/>
-                  </a:lnTo>
-                  <a:lnTo>
-                    <a:pt x="5586557" y="181911"/>
-                  </a:lnTo>
-                  <a:lnTo>
-                    <a:pt x="5658179" y="43588"/>
-                  </a:lnTo>
-                  <a:lnTo>
-                    <a:pt x="5679884" y="0"/>
+                    <a:pt x="71622" y="2908191"/>
+                  </a:lnTo>
+                  <a:lnTo>
+                    <a:pt x="143245" y="2905402"/>
+                  </a:lnTo>
+                  <a:lnTo>
+                    <a:pt x="214867" y="2902603"/>
+                  </a:lnTo>
+                  <a:lnTo>
+                    <a:pt x="286490" y="2899794"/>
+                  </a:lnTo>
+                  <a:lnTo>
+                    <a:pt x="358112" y="2896974"/>
+                  </a:lnTo>
+                  <a:lnTo>
+                    <a:pt x="429735" y="2894144"/>
+                  </a:lnTo>
+                  <a:lnTo>
+                    <a:pt x="501357" y="2891303"/>
+                  </a:lnTo>
+                  <a:lnTo>
+                    <a:pt x="572980" y="2888451"/>
+                  </a:lnTo>
+                  <a:lnTo>
+                    <a:pt x="644602" y="2885589"/>
+                  </a:lnTo>
+                  <a:lnTo>
+                    <a:pt x="716225" y="2882716"/>
+                  </a:lnTo>
+                  <a:lnTo>
+                    <a:pt x="787847" y="2879832"/>
+                  </a:lnTo>
+                  <a:lnTo>
+                    <a:pt x="859470" y="2876937"/>
+                  </a:lnTo>
+                  <a:lnTo>
+                    <a:pt x="931092" y="2874032"/>
+                  </a:lnTo>
+                  <a:lnTo>
+                    <a:pt x="1002715" y="2871115"/>
+                  </a:lnTo>
+                  <a:lnTo>
+                    <a:pt x="1074337" y="2868188"/>
+                  </a:lnTo>
+                  <a:lnTo>
+                    <a:pt x="1145960" y="2865250"/>
+                  </a:lnTo>
+                  <a:lnTo>
+                    <a:pt x="1217582" y="2862301"/>
+                  </a:lnTo>
+                  <a:lnTo>
+                    <a:pt x="1289205" y="2859340"/>
+                  </a:lnTo>
+                  <a:lnTo>
+                    <a:pt x="1360827" y="2856369"/>
+                  </a:lnTo>
+                  <a:lnTo>
+                    <a:pt x="1432450" y="2853386"/>
+                  </a:lnTo>
+                  <a:lnTo>
+                    <a:pt x="1504073" y="2850393"/>
+                  </a:lnTo>
+                  <a:lnTo>
+                    <a:pt x="1575695" y="2847388"/>
+                  </a:lnTo>
+                  <a:lnTo>
+                    <a:pt x="1647318" y="2844372"/>
+                  </a:lnTo>
+                  <a:lnTo>
+                    <a:pt x="1718940" y="2841344"/>
+                  </a:lnTo>
+                  <a:lnTo>
+                    <a:pt x="1790563" y="2838305"/>
+                  </a:lnTo>
+                  <a:lnTo>
+                    <a:pt x="1862185" y="2835255"/>
+                  </a:lnTo>
+                  <a:lnTo>
+                    <a:pt x="1933808" y="2832194"/>
+                  </a:lnTo>
+                  <a:lnTo>
+                    <a:pt x="2005430" y="2829121"/>
+                  </a:lnTo>
+                  <a:lnTo>
+                    <a:pt x="2077053" y="2826036"/>
+                  </a:lnTo>
+                  <a:lnTo>
+                    <a:pt x="2148675" y="2822940"/>
+                  </a:lnTo>
+                  <a:lnTo>
+                    <a:pt x="2220298" y="2819832"/>
+                  </a:lnTo>
+                  <a:lnTo>
+                    <a:pt x="2291920" y="2816713"/>
+                  </a:lnTo>
+                  <a:lnTo>
+                    <a:pt x="2363543" y="2813582"/>
+                  </a:lnTo>
+                  <a:lnTo>
+                    <a:pt x="2435165" y="2810439"/>
+                  </a:lnTo>
+                  <a:lnTo>
+                    <a:pt x="2506788" y="2807284"/>
+                  </a:lnTo>
+                  <a:lnTo>
+                    <a:pt x="2578410" y="2804118"/>
+                  </a:lnTo>
+                  <a:lnTo>
+                    <a:pt x="2650033" y="2800940"/>
+                  </a:lnTo>
+                  <a:lnTo>
+                    <a:pt x="2721655" y="2797750"/>
+                  </a:lnTo>
+                  <a:lnTo>
+                    <a:pt x="2793278" y="2794548"/>
+                  </a:lnTo>
+                  <a:lnTo>
+                    <a:pt x="2864901" y="2791334"/>
+                  </a:lnTo>
+                  <a:lnTo>
+                    <a:pt x="2936523" y="2788107"/>
+                  </a:lnTo>
+                  <a:lnTo>
+                    <a:pt x="3008146" y="2784869"/>
+                  </a:lnTo>
+                  <a:lnTo>
+                    <a:pt x="3079768" y="2769385"/>
+                  </a:lnTo>
+                  <a:lnTo>
+                    <a:pt x="3151391" y="2735703"/>
+                  </a:lnTo>
+                  <a:lnTo>
+                    <a:pt x="3223013" y="2700736"/>
+                  </a:lnTo>
+                  <a:lnTo>
+                    <a:pt x="3294636" y="2664436"/>
+                  </a:lnTo>
+                  <a:lnTo>
+                    <a:pt x="3366258" y="2626752"/>
+                  </a:lnTo>
+                  <a:lnTo>
+                    <a:pt x="3437881" y="2587631"/>
+                  </a:lnTo>
+                  <a:lnTo>
+                    <a:pt x="3509503" y="2547017"/>
+                  </a:lnTo>
+                  <a:lnTo>
+                    <a:pt x="3581126" y="2504855"/>
+                  </a:lnTo>
+                  <a:lnTo>
+                    <a:pt x="3652748" y="2461085"/>
+                  </a:lnTo>
+                  <a:lnTo>
+                    <a:pt x="3724371" y="2415646"/>
+                  </a:lnTo>
+                  <a:lnTo>
+                    <a:pt x="3795993" y="2368475"/>
+                  </a:lnTo>
+                  <a:lnTo>
+                    <a:pt x="3867616" y="2319504"/>
+                  </a:lnTo>
+                  <a:lnTo>
+                    <a:pt x="3939238" y="2268666"/>
+                  </a:lnTo>
+                  <a:lnTo>
+                    <a:pt x="4010861" y="2215889"/>
+                  </a:lnTo>
+                  <a:lnTo>
+                    <a:pt x="4082483" y="2161100"/>
+                  </a:lnTo>
+                  <a:lnTo>
+                    <a:pt x="4154106" y="2104221"/>
+                  </a:lnTo>
+                  <a:lnTo>
+                    <a:pt x="4225729" y="2045174"/>
+                  </a:lnTo>
+                  <a:lnTo>
+                    <a:pt x="4297351" y="1983874"/>
+                  </a:lnTo>
+                  <a:lnTo>
+                    <a:pt x="4368974" y="1920237"/>
+                  </a:lnTo>
+                  <a:lnTo>
+                    <a:pt x="4440596" y="1854174"/>
+                  </a:lnTo>
+                  <a:lnTo>
+                    <a:pt x="4512219" y="1785591"/>
+                  </a:lnTo>
+                  <a:lnTo>
+                    <a:pt x="4583841" y="1714392"/>
+                  </a:lnTo>
+                  <a:lnTo>
+                    <a:pt x="4655464" y="1640479"/>
+                  </a:lnTo>
+                  <a:lnTo>
+                    <a:pt x="4727086" y="1563747"/>
+                  </a:lnTo>
+                  <a:lnTo>
+                    <a:pt x="4798709" y="1484089"/>
+                  </a:lnTo>
+                  <a:lnTo>
+                    <a:pt x="4870331" y="1401393"/>
+                  </a:lnTo>
+                  <a:lnTo>
+                    <a:pt x="4941954" y="1315544"/>
+                  </a:lnTo>
+                  <a:lnTo>
+                    <a:pt x="5013576" y="1226420"/>
+                  </a:lnTo>
+                  <a:lnTo>
+                    <a:pt x="5085199" y="1133899"/>
+                  </a:lnTo>
+                  <a:lnTo>
+                    <a:pt x="5156821" y="1037849"/>
+                  </a:lnTo>
+                  <a:lnTo>
+                    <a:pt x="5228444" y="938136"/>
+                  </a:lnTo>
+                  <a:lnTo>
+                    <a:pt x="5300066" y="834620"/>
+                  </a:lnTo>
+                  <a:lnTo>
+                    <a:pt x="5371689" y="727158"/>
+                  </a:lnTo>
+                  <a:lnTo>
+                    <a:pt x="5443311" y="615597"/>
+                  </a:lnTo>
+                  <a:lnTo>
+                    <a:pt x="5514934" y="499782"/>
+                  </a:lnTo>
+                  <a:lnTo>
+                    <a:pt x="5586557" y="379551"/>
+                  </a:lnTo>
+                  <a:lnTo>
+                    <a:pt x="5658179" y="254734"/>
+                  </a:lnTo>
+                  <a:lnTo>
+                    <a:pt x="5729802" y="125158"/>
+                  </a:lnTo>
+                  <a:lnTo>
+                    <a:pt x="5796441" y="0"/>
                   </a:lnTo>
                   <a:lnTo>
                     <a:pt x="7090630" y="0"/>
                   </a:lnTo>
                   <a:lnTo>
-                    <a:pt x="7090630" y="2387888"/>
-                  </a:lnTo>
-                  <a:lnTo>
-                    <a:pt x="7019007" y="2396257"/>
-                  </a:lnTo>
-                  <a:lnTo>
-                    <a:pt x="6947385" y="2404570"/>
-                  </a:lnTo>
-                  <a:lnTo>
-                    <a:pt x="6875762" y="2412828"/>
-                  </a:lnTo>
-                  <a:lnTo>
-                    <a:pt x="6804139" y="2421031"/>
-                  </a:lnTo>
-                  <a:lnTo>
-                    <a:pt x="6732517" y="2429180"/>
-                  </a:lnTo>
-                  <a:lnTo>
-                    <a:pt x="6660894" y="2437276"/>
-                  </a:lnTo>
-                  <a:lnTo>
-                    <a:pt x="6589272" y="2445317"/>
-                  </a:lnTo>
-                  <a:lnTo>
-                    <a:pt x="6517649" y="2453306"/>
-                  </a:lnTo>
-                  <a:lnTo>
-                    <a:pt x="6446027" y="2461241"/>
-                  </a:lnTo>
-                  <a:lnTo>
-                    <a:pt x="6374404" y="2469124"/>
-                  </a:lnTo>
-                  <a:lnTo>
-                    <a:pt x="6302782" y="2476955"/>
-                  </a:lnTo>
-                  <a:lnTo>
-                    <a:pt x="6231159" y="2484734"/>
-                  </a:lnTo>
-                  <a:lnTo>
-                    <a:pt x="6159537" y="2492462"/>
-                  </a:lnTo>
-                  <a:lnTo>
-                    <a:pt x="6087914" y="2500138"/>
-                  </a:lnTo>
-                  <a:lnTo>
-                    <a:pt x="6016292" y="2507764"/>
-                  </a:lnTo>
-                  <a:lnTo>
-                    <a:pt x="5944669" y="2515339"/>
-                  </a:lnTo>
-                  <a:lnTo>
-                    <a:pt x="5873047" y="2522865"/>
-                  </a:lnTo>
-                  <a:lnTo>
-                    <a:pt x="5801424" y="2530340"/>
-                  </a:lnTo>
-                  <a:lnTo>
-                    <a:pt x="5729802" y="2537766"/>
-                  </a:lnTo>
-                  <a:lnTo>
-                    <a:pt x="5658179" y="2545143"/>
-                  </a:lnTo>
-                  <a:lnTo>
-                    <a:pt x="5586557" y="2552470"/>
-                  </a:lnTo>
-                  <a:lnTo>
-                    <a:pt x="5514934" y="2559750"/>
-                  </a:lnTo>
-                  <a:lnTo>
-                    <a:pt x="5443311" y="2566981"/>
-                  </a:lnTo>
-                  <a:lnTo>
-                    <a:pt x="5371689" y="2574165"/>
-                  </a:lnTo>
-                  <a:lnTo>
-                    <a:pt x="5300066" y="2581301"/>
-                  </a:lnTo>
-                  <a:lnTo>
-                    <a:pt x="5228444" y="2588389"/>
-                  </a:lnTo>
-                  <a:lnTo>
-                    <a:pt x="5156821" y="2595431"/>
-                  </a:lnTo>
-                  <a:lnTo>
-                    <a:pt x="5085199" y="2602426"/>
-                  </a:lnTo>
-                  <a:lnTo>
-                    <a:pt x="5013576" y="2609375"/>
-                  </a:lnTo>
-                  <a:lnTo>
-                    <a:pt x="4941954" y="2616278"/>
-                  </a:lnTo>
-                  <a:lnTo>
-                    <a:pt x="4870331" y="2623135"/>
-                  </a:lnTo>
-                  <a:lnTo>
-                    <a:pt x="4798709" y="2629947"/>
-                  </a:lnTo>
-                  <a:lnTo>
-                    <a:pt x="4727086" y="2636714"/>
-                  </a:lnTo>
-                  <a:lnTo>
-                    <a:pt x="4655464" y="2643436"/>
-                  </a:lnTo>
-                  <a:lnTo>
-                    <a:pt x="4583841" y="2650114"/>
-                  </a:lnTo>
-                  <a:lnTo>
-                    <a:pt x="4512219" y="2656747"/>
-                  </a:lnTo>
-                  <a:lnTo>
-                    <a:pt x="4440596" y="2663336"/>
-                  </a:lnTo>
-                  <a:lnTo>
-                    <a:pt x="4368974" y="2669882"/>
-                  </a:lnTo>
-                  <a:lnTo>
-                    <a:pt x="4297351" y="2676385"/>
-                  </a:lnTo>
-                  <a:lnTo>
-                    <a:pt x="4225729" y="2682844"/>
-                  </a:lnTo>
-                  <a:lnTo>
-                    <a:pt x="4154106" y="2689261"/>
-                  </a:lnTo>
-                  <a:lnTo>
-                    <a:pt x="4082483" y="2695636"/>
-                  </a:lnTo>
-                  <a:lnTo>
-                    <a:pt x="4010861" y="2701968"/>
-                  </a:lnTo>
-                  <a:lnTo>
-                    <a:pt x="3939238" y="2708258"/>
-                  </a:lnTo>
-                  <a:lnTo>
-                    <a:pt x="3867616" y="2714507"/>
-                  </a:lnTo>
-                  <a:lnTo>
-                    <a:pt x="3795993" y="2720714"/>
-                  </a:lnTo>
-                  <a:lnTo>
-                    <a:pt x="3724371" y="2726880"/>
-                  </a:lnTo>
-                  <a:lnTo>
-                    <a:pt x="3652748" y="2733006"/>
-                  </a:lnTo>
-                  <a:lnTo>
-                    <a:pt x="3581126" y="2739091"/>
-                  </a:lnTo>
-                  <a:lnTo>
-                    <a:pt x="3509503" y="2745135"/>
-                  </a:lnTo>
-                  <a:lnTo>
-                    <a:pt x="3437881" y="2751140"/>
-                  </a:lnTo>
-                  <a:lnTo>
-                    <a:pt x="3366258" y="2757105"/>
-                  </a:lnTo>
-                  <a:lnTo>
-                    <a:pt x="3294636" y="2763030"/>
-                  </a:lnTo>
-                  <a:lnTo>
-                    <a:pt x="3223013" y="2768917"/>
-                  </a:lnTo>
-                  <a:lnTo>
-                    <a:pt x="3151391" y="2774764"/>
-                  </a:lnTo>
-                  <a:lnTo>
-                    <a:pt x="3079768" y="2780573"/>
-                  </a:lnTo>
-                  <a:lnTo>
-                    <a:pt x="3008146" y="2802655"/>
-                  </a:lnTo>
-                  <a:lnTo>
-                    <a:pt x="2936523" y="2835233"/>
-                  </a:lnTo>
-                  <a:lnTo>
-                    <a:pt x="2864901" y="2866561"/>
-                  </a:lnTo>
-                  <a:lnTo>
-                    <a:pt x="2793278" y="2896689"/>
-                  </a:lnTo>
-                  <a:lnTo>
-                    <a:pt x="2721655" y="2925662"/>
-                  </a:lnTo>
-                  <a:lnTo>
-                    <a:pt x="2650033" y="2953525"/>
-                  </a:lnTo>
-                  <a:lnTo>
-                    <a:pt x="2578410" y="2980320"/>
-                  </a:lnTo>
-                  <a:lnTo>
-                    <a:pt x="2506788" y="3006088"/>
-                  </a:lnTo>
-                  <a:lnTo>
-                    <a:pt x="2435165" y="3030868"/>
-                  </a:lnTo>
-                  <a:lnTo>
-                    <a:pt x="2363543" y="3054699"/>
-                  </a:lnTo>
-                  <a:lnTo>
-                    <a:pt x="2291920" y="3077616"/>
-                  </a:lnTo>
-                  <a:lnTo>
-                    <a:pt x="2220298" y="3099655"/>
-                  </a:lnTo>
-                  <a:lnTo>
-                    <a:pt x="2148675" y="3120849"/>
-                  </a:lnTo>
-                  <a:lnTo>
-                    <a:pt x="2077053" y="3141231"/>
-                  </a:lnTo>
-                  <a:lnTo>
-                    <a:pt x="2005430" y="3160832"/>
-                  </a:lnTo>
-                  <a:lnTo>
-                    <a:pt x="1933808" y="3179682"/>
-                  </a:lnTo>
-                  <a:lnTo>
-                    <a:pt x="1862185" y="3197809"/>
-                  </a:lnTo>
-                  <a:lnTo>
-                    <a:pt x="1790563" y="3215241"/>
-                  </a:lnTo>
-                  <a:lnTo>
-                    <a:pt x="1718940" y="3232005"/>
-                  </a:lnTo>
-                  <a:lnTo>
-                    <a:pt x="1647318" y="3248127"/>
-                  </a:lnTo>
-                  <a:lnTo>
-                    <a:pt x="1575695" y="3263631"/>
-                  </a:lnTo>
-                  <a:lnTo>
-                    <a:pt x="1504073" y="3278540"/>
-                  </a:lnTo>
-                  <a:lnTo>
-                    <a:pt x="1432450" y="3292878"/>
-                  </a:lnTo>
-                  <a:lnTo>
-                    <a:pt x="1360827" y="3306667"/>
-                  </a:lnTo>
-                  <a:lnTo>
-                    <a:pt x="1289205" y="3319927"/>
-                  </a:lnTo>
-                  <a:lnTo>
-                    <a:pt x="1217582" y="3332679"/>
-                  </a:lnTo>
-                  <a:lnTo>
-                    <a:pt x="1145960" y="3344942"/>
-                  </a:lnTo>
-                  <a:lnTo>
-                    <a:pt x="1074337" y="3356735"/>
-                  </a:lnTo>
-                  <a:lnTo>
-                    <a:pt x="1002715" y="3368077"/>
-                  </a:lnTo>
-                  <a:lnTo>
-                    <a:pt x="931092" y="3378983"/>
-                  </a:lnTo>
-                  <a:lnTo>
-                    <a:pt x="859470" y="3389472"/>
-                  </a:lnTo>
-                  <a:lnTo>
-                    <a:pt x="787847" y="3399558"/>
-                  </a:lnTo>
-                  <a:lnTo>
-                    <a:pt x="716225" y="3409258"/>
-                  </a:lnTo>
-                  <a:lnTo>
-                    <a:pt x="644602" y="3418586"/>
-                  </a:lnTo>
-                  <a:lnTo>
-                    <a:pt x="572980" y="3427557"/>
-                  </a:lnTo>
-                  <a:lnTo>
-                    <a:pt x="501357" y="3436184"/>
-                  </a:lnTo>
-                  <a:lnTo>
-                    <a:pt x="429735" y="3444480"/>
-                  </a:lnTo>
-                  <a:lnTo>
-                    <a:pt x="358112" y="3452458"/>
-                  </a:lnTo>
-                  <a:lnTo>
-                    <a:pt x="286490" y="3460131"/>
-                  </a:lnTo>
-                  <a:lnTo>
-                    <a:pt x="214867" y="3467509"/>
-                  </a:lnTo>
-                  <a:lnTo>
-                    <a:pt x="143245" y="3474605"/>
-                  </a:lnTo>
-                  <a:lnTo>
-                    <a:pt x="71622" y="3481428"/>
-                  </a:lnTo>
-                  <a:lnTo>
-                    <a:pt x="0" y="3487990"/>
+                    <a:pt x="7090630" y="2578766"/>
+                  </a:lnTo>
+                  <a:lnTo>
+                    <a:pt x="7019007" y="2582774"/>
+                  </a:lnTo>
+                  <a:lnTo>
+                    <a:pt x="6947385" y="2586766"/>
+                  </a:lnTo>
+                  <a:lnTo>
+                    <a:pt x="6875762" y="2590744"/>
+                  </a:lnTo>
+                  <a:lnTo>
+                    <a:pt x="6804139" y="2594706"/>
+                  </a:lnTo>
+                  <a:lnTo>
+                    <a:pt x="6732517" y="2598654"/>
+                  </a:lnTo>
+                  <a:lnTo>
+                    <a:pt x="6660894" y="2602587"/>
+                  </a:lnTo>
+                  <a:lnTo>
+                    <a:pt x="6589272" y="2606505"/>
+                  </a:lnTo>
+                  <a:lnTo>
+                    <a:pt x="6517649" y="2610409"/>
+                  </a:lnTo>
+                  <a:lnTo>
+                    <a:pt x="6446027" y="2614298"/>
+                  </a:lnTo>
+                  <a:lnTo>
+                    <a:pt x="6374404" y="2618173"/>
+                  </a:lnTo>
+                  <a:lnTo>
+                    <a:pt x="6302782" y="2622033"/>
+                  </a:lnTo>
+                  <a:lnTo>
+                    <a:pt x="6231159" y="2625879"/>
+                  </a:lnTo>
+                  <a:lnTo>
+                    <a:pt x="6159537" y="2629711"/>
+                  </a:lnTo>
+                  <a:lnTo>
+                    <a:pt x="6087914" y="2633528"/>
+                  </a:lnTo>
+                  <a:lnTo>
+                    <a:pt x="6016292" y="2637331"/>
+                  </a:lnTo>
+                  <a:lnTo>
+                    <a:pt x="5944669" y="2641119"/>
+                  </a:lnTo>
+                  <a:lnTo>
+                    <a:pt x="5873047" y="2644894"/>
+                  </a:lnTo>
+                  <a:lnTo>
+                    <a:pt x="5801424" y="2648655"/>
+                  </a:lnTo>
+                  <a:lnTo>
+                    <a:pt x="5729802" y="2652401"/>
+                  </a:lnTo>
+                  <a:lnTo>
+                    <a:pt x="5658179" y="2656134"/>
+                  </a:lnTo>
+                  <a:lnTo>
+                    <a:pt x="5586557" y="2659852"/>
+                  </a:lnTo>
+                  <a:lnTo>
+                    <a:pt x="5514934" y="2663557"/>
+                  </a:lnTo>
+                  <a:lnTo>
+                    <a:pt x="5443311" y="2667248"/>
+                  </a:lnTo>
+                  <a:lnTo>
+                    <a:pt x="5371689" y="2670925"/>
+                  </a:lnTo>
+                  <a:lnTo>
+                    <a:pt x="5300066" y="2674588"/>
+                  </a:lnTo>
+                  <a:lnTo>
+                    <a:pt x="5228444" y="2678238"/>
+                  </a:lnTo>
+                  <a:lnTo>
+                    <a:pt x="5156821" y="2681874"/>
+                  </a:lnTo>
+                  <a:lnTo>
+                    <a:pt x="5085199" y="2685497"/>
+                  </a:lnTo>
+                  <a:lnTo>
+                    <a:pt x="5013576" y="2689106"/>
+                  </a:lnTo>
+                  <a:lnTo>
+                    <a:pt x="4941954" y="2692701"/>
+                  </a:lnTo>
+                  <a:lnTo>
+                    <a:pt x="4870331" y="2696283"/>
+                  </a:lnTo>
+                  <a:lnTo>
+                    <a:pt x="4798709" y="2699852"/>
+                  </a:lnTo>
+                  <a:lnTo>
+                    <a:pt x="4727086" y="2703407"/>
+                  </a:lnTo>
+                  <a:lnTo>
+                    <a:pt x="4655464" y="2706950"/>
+                  </a:lnTo>
+                  <a:lnTo>
+                    <a:pt x="4583841" y="2710479"/>
+                  </a:lnTo>
+                  <a:lnTo>
+                    <a:pt x="4512219" y="2713994"/>
+                  </a:lnTo>
+                  <a:lnTo>
+                    <a:pt x="4440596" y="2717497"/>
+                  </a:lnTo>
+                  <a:lnTo>
+                    <a:pt x="4368974" y="2720987"/>
+                  </a:lnTo>
+                  <a:lnTo>
+                    <a:pt x="4297351" y="2724463"/>
+                  </a:lnTo>
+                  <a:lnTo>
+                    <a:pt x="4225729" y="2727927"/>
+                  </a:lnTo>
+                  <a:lnTo>
+                    <a:pt x="4154106" y="2731377"/>
+                  </a:lnTo>
+                  <a:lnTo>
+                    <a:pt x="4082483" y="2734815"/>
+                  </a:lnTo>
+                  <a:lnTo>
+                    <a:pt x="4010861" y="2738240"/>
+                  </a:lnTo>
+                  <a:lnTo>
+                    <a:pt x="3939238" y="2741652"/>
+                  </a:lnTo>
+                  <a:lnTo>
+                    <a:pt x="3867616" y="2745052"/>
+                  </a:lnTo>
+                  <a:lnTo>
+                    <a:pt x="3795993" y="2748439"/>
+                  </a:lnTo>
+                  <a:lnTo>
+                    <a:pt x="3724371" y="2751813"/>
+                  </a:lnTo>
+                  <a:lnTo>
+                    <a:pt x="3652748" y="2755174"/>
+                  </a:lnTo>
+                  <a:lnTo>
+                    <a:pt x="3581126" y="2758523"/>
+                  </a:lnTo>
+                  <a:lnTo>
+                    <a:pt x="3509503" y="2761860"/>
+                  </a:lnTo>
+                  <a:lnTo>
+                    <a:pt x="3437881" y="2765184"/>
+                  </a:lnTo>
+                  <a:lnTo>
+                    <a:pt x="3366258" y="2768496"/>
+                  </a:lnTo>
+                  <a:lnTo>
+                    <a:pt x="3294636" y="2771795"/>
+                  </a:lnTo>
+                  <a:lnTo>
+                    <a:pt x="3223013" y="2775082"/>
+                  </a:lnTo>
+                  <a:lnTo>
+                    <a:pt x="3151391" y="2778356"/>
+                  </a:lnTo>
+                  <a:lnTo>
+                    <a:pt x="3079768" y="2781619"/>
+                  </a:lnTo>
+                  <a:lnTo>
+                    <a:pt x="3008146" y="2801830"/>
+                  </a:lnTo>
+                  <a:lnTo>
+                    <a:pt x="2936523" y="2833084"/>
+                  </a:lnTo>
+                  <a:lnTo>
+                    <a:pt x="2864901" y="2863189"/>
+                  </a:lnTo>
+                  <a:lnTo>
+                    <a:pt x="2793278" y="2892188"/>
+                  </a:lnTo>
+                  <a:lnTo>
+                    <a:pt x="2721655" y="2920122"/>
+                  </a:lnTo>
+                  <a:lnTo>
+                    <a:pt x="2650033" y="2947030"/>
+                  </a:lnTo>
+                  <a:lnTo>
+                    <a:pt x="2578410" y="2972949"/>
+                  </a:lnTo>
+                  <a:lnTo>
+                    <a:pt x="2506788" y="2997917"/>
+                  </a:lnTo>
+                  <a:lnTo>
+                    <a:pt x="2435165" y="3021967"/>
+                  </a:lnTo>
+                  <a:lnTo>
+                    <a:pt x="2363543" y="3045134"/>
+                  </a:lnTo>
+                  <a:lnTo>
+                    <a:pt x="2291920" y="3067450"/>
+                  </a:lnTo>
+                  <a:lnTo>
+                    <a:pt x="2220298" y="3088946"/>
+                  </a:lnTo>
+                  <a:lnTo>
+                    <a:pt x="2148675" y="3109652"/>
+                  </a:lnTo>
+                  <a:lnTo>
+                    <a:pt x="2077053" y="3129598"/>
+                  </a:lnTo>
+                  <a:lnTo>
+                    <a:pt x="2005430" y="3148811"/>
+                  </a:lnTo>
+                  <a:lnTo>
+                    <a:pt x="1933808" y="3167319"/>
+                  </a:lnTo>
+                  <a:lnTo>
+                    <a:pt x="1862185" y="3185146"/>
+                  </a:lnTo>
+                  <a:lnTo>
+                    <a:pt x="1790563" y="3202319"/>
+                  </a:lnTo>
+                  <a:lnTo>
+                    <a:pt x="1718940" y="3218861"/>
+                  </a:lnTo>
+                  <a:lnTo>
+                    <a:pt x="1647318" y="3234795"/>
+                  </a:lnTo>
+                  <a:lnTo>
+                    <a:pt x="1575695" y="3250144"/>
+                  </a:lnTo>
+                  <a:lnTo>
+                    <a:pt x="1504073" y="3264929"/>
+                  </a:lnTo>
+                  <a:lnTo>
+                    <a:pt x="1432450" y="3279171"/>
+                  </a:lnTo>
+                  <a:lnTo>
+                    <a:pt x="1360827" y="3292890"/>
+                  </a:lnTo>
+                  <a:lnTo>
+                    <a:pt x="1289205" y="3306105"/>
+                  </a:lnTo>
+                  <a:lnTo>
+                    <a:pt x="1217582" y="3318834"/>
+                  </a:lnTo>
+                  <a:lnTo>
+                    <a:pt x="1145960" y="3331096"/>
+                  </a:lnTo>
+                  <a:lnTo>
+                    <a:pt x="1074337" y="3342908"/>
+                  </a:lnTo>
+                  <a:lnTo>
+                    <a:pt x="1002715" y="3354285"/>
+                  </a:lnTo>
+                  <a:lnTo>
+                    <a:pt x="931092" y="3365245"/>
+                  </a:lnTo>
+                  <a:lnTo>
+                    <a:pt x="859470" y="3375802"/>
+                  </a:lnTo>
+                  <a:lnTo>
+                    <a:pt x="787847" y="3385972"/>
+                  </a:lnTo>
+                  <a:lnTo>
+                    <a:pt x="716225" y="3395767"/>
+                  </a:lnTo>
+                  <a:lnTo>
+                    <a:pt x="644602" y="3405203"/>
+                  </a:lnTo>
+                  <a:lnTo>
+                    <a:pt x="572980" y="3414292"/>
+                  </a:lnTo>
+                  <a:lnTo>
+                    <a:pt x="501357" y="3423048"/>
+                  </a:lnTo>
+                  <a:lnTo>
+                    <a:pt x="429735" y="3431482"/>
+                  </a:lnTo>
+                  <a:lnTo>
+                    <a:pt x="358112" y="3439606"/>
+                  </a:lnTo>
+                  <a:lnTo>
+                    <a:pt x="286490" y="3447431"/>
+                  </a:lnTo>
+                  <a:lnTo>
+                    <a:pt x="214867" y="3454969"/>
+                  </a:lnTo>
+                  <a:lnTo>
+                    <a:pt x="143245" y="3462231"/>
+                  </a:lnTo>
+                  <a:lnTo>
+                    <a:pt x="71622" y="3469225"/>
+                  </a:lnTo>
+                  <a:lnTo>
+                    <a:pt x="0" y="3475963"/>
                   </a:lnTo>
                   <a:close/>
                 </a:path>
@@ -3709,254 +3712,257 @@
           <p:spPr>
             <a:xfrm>
               <a:off x="1172049" y="1896563"/>
-              <a:ext cx="5679884" cy="2997136"/>
+              <a:ext cx="5796441" cy="2910969"/>
             </a:xfrm>
             <a:custGeom>
               <a:avLst/>
               <a:pathLst>
-                <a:path w="5679884" h="2997136">
+                <a:path w="5796441" h="2910969">
                   <a:moveTo>
-                    <a:pt x="0" y="2997136"/>
+                    <a:pt x="0" y="2910969"/>
                   </a:moveTo>
                   <a:lnTo>
-                    <a:pt x="71622" y="2992770"/>
-                  </a:lnTo>
-                  <a:lnTo>
-                    <a:pt x="143245" y="2988374"/>
-                  </a:lnTo>
-                  <a:lnTo>
-                    <a:pt x="214867" y="2983950"/>
-                  </a:lnTo>
-                  <a:lnTo>
-                    <a:pt x="286490" y="2979496"/>
-                  </a:lnTo>
-                  <a:lnTo>
-                    <a:pt x="358112" y="2975012"/>
-                  </a:lnTo>
-                  <a:lnTo>
-                    <a:pt x="429735" y="2970499"/>
-                  </a:lnTo>
-                  <a:lnTo>
-                    <a:pt x="501357" y="2965955"/>
-                  </a:lnTo>
-                  <a:lnTo>
-                    <a:pt x="572980" y="2961381"/>
-                  </a:lnTo>
-                  <a:lnTo>
-                    <a:pt x="644602" y="2956777"/>
-                  </a:lnTo>
-                  <a:lnTo>
-                    <a:pt x="716225" y="2952142"/>
-                  </a:lnTo>
-                  <a:lnTo>
-                    <a:pt x="787847" y="2947476"/>
-                  </a:lnTo>
-                  <a:lnTo>
-                    <a:pt x="859470" y="2942779"/>
-                  </a:lnTo>
-                  <a:lnTo>
-                    <a:pt x="931092" y="2938051"/>
-                  </a:lnTo>
-                  <a:lnTo>
-                    <a:pt x="1002715" y="2933292"/>
-                  </a:lnTo>
-                  <a:lnTo>
-                    <a:pt x="1074337" y="2928500"/>
-                  </a:lnTo>
-                  <a:lnTo>
-                    <a:pt x="1145960" y="2923677"/>
-                  </a:lnTo>
-                  <a:lnTo>
-                    <a:pt x="1217582" y="2918821"/>
-                  </a:lnTo>
-                  <a:lnTo>
-                    <a:pt x="1289205" y="2913934"/>
-                  </a:lnTo>
-                  <a:lnTo>
-                    <a:pt x="1360827" y="2909013"/>
-                  </a:lnTo>
-                  <a:lnTo>
-                    <a:pt x="1432450" y="2904060"/>
-                  </a:lnTo>
-                  <a:lnTo>
-                    <a:pt x="1504073" y="2899074"/>
-                  </a:lnTo>
-                  <a:lnTo>
-                    <a:pt x="1575695" y="2894055"/>
-                  </a:lnTo>
-                  <a:lnTo>
-                    <a:pt x="1647318" y="2889002"/>
-                  </a:lnTo>
-                  <a:lnTo>
-                    <a:pt x="1718940" y="2883916"/>
-                  </a:lnTo>
-                  <a:lnTo>
-                    <a:pt x="1790563" y="2878795"/>
-                  </a:lnTo>
-                  <a:lnTo>
-                    <a:pt x="1862185" y="2873641"/>
-                  </a:lnTo>
-                  <a:lnTo>
-                    <a:pt x="1933808" y="2868452"/>
-                  </a:lnTo>
-                  <a:lnTo>
-                    <a:pt x="2005430" y="2863229"/>
-                  </a:lnTo>
-                  <a:lnTo>
-                    <a:pt x="2077053" y="2857971"/>
-                  </a:lnTo>
-                  <a:lnTo>
-                    <a:pt x="2148675" y="2852678"/>
-                  </a:lnTo>
-                  <a:lnTo>
-                    <a:pt x="2220298" y="2847350"/>
-                  </a:lnTo>
-                  <a:lnTo>
-                    <a:pt x="2291920" y="2841986"/>
-                  </a:lnTo>
-                  <a:lnTo>
-                    <a:pt x="2363543" y="2836586"/>
-                  </a:lnTo>
-                  <a:lnTo>
-                    <a:pt x="2435165" y="2831151"/>
-                  </a:lnTo>
-                  <a:lnTo>
-                    <a:pt x="2506788" y="2825679"/>
-                  </a:lnTo>
-                  <a:lnTo>
-                    <a:pt x="2578410" y="2820171"/>
-                  </a:lnTo>
-                  <a:lnTo>
-                    <a:pt x="2650033" y="2814626"/>
-                  </a:lnTo>
-                  <a:lnTo>
-                    <a:pt x="2721655" y="2809044"/>
-                  </a:lnTo>
-                  <a:lnTo>
-                    <a:pt x="2793278" y="2803425"/>
-                  </a:lnTo>
-                  <a:lnTo>
-                    <a:pt x="2864901" y="2797769"/>
-                  </a:lnTo>
-                  <a:lnTo>
-                    <a:pt x="2936523" y="2792075"/>
-                  </a:lnTo>
-                  <a:lnTo>
-                    <a:pt x="3008146" y="2786343"/>
-                  </a:lnTo>
-                  <a:lnTo>
-                    <a:pt x="3079768" y="2768780"/>
-                  </a:lnTo>
-                  <a:lnTo>
-                    <a:pt x="3151391" y="2733554"/>
-                  </a:lnTo>
-                  <a:lnTo>
-                    <a:pt x="3223013" y="2696925"/>
-                  </a:lnTo>
-                  <a:lnTo>
-                    <a:pt x="3294636" y="2658835"/>
-                  </a:lnTo>
-                  <a:lnTo>
-                    <a:pt x="3366258" y="2619228"/>
-                  </a:lnTo>
-                  <a:lnTo>
-                    <a:pt x="3437881" y="2578042"/>
-                  </a:lnTo>
-                  <a:lnTo>
-                    <a:pt x="3509503" y="2535214"/>
-                  </a:lnTo>
-                  <a:lnTo>
-                    <a:pt x="3581126" y="2490680"/>
-                  </a:lnTo>
-                  <a:lnTo>
-                    <a:pt x="3652748" y="2444371"/>
-                  </a:lnTo>
-                  <a:lnTo>
-                    <a:pt x="3724371" y="2396216"/>
-                  </a:lnTo>
-                  <a:lnTo>
-                    <a:pt x="3795993" y="2346142"/>
-                  </a:lnTo>
-                  <a:lnTo>
-                    <a:pt x="3867616" y="2294073"/>
-                  </a:lnTo>
-                  <a:lnTo>
-                    <a:pt x="3939238" y="2239928"/>
-                  </a:lnTo>
-                  <a:lnTo>
-                    <a:pt x="4010861" y="2183625"/>
-                  </a:lnTo>
-                  <a:lnTo>
-                    <a:pt x="4082483" y="2125079"/>
-                  </a:lnTo>
-                  <a:lnTo>
-                    <a:pt x="4154106" y="2064199"/>
-                  </a:lnTo>
-                  <a:lnTo>
-                    <a:pt x="4225729" y="2000893"/>
-                  </a:lnTo>
-                  <a:lnTo>
-                    <a:pt x="4297351" y="1935064"/>
-                  </a:lnTo>
-                  <a:lnTo>
-                    <a:pt x="4368974" y="1866611"/>
-                  </a:lnTo>
-                  <a:lnTo>
-                    <a:pt x="4440596" y="1795430"/>
-                  </a:lnTo>
-                  <a:lnTo>
-                    <a:pt x="4512219" y="1721412"/>
-                  </a:lnTo>
-                  <a:lnTo>
-                    <a:pt x="4583841" y="1644444"/>
-                  </a:lnTo>
-                  <a:lnTo>
-                    <a:pt x="4655464" y="1564409"/>
-                  </a:lnTo>
-                  <a:lnTo>
-                    <a:pt x="4727086" y="1481184"/>
-                  </a:lnTo>
-                  <a:lnTo>
-                    <a:pt x="4798709" y="1394643"/>
-                  </a:lnTo>
-                  <a:lnTo>
-                    <a:pt x="4870331" y="1304652"/>
-                  </a:lnTo>
-                  <a:lnTo>
-                    <a:pt x="4941954" y="1211074"/>
-                  </a:lnTo>
-                  <a:lnTo>
-                    <a:pt x="5013576" y="1113768"/>
-                  </a:lnTo>
-                  <a:lnTo>
-                    <a:pt x="5085199" y="1012583"/>
-                  </a:lnTo>
-                  <a:lnTo>
-                    <a:pt x="5156821" y="907365"/>
-                  </a:lnTo>
-                  <a:lnTo>
-                    <a:pt x="5228444" y="797954"/>
-                  </a:lnTo>
-                  <a:lnTo>
-                    <a:pt x="5300066" y="684183"/>
-                  </a:lnTo>
-                  <a:lnTo>
-                    <a:pt x="5371689" y="565877"/>
-                  </a:lnTo>
-                  <a:lnTo>
-                    <a:pt x="5443311" y="442857"/>
-                  </a:lnTo>
-                  <a:lnTo>
-                    <a:pt x="5514934" y="314933"/>
-                  </a:lnTo>
-                  <a:lnTo>
-                    <a:pt x="5586557" y="181911"/>
-                  </a:lnTo>
-                  <a:lnTo>
-                    <a:pt x="5658179" y="43588"/>
-                  </a:lnTo>
-                  <a:lnTo>
-                    <a:pt x="5679884" y="0"/>
+                    <a:pt x="71622" y="2908191"/>
+                  </a:lnTo>
+                  <a:lnTo>
+                    <a:pt x="143245" y="2905402"/>
+                  </a:lnTo>
+                  <a:lnTo>
+                    <a:pt x="214867" y="2902603"/>
+                  </a:lnTo>
+                  <a:lnTo>
+                    <a:pt x="286490" y="2899794"/>
+                  </a:lnTo>
+                  <a:lnTo>
+                    <a:pt x="358112" y="2896974"/>
+                  </a:lnTo>
+                  <a:lnTo>
+                    <a:pt x="429735" y="2894144"/>
+                  </a:lnTo>
+                  <a:lnTo>
+                    <a:pt x="501357" y="2891303"/>
+                  </a:lnTo>
+                  <a:lnTo>
+                    <a:pt x="572980" y="2888451"/>
+                  </a:lnTo>
+                  <a:lnTo>
+                    <a:pt x="644602" y="2885589"/>
+                  </a:lnTo>
+                  <a:lnTo>
+                    <a:pt x="716225" y="2882716"/>
+                  </a:lnTo>
+                  <a:lnTo>
+                    <a:pt x="787847" y="2879832"/>
+                  </a:lnTo>
+                  <a:lnTo>
+                    <a:pt x="859470" y="2876937"/>
+                  </a:lnTo>
+                  <a:lnTo>
+                    <a:pt x="931092" y="2874032"/>
+                  </a:lnTo>
+                  <a:lnTo>
+                    <a:pt x="1002715" y="2871115"/>
+                  </a:lnTo>
+                  <a:lnTo>
+                    <a:pt x="1074337" y="2868188"/>
+                  </a:lnTo>
+                  <a:lnTo>
+                    <a:pt x="1145960" y="2865250"/>
+                  </a:lnTo>
+                  <a:lnTo>
+                    <a:pt x="1217582" y="2862301"/>
+                  </a:lnTo>
+                  <a:lnTo>
+                    <a:pt x="1289205" y="2859340"/>
+                  </a:lnTo>
+                  <a:lnTo>
+                    <a:pt x="1360827" y="2856369"/>
+                  </a:lnTo>
+                  <a:lnTo>
+                    <a:pt x="1432450" y="2853386"/>
+                  </a:lnTo>
+                  <a:lnTo>
+                    <a:pt x="1504073" y="2850393"/>
+                  </a:lnTo>
+                  <a:lnTo>
+                    <a:pt x="1575695" y="2847388"/>
+                  </a:lnTo>
+                  <a:lnTo>
+                    <a:pt x="1647318" y="2844372"/>
+                  </a:lnTo>
+                  <a:lnTo>
+                    <a:pt x="1718940" y="2841344"/>
+                  </a:lnTo>
+                  <a:lnTo>
+                    <a:pt x="1790563" y="2838305"/>
+                  </a:lnTo>
+                  <a:lnTo>
+                    <a:pt x="1862185" y="2835255"/>
+                  </a:lnTo>
+                  <a:lnTo>
+                    <a:pt x="1933808" y="2832194"/>
+                  </a:lnTo>
+                  <a:lnTo>
+                    <a:pt x="2005430" y="2829121"/>
+                  </a:lnTo>
+                  <a:lnTo>
+                    <a:pt x="2077053" y="2826036"/>
+                  </a:lnTo>
+                  <a:lnTo>
+                    <a:pt x="2148675" y="2822940"/>
+                  </a:lnTo>
+                  <a:lnTo>
+                    <a:pt x="2220298" y="2819832"/>
+                  </a:lnTo>
+                  <a:lnTo>
+                    <a:pt x="2291920" y="2816713"/>
+                  </a:lnTo>
+                  <a:lnTo>
+                    <a:pt x="2363543" y="2813582"/>
+                  </a:lnTo>
+                  <a:lnTo>
+                    <a:pt x="2435165" y="2810439"/>
+                  </a:lnTo>
+                  <a:lnTo>
+                    <a:pt x="2506788" y="2807284"/>
+                  </a:lnTo>
+                  <a:lnTo>
+                    <a:pt x="2578410" y="2804118"/>
+                  </a:lnTo>
+                  <a:lnTo>
+                    <a:pt x="2650033" y="2800940"/>
+                  </a:lnTo>
+                  <a:lnTo>
+                    <a:pt x="2721655" y="2797750"/>
+                  </a:lnTo>
+                  <a:lnTo>
+                    <a:pt x="2793278" y="2794548"/>
+                  </a:lnTo>
+                  <a:lnTo>
+                    <a:pt x="2864901" y="2791334"/>
+                  </a:lnTo>
+                  <a:lnTo>
+                    <a:pt x="2936523" y="2788107"/>
+                  </a:lnTo>
+                  <a:lnTo>
+                    <a:pt x="3008146" y="2784869"/>
+                  </a:lnTo>
+                  <a:lnTo>
+                    <a:pt x="3079768" y="2769385"/>
+                  </a:lnTo>
+                  <a:lnTo>
+                    <a:pt x="3151391" y="2735703"/>
+                  </a:lnTo>
+                  <a:lnTo>
+                    <a:pt x="3223013" y="2700736"/>
+                  </a:lnTo>
+                  <a:lnTo>
+                    <a:pt x="3294636" y="2664436"/>
+                  </a:lnTo>
+                  <a:lnTo>
+                    <a:pt x="3366258" y="2626752"/>
+                  </a:lnTo>
+                  <a:lnTo>
+                    <a:pt x="3437881" y="2587631"/>
+                  </a:lnTo>
+                  <a:lnTo>
+                    <a:pt x="3509503" y="2547017"/>
+                  </a:lnTo>
+                  <a:lnTo>
+                    <a:pt x="3581126" y="2504855"/>
+                  </a:lnTo>
+                  <a:lnTo>
+                    <a:pt x="3652748" y="2461085"/>
+                  </a:lnTo>
+                  <a:lnTo>
+                    <a:pt x="3724371" y="2415646"/>
+                  </a:lnTo>
+                  <a:lnTo>
+                    <a:pt x="3795993" y="2368475"/>
+                  </a:lnTo>
+                  <a:lnTo>
+                    <a:pt x="3867616" y="2319504"/>
+                  </a:lnTo>
+                  <a:lnTo>
+                    <a:pt x="3939238" y="2268666"/>
+                  </a:lnTo>
+                  <a:lnTo>
+                    <a:pt x="4010861" y="2215889"/>
+                  </a:lnTo>
+                  <a:lnTo>
+                    <a:pt x="4082483" y="2161100"/>
+                  </a:lnTo>
+                  <a:lnTo>
+                    <a:pt x="4154106" y="2104221"/>
+                  </a:lnTo>
+                  <a:lnTo>
+                    <a:pt x="4225729" y="2045174"/>
+                  </a:lnTo>
+                  <a:lnTo>
+                    <a:pt x="4297351" y="1983874"/>
+                  </a:lnTo>
+                  <a:lnTo>
+                    <a:pt x="4368974" y="1920237"/>
+                  </a:lnTo>
+                  <a:lnTo>
+                    <a:pt x="4440596" y="1854174"/>
+                  </a:lnTo>
+                  <a:lnTo>
+                    <a:pt x="4512219" y="1785591"/>
+                  </a:lnTo>
+                  <a:lnTo>
+                    <a:pt x="4583841" y="1714392"/>
+                  </a:lnTo>
+                  <a:lnTo>
+                    <a:pt x="4655464" y="1640479"/>
+                  </a:lnTo>
+                  <a:lnTo>
+                    <a:pt x="4727086" y="1563747"/>
+                  </a:lnTo>
+                  <a:lnTo>
+                    <a:pt x="4798709" y="1484089"/>
+                  </a:lnTo>
+                  <a:lnTo>
+                    <a:pt x="4870331" y="1401393"/>
+                  </a:lnTo>
+                  <a:lnTo>
+                    <a:pt x="4941954" y="1315544"/>
+                  </a:lnTo>
+                  <a:lnTo>
+                    <a:pt x="5013576" y="1226420"/>
+                  </a:lnTo>
+                  <a:lnTo>
+                    <a:pt x="5085199" y="1133899"/>
+                  </a:lnTo>
+                  <a:lnTo>
+                    <a:pt x="5156821" y="1037849"/>
+                  </a:lnTo>
+                  <a:lnTo>
+                    <a:pt x="5228444" y="938136"/>
+                  </a:lnTo>
+                  <a:lnTo>
+                    <a:pt x="5300066" y="834620"/>
+                  </a:lnTo>
+                  <a:lnTo>
+                    <a:pt x="5371689" y="727158"/>
+                  </a:lnTo>
+                  <a:lnTo>
+                    <a:pt x="5443311" y="615597"/>
+                  </a:lnTo>
+                  <a:lnTo>
+                    <a:pt x="5514934" y="499782"/>
+                  </a:lnTo>
+                  <a:lnTo>
+                    <a:pt x="5586557" y="379551"/>
+                  </a:lnTo>
+                  <a:lnTo>
+                    <a:pt x="5658179" y="254734"/>
+                  </a:lnTo>
+                  <a:lnTo>
+                    <a:pt x="5729802" y="125158"/>
+                  </a:lnTo>
+                  <a:lnTo>
+                    <a:pt x="5796441" y="0"/>
                   </a:lnTo>
                 </a:path>
               </a:pathLst>
@@ -3976,312 +3982,312 @@
           </p:nvSpPr>
           <p:spPr>
             <a:xfrm>
-              <a:off x="1172049" y="4284452"/>
-              <a:ext cx="7090630" cy="1100102"/>
+              <a:off x="1172049" y="4475330"/>
+              <a:ext cx="7090630" cy="897196"/>
             </a:xfrm>
             <a:custGeom>
               <a:avLst/>
               <a:pathLst>
-                <a:path w="7090630" h="1100102">
+                <a:path w="7090630" h="897196">
                   <a:moveTo>
                     <a:pt x="7090630" y="0"/>
                   </a:moveTo>
                   <a:lnTo>
-                    <a:pt x="7019007" y="8368"/>
-                  </a:lnTo>
-                  <a:lnTo>
-                    <a:pt x="6947385" y="16681"/>
-                  </a:lnTo>
-                  <a:lnTo>
-                    <a:pt x="6875762" y="24939"/>
-                  </a:lnTo>
-                  <a:lnTo>
-                    <a:pt x="6804139" y="33142"/>
-                  </a:lnTo>
-                  <a:lnTo>
-                    <a:pt x="6732517" y="41292"/>
-                  </a:lnTo>
-                  <a:lnTo>
-                    <a:pt x="6660894" y="49387"/>
-                  </a:lnTo>
-                  <a:lnTo>
-                    <a:pt x="6589272" y="57428"/>
-                  </a:lnTo>
-                  <a:lnTo>
-                    <a:pt x="6517649" y="65417"/>
-                  </a:lnTo>
-                  <a:lnTo>
-                    <a:pt x="6446027" y="73352"/>
-                  </a:lnTo>
-                  <a:lnTo>
-                    <a:pt x="6374404" y="81236"/>
-                  </a:lnTo>
-                  <a:lnTo>
-                    <a:pt x="6302782" y="89066"/>
-                  </a:lnTo>
-                  <a:lnTo>
-                    <a:pt x="6231159" y="96846"/>
-                  </a:lnTo>
-                  <a:lnTo>
-                    <a:pt x="6159537" y="104573"/>
-                  </a:lnTo>
-                  <a:lnTo>
-                    <a:pt x="6087914" y="112250"/>
-                  </a:lnTo>
-                  <a:lnTo>
-                    <a:pt x="6016292" y="119875"/>
-                  </a:lnTo>
-                  <a:lnTo>
-                    <a:pt x="5944669" y="127451"/>
-                  </a:lnTo>
-                  <a:lnTo>
-                    <a:pt x="5873047" y="134976"/>
-                  </a:lnTo>
-                  <a:lnTo>
-                    <a:pt x="5801424" y="142451"/>
-                  </a:lnTo>
-                  <a:lnTo>
-                    <a:pt x="5729802" y="149877"/>
-                  </a:lnTo>
-                  <a:lnTo>
-                    <a:pt x="5658179" y="157254"/>
-                  </a:lnTo>
-                  <a:lnTo>
-                    <a:pt x="5586557" y="164582"/>
-                  </a:lnTo>
-                  <a:lnTo>
-                    <a:pt x="5514934" y="171861"/>
-                  </a:lnTo>
-                  <a:lnTo>
-                    <a:pt x="5443311" y="179092"/>
-                  </a:lnTo>
-                  <a:lnTo>
-                    <a:pt x="5371689" y="186276"/>
-                  </a:lnTo>
-                  <a:lnTo>
-                    <a:pt x="5300066" y="193412"/>
-                  </a:lnTo>
-                  <a:lnTo>
-                    <a:pt x="5228444" y="200500"/>
-                  </a:lnTo>
-                  <a:lnTo>
-                    <a:pt x="5156821" y="207542"/>
-                  </a:lnTo>
-                  <a:lnTo>
-                    <a:pt x="5085199" y="214537"/>
-                  </a:lnTo>
-                  <a:lnTo>
-                    <a:pt x="5013576" y="221486"/>
-                  </a:lnTo>
-                  <a:lnTo>
-                    <a:pt x="4941954" y="228389"/>
-                  </a:lnTo>
-                  <a:lnTo>
-                    <a:pt x="4870331" y="235247"/>
-                  </a:lnTo>
-                  <a:lnTo>
-                    <a:pt x="4798709" y="242058"/>
-                  </a:lnTo>
-                  <a:lnTo>
-                    <a:pt x="4727086" y="248825"/>
-                  </a:lnTo>
-                  <a:lnTo>
-                    <a:pt x="4655464" y="255547"/>
-                  </a:lnTo>
-                  <a:lnTo>
-                    <a:pt x="4583841" y="262225"/>
-                  </a:lnTo>
-                  <a:lnTo>
-                    <a:pt x="4512219" y="268858"/>
-                  </a:lnTo>
-                  <a:lnTo>
-                    <a:pt x="4440596" y="275448"/>
-                  </a:lnTo>
-                  <a:lnTo>
-                    <a:pt x="4368974" y="281994"/>
-                  </a:lnTo>
-                  <a:lnTo>
-                    <a:pt x="4297351" y="288496"/>
-                  </a:lnTo>
-                  <a:lnTo>
-                    <a:pt x="4225729" y="294956"/>
-                  </a:lnTo>
-                  <a:lnTo>
-                    <a:pt x="4154106" y="301373"/>
-                  </a:lnTo>
-                  <a:lnTo>
-                    <a:pt x="4082483" y="307747"/>
-                  </a:lnTo>
-                  <a:lnTo>
-                    <a:pt x="4010861" y="314079"/>
-                  </a:lnTo>
-                  <a:lnTo>
-                    <a:pt x="3939238" y="320369"/>
-                  </a:lnTo>
-                  <a:lnTo>
-                    <a:pt x="3867616" y="326618"/>
-                  </a:lnTo>
-                  <a:lnTo>
-                    <a:pt x="3795993" y="332825"/>
-                  </a:lnTo>
-                  <a:lnTo>
-                    <a:pt x="3724371" y="338992"/>
-                  </a:lnTo>
-                  <a:lnTo>
-                    <a:pt x="3652748" y="345117"/>
-                  </a:lnTo>
-                  <a:lnTo>
-                    <a:pt x="3581126" y="351202"/>
-                  </a:lnTo>
-                  <a:lnTo>
-                    <a:pt x="3509503" y="357247"/>
-                  </a:lnTo>
-                  <a:lnTo>
-                    <a:pt x="3437881" y="363251"/>
-                  </a:lnTo>
-                  <a:lnTo>
-                    <a:pt x="3366258" y="369216"/>
-                  </a:lnTo>
-                  <a:lnTo>
-                    <a:pt x="3294636" y="375142"/>
-                  </a:lnTo>
-                  <a:lnTo>
-                    <a:pt x="3223013" y="381028"/>
-                  </a:lnTo>
-                  <a:lnTo>
-                    <a:pt x="3151391" y="386875"/>
-                  </a:lnTo>
-                  <a:lnTo>
-                    <a:pt x="3079768" y="392684"/>
-                  </a:lnTo>
-                  <a:lnTo>
-                    <a:pt x="3008146" y="414767"/>
-                  </a:lnTo>
-                  <a:lnTo>
-                    <a:pt x="2936523" y="447344"/>
-                  </a:lnTo>
-                  <a:lnTo>
-                    <a:pt x="2864901" y="478673"/>
-                  </a:lnTo>
-                  <a:lnTo>
-                    <a:pt x="2793278" y="508800"/>
-                  </a:lnTo>
-                  <a:lnTo>
-                    <a:pt x="2721655" y="537774"/>
-                  </a:lnTo>
-                  <a:lnTo>
-                    <a:pt x="2650033" y="565637"/>
-                  </a:lnTo>
-                  <a:lnTo>
-                    <a:pt x="2578410" y="592431"/>
-                  </a:lnTo>
-                  <a:lnTo>
-                    <a:pt x="2506788" y="618199"/>
-                  </a:lnTo>
-                  <a:lnTo>
-                    <a:pt x="2435165" y="642980"/>
-                  </a:lnTo>
-                  <a:lnTo>
-                    <a:pt x="2363543" y="666810"/>
-                  </a:lnTo>
-                  <a:lnTo>
-                    <a:pt x="2291920" y="689728"/>
-                  </a:lnTo>
-                  <a:lnTo>
-                    <a:pt x="2220298" y="711766"/>
-                  </a:lnTo>
-                  <a:lnTo>
-                    <a:pt x="2148675" y="732961"/>
-                  </a:lnTo>
-                  <a:lnTo>
-                    <a:pt x="2077053" y="753343"/>
-                  </a:lnTo>
-                  <a:lnTo>
-                    <a:pt x="2005430" y="772943"/>
-                  </a:lnTo>
-                  <a:lnTo>
-                    <a:pt x="1933808" y="791793"/>
-                  </a:lnTo>
-                  <a:lnTo>
-                    <a:pt x="1862185" y="809920"/>
-                  </a:lnTo>
-                  <a:lnTo>
-                    <a:pt x="1790563" y="827352"/>
-                  </a:lnTo>
-                  <a:lnTo>
-                    <a:pt x="1718940" y="844116"/>
-                  </a:lnTo>
-                  <a:lnTo>
-                    <a:pt x="1647318" y="860238"/>
-                  </a:lnTo>
-                  <a:lnTo>
-                    <a:pt x="1575695" y="875742"/>
-                  </a:lnTo>
-                  <a:lnTo>
-                    <a:pt x="1504073" y="890651"/>
-                  </a:lnTo>
-                  <a:lnTo>
-                    <a:pt x="1432450" y="904990"/>
-                  </a:lnTo>
-                  <a:lnTo>
-                    <a:pt x="1360827" y="918778"/>
-                  </a:lnTo>
-                  <a:lnTo>
-                    <a:pt x="1289205" y="932038"/>
-                  </a:lnTo>
-                  <a:lnTo>
-                    <a:pt x="1217582" y="944790"/>
-                  </a:lnTo>
-                  <a:lnTo>
-                    <a:pt x="1145960" y="957053"/>
-                  </a:lnTo>
-                  <a:lnTo>
-                    <a:pt x="1074337" y="968847"/>
-                  </a:lnTo>
-                  <a:lnTo>
-                    <a:pt x="1002715" y="980188"/>
-                  </a:lnTo>
-                  <a:lnTo>
-                    <a:pt x="931092" y="991094"/>
-                  </a:lnTo>
-                  <a:lnTo>
-                    <a:pt x="859470" y="1001583"/>
-                  </a:lnTo>
-                  <a:lnTo>
-                    <a:pt x="787847" y="1011669"/>
-                  </a:lnTo>
-                  <a:lnTo>
-                    <a:pt x="716225" y="1021369"/>
-                  </a:lnTo>
-                  <a:lnTo>
-                    <a:pt x="644602" y="1030697"/>
-                  </a:lnTo>
-                  <a:lnTo>
-                    <a:pt x="572980" y="1039668"/>
-                  </a:lnTo>
-                  <a:lnTo>
-                    <a:pt x="501357" y="1048295"/>
-                  </a:lnTo>
-                  <a:lnTo>
-                    <a:pt x="429735" y="1056591"/>
-                  </a:lnTo>
-                  <a:lnTo>
-                    <a:pt x="358112" y="1064569"/>
-                  </a:lnTo>
-                  <a:lnTo>
-                    <a:pt x="286490" y="1072242"/>
-                  </a:lnTo>
-                  <a:lnTo>
-                    <a:pt x="214867" y="1079620"/>
-                  </a:lnTo>
-                  <a:lnTo>
-                    <a:pt x="143245" y="1086716"/>
-                  </a:lnTo>
-                  <a:lnTo>
-                    <a:pt x="71622" y="1093539"/>
-                  </a:lnTo>
-                  <a:lnTo>
-                    <a:pt x="0" y="1100102"/>
+                    <a:pt x="7019007" y="4007"/>
+                  </a:lnTo>
+                  <a:lnTo>
+                    <a:pt x="6947385" y="7999"/>
+                  </a:lnTo>
+                  <a:lnTo>
+                    <a:pt x="6875762" y="11977"/>
+                  </a:lnTo>
+                  <a:lnTo>
+                    <a:pt x="6804139" y="15939"/>
+                  </a:lnTo>
+                  <a:lnTo>
+                    <a:pt x="6732517" y="19887"/>
+                  </a:lnTo>
+                  <a:lnTo>
+                    <a:pt x="6660894" y="23820"/>
+                  </a:lnTo>
+                  <a:lnTo>
+                    <a:pt x="6589272" y="27738"/>
+                  </a:lnTo>
+                  <a:lnTo>
+                    <a:pt x="6517649" y="31642"/>
+                  </a:lnTo>
+                  <a:lnTo>
+                    <a:pt x="6446027" y="35531"/>
+                  </a:lnTo>
+                  <a:lnTo>
+                    <a:pt x="6374404" y="39406"/>
+                  </a:lnTo>
+                  <a:lnTo>
+                    <a:pt x="6302782" y="43266"/>
+                  </a:lnTo>
+                  <a:lnTo>
+                    <a:pt x="6231159" y="47112"/>
+                  </a:lnTo>
+                  <a:lnTo>
+                    <a:pt x="6159537" y="50944"/>
+                  </a:lnTo>
+                  <a:lnTo>
+                    <a:pt x="6087914" y="54761"/>
+                  </a:lnTo>
+                  <a:lnTo>
+                    <a:pt x="6016292" y="58564"/>
+                  </a:lnTo>
+                  <a:lnTo>
+                    <a:pt x="5944669" y="62352"/>
+                  </a:lnTo>
+                  <a:lnTo>
+                    <a:pt x="5873047" y="66127"/>
+                  </a:lnTo>
+                  <a:lnTo>
+                    <a:pt x="5801424" y="69888"/>
+                  </a:lnTo>
+                  <a:lnTo>
+                    <a:pt x="5729802" y="73634"/>
+                  </a:lnTo>
+                  <a:lnTo>
+                    <a:pt x="5658179" y="77367"/>
+                  </a:lnTo>
+                  <a:lnTo>
+                    <a:pt x="5586557" y="81085"/>
+                  </a:lnTo>
+                  <a:lnTo>
+                    <a:pt x="5514934" y="84790"/>
+                  </a:lnTo>
+                  <a:lnTo>
+                    <a:pt x="5443311" y="88481"/>
+                  </a:lnTo>
+                  <a:lnTo>
+                    <a:pt x="5371689" y="92158"/>
+                  </a:lnTo>
+                  <a:lnTo>
+                    <a:pt x="5300066" y="95821"/>
+                  </a:lnTo>
+                  <a:lnTo>
+                    <a:pt x="5228444" y="99471"/>
+                  </a:lnTo>
+                  <a:lnTo>
+                    <a:pt x="5156821" y="103107"/>
+                  </a:lnTo>
+                  <a:lnTo>
+                    <a:pt x="5085199" y="106730"/>
+                  </a:lnTo>
+                  <a:lnTo>
+                    <a:pt x="5013576" y="110339"/>
+                  </a:lnTo>
+                  <a:lnTo>
+                    <a:pt x="4941954" y="113934"/>
+                  </a:lnTo>
+                  <a:lnTo>
+                    <a:pt x="4870331" y="117516"/>
+                  </a:lnTo>
+                  <a:lnTo>
+                    <a:pt x="4798709" y="121085"/>
+                  </a:lnTo>
+                  <a:lnTo>
+                    <a:pt x="4727086" y="124640"/>
+                  </a:lnTo>
+                  <a:lnTo>
+                    <a:pt x="4655464" y="128183"/>
+                  </a:lnTo>
+                  <a:lnTo>
+                    <a:pt x="4583841" y="131712"/>
+                  </a:lnTo>
+                  <a:lnTo>
+                    <a:pt x="4512219" y="135227"/>
+                  </a:lnTo>
+                  <a:lnTo>
+                    <a:pt x="4440596" y="138730"/>
+                  </a:lnTo>
+                  <a:lnTo>
+                    <a:pt x="4368974" y="142220"/>
+                  </a:lnTo>
+                  <a:lnTo>
+                    <a:pt x="4297351" y="145696"/>
+                  </a:lnTo>
+                  <a:lnTo>
+                    <a:pt x="4225729" y="149160"/>
+                  </a:lnTo>
+                  <a:lnTo>
+                    <a:pt x="4154106" y="152610"/>
+                  </a:lnTo>
+                  <a:lnTo>
+                    <a:pt x="4082483" y="156048"/>
+                  </a:lnTo>
+                  <a:lnTo>
+                    <a:pt x="4010861" y="159473"/>
+                  </a:lnTo>
+                  <a:lnTo>
+                    <a:pt x="3939238" y="162885"/>
+                  </a:lnTo>
+                  <a:lnTo>
+                    <a:pt x="3867616" y="166285"/>
+                  </a:lnTo>
+                  <a:lnTo>
+                    <a:pt x="3795993" y="169672"/>
+                  </a:lnTo>
+                  <a:lnTo>
+                    <a:pt x="3724371" y="173046"/>
+                  </a:lnTo>
+                  <a:lnTo>
+                    <a:pt x="3652748" y="176407"/>
+                  </a:lnTo>
+                  <a:lnTo>
+                    <a:pt x="3581126" y="179756"/>
+                  </a:lnTo>
+                  <a:lnTo>
+                    <a:pt x="3509503" y="183093"/>
+                  </a:lnTo>
+                  <a:lnTo>
+                    <a:pt x="3437881" y="186417"/>
+                  </a:lnTo>
+                  <a:lnTo>
+                    <a:pt x="3366258" y="189729"/>
+                  </a:lnTo>
+                  <a:lnTo>
+                    <a:pt x="3294636" y="193028"/>
+                  </a:lnTo>
+                  <a:lnTo>
+                    <a:pt x="3223013" y="196315"/>
+                  </a:lnTo>
+                  <a:lnTo>
+                    <a:pt x="3151391" y="199589"/>
+                  </a:lnTo>
+                  <a:lnTo>
+                    <a:pt x="3079768" y="202852"/>
+                  </a:lnTo>
+                  <a:lnTo>
+                    <a:pt x="3008146" y="223063"/>
+                  </a:lnTo>
+                  <a:lnTo>
+                    <a:pt x="2936523" y="254317"/>
+                  </a:lnTo>
+                  <a:lnTo>
+                    <a:pt x="2864901" y="284422"/>
+                  </a:lnTo>
+                  <a:lnTo>
+                    <a:pt x="2793278" y="313421"/>
+                  </a:lnTo>
+                  <a:lnTo>
+                    <a:pt x="2721655" y="341355"/>
+                  </a:lnTo>
+                  <a:lnTo>
+                    <a:pt x="2650033" y="368263"/>
+                  </a:lnTo>
+                  <a:lnTo>
+                    <a:pt x="2578410" y="394182"/>
+                  </a:lnTo>
+                  <a:lnTo>
+                    <a:pt x="2506788" y="419150"/>
+                  </a:lnTo>
+                  <a:lnTo>
+                    <a:pt x="2435165" y="443200"/>
+                  </a:lnTo>
+                  <a:lnTo>
+                    <a:pt x="2363543" y="466367"/>
+                  </a:lnTo>
+                  <a:lnTo>
+                    <a:pt x="2291920" y="488683"/>
+                  </a:lnTo>
+                  <a:lnTo>
+                    <a:pt x="2220298" y="510179"/>
+                  </a:lnTo>
+                  <a:lnTo>
+                    <a:pt x="2148675" y="530885"/>
+                  </a:lnTo>
+                  <a:lnTo>
+                    <a:pt x="2077053" y="550831"/>
+                  </a:lnTo>
+                  <a:lnTo>
+                    <a:pt x="2005430" y="570044"/>
+                  </a:lnTo>
+                  <a:lnTo>
+                    <a:pt x="1933808" y="588552"/>
+                  </a:lnTo>
+                  <a:lnTo>
+                    <a:pt x="1862185" y="606379"/>
+                  </a:lnTo>
+                  <a:lnTo>
+                    <a:pt x="1790563" y="623552"/>
+                  </a:lnTo>
+                  <a:lnTo>
+                    <a:pt x="1718940" y="640094"/>
+                  </a:lnTo>
+                  <a:lnTo>
+                    <a:pt x="1647318" y="656028"/>
+                  </a:lnTo>
+                  <a:lnTo>
+                    <a:pt x="1575695" y="671377"/>
+                  </a:lnTo>
+                  <a:lnTo>
+                    <a:pt x="1504073" y="686162"/>
+                  </a:lnTo>
+                  <a:lnTo>
+                    <a:pt x="1432450" y="700404"/>
+                  </a:lnTo>
+                  <a:lnTo>
+                    <a:pt x="1360827" y="714123"/>
+                  </a:lnTo>
+                  <a:lnTo>
+                    <a:pt x="1289205" y="727338"/>
+                  </a:lnTo>
+                  <a:lnTo>
+                    <a:pt x="1217582" y="740067"/>
+                  </a:lnTo>
+                  <a:lnTo>
+                    <a:pt x="1145960" y="752329"/>
+                  </a:lnTo>
+                  <a:lnTo>
+                    <a:pt x="1074337" y="764141"/>
+                  </a:lnTo>
+                  <a:lnTo>
+                    <a:pt x="1002715" y="775518"/>
+                  </a:lnTo>
+                  <a:lnTo>
+                    <a:pt x="931092" y="786478"/>
+                  </a:lnTo>
+                  <a:lnTo>
+                    <a:pt x="859470" y="797035"/>
+                  </a:lnTo>
+                  <a:lnTo>
+                    <a:pt x="787847" y="807205"/>
+                  </a:lnTo>
+                  <a:lnTo>
+                    <a:pt x="716225" y="817000"/>
+                  </a:lnTo>
+                  <a:lnTo>
+                    <a:pt x="644602" y="826436"/>
+                  </a:lnTo>
+                  <a:lnTo>
+                    <a:pt x="572980" y="835525"/>
+                  </a:lnTo>
+                  <a:lnTo>
+                    <a:pt x="501357" y="844281"/>
+                  </a:lnTo>
+                  <a:lnTo>
+                    <a:pt x="429735" y="852715"/>
+                  </a:lnTo>
+                  <a:lnTo>
+                    <a:pt x="358112" y="860839"/>
+                  </a:lnTo>
+                  <a:lnTo>
+                    <a:pt x="286490" y="868664"/>
+                  </a:lnTo>
+                  <a:lnTo>
+                    <a:pt x="214867" y="876202"/>
+                  </a:lnTo>
+                  <a:lnTo>
+                    <a:pt x="143245" y="883464"/>
+                  </a:lnTo>
+                  <a:lnTo>
+                    <a:pt x="71622" y="890458"/>
+                  </a:lnTo>
+                  <a:lnTo>
+                    <a:pt x="0" y="897196"/>
                   </a:lnTo>
                 </a:path>
               </a:pathLst>
@@ -4301,309 +4307,309 @@
           </p:nvSpPr>
           <p:spPr>
             <a:xfrm>
-              <a:off x="1172049" y="2391117"/>
-              <a:ext cx="7090630" cy="2829561"/>
+              <a:off x="1172049" y="2771940"/>
+              <a:ext cx="7090630" cy="2415272"/>
             </a:xfrm>
             <a:custGeom>
               <a:avLst/>
               <a:pathLst>
-                <a:path w="7090630" h="2829561">
+                <a:path w="7090630" h="2415272">
                   <a:moveTo>
-                    <a:pt x="0" y="2829561"/>
+                    <a:pt x="0" y="2415272"/>
                   </a:moveTo>
                   <a:lnTo>
-                    <a:pt x="71622" y="2821964"/>
-                  </a:lnTo>
-                  <a:lnTo>
-                    <a:pt x="143245" y="2814192"/>
-                  </a:lnTo>
-                  <a:lnTo>
-                    <a:pt x="214867" y="2806240"/>
-                  </a:lnTo>
-                  <a:lnTo>
-                    <a:pt x="286490" y="2798104"/>
-                  </a:lnTo>
-                  <a:lnTo>
-                    <a:pt x="358112" y="2789780"/>
-                  </a:lnTo>
-                  <a:lnTo>
-                    <a:pt x="429735" y="2781264"/>
-                  </a:lnTo>
-                  <a:lnTo>
-                    <a:pt x="501357" y="2772551"/>
-                  </a:lnTo>
-                  <a:lnTo>
-                    <a:pt x="572980" y="2763636"/>
-                  </a:lnTo>
-                  <a:lnTo>
-                    <a:pt x="644602" y="2754515"/>
-                  </a:lnTo>
-                  <a:lnTo>
-                    <a:pt x="716225" y="2745183"/>
-                  </a:lnTo>
-                  <a:lnTo>
-                    <a:pt x="787847" y="2735636"/>
-                  </a:lnTo>
-                  <a:lnTo>
-                    <a:pt x="859470" y="2725867"/>
-                  </a:lnTo>
-                  <a:lnTo>
-                    <a:pt x="931092" y="2715873"/>
-                  </a:lnTo>
-                  <a:lnTo>
-                    <a:pt x="1002715" y="2705648"/>
-                  </a:lnTo>
-                  <a:lnTo>
-                    <a:pt x="1074337" y="2695186"/>
-                  </a:lnTo>
-                  <a:lnTo>
-                    <a:pt x="1145960" y="2684482"/>
-                  </a:lnTo>
-                  <a:lnTo>
-                    <a:pt x="1217582" y="2673531"/>
-                  </a:lnTo>
-                  <a:lnTo>
-                    <a:pt x="1289205" y="2662327"/>
-                  </a:lnTo>
-                  <a:lnTo>
-                    <a:pt x="1360827" y="2650863"/>
-                  </a:lnTo>
-                  <a:lnTo>
-                    <a:pt x="1432450" y="2639135"/>
-                  </a:lnTo>
-                  <a:lnTo>
-                    <a:pt x="1504073" y="2627135"/>
-                  </a:lnTo>
-                  <a:lnTo>
-                    <a:pt x="1575695" y="2614858"/>
-                  </a:lnTo>
-                  <a:lnTo>
-                    <a:pt x="1647318" y="2602297"/>
-                  </a:lnTo>
-                  <a:lnTo>
-                    <a:pt x="1718940" y="2589445"/>
-                  </a:lnTo>
-                  <a:lnTo>
-                    <a:pt x="1790563" y="2576297"/>
-                  </a:lnTo>
-                  <a:lnTo>
-                    <a:pt x="1862185" y="2562844"/>
-                  </a:lnTo>
-                  <a:lnTo>
-                    <a:pt x="1933808" y="2549080"/>
-                  </a:lnTo>
-                  <a:lnTo>
-                    <a:pt x="2005430" y="2534998"/>
-                  </a:lnTo>
-                  <a:lnTo>
-                    <a:pt x="2077053" y="2520591"/>
-                  </a:lnTo>
-                  <a:lnTo>
-                    <a:pt x="2148675" y="2505850"/>
-                  </a:lnTo>
-                  <a:lnTo>
-                    <a:pt x="2220298" y="2490768"/>
-                  </a:lnTo>
-                  <a:lnTo>
-                    <a:pt x="2291920" y="2475338"/>
-                  </a:lnTo>
-                  <a:lnTo>
-                    <a:pt x="2363543" y="2459551"/>
-                  </a:lnTo>
-                  <a:lnTo>
-                    <a:pt x="2435165" y="2443398"/>
-                  </a:lnTo>
-                  <a:lnTo>
-                    <a:pt x="2506788" y="2426873"/>
-                  </a:lnTo>
-                  <a:lnTo>
-                    <a:pt x="2578410" y="2409965"/>
-                  </a:lnTo>
-                  <a:lnTo>
-                    <a:pt x="2650033" y="2392666"/>
-                  </a:lnTo>
-                  <a:lnTo>
-                    <a:pt x="2721655" y="2374967"/>
-                  </a:lnTo>
-                  <a:lnTo>
-                    <a:pt x="2793278" y="2356859"/>
-                  </a:lnTo>
-                  <a:lnTo>
-                    <a:pt x="2864901" y="2338333"/>
-                  </a:lnTo>
-                  <a:lnTo>
-                    <a:pt x="2936523" y="2319377"/>
-                  </a:lnTo>
-                  <a:lnTo>
-                    <a:pt x="3008146" y="2299984"/>
-                  </a:lnTo>
-                  <a:lnTo>
-                    <a:pt x="3079768" y="2280142"/>
-                  </a:lnTo>
-                  <a:lnTo>
-                    <a:pt x="3151391" y="2259841"/>
-                  </a:lnTo>
-                  <a:lnTo>
-                    <a:pt x="3223013" y="2239071"/>
-                  </a:lnTo>
-                  <a:lnTo>
-                    <a:pt x="3294636" y="2217821"/>
-                  </a:lnTo>
-                  <a:lnTo>
-                    <a:pt x="3366258" y="2196079"/>
-                  </a:lnTo>
-                  <a:lnTo>
-                    <a:pt x="3437881" y="2173835"/>
-                  </a:lnTo>
-                  <a:lnTo>
-                    <a:pt x="3509503" y="2151076"/>
-                  </a:lnTo>
-                  <a:lnTo>
-                    <a:pt x="3581126" y="2127791"/>
-                  </a:lnTo>
-                  <a:lnTo>
-                    <a:pt x="3652748" y="2103968"/>
-                  </a:lnTo>
-                  <a:lnTo>
-                    <a:pt x="3724371" y="2079593"/>
-                  </a:lnTo>
-                  <a:lnTo>
-                    <a:pt x="3795993" y="2054656"/>
-                  </a:lnTo>
-                  <a:lnTo>
-                    <a:pt x="3867616" y="2029141"/>
-                  </a:lnTo>
-                  <a:lnTo>
-                    <a:pt x="3939238" y="2003036"/>
-                  </a:lnTo>
-                  <a:lnTo>
-                    <a:pt x="4010861" y="1976328"/>
-                  </a:lnTo>
-                  <a:lnTo>
-                    <a:pt x="4082483" y="1949003"/>
-                  </a:lnTo>
-                  <a:lnTo>
-                    <a:pt x="4154106" y="1921045"/>
-                  </a:lnTo>
-                  <a:lnTo>
-                    <a:pt x="4225729" y="1892441"/>
-                  </a:lnTo>
-                  <a:lnTo>
-                    <a:pt x="4297351" y="1863176"/>
-                  </a:lnTo>
-                  <a:lnTo>
-                    <a:pt x="4368974" y="1833234"/>
-                  </a:lnTo>
-                  <a:lnTo>
-                    <a:pt x="4440596" y="1802599"/>
-                  </a:lnTo>
-                  <a:lnTo>
-                    <a:pt x="4512219" y="1771256"/>
-                  </a:lnTo>
-                  <a:lnTo>
-                    <a:pt x="4583841" y="1739189"/>
-                  </a:lnTo>
-                  <a:lnTo>
-                    <a:pt x="4655464" y="1706380"/>
-                  </a:lnTo>
-                  <a:lnTo>
-                    <a:pt x="4727086" y="1672812"/>
-                  </a:lnTo>
-                  <a:lnTo>
-                    <a:pt x="4798709" y="1638468"/>
-                  </a:lnTo>
-                  <a:lnTo>
-                    <a:pt x="4870331" y="1603330"/>
-                  </a:lnTo>
-                  <a:lnTo>
-                    <a:pt x="4941954" y="1567380"/>
-                  </a:lnTo>
-                  <a:lnTo>
-                    <a:pt x="5013576" y="1530598"/>
-                  </a:lnTo>
-                  <a:lnTo>
-                    <a:pt x="5085199" y="1492966"/>
-                  </a:lnTo>
-                  <a:lnTo>
-                    <a:pt x="5156821" y="1454463"/>
-                  </a:lnTo>
-                  <a:lnTo>
-                    <a:pt x="5228444" y="1415071"/>
-                  </a:lnTo>
-                  <a:lnTo>
-                    <a:pt x="5300066" y="1374767"/>
-                  </a:lnTo>
-                  <a:lnTo>
-                    <a:pt x="5371689" y="1333532"/>
-                  </a:lnTo>
-                  <a:lnTo>
-                    <a:pt x="5443311" y="1291343"/>
-                  </a:lnTo>
-                  <a:lnTo>
-                    <a:pt x="5514934" y="1248178"/>
-                  </a:lnTo>
-                  <a:lnTo>
-                    <a:pt x="5586557" y="1204016"/>
-                  </a:lnTo>
-                  <a:lnTo>
-                    <a:pt x="5658179" y="1158832"/>
-                  </a:lnTo>
-                  <a:lnTo>
-                    <a:pt x="5729802" y="1112603"/>
-                  </a:lnTo>
-                  <a:lnTo>
-                    <a:pt x="5801424" y="1065306"/>
-                  </a:lnTo>
-                  <a:lnTo>
-                    <a:pt x="5873047" y="1016915"/>
-                  </a:lnTo>
-                  <a:lnTo>
-                    <a:pt x="5944669" y="967405"/>
-                  </a:lnTo>
-                  <a:lnTo>
-                    <a:pt x="6016292" y="916750"/>
-                  </a:lnTo>
-                  <a:lnTo>
-                    <a:pt x="6087914" y="864923"/>
-                  </a:lnTo>
-                  <a:lnTo>
-                    <a:pt x="6159537" y="811899"/>
-                  </a:lnTo>
-                  <a:lnTo>
-                    <a:pt x="6231159" y="757648"/>
-                  </a:lnTo>
-                  <a:lnTo>
-                    <a:pt x="6302782" y="702143"/>
-                  </a:lnTo>
-                  <a:lnTo>
-                    <a:pt x="6374404" y="645355"/>
-                  </a:lnTo>
-                  <a:lnTo>
-                    <a:pt x="6446027" y="587253"/>
-                  </a:lnTo>
-                  <a:lnTo>
-                    <a:pt x="6517649" y="527808"/>
-                  </a:lnTo>
-                  <a:lnTo>
-                    <a:pt x="6589272" y="466988"/>
-                  </a:lnTo>
-                  <a:lnTo>
-                    <a:pt x="6660894" y="404763"/>
-                  </a:lnTo>
-                  <a:lnTo>
-                    <a:pt x="6732517" y="341098"/>
-                  </a:lnTo>
-                  <a:lnTo>
-                    <a:pt x="6804139" y="275961"/>
-                  </a:lnTo>
-                  <a:lnTo>
-                    <a:pt x="6875762" y="209318"/>
-                  </a:lnTo>
-                  <a:lnTo>
-                    <a:pt x="6947385" y="141134"/>
-                  </a:lnTo>
-                  <a:lnTo>
-                    <a:pt x="7019007" y="71373"/>
+                    <a:pt x="71622" y="2407745"/>
+                  </a:lnTo>
+                  <a:lnTo>
+                    <a:pt x="143245" y="2400061"/>
+                  </a:lnTo>
+                  <a:lnTo>
+                    <a:pt x="214867" y="2392217"/>
+                  </a:lnTo>
+                  <a:lnTo>
+                    <a:pt x="286490" y="2384209"/>
+                  </a:lnTo>
+                  <a:lnTo>
+                    <a:pt x="358112" y="2376036"/>
+                  </a:lnTo>
+                  <a:lnTo>
+                    <a:pt x="429735" y="2367692"/>
+                  </a:lnTo>
+                  <a:lnTo>
+                    <a:pt x="501357" y="2359175"/>
+                  </a:lnTo>
+                  <a:lnTo>
+                    <a:pt x="572980" y="2350481"/>
+                  </a:lnTo>
+                  <a:lnTo>
+                    <a:pt x="644602" y="2341606"/>
+                  </a:lnTo>
+                  <a:lnTo>
+                    <a:pt x="716225" y="2332546"/>
+                  </a:lnTo>
+                  <a:lnTo>
+                    <a:pt x="787847" y="2323298"/>
+                  </a:lnTo>
+                  <a:lnTo>
+                    <a:pt x="859470" y="2313858"/>
+                  </a:lnTo>
+                  <a:lnTo>
+                    <a:pt x="931092" y="2304221"/>
+                  </a:lnTo>
+                  <a:lnTo>
+                    <a:pt x="1002715" y="2294384"/>
+                  </a:lnTo>
+                  <a:lnTo>
+                    <a:pt x="1074337" y="2284343"/>
+                  </a:lnTo>
+                  <a:lnTo>
+                    <a:pt x="1145960" y="2274093"/>
+                  </a:lnTo>
+                  <a:lnTo>
+                    <a:pt x="1217582" y="2263629"/>
+                  </a:lnTo>
+                  <a:lnTo>
+                    <a:pt x="1289205" y="2252948"/>
+                  </a:lnTo>
+                  <a:lnTo>
+                    <a:pt x="1360827" y="2242045"/>
+                  </a:lnTo>
+                  <a:lnTo>
+                    <a:pt x="1432450" y="2230915"/>
+                  </a:lnTo>
+                  <a:lnTo>
+                    <a:pt x="1504073" y="2219553"/>
+                  </a:lnTo>
+                  <a:lnTo>
+                    <a:pt x="1575695" y="2207956"/>
+                  </a:lnTo>
+                  <a:lnTo>
+                    <a:pt x="1647318" y="2196117"/>
+                  </a:lnTo>
+                  <a:lnTo>
+                    <a:pt x="1718940" y="2184032"/>
+                  </a:lnTo>
+                  <a:lnTo>
+                    <a:pt x="1790563" y="2171696"/>
+                  </a:lnTo>
+                  <a:lnTo>
+                    <a:pt x="1862185" y="2159103"/>
+                  </a:lnTo>
+                  <a:lnTo>
+                    <a:pt x="1933808" y="2146248"/>
+                  </a:lnTo>
+                  <a:lnTo>
+                    <a:pt x="2005430" y="2133126"/>
+                  </a:lnTo>
+                  <a:lnTo>
+                    <a:pt x="2077053" y="2119731"/>
+                  </a:lnTo>
+                  <a:lnTo>
+                    <a:pt x="2148675" y="2106057"/>
+                  </a:lnTo>
+                  <a:lnTo>
+                    <a:pt x="2220298" y="2092100"/>
+                  </a:lnTo>
+                  <a:lnTo>
+                    <a:pt x="2291920" y="2077852"/>
+                  </a:lnTo>
+                  <a:lnTo>
+                    <a:pt x="2363543" y="2063307"/>
+                  </a:lnTo>
+                  <a:lnTo>
+                    <a:pt x="2435165" y="2048460"/>
+                  </a:lnTo>
+                  <a:lnTo>
+                    <a:pt x="2506788" y="2033305"/>
+                  </a:lnTo>
+                  <a:lnTo>
+                    <a:pt x="2578410" y="2017834"/>
+                  </a:lnTo>
+                  <a:lnTo>
+                    <a:pt x="2650033" y="2002042"/>
+                  </a:lnTo>
+                  <a:lnTo>
+                    <a:pt x="2721655" y="1985921"/>
+                  </a:lnTo>
+                  <a:lnTo>
+                    <a:pt x="2793278" y="1969465"/>
+                  </a:lnTo>
+                  <a:lnTo>
+                    <a:pt x="2864901" y="1952667"/>
+                  </a:lnTo>
+                  <a:lnTo>
+                    <a:pt x="2936523" y="1935519"/>
+                  </a:lnTo>
+                  <a:lnTo>
+                    <a:pt x="3008146" y="1918015"/>
+                  </a:lnTo>
+                  <a:lnTo>
+                    <a:pt x="3079768" y="1900147"/>
+                  </a:lnTo>
+                  <a:lnTo>
+                    <a:pt x="3151391" y="1881907"/>
+                  </a:lnTo>
+                  <a:lnTo>
+                    <a:pt x="3223013" y="1863288"/>
+                  </a:lnTo>
+                  <a:lnTo>
+                    <a:pt x="3294636" y="1844282"/>
+                  </a:lnTo>
+                  <a:lnTo>
+                    <a:pt x="3366258" y="1824880"/>
+                  </a:lnTo>
+                  <a:lnTo>
+                    <a:pt x="3437881" y="1805075"/>
+                  </a:lnTo>
+                  <a:lnTo>
+                    <a:pt x="3509503" y="1784859"/>
+                  </a:lnTo>
+                  <a:lnTo>
+                    <a:pt x="3581126" y="1764221"/>
+                  </a:lnTo>
+                  <a:lnTo>
+                    <a:pt x="3652748" y="1743155"/>
+                  </a:lnTo>
+                  <a:lnTo>
+                    <a:pt x="3724371" y="1721651"/>
+                  </a:lnTo>
+                  <a:lnTo>
+                    <a:pt x="3795993" y="1699699"/>
+                  </a:lnTo>
+                  <a:lnTo>
+                    <a:pt x="3867616" y="1677291"/>
+                  </a:lnTo>
+                  <a:lnTo>
+                    <a:pt x="3939238" y="1654417"/>
+                  </a:lnTo>
+                  <a:lnTo>
+                    <a:pt x="4010861" y="1631067"/>
+                  </a:lnTo>
+                  <a:lnTo>
+                    <a:pt x="4082483" y="1607232"/>
+                  </a:lnTo>
+                  <a:lnTo>
+                    <a:pt x="4154106" y="1582901"/>
+                  </a:lnTo>
+                  <a:lnTo>
+                    <a:pt x="4225729" y="1558064"/>
+                  </a:lnTo>
+                  <a:lnTo>
+                    <a:pt x="4297351" y="1532711"/>
+                  </a:lnTo>
+                  <a:lnTo>
+                    <a:pt x="4368974" y="1506830"/>
+                  </a:lnTo>
+                  <a:lnTo>
+                    <a:pt x="4440596" y="1480412"/>
+                  </a:lnTo>
+                  <a:lnTo>
+                    <a:pt x="4512219" y="1453444"/>
+                  </a:lnTo>
+                  <a:lnTo>
+                    <a:pt x="4583841" y="1425915"/>
+                  </a:lnTo>
+                  <a:lnTo>
+                    <a:pt x="4655464" y="1397813"/>
+                  </a:lnTo>
+                  <a:lnTo>
+                    <a:pt x="4727086" y="1369127"/>
+                  </a:lnTo>
+                  <a:lnTo>
+                    <a:pt x="4798709" y="1339845"/>
+                  </a:lnTo>
+                  <a:lnTo>
+                    <a:pt x="4870331" y="1309954"/>
+                  </a:lnTo>
+                  <a:lnTo>
+                    <a:pt x="4941954" y="1279441"/>
+                  </a:lnTo>
+                  <a:lnTo>
+                    <a:pt x="5013576" y="1248294"/>
+                  </a:lnTo>
+                  <a:lnTo>
+                    <a:pt x="5085199" y="1216499"/>
+                  </a:lnTo>
+                  <a:lnTo>
+                    <a:pt x="5156821" y="1184043"/>
+                  </a:lnTo>
+                  <a:lnTo>
+                    <a:pt x="5228444" y="1150911"/>
+                  </a:lnTo>
+                  <a:lnTo>
+                    <a:pt x="5300066" y="1117091"/>
+                  </a:lnTo>
+                  <a:lnTo>
+                    <a:pt x="5371689" y="1082568"/>
+                  </a:lnTo>
+                  <a:lnTo>
+                    <a:pt x="5443311" y="1047327"/>
+                  </a:lnTo>
+                  <a:lnTo>
+                    <a:pt x="5514934" y="1011352"/>
+                  </a:lnTo>
+                  <a:lnTo>
+                    <a:pt x="5586557" y="974630"/>
+                  </a:lnTo>
+                  <a:lnTo>
+                    <a:pt x="5658179" y="937144"/>
+                  </a:lnTo>
+                  <a:lnTo>
+                    <a:pt x="5729802" y="898879"/>
+                  </a:lnTo>
+                  <a:lnTo>
+                    <a:pt x="5801424" y="859818"/>
+                  </a:lnTo>
+                  <a:lnTo>
+                    <a:pt x="5873047" y="819944"/>
+                  </a:lnTo>
+                  <a:lnTo>
+                    <a:pt x="5944669" y="779242"/>
+                  </a:lnTo>
+                  <a:lnTo>
+                    <a:pt x="6016292" y="737693"/>
+                  </a:lnTo>
+                  <a:lnTo>
+                    <a:pt x="6087914" y="695280"/>
+                  </a:lnTo>
+                  <a:lnTo>
+                    <a:pt x="6159537" y="651985"/>
+                  </a:lnTo>
+                  <a:lnTo>
+                    <a:pt x="6231159" y="607789"/>
+                  </a:lnTo>
+                  <a:lnTo>
+                    <a:pt x="6302782" y="562675"/>
+                  </a:lnTo>
+                  <a:lnTo>
+                    <a:pt x="6374404" y="516623"/>
+                  </a:lnTo>
+                  <a:lnTo>
+                    <a:pt x="6446027" y="469612"/>
+                  </a:lnTo>
+                  <a:lnTo>
+                    <a:pt x="6517649" y="421625"/>
+                  </a:lnTo>
+                  <a:lnTo>
+                    <a:pt x="6589272" y="372639"/>
+                  </a:lnTo>
+                  <a:lnTo>
+                    <a:pt x="6660894" y="322635"/>
+                  </a:lnTo>
+                  <a:lnTo>
+                    <a:pt x="6732517" y="271591"/>
+                  </a:lnTo>
+                  <a:lnTo>
+                    <a:pt x="6804139" y="219485"/>
+                  </a:lnTo>
+                  <a:lnTo>
+                    <a:pt x="6875762" y="166296"/>
+                  </a:lnTo>
+                  <a:lnTo>
+                    <a:pt x="6947385" y="112001"/>
+                  </a:lnTo>
+                  <a:lnTo>
+                    <a:pt x="7019007" y="56576"/>
                   </a:lnTo>
                   <a:lnTo>
                     <a:pt x="7090630" y="0"/>

--- a/docs/plots/carbo/jx_carbo_linsubhr_dosedisc_grade2.pptx
+++ b/docs/plots/carbo/jx_carbo_linsubhr_dosedisc_grade2.pptx
@@ -3132,560 +3132,563 @@
           <p:spPr>
             <a:xfrm>
               <a:off x="1172049" y="1896563"/>
-              <a:ext cx="7090630" cy="3475963"/>
+              <a:ext cx="7090630" cy="3470452"/>
             </a:xfrm>
             <a:custGeom>
               <a:avLst/>
               <a:pathLst>
-                <a:path w="7090630" h="3475963">
+                <a:path w="7090630" h="3470452">
                   <a:moveTo>
-                    <a:pt x="0" y="2910969"/>
+                    <a:pt x="0" y="2917261"/>
                   </a:moveTo>
                   <a:lnTo>
-                    <a:pt x="71622" y="2908191"/>
-                  </a:lnTo>
-                  <a:lnTo>
-                    <a:pt x="143245" y="2905402"/>
-                  </a:lnTo>
-                  <a:lnTo>
-                    <a:pt x="214867" y="2902603"/>
-                  </a:lnTo>
-                  <a:lnTo>
-                    <a:pt x="286490" y="2899794"/>
-                  </a:lnTo>
-                  <a:lnTo>
-                    <a:pt x="358112" y="2896974"/>
-                  </a:lnTo>
-                  <a:lnTo>
-                    <a:pt x="429735" y="2894144"/>
-                  </a:lnTo>
-                  <a:lnTo>
-                    <a:pt x="501357" y="2891303"/>
-                  </a:lnTo>
-                  <a:lnTo>
-                    <a:pt x="572980" y="2888451"/>
-                  </a:lnTo>
-                  <a:lnTo>
-                    <a:pt x="644602" y="2885589"/>
-                  </a:lnTo>
-                  <a:lnTo>
-                    <a:pt x="716225" y="2882716"/>
-                  </a:lnTo>
-                  <a:lnTo>
-                    <a:pt x="787847" y="2879832"/>
-                  </a:lnTo>
-                  <a:lnTo>
-                    <a:pt x="859470" y="2876937"/>
-                  </a:lnTo>
-                  <a:lnTo>
-                    <a:pt x="931092" y="2874032"/>
-                  </a:lnTo>
-                  <a:lnTo>
-                    <a:pt x="1002715" y="2871115"/>
-                  </a:lnTo>
-                  <a:lnTo>
-                    <a:pt x="1074337" y="2868188"/>
-                  </a:lnTo>
-                  <a:lnTo>
-                    <a:pt x="1145960" y="2865250"/>
-                  </a:lnTo>
-                  <a:lnTo>
-                    <a:pt x="1217582" y="2862301"/>
-                  </a:lnTo>
-                  <a:lnTo>
-                    <a:pt x="1289205" y="2859340"/>
-                  </a:lnTo>
-                  <a:lnTo>
-                    <a:pt x="1360827" y="2856369"/>
-                  </a:lnTo>
-                  <a:lnTo>
-                    <a:pt x="1432450" y="2853386"/>
-                  </a:lnTo>
-                  <a:lnTo>
-                    <a:pt x="1504073" y="2850393"/>
-                  </a:lnTo>
-                  <a:lnTo>
-                    <a:pt x="1575695" y="2847388"/>
-                  </a:lnTo>
-                  <a:lnTo>
-                    <a:pt x="1647318" y="2844372"/>
-                  </a:lnTo>
-                  <a:lnTo>
-                    <a:pt x="1718940" y="2841344"/>
-                  </a:lnTo>
-                  <a:lnTo>
-                    <a:pt x="1790563" y="2838305"/>
-                  </a:lnTo>
-                  <a:lnTo>
-                    <a:pt x="1862185" y="2835255"/>
-                  </a:lnTo>
-                  <a:lnTo>
-                    <a:pt x="1933808" y="2832194"/>
-                  </a:lnTo>
-                  <a:lnTo>
-                    <a:pt x="2005430" y="2829121"/>
-                  </a:lnTo>
-                  <a:lnTo>
-                    <a:pt x="2077053" y="2826036"/>
-                  </a:lnTo>
-                  <a:lnTo>
-                    <a:pt x="2148675" y="2822940"/>
-                  </a:lnTo>
-                  <a:lnTo>
-                    <a:pt x="2220298" y="2819832"/>
-                  </a:lnTo>
-                  <a:lnTo>
-                    <a:pt x="2291920" y="2816713"/>
-                  </a:lnTo>
-                  <a:lnTo>
-                    <a:pt x="2363543" y="2813582"/>
-                  </a:lnTo>
-                  <a:lnTo>
-                    <a:pt x="2435165" y="2810439"/>
-                  </a:lnTo>
-                  <a:lnTo>
-                    <a:pt x="2506788" y="2807284"/>
-                  </a:lnTo>
-                  <a:lnTo>
-                    <a:pt x="2578410" y="2804118"/>
-                  </a:lnTo>
-                  <a:lnTo>
-                    <a:pt x="2650033" y="2800940"/>
-                  </a:lnTo>
-                  <a:lnTo>
-                    <a:pt x="2721655" y="2797750"/>
-                  </a:lnTo>
-                  <a:lnTo>
-                    <a:pt x="2793278" y="2794548"/>
-                  </a:lnTo>
-                  <a:lnTo>
-                    <a:pt x="2864901" y="2791334"/>
-                  </a:lnTo>
-                  <a:lnTo>
-                    <a:pt x="2936523" y="2788107"/>
-                  </a:lnTo>
-                  <a:lnTo>
-                    <a:pt x="3008146" y="2784869"/>
-                  </a:lnTo>
-                  <a:lnTo>
-                    <a:pt x="3079768" y="2769385"/>
-                  </a:lnTo>
-                  <a:lnTo>
-                    <a:pt x="3151391" y="2735703"/>
-                  </a:lnTo>
-                  <a:lnTo>
-                    <a:pt x="3223013" y="2700736"/>
-                  </a:lnTo>
-                  <a:lnTo>
-                    <a:pt x="3294636" y="2664436"/>
-                  </a:lnTo>
-                  <a:lnTo>
-                    <a:pt x="3366258" y="2626752"/>
-                  </a:lnTo>
-                  <a:lnTo>
-                    <a:pt x="3437881" y="2587631"/>
-                  </a:lnTo>
-                  <a:lnTo>
-                    <a:pt x="3509503" y="2547017"/>
-                  </a:lnTo>
-                  <a:lnTo>
-                    <a:pt x="3581126" y="2504855"/>
-                  </a:lnTo>
-                  <a:lnTo>
-                    <a:pt x="3652748" y="2461085"/>
-                  </a:lnTo>
-                  <a:lnTo>
-                    <a:pt x="3724371" y="2415646"/>
-                  </a:lnTo>
-                  <a:lnTo>
-                    <a:pt x="3795993" y="2368475"/>
-                  </a:lnTo>
-                  <a:lnTo>
-                    <a:pt x="3867616" y="2319504"/>
-                  </a:lnTo>
-                  <a:lnTo>
-                    <a:pt x="3939238" y="2268666"/>
-                  </a:lnTo>
-                  <a:lnTo>
-                    <a:pt x="4010861" y="2215889"/>
-                  </a:lnTo>
-                  <a:lnTo>
-                    <a:pt x="4082483" y="2161100"/>
-                  </a:lnTo>
-                  <a:lnTo>
-                    <a:pt x="4154106" y="2104221"/>
-                  </a:lnTo>
-                  <a:lnTo>
-                    <a:pt x="4225729" y="2045174"/>
-                  </a:lnTo>
-                  <a:lnTo>
-                    <a:pt x="4297351" y="1983874"/>
-                  </a:lnTo>
-                  <a:lnTo>
-                    <a:pt x="4368974" y="1920237"/>
-                  </a:lnTo>
-                  <a:lnTo>
-                    <a:pt x="4440596" y="1854174"/>
-                  </a:lnTo>
-                  <a:lnTo>
-                    <a:pt x="4512219" y="1785591"/>
-                  </a:lnTo>
-                  <a:lnTo>
-                    <a:pt x="4583841" y="1714392"/>
-                  </a:lnTo>
-                  <a:lnTo>
-                    <a:pt x="4655464" y="1640479"/>
-                  </a:lnTo>
-                  <a:lnTo>
-                    <a:pt x="4727086" y="1563747"/>
-                  </a:lnTo>
-                  <a:lnTo>
-                    <a:pt x="4798709" y="1484089"/>
-                  </a:lnTo>
-                  <a:lnTo>
-                    <a:pt x="4870331" y="1401393"/>
-                  </a:lnTo>
-                  <a:lnTo>
-                    <a:pt x="4941954" y="1315544"/>
-                  </a:lnTo>
-                  <a:lnTo>
-                    <a:pt x="5013576" y="1226420"/>
-                  </a:lnTo>
-                  <a:lnTo>
-                    <a:pt x="5085199" y="1133899"/>
-                  </a:lnTo>
-                  <a:lnTo>
-                    <a:pt x="5156821" y="1037849"/>
-                  </a:lnTo>
-                  <a:lnTo>
-                    <a:pt x="5228444" y="938136"/>
-                  </a:lnTo>
-                  <a:lnTo>
-                    <a:pt x="5300066" y="834620"/>
-                  </a:lnTo>
-                  <a:lnTo>
-                    <a:pt x="5371689" y="727158"/>
-                  </a:lnTo>
-                  <a:lnTo>
-                    <a:pt x="5443311" y="615597"/>
-                  </a:lnTo>
-                  <a:lnTo>
-                    <a:pt x="5514934" y="499782"/>
-                  </a:lnTo>
-                  <a:lnTo>
-                    <a:pt x="5586557" y="379551"/>
-                  </a:lnTo>
-                  <a:lnTo>
-                    <a:pt x="5658179" y="254734"/>
-                  </a:lnTo>
-                  <a:lnTo>
-                    <a:pt x="5729802" y="125158"/>
-                  </a:lnTo>
-                  <a:lnTo>
-                    <a:pt x="5796441" y="0"/>
+                    <a:pt x="71622" y="2914359"/>
+                  </a:lnTo>
+                  <a:lnTo>
+                    <a:pt x="143245" y="2911446"/>
+                  </a:lnTo>
+                  <a:lnTo>
+                    <a:pt x="214867" y="2908520"/>
+                  </a:lnTo>
+                  <a:lnTo>
+                    <a:pt x="286490" y="2905584"/>
+                  </a:lnTo>
+                  <a:lnTo>
+                    <a:pt x="358112" y="2902636"/>
+                  </a:lnTo>
+                  <a:lnTo>
+                    <a:pt x="429735" y="2899676"/>
+                  </a:lnTo>
+                  <a:lnTo>
+                    <a:pt x="501357" y="2896704"/>
+                  </a:lnTo>
+                  <a:lnTo>
+                    <a:pt x="572980" y="2893721"/>
+                  </a:lnTo>
+                  <a:lnTo>
+                    <a:pt x="644602" y="2890726"/>
+                  </a:lnTo>
+                  <a:lnTo>
+                    <a:pt x="716225" y="2887719"/>
+                  </a:lnTo>
+                  <a:lnTo>
+                    <a:pt x="787847" y="2884700"/>
+                  </a:lnTo>
+                  <a:lnTo>
+                    <a:pt x="859470" y="2881670"/>
+                  </a:lnTo>
+                  <a:lnTo>
+                    <a:pt x="931092" y="2878627"/>
+                  </a:lnTo>
+                  <a:lnTo>
+                    <a:pt x="1002715" y="2875572"/>
+                  </a:lnTo>
+                  <a:lnTo>
+                    <a:pt x="1074337" y="2872506"/>
+                  </a:lnTo>
+                  <a:lnTo>
+                    <a:pt x="1145960" y="2869427"/>
+                  </a:lnTo>
+                  <a:lnTo>
+                    <a:pt x="1217582" y="2866336"/>
+                  </a:lnTo>
+                  <a:lnTo>
+                    <a:pt x="1289205" y="2863233"/>
+                  </a:lnTo>
+                  <a:lnTo>
+                    <a:pt x="1360827" y="2860118"/>
+                  </a:lnTo>
+                  <a:lnTo>
+                    <a:pt x="1432450" y="2856990"/>
+                  </a:lnTo>
+                  <a:lnTo>
+                    <a:pt x="1504073" y="2853850"/>
+                  </a:lnTo>
+                  <a:lnTo>
+                    <a:pt x="1575695" y="2850698"/>
+                  </a:lnTo>
+                  <a:lnTo>
+                    <a:pt x="1647318" y="2847533"/>
+                  </a:lnTo>
+                  <a:lnTo>
+                    <a:pt x="1718940" y="2844356"/>
+                  </a:lnTo>
+                  <a:lnTo>
+                    <a:pt x="1790563" y="2841166"/>
+                  </a:lnTo>
+                  <a:lnTo>
+                    <a:pt x="1862185" y="2837963"/>
+                  </a:lnTo>
+                  <a:lnTo>
+                    <a:pt x="1933808" y="2834748"/>
+                  </a:lnTo>
+                  <a:lnTo>
+                    <a:pt x="2005430" y="2831520"/>
+                  </a:lnTo>
+                  <a:lnTo>
+                    <a:pt x="2077053" y="2828280"/>
+                  </a:lnTo>
+                  <a:lnTo>
+                    <a:pt x="2148675" y="2825027"/>
+                  </a:lnTo>
+                  <a:lnTo>
+                    <a:pt x="2220298" y="2821760"/>
+                  </a:lnTo>
+                  <a:lnTo>
+                    <a:pt x="2291920" y="2818481"/>
+                  </a:lnTo>
+                  <a:lnTo>
+                    <a:pt x="2363543" y="2815190"/>
+                  </a:lnTo>
+                  <a:lnTo>
+                    <a:pt x="2435165" y="2811885"/>
+                  </a:lnTo>
+                  <a:lnTo>
+                    <a:pt x="2506788" y="2808567"/>
+                  </a:lnTo>
+                  <a:lnTo>
+                    <a:pt x="2578410" y="2805235"/>
+                  </a:lnTo>
+                  <a:lnTo>
+                    <a:pt x="2650033" y="2801891"/>
+                  </a:lnTo>
+                  <a:lnTo>
+                    <a:pt x="2721655" y="2798534"/>
+                  </a:lnTo>
+                  <a:lnTo>
+                    <a:pt x="2793278" y="2795163"/>
+                  </a:lnTo>
+                  <a:lnTo>
+                    <a:pt x="2864901" y="2791779"/>
+                  </a:lnTo>
+                  <a:lnTo>
+                    <a:pt x="2936523" y="2788382"/>
+                  </a:lnTo>
+                  <a:lnTo>
+                    <a:pt x="3008146" y="2784971"/>
+                  </a:lnTo>
+                  <a:lnTo>
+                    <a:pt x="3079768" y="2769649"/>
+                  </a:lnTo>
+                  <a:lnTo>
+                    <a:pt x="3151391" y="2736638"/>
+                  </a:lnTo>
+                  <a:lnTo>
+                    <a:pt x="3223013" y="2702392"/>
+                  </a:lnTo>
+                  <a:lnTo>
+                    <a:pt x="3294636" y="2666867"/>
+                  </a:lnTo>
+                  <a:lnTo>
+                    <a:pt x="3366258" y="2630013"/>
+                  </a:lnTo>
+                  <a:lnTo>
+                    <a:pt x="3437881" y="2591781"/>
+                  </a:lnTo>
+                  <a:lnTo>
+                    <a:pt x="3509503" y="2552120"/>
+                  </a:lnTo>
+                  <a:lnTo>
+                    <a:pt x="3581126" y="2510977"/>
+                  </a:lnTo>
+                  <a:lnTo>
+                    <a:pt x="3652748" y="2468295"/>
+                  </a:lnTo>
+                  <a:lnTo>
+                    <a:pt x="3724371" y="2424017"/>
+                  </a:lnTo>
+                  <a:lnTo>
+                    <a:pt x="3795993" y="2378084"/>
+                  </a:lnTo>
+                  <a:lnTo>
+                    <a:pt x="3867616" y="2330434"/>
+                  </a:lnTo>
+                  <a:lnTo>
+                    <a:pt x="3939238" y="2281003"/>
+                  </a:lnTo>
+                  <a:lnTo>
+                    <a:pt x="4010861" y="2229723"/>
+                  </a:lnTo>
+                  <a:lnTo>
+                    <a:pt x="4082483" y="2176526"/>
+                  </a:lnTo>
+                  <a:lnTo>
+                    <a:pt x="4154106" y="2121341"/>
+                  </a:lnTo>
+                  <a:lnTo>
+                    <a:pt x="4225729" y="2064092"/>
+                  </a:lnTo>
+                  <a:lnTo>
+                    <a:pt x="4297351" y="2004703"/>
+                  </a:lnTo>
+                  <a:lnTo>
+                    <a:pt x="4368974" y="1943094"/>
+                  </a:lnTo>
+                  <a:lnTo>
+                    <a:pt x="4440596" y="1879181"/>
+                  </a:lnTo>
+                  <a:lnTo>
+                    <a:pt x="4512219" y="1812880"/>
+                  </a:lnTo>
+                  <a:lnTo>
+                    <a:pt x="4583841" y="1744099"/>
+                  </a:lnTo>
+                  <a:lnTo>
+                    <a:pt x="4655464" y="1672747"/>
+                  </a:lnTo>
+                  <a:lnTo>
+                    <a:pt x="4727086" y="1598727"/>
+                  </a:lnTo>
+                  <a:lnTo>
+                    <a:pt x="4798709" y="1521940"/>
+                  </a:lnTo>
+                  <a:lnTo>
+                    <a:pt x="4870331" y="1442283"/>
+                  </a:lnTo>
+                  <a:lnTo>
+                    <a:pt x="4941954" y="1359647"/>
+                  </a:lnTo>
+                  <a:lnTo>
+                    <a:pt x="5013576" y="1273922"/>
+                  </a:lnTo>
+                  <a:lnTo>
+                    <a:pt x="5085199" y="1184992"/>
+                  </a:lnTo>
+                  <a:lnTo>
+                    <a:pt x="5156821" y="1092738"/>
+                  </a:lnTo>
+                  <a:lnTo>
+                    <a:pt x="5228444" y="997034"/>
+                  </a:lnTo>
+                  <a:lnTo>
+                    <a:pt x="5300066" y="897753"/>
+                  </a:lnTo>
+                  <a:lnTo>
+                    <a:pt x="5371689" y="794759"/>
+                  </a:lnTo>
+                  <a:lnTo>
+                    <a:pt x="5443311" y="687916"/>
+                  </a:lnTo>
+                  <a:lnTo>
+                    <a:pt x="5514934" y="577078"/>
+                  </a:lnTo>
+                  <a:lnTo>
+                    <a:pt x="5586557" y="462096"/>
+                  </a:lnTo>
+                  <a:lnTo>
+                    <a:pt x="5658179" y="342815"/>
+                  </a:lnTo>
+                  <a:lnTo>
+                    <a:pt x="5729802" y="219075"/>
+                  </a:lnTo>
+                  <a:lnTo>
+                    <a:pt x="5801424" y="90709"/>
+                  </a:lnTo>
+                  <a:lnTo>
+                    <a:pt x="5850212" y="0"/>
                   </a:lnTo>
                   <a:lnTo>
                     <a:pt x="7090630" y="0"/>
                   </a:lnTo>
                   <a:lnTo>
-                    <a:pt x="7090630" y="2578766"/>
-                  </a:lnTo>
-                  <a:lnTo>
-                    <a:pt x="7019007" y="2582774"/>
-                  </a:lnTo>
-                  <a:lnTo>
-                    <a:pt x="6947385" y="2586766"/>
-                  </a:lnTo>
-                  <a:lnTo>
-                    <a:pt x="6875762" y="2590744"/>
-                  </a:lnTo>
-                  <a:lnTo>
-                    <a:pt x="6804139" y="2594706"/>
-                  </a:lnTo>
-                  <a:lnTo>
-                    <a:pt x="6732517" y="2598654"/>
-                  </a:lnTo>
-                  <a:lnTo>
-                    <a:pt x="6660894" y="2602587"/>
-                  </a:lnTo>
-                  <a:lnTo>
-                    <a:pt x="6589272" y="2606505"/>
-                  </a:lnTo>
-                  <a:lnTo>
-                    <a:pt x="6517649" y="2610409"/>
-                  </a:lnTo>
-                  <a:lnTo>
-                    <a:pt x="6446027" y="2614298"/>
-                  </a:lnTo>
-                  <a:lnTo>
-                    <a:pt x="6374404" y="2618173"/>
-                  </a:lnTo>
-                  <a:lnTo>
-                    <a:pt x="6302782" y="2622033"/>
-                  </a:lnTo>
-                  <a:lnTo>
-                    <a:pt x="6231159" y="2625879"/>
-                  </a:lnTo>
-                  <a:lnTo>
-                    <a:pt x="6159537" y="2629711"/>
-                  </a:lnTo>
-                  <a:lnTo>
-                    <a:pt x="6087914" y="2633528"/>
-                  </a:lnTo>
-                  <a:lnTo>
-                    <a:pt x="6016292" y="2637331"/>
-                  </a:lnTo>
-                  <a:lnTo>
-                    <a:pt x="5944669" y="2641119"/>
-                  </a:lnTo>
-                  <a:lnTo>
-                    <a:pt x="5873047" y="2644894"/>
-                  </a:lnTo>
-                  <a:lnTo>
-                    <a:pt x="5801424" y="2648655"/>
-                  </a:lnTo>
-                  <a:lnTo>
-                    <a:pt x="5729802" y="2652401"/>
-                  </a:lnTo>
-                  <a:lnTo>
-                    <a:pt x="5658179" y="2656134"/>
-                  </a:lnTo>
-                  <a:lnTo>
-                    <a:pt x="5586557" y="2659852"/>
-                  </a:lnTo>
-                  <a:lnTo>
-                    <a:pt x="5514934" y="2663557"/>
-                  </a:lnTo>
-                  <a:lnTo>
-                    <a:pt x="5443311" y="2667248"/>
-                  </a:lnTo>
-                  <a:lnTo>
-                    <a:pt x="5371689" y="2670925"/>
-                  </a:lnTo>
-                  <a:lnTo>
-                    <a:pt x="5300066" y="2674588"/>
-                  </a:lnTo>
-                  <a:lnTo>
-                    <a:pt x="5228444" y="2678238"/>
-                  </a:lnTo>
-                  <a:lnTo>
-                    <a:pt x="5156821" y="2681874"/>
-                  </a:lnTo>
-                  <a:lnTo>
-                    <a:pt x="5085199" y="2685497"/>
-                  </a:lnTo>
-                  <a:lnTo>
-                    <a:pt x="5013576" y="2689106"/>
-                  </a:lnTo>
-                  <a:lnTo>
-                    <a:pt x="4941954" y="2692701"/>
-                  </a:lnTo>
-                  <a:lnTo>
-                    <a:pt x="4870331" y="2696283"/>
-                  </a:lnTo>
-                  <a:lnTo>
-                    <a:pt x="4798709" y="2699852"/>
-                  </a:lnTo>
-                  <a:lnTo>
-                    <a:pt x="4727086" y="2703407"/>
-                  </a:lnTo>
-                  <a:lnTo>
-                    <a:pt x="4655464" y="2706950"/>
-                  </a:lnTo>
-                  <a:lnTo>
-                    <a:pt x="4583841" y="2710479"/>
-                  </a:lnTo>
-                  <a:lnTo>
-                    <a:pt x="4512219" y="2713994"/>
-                  </a:lnTo>
-                  <a:lnTo>
-                    <a:pt x="4440596" y="2717497"/>
-                  </a:lnTo>
-                  <a:lnTo>
-                    <a:pt x="4368974" y="2720987"/>
-                  </a:lnTo>
-                  <a:lnTo>
-                    <a:pt x="4297351" y="2724463"/>
-                  </a:lnTo>
-                  <a:lnTo>
-                    <a:pt x="4225729" y="2727927"/>
-                  </a:lnTo>
-                  <a:lnTo>
-                    <a:pt x="4154106" y="2731377"/>
-                  </a:lnTo>
-                  <a:lnTo>
-                    <a:pt x="4082483" y="2734815"/>
-                  </a:lnTo>
-                  <a:lnTo>
-                    <a:pt x="4010861" y="2738240"/>
-                  </a:lnTo>
-                  <a:lnTo>
-                    <a:pt x="3939238" y="2741652"/>
-                  </a:lnTo>
-                  <a:lnTo>
-                    <a:pt x="3867616" y="2745052"/>
-                  </a:lnTo>
-                  <a:lnTo>
-                    <a:pt x="3795993" y="2748439"/>
-                  </a:lnTo>
-                  <a:lnTo>
-                    <a:pt x="3724371" y="2751813"/>
-                  </a:lnTo>
-                  <a:lnTo>
-                    <a:pt x="3652748" y="2755174"/>
-                  </a:lnTo>
-                  <a:lnTo>
-                    <a:pt x="3581126" y="2758523"/>
-                  </a:lnTo>
-                  <a:lnTo>
-                    <a:pt x="3509503" y="2761860"/>
-                  </a:lnTo>
-                  <a:lnTo>
-                    <a:pt x="3437881" y="2765184"/>
-                  </a:lnTo>
-                  <a:lnTo>
-                    <a:pt x="3366258" y="2768496"/>
-                  </a:lnTo>
-                  <a:lnTo>
-                    <a:pt x="3294636" y="2771795"/>
-                  </a:lnTo>
-                  <a:lnTo>
-                    <a:pt x="3223013" y="2775082"/>
-                  </a:lnTo>
-                  <a:lnTo>
-                    <a:pt x="3151391" y="2778356"/>
-                  </a:lnTo>
-                  <a:lnTo>
-                    <a:pt x="3079768" y="2781619"/>
-                  </a:lnTo>
-                  <a:lnTo>
-                    <a:pt x="3008146" y="2801830"/>
-                  </a:lnTo>
-                  <a:lnTo>
-                    <a:pt x="2936523" y="2833084"/>
-                  </a:lnTo>
-                  <a:lnTo>
-                    <a:pt x="2864901" y="2863189"/>
-                  </a:lnTo>
-                  <a:lnTo>
-                    <a:pt x="2793278" y="2892188"/>
-                  </a:lnTo>
-                  <a:lnTo>
-                    <a:pt x="2721655" y="2920122"/>
-                  </a:lnTo>
-                  <a:lnTo>
-                    <a:pt x="2650033" y="2947030"/>
-                  </a:lnTo>
-                  <a:lnTo>
-                    <a:pt x="2578410" y="2972949"/>
-                  </a:lnTo>
-                  <a:lnTo>
-                    <a:pt x="2506788" y="2997917"/>
-                  </a:lnTo>
-                  <a:lnTo>
-                    <a:pt x="2435165" y="3021967"/>
-                  </a:lnTo>
-                  <a:lnTo>
-                    <a:pt x="2363543" y="3045134"/>
-                  </a:lnTo>
-                  <a:lnTo>
-                    <a:pt x="2291920" y="3067450"/>
-                  </a:lnTo>
-                  <a:lnTo>
-                    <a:pt x="2220298" y="3088946"/>
-                  </a:lnTo>
-                  <a:lnTo>
-                    <a:pt x="2148675" y="3109652"/>
-                  </a:lnTo>
-                  <a:lnTo>
-                    <a:pt x="2077053" y="3129598"/>
-                  </a:lnTo>
-                  <a:lnTo>
-                    <a:pt x="2005430" y="3148811"/>
-                  </a:lnTo>
-                  <a:lnTo>
-                    <a:pt x="1933808" y="3167319"/>
-                  </a:lnTo>
-                  <a:lnTo>
-                    <a:pt x="1862185" y="3185146"/>
-                  </a:lnTo>
-                  <a:lnTo>
-                    <a:pt x="1790563" y="3202319"/>
-                  </a:lnTo>
-                  <a:lnTo>
-                    <a:pt x="1718940" y="3218861"/>
-                  </a:lnTo>
-                  <a:lnTo>
-                    <a:pt x="1647318" y="3234795"/>
-                  </a:lnTo>
-                  <a:lnTo>
-                    <a:pt x="1575695" y="3250144"/>
-                  </a:lnTo>
-                  <a:lnTo>
-                    <a:pt x="1504073" y="3264929"/>
-                  </a:lnTo>
-                  <a:lnTo>
-                    <a:pt x="1432450" y="3279171"/>
-                  </a:lnTo>
-                  <a:lnTo>
-                    <a:pt x="1360827" y="3292890"/>
-                  </a:lnTo>
-                  <a:lnTo>
-                    <a:pt x="1289205" y="3306105"/>
-                  </a:lnTo>
-                  <a:lnTo>
-                    <a:pt x="1217582" y="3318834"/>
-                  </a:lnTo>
-                  <a:lnTo>
-                    <a:pt x="1145960" y="3331096"/>
-                  </a:lnTo>
-                  <a:lnTo>
-                    <a:pt x="1074337" y="3342908"/>
-                  </a:lnTo>
-                  <a:lnTo>
-                    <a:pt x="1002715" y="3354285"/>
-                  </a:lnTo>
-                  <a:lnTo>
-                    <a:pt x="931092" y="3365245"/>
-                  </a:lnTo>
-                  <a:lnTo>
-                    <a:pt x="859470" y="3375802"/>
-                  </a:lnTo>
-                  <a:lnTo>
-                    <a:pt x="787847" y="3385972"/>
-                  </a:lnTo>
-                  <a:lnTo>
-                    <a:pt x="716225" y="3395767"/>
-                  </a:lnTo>
-                  <a:lnTo>
-                    <a:pt x="644602" y="3405203"/>
-                  </a:lnTo>
-                  <a:lnTo>
-                    <a:pt x="572980" y="3414292"/>
-                  </a:lnTo>
-                  <a:lnTo>
-                    <a:pt x="501357" y="3423048"/>
-                  </a:lnTo>
-                  <a:lnTo>
-                    <a:pt x="429735" y="3431482"/>
-                  </a:lnTo>
-                  <a:lnTo>
-                    <a:pt x="358112" y="3439606"/>
-                  </a:lnTo>
-                  <a:lnTo>
-                    <a:pt x="286490" y="3447431"/>
-                  </a:lnTo>
-                  <a:lnTo>
-                    <a:pt x="214867" y="3454969"/>
-                  </a:lnTo>
-                  <a:lnTo>
-                    <a:pt x="143245" y="3462231"/>
-                  </a:lnTo>
-                  <a:lnTo>
-                    <a:pt x="71622" y="3469225"/>
-                  </a:lnTo>
-                  <a:lnTo>
-                    <a:pt x="0" y="3475963"/>
+                    <a:pt x="7090630" y="2566577"/>
+                  </a:lnTo>
+                  <a:lnTo>
+                    <a:pt x="7019007" y="2570846"/>
+                  </a:lnTo>
+                  <a:lnTo>
+                    <a:pt x="6947385" y="2575098"/>
+                  </a:lnTo>
+                  <a:lnTo>
+                    <a:pt x="6875762" y="2579334"/>
+                  </a:lnTo>
+                  <a:lnTo>
+                    <a:pt x="6804139" y="2583553"/>
+                  </a:lnTo>
+                  <a:lnTo>
+                    <a:pt x="6732517" y="2587756"/>
+                  </a:lnTo>
+                  <a:lnTo>
+                    <a:pt x="6660894" y="2591942"/>
+                  </a:lnTo>
+                  <a:lnTo>
+                    <a:pt x="6589272" y="2596111"/>
+                  </a:lnTo>
+                  <a:lnTo>
+                    <a:pt x="6517649" y="2600264"/>
+                  </a:lnTo>
+                  <a:lnTo>
+                    <a:pt x="6446027" y="2604401"/>
+                  </a:lnTo>
+                  <a:lnTo>
+                    <a:pt x="6374404" y="2608522"/>
+                  </a:lnTo>
+                  <a:lnTo>
+                    <a:pt x="6302782" y="2612626"/>
+                  </a:lnTo>
+                  <a:lnTo>
+                    <a:pt x="6231159" y="2616714"/>
+                  </a:lnTo>
+                  <a:lnTo>
+                    <a:pt x="6159537" y="2620786"/>
+                  </a:lnTo>
+                  <a:lnTo>
+                    <a:pt x="6087914" y="2624843"/>
+                  </a:lnTo>
+                  <a:lnTo>
+                    <a:pt x="6016292" y="2628883"/>
+                  </a:lnTo>
+                  <a:lnTo>
+                    <a:pt x="5944669" y="2632907"/>
+                  </a:lnTo>
+                  <a:lnTo>
+                    <a:pt x="5873047" y="2636916"/>
+                  </a:lnTo>
+                  <a:lnTo>
+                    <a:pt x="5801424" y="2640908"/>
+                  </a:lnTo>
+                  <a:lnTo>
+                    <a:pt x="5729802" y="2644885"/>
+                  </a:lnTo>
+                  <a:lnTo>
+                    <a:pt x="5658179" y="2648847"/>
+                  </a:lnTo>
+                  <a:lnTo>
+                    <a:pt x="5586557" y="2652793"/>
+                  </a:lnTo>
+                  <a:lnTo>
+                    <a:pt x="5514934" y="2656723"/>
+                  </a:lnTo>
+                  <a:lnTo>
+                    <a:pt x="5443311" y="2660638"/>
+                  </a:lnTo>
+                  <a:lnTo>
+                    <a:pt x="5371689" y="2664537"/>
+                  </a:lnTo>
+                  <a:lnTo>
+                    <a:pt x="5300066" y="2668421"/>
+                  </a:lnTo>
+                  <a:lnTo>
+                    <a:pt x="5228444" y="2672290"/>
+                  </a:lnTo>
+                  <a:lnTo>
+                    <a:pt x="5156821" y="2676144"/>
+                  </a:lnTo>
+                  <a:lnTo>
+                    <a:pt x="5085199" y="2679983"/>
+                  </a:lnTo>
+                  <a:lnTo>
+                    <a:pt x="5013576" y="2683806"/>
+                  </a:lnTo>
+                  <a:lnTo>
+                    <a:pt x="4941954" y="2687614"/>
+                  </a:lnTo>
+                  <a:lnTo>
+                    <a:pt x="4870331" y="2691408"/>
+                  </a:lnTo>
+                  <a:lnTo>
+                    <a:pt x="4798709" y="2695186"/>
+                  </a:lnTo>
+                  <a:lnTo>
+                    <a:pt x="4727086" y="2698950"/>
+                  </a:lnTo>
+                  <a:lnTo>
+                    <a:pt x="4655464" y="2702699"/>
+                  </a:lnTo>
+                  <a:lnTo>
+                    <a:pt x="4583841" y="2706433"/>
+                  </a:lnTo>
+                  <a:lnTo>
+                    <a:pt x="4512219" y="2710153"/>
+                  </a:lnTo>
+                  <a:lnTo>
+                    <a:pt x="4440596" y="2713857"/>
+                  </a:lnTo>
+                  <a:lnTo>
+                    <a:pt x="4368974" y="2717548"/>
+                  </a:lnTo>
+                  <a:lnTo>
+                    <a:pt x="4297351" y="2721224"/>
+                  </a:lnTo>
+                  <a:lnTo>
+                    <a:pt x="4225729" y="2724885"/>
+                  </a:lnTo>
+                  <a:lnTo>
+                    <a:pt x="4154106" y="2728532"/>
+                  </a:lnTo>
+                  <a:lnTo>
+                    <a:pt x="4082483" y="2732164"/>
+                  </a:lnTo>
+                  <a:lnTo>
+                    <a:pt x="4010861" y="2735783"/>
+                  </a:lnTo>
+                  <a:lnTo>
+                    <a:pt x="3939238" y="2739387"/>
+                  </a:lnTo>
+                  <a:lnTo>
+                    <a:pt x="3867616" y="2742977"/>
+                  </a:lnTo>
+                  <a:lnTo>
+                    <a:pt x="3795993" y="2746553"/>
+                  </a:lnTo>
+                  <a:lnTo>
+                    <a:pt x="3724371" y="2750114"/>
+                  </a:lnTo>
+                  <a:lnTo>
+                    <a:pt x="3652748" y="2753662"/>
+                  </a:lnTo>
+                  <a:lnTo>
+                    <a:pt x="3581126" y="2757196"/>
+                  </a:lnTo>
+                  <a:lnTo>
+                    <a:pt x="3509503" y="2760716"/>
+                  </a:lnTo>
+                  <a:lnTo>
+                    <a:pt x="3437881" y="2764222"/>
+                  </a:lnTo>
+                  <a:lnTo>
+                    <a:pt x="3366258" y="2767714"/>
+                  </a:lnTo>
+                  <a:lnTo>
+                    <a:pt x="3294636" y="2771193"/>
+                  </a:lnTo>
+                  <a:lnTo>
+                    <a:pt x="3223013" y="2774658"/>
+                  </a:lnTo>
+                  <a:lnTo>
+                    <a:pt x="3151391" y="2778109"/>
+                  </a:lnTo>
+                  <a:lnTo>
+                    <a:pt x="3079768" y="2781547"/>
+                  </a:lnTo>
+                  <a:lnTo>
+                    <a:pt x="3008146" y="2801471"/>
+                  </a:lnTo>
+                  <a:lnTo>
+                    <a:pt x="2936523" y="2832146"/>
+                  </a:lnTo>
+                  <a:lnTo>
+                    <a:pt x="2864901" y="2861715"/>
+                  </a:lnTo>
+                  <a:lnTo>
+                    <a:pt x="2793278" y="2890219"/>
+                  </a:lnTo>
+                  <a:lnTo>
+                    <a:pt x="2721655" y="2917695"/>
+                  </a:lnTo>
+                  <a:lnTo>
+                    <a:pt x="2650033" y="2944181"/>
+                  </a:lnTo>
+                  <a:lnTo>
+                    <a:pt x="2578410" y="2969713"/>
+                  </a:lnTo>
+                  <a:lnTo>
+                    <a:pt x="2506788" y="2994325"/>
+                  </a:lnTo>
+                  <a:lnTo>
+                    <a:pt x="2435165" y="3018049"/>
+                  </a:lnTo>
+                  <a:lnTo>
+                    <a:pt x="2363543" y="3040919"/>
+                  </a:lnTo>
+                  <a:lnTo>
+                    <a:pt x="2291920" y="3062965"/>
+                  </a:lnTo>
+                  <a:lnTo>
+                    <a:pt x="2220298" y="3084216"/>
+                  </a:lnTo>
+                  <a:lnTo>
+                    <a:pt x="2148675" y="3104701"/>
+                  </a:lnTo>
+                  <a:lnTo>
+                    <a:pt x="2077053" y="3124448"/>
+                  </a:lnTo>
+                  <a:lnTo>
+                    <a:pt x="2005430" y="3143483"/>
+                  </a:lnTo>
+                  <a:lnTo>
+                    <a:pt x="1933808" y="3161832"/>
+                  </a:lnTo>
+                  <a:lnTo>
+                    <a:pt x="1862185" y="3179520"/>
+                  </a:lnTo>
+                  <a:lnTo>
+                    <a:pt x="1790563" y="3196571"/>
+                  </a:lnTo>
+                  <a:lnTo>
+                    <a:pt x="1718940" y="3213007"/>
+                  </a:lnTo>
+                  <a:lnTo>
+                    <a:pt x="1647318" y="3228850"/>
+                  </a:lnTo>
+                  <a:lnTo>
+                    <a:pt x="1575695" y="3244123"/>
+                  </a:lnTo>
+                  <a:lnTo>
+                    <a:pt x="1504073" y="3258846"/>
+                  </a:lnTo>
+                  <a:lnTo>
+                    <a:pt x="1432450" y="3273037"/>
+                  </a:lnTo>
+                  <a:lnTo>
+                    <a:pt x="1360827" y="3286718"/>
+                  </a:lnTo>
+                  <a:lnTo>
+                    <a:pt x="1289205" y="3299905"/>
+                  </a:lnTo>
+                  <a:lnTo>
+                    <a:pt x="1217582" y="3312617"/>
+                  </a:lnTo>
+                  <a:lnTo>
+                    <a:pt x="1145960" y="3324871"/>
+                  </a:lnTo>
+                  <a:lnTo>
+                    <a:pt x="1074337" y="3336683"/>
+                  </a:lnTo>
+                  <a:lnTo>
+                    <a:pt x="1002715" y="3348070"/>
+                  </a:lnTo>
+                  <a:lnTo>
+                    <a:pt x="931092" y="3359046"/>
+                  </a:lnTo>
+                  <a:lnTo>
+                    <a:pt x="859470" y="3369627"/>
+                  </a:lnTo>
+                  <a:lnTo>
+                    <a:pt x="787847" y="3379827"/>
+                  </a:lnTo>
+                  <a:lnTo>
+                    <a:pt x="716225" y="3389658"/>
+                  </a:lnTo>
+                  <a:lnTo>
+                    <a:pt x="644602" y="3399136"/>
+                  </a:lnTo>
+                  <a:lnTo>
+                    <a:pt x="572980" y="3408272"/>
+                  </a:lnTo>
+                  <a:lnTo>
+                    <a:pt x="501357" y="3417079"/>
+                  </a:lnTo>
+                  <a:lnTo>
+                    <a:pt x="429735" y="3425568"/>
+                  </a:lnTo>
+                  <a:lnTo>
+                    <a:pt x="358112" y="3433751"/>
+                  </a:lnTo>
+                  <a:lnTo>
+                    <a:pt x="286490" y="3441640"/>
+                  </a:lnTo>
+                  <a:lnTo>
+                    <a:pt x="214867" y="3449244"/>
+                  </a:lnTo>
+                  <a:lnTo>
+                    <a:pt x="143245" y="3456574"/>
+                  </a:lnTo>
+                  <a:lnTo>
+                    <a:pt x="71622" y="3463640"/>
+                  </a:lnTo>
+                  <a:lnTo>
+                    <a:pt x="0" y="3470452"/>
                   </a:lnTo>
                   <a:close/>
                 </a:path>
@@ -3712,257 +3715,260 @@
           <p:spPr>
             <a:xfrm>
               <a:off x="1172049" y="1896563"/>
-              <a:ext cx="5796441" cy="2910969"/>
+              <a:ext cx="5850212" cy="2917261"/>
             </a:xfrm>
             <a:custGeom>
               <a:avLst/>
               <a:pathLst>
-                <a:path w="5796441" h="2910969">
+                <a:path w="5850212" h="2917261">
                   <a:moveTo>
-                    <a:pt x="0" y="2910969"/>
+                    <a:pt x="0" y="2917261"/>
                   </a:moveTo>
                   <a:lnTo>
-                    <a:pt x="71622" y="2908191"/>
-                  </a:lnTo>
-                  <a:lnTo>
-                    <a:pt x="143245" y="2905402"/>
-                  </a:lnTo>
-                  <a:lnTo>
-                    <a:pt x="214867" y="2902603"/>
-                  </a:lnTo>
-                  <a:lnTo>
-                    <a:pt x="286490" y="2899794"/>
-                  </a:lnTo>
-                  <a:lnTo>
-                    <a:pt x="358112" y="2896974"/>
-                  </a:lnTo>
-                  <a:lnTo>
-                    <a:pt x="429735" y="2894144"/>
-                  </a:lnTo>
-                  <a:lnTo>
-                    <a:pt x="501357" y="2891303"/>
-                  </a:lnTo>
-                  <a:lnTo>
-                    <a:pt x="572980" y="2888451"/>
-                  </a:lnTo>
-                  <a:lnTo>
-                    <a:pt x="644602" y="2885589"/>
-                  </a:lnTo>
-                  <a:lnTo>
-                    <a:pt x="716225" y="2882716"/>
-                  </a:lnTo>
-                  <a:lnTo>
-                    <a:pt x="787847" y="2879832"/>
-                  </a:lnTo>
-                  <a:lnTo>
-                    <a:pt x="859470" y="2876937"/>
-                  </a:lnTo>
-                  <a:lnTo>
-                    <a:pt x="931092" y="2874032"/>
-                  </a:lnTo>
-                  <a:lnTo>
-                    <a:pt x="1002715" y="2871115"/>
-                  </a:lnTo>
-                  <a:lnTo>
-                    <a:pt x="1074337" y="2868188"/>
-                  </a:lnTo>
-                  <a:lnTo>
-                    <a:pt x="1145960" y="2865250"/>
-                  </a:lnTo>
-                  <a:lnTo>
-                    <a:pt x="1217582" y="2862301"/>
-                  </a:lnTo>
-                  <a:lnTo>
-                    <a:pt x="1289205" y="2859340"/>
-                  </a:lnTo>
-                  <a:lnTo>
-                    <a:pt x="1360827" y="2856369"/>
-                  </a:lnTo>
-                  <a:lnTo>
-                    <a:pt x="1432450" y="2853386"/>
-                  </a:lnTo>
-                  <a:lnTo>
-                    <a:pt x="1504073" y="2850393"/>
-                  </a:lnTo>
-                  <a:lnTo>
-                    <a:pt x="1575695" y="2847388"/>
-                  </a:lnTo>
-                  <a:lnTo>
-                    <a:pt x="1647318" y="2844372"/>
-                  </a:lnTo>
-                  <a:lnTo>
-                    <a:pt x="1718940" y="2841344"/>
-                  </a:lnTo>
-                  <a:lnTo>
-                    <a:pt x="1790563" y="2838305"/>
-                  </a:lnTo>
-                  <a:lnTo>
-                    <a:pt x="1862185" y="2835255"/>
-                  </a:lnTo>
-                  <a:lnTo>
-                    <a:pt x="1933808" y="2832194"/>
-                  </a:lnTo>
-                  <a:lnTo>
-                    <a:pt x="2005430" y="2829121"/>
-                  </a:lnTo>
-                  <a:lnTo>
-                    <a:pt x="2077053" y="2826036"/>
-                  </a:lnTo>
-                  <a:lnTo>
-                    <a:pt x="2148675" y="2822940"/>
-                  </a:lnTo>
-                  <a:lnTo>
-                    <a:pt x="2220298" y="2819832"/>
-                  </a:lnTo>
-                  <a:lnTo>
-                    <a:pt x="2291920" y="2816713"/>
-                  </a:lnTo>
-                  <a:lnTo>
-                    <a:pt x="2363543" y="2813582"/>
-                  </a:lnTo>
-                  <a:lnTo>
-                    <a:pt x="2435165" y="2810439"/>
-                  </a:lnTo>
-                  <a:lnTo>
-                    <a:pt x="2506788" y="2807284"/>
-                  </a:lnTo>
-                  <a:lnTo>
-                    <a:pt x="2578410" y="2804118"/>
-                  </a:lnTo>
-                  <a:lnTo>
-                    <a:pt x="2650033" y="2800940"/>
-                  </a:lnTo>
-                  <a:lnTo>
-                    <a:pt x="2721655" y="2797750"/>
-                  </a:lnTo>
-                  <a:lnTo>
-                    <a:pt x="2793278" y="2794548"/>
-                  </a:lnTo>
-                  <a:lnTo>
-                    <a:pt x="2864901" y="2791334"/>
-                  </a:lnTo>
-                  <a:lnTo>
-                    <a:pt x="2936523" y="2788107"/>
-                  </a:lnTo>
-                  <a:lnTo>
-                    <a:pt x="3008146" y="2784869"/>
-                  </a:lnTo>
-                  <a:lnTo>
-                    <a:pt x="3079768" y="2769385"/>
-                  </a:lnTo>
-                  <a:lnTo>
-                    <a:pt x="3151391" y="2735703"/>
-                  </a:lnTo>
-                  <a:lnTo>
-                    <a:pt x="3223013" y="2700736"/>
-                  </a:lnTo>
-                  <a:lnTo>
-                    <a:pt x="3294636" y="2664436"/>
-                  </a:lnTo>
-                  <a:lnTo>
-                    <a:pt x="3366258" y="2626752"/>
-                  </a:lnTo>
-                  <a:lnTo>
-                    <a:pt x="3437881" y="2587631"/>
-                  </a:lnTo>
-                  <a:lnTo>
-                    <a:pt x="3509503" y="2547017"/>
-                  </a:lnTo>
-                  <a:lnTo>
-                    <a:pt x="3581126" y="2504855"/>
-                  </a:lnTo>
-                  <a:lnTo>
-                    <a:pt x="3652748" y="2461085"/>
-                  </a:lnTo>
-                  <a:lnTo>
-                    <a:pt x="3724371" y="2415646"/>
-                  </a:lnTo>
-                  <a:lnTo>
-                    <a:pt x="3795993" y="2368475"/>
-                  </a:lnTo>
-                  <a:lnTo>
-                    <a:pt x="3867616" y="2319504"/>
-                  </a:lnTo>
-                  <a:lnTo>
-                    <a:pt x="3939238" y="2268666"/>
-                  </a:lnTo>
-                  <a:lnTo>
-                    <a:pt x="4010861" y="2215889"/>
-                  </a:lnTo>
-                  <a:lnTo>
-                    <a:pt x="4082483" y="2161100"/>
-                  </a:lnTo>
-                  <a:lnTo>
-                    <a:pt x="4154106" y="2104221"/>
-                  </a:lnTo>
-                  <a:lnTo>
-                    <a:pt x="4225729" y="2045174"/>
-                  </a:lnTo>
-                  <a:lnTo>
-                    <a:pt x="4297351" y="1983874"/>
-                  </a:lnTo>
-                  <a:lnTo>
-                    <a:pt x="4368974" y="1920237"/>
-                  </a:lnTo>
-                  <a:lnTo>
-                    <a:pt x="4440596" y="1854174"/>
-                  </a:lnTo>
-                  <a:lnTo>
-                    <a:pt x="4512219" y="1785591"/>
-                  </a:lnTo>
-                  <a:lnTo>
-                    <a:pt x="4583841" y="1714392"/>
-                  </a:lnTo>
-                  <a:lnTo>
-                    <a:pt x="4655464" y="1640479"/>
-                  </a:lnTo>
-                  <a:lnTo>
-                    <a:pt x="4727086" y="1563747"/>
-                  </a:lnTo>
-                  <a:lnTo>
-                    <a:pt x="4798709" y="1484089"/>
-                  </a:lnTo>
-                  <a:lnTo>
-                    <a:pt x="4870331" y="1401393"/>
-                  </a:lnTo>
-                  <a:lnTo>
-                    <a:pt x="4941954" y="1315544"/>
-                  </a:lnTo>
-                  <a:lnTo>
-                    <a:pt x="5013576" y="1226420"/>
-                  </a:lnTo>
-                  <a:lnTo>
-                    <a:pt x="5085199" y="1133899"/>
-                  </a:lnTo>
-                  <a:lnTo>
-                    <a:pt x="5156821" y="1037849"/>
-                  </a:lnTo>
-                  <a:lnTo>
-                    <a:pt x="5228444" y="938136"/>
-                  </a:lnTo>
-                  <a:lnTo>
-                    <a:pt x="5300066" y="834620"/>
-                  </a:lnTo>
-                  <a:lnTo>
-                    <a:pt x="5371689" y="727158"/>
-                  </a:lnTo>
-                  <a:lnTo>
-                    <a:pt x="5443311" y="615597"/>
-                  </a:lnTo>
-                  <a:lnTo>
-                    <a:pt x="5514934" y="499782"/>
-                  </a:lnTo>
-                  <a:lnTo>
-                    <a:pt x="5586557" y="379551"/>
-                  </a:lnTo>
-                  <a:lnTo>
-                    <a:pt x="5658179" y="254734"/>
-                  </a:lnTo>
-                  <a:lnTo>
-                    <a:pt x="5729802" y="125158"/>
-                  </a:lnTo>
-                  <a:lnTo>
-                    <a:pt x="5796441" y="0"/>
+                    <a:pt x="71622" y="2914359"/>
+                  </a:lnTo>
+                  <a:lnTo>
+                    <a:pt x="143245" y="2911446"/>
+                  </a:lnTo>
+                  <a:lnTo>
+                    <a:pt x="214867" y="2908520"/>
+                  </a:lnTo>
+                  <a:lnTo>
+                    <a:pt x="286490" y="2905584"/>
+                  </a:lnTo>
+                  <a:lnTo>
+                    <a:pt x="358112" y="2902636"/>
+                  </a:lnTo>
+                  <a:lnTo>
+                    <a:pt x="429735" y="2899676"/>
+                  </a:lnTo>
+                  <a:lnTo>
+                    <a:pt x="501357" y="2896704"/>
+                  </a:lnTo>
+                  <a:lnTo>
+                    <a:pt x="572980" y="2893721"/>
+                  </a:lnTo>
+                  <a:lnTo>
+                    <a:pt x="644602" y="2890726"/>
+                  </a:lnTo>
+                  <a:lnTo>
+                    <a:pt x="716225" y="2887719"/>
+                  </a:lnTo>
+                  <a:lnTo>
+                    <a:pt x="787847" y="2884700"/>
+                  </a:lnTo>
+                  <a:lnTo>
+                    <a:pt x="859470" y="2881670"/>
+                  </a:lnTo>
+                  <a:lnTo>
+                    <a:pt x="931092" y="2878627"/>
+                  </a:lnTo>
+                  <a:lnTo>
+                    <a:pt x="1002715" y="2875572"/>
+                  </a:lnTo>
+                  <a:lnTo>
+                    <a:pt x="1074337" y="2872506"/>
+                  </a:lnTo>
+                  <a:lnTo>
+                    <a:pt x="1145960" y="2869427"/>
+                  </a:lnTo>
+                  <a:lnTo>
+                    <a:pt x="1217582" y="2866336"/>
+                  </a:lnTo>
+                  <a:lnTo>
+                    <a:pt x="1289205" y="2863233"/>
+                  </a:lnTo>
+                  <a:lnTo>
+                    <a:pt x="1360827" y="2860118"/>
+                  </a:lnTo>
+                  <a:lnTo>
+                    <a:pt x="1432450" y="2856990"/>
+                  </a:lnTo>
+                  <a:lnTo>
+                    <a:pt x="1504073" y="2853850"/>
+                  </a:lnTo>
+                  <a:lnTo>
+                    <a:pt x="1575695" y="2850698"/>
+                  </a:lnTo>
+                  <a:lnTo>
+                    <a:pt x="1647318" y="2847533"/>
+                  </a:lnTo>
+                  <a:lnTo>
+                    <a:pt x="1718940" y="2844356"/>
+                  </a:lnTo>
+                  <a:lnTo>
+                    <a:pt x="1790563" y="2841166"/>
+                  </a:lnTo>
+                  <a:lnTo>
+                    <a:pt x="1862185" y="2837963"/>
+                  </a:lnTo>
+                  <a:lnTo>
+                    <a:pt x="1933808" y="2834748"/>
+                  </a:lnTo>
+                  <a:lnTo>
+                    <a:pt x="2005430" y="2831520"/>
+                  </a:lnTo>
+                  <a:lnTo>
+                    <a:pt x="2077053" y="2828280"/>
+                  </a:lnTo>
+                  <a:lnTo>
+                    <a:pt x="2148675" y="2825027"/>
+                  </a:lnTo>
+                  <a:lnTo>
+                    <a:pt x="2220298" y="2821760"/>
+                  </a:lnTo>
+                  <a:lnTo>
+                    <a:pt x="2291920" y="2818481"/>
+                  </a:lnTo>
+                  <a:lnTo>
+                    <a:pt x="2363543" y="2815190"/>
+                  </a:lnTo>
+                  <a:lnTo>
+                    <a:pt x="2435165" y="2811885"/>
+                  </a:lnTo>
+                  <a:lnTo>
+                    <a:pt x="2506788" y="2808567"/>
+                  </a:lnTo>
+                  <a:lnTo>
+                    <a:pt x="2578410" y="2805235"/>
+                  </a:lnTo>
+                  <a:lnTo>
+                    <a:pt x="2650033" y="2801891"/>
+                  </a:lnTo>
+                  <a:lnTo>
+                    <a:pt x="2721655" y="2798534"/>
+                  </a:lnTo>
+                  <a:lnTo>
+                    <a:pt x="2793278" y="2795163"/>
+                  </a:lnTo>
+                  <a:lnTo>
+                    <a:pt x="2864901" y="2791779"/>
+                  </a:lnTo>
+                  <a:lnTo>
+                    <a:pt x="2936523" y="2788382"/>
+                  </a:lnTo>
+                  <a:lnTo>
+                    <a:pt x="3008146" y="2784971"/>
+                  </a:lnTo>
+                  <a:lnTo>
+                    <a:pt x="3079768" y="2769649"/>
+                  </a:lnTo>
+                  <a:lnTo>
+                    <a:pt x="3151391" y="2736638"/>
+                  </a:lnTo>
+                  <a:lnTo>
+                    <a:pt x="3223013" y="2702392"/>
+                  </a:lnTo>
+                  <a:lnTo>
+                    <a:pt x="3294636" y="2666867"/>
+                  </a:lnTo>
+                  <a:lnTo>
+                    <a:pt x="3366258" y="2630013"/>
+                  </a:lnTo>
+                  <a:lnTo>
+                    <a:pt x="3437881" y="2591781"/>
+                  </a:lnTo>
+                  <a:lnTo>
+                    <a:pt x="3509503" y="2552120"/>
+                  </a:lnTo>
+                  <a:lnTo>
+                    <a:pt x="3581126" y="2510977"/>
+                  </a:lnTo>
+                  <a:lnTo>
+                    <a:pt x="3652748" y="2468295"/>
+                  </a:lnTo>
+                  <a:lnTo>
+                    <a:pt x="3724371" y="2424017"/>
+                  </a:lnTo>
+                  <a:lnTo>
+                    <a:pt x="3795993" y="2378084"/>
+                  </a:lnTo>
+                  <a:lnTo>
+                    <a:pt x="3867616" y="2330434"/>
+                  </a:lnTo>
+                  <a:lnTo>
+                    <a:pt x="3939238" y="2281003"/>
+                  </a:lnTo>
+                  <a:lnTo>
+                    <a:pt x="4010861" y="2229723"/>
+                  </a:lnTo>
+                  <a:lnTo>
+                    <a:pt x="4082483" y="2176526"/>
+                  </a:lnTo>
+                  <a:lnTo>
+                    <a:pt x="4154106" y="2121341"/>
+                  </a:lnTo>
+                  <a:lnTo>
+                    <a:pt x="4225729" y="2064092"/>
+                  </a:lnTo>
+                  <a:lnTo>
+                    <a:pt x="4297351" y="2004703"/>
+                  </a:lnTo>
+                  <a:lnTo>
+                    <a:pt x="4368974" y="1943094"/>
+                  </a:lnTo>
+                  <a:lnTo>
+                    <a:pt x="4440596" y="1879181"/>
+                  </a:lnTo>
+                  <a:lnTo>
+                    <a:pt x="4512219" y="1812880"/>
+                  </a:lnTo>
+                  <a:lnTo>
+                    <a:pt x="4583841" y="1744099"/>
+                  </a:lnTo>
+                  <a:lnTo>
+                    <a:pt x="4655464" y="1672747"/>
+                  </a:lnTo>
+                  <a:lnTo>
+                    <a:pt x="4727086" y="1598727"/>
+                  </a:lnTo>
+                  <a:lnTo>
+                    <a:pt x="4798709" y="1521940"/>
+                  </a:lnTo>
+                  <a:lnTo>
+                    <a:pt x="4870331" y="1442283"/>
+                  </a:lnTo>
+                  <a:lnTo>
+                    <a:pt x="4941954" y="1359647"/>
+                  </a:lnTo>
+                  <a:lnTo>
+                    <a:pt x="5013576" y="1273922"/>
+                  </a:lnTo>
+                  <a:lnTo>
+                    <a:pt x="5085199" y="1184992"/>
+                  </a:lnTo>
+                  <a:lnTo>
+                    <a:pt x="5156821" y="1092738"/>
+                  </a:lnTo>
+                  <a:lnTo>
+                    <a:pt x="5228444" y="997034"/>
+                  </a:lnTo>
+                  <a:lnTo>
+                    <a:pt x="5300066" y="897753"/>
+                  </a:lnTo>
+                  <a:lnTo>
+                    <a:pt x="5371689" y="794759"/>
+                  </a:lnTo>
+                  <a:lnTo>
+                    <a:pt x="5443311" y="687916"/>
+                  </a:lnTo>
+                  <a:lnTo>
+                    <a:pt x="5514934" y="577078"/>
+                  </a:lnTo>
+                  <a:lnTo>
+                    <a:pt x="5586557" y="462096"/>
+                  </a:lnTo>
+                  <a:lnTo>
+                    <a:pt x="5658179" y="342815"/>
+                  </a:lnTo>
+                  <a:lnTo>
+                    <a:pt x="5729802" y="219075"/>
+                  </a:lnTo>
+                  <a:lnTo>
+                    <a:pt x="5801424" y="90709"/>
+                  </a:lnTo>
+                  <a:lnTo>
+                    <a:pt x="5850212" y="0"/>
                   </a:lnTo>
                 </a:path>
               </a:pathLst>
@@ -3982,312 +3988,312 @@
           </p:nvSpPr>
           <p:spPr>
             <a:xfrm>
-              <a:off x="1172049" y="4475330"/>
-              <a:ext cx="7090630" cy="897196"/>
+              <a:off x="1172049" y="4463140"/>
+              <a:ext cx="7090630" cy="903874"/>
             </a:xfrm>
             <a:custGeom>
               <a:avLst/>
               <a:pathLst>
-                <a:path w="7090630" h="897196">
+                <a:path w="7090630" h="903874">
                   <a:moveTo>
                     <a:pt x="7090630" y="0"/>
                   </a:moveTo>
                   <a:lnTo>
-                    <a:pt x="7019007" y="4007"/>
-                  </a:lnTo>
-                  <a:lnTo>
-                    <a:pt x="6947385" y="7999"/>
-                  </a:lnTo>
-                  <a:lnTo>
-                    <a:pt x="6875762" y="11977"/>
-                  </a:lnTo>
-                  <a:lnTo>
-                    <a:pt x="6804139" y="15939"/>
-                  </a:lnTo>
-                  <a:lnTo>
-                    <a:pt x="6732517" y="19887"/>
-                  </a:lnTo>
-                  <a:lnTo>
-                    <a:pt x="6660894" y="23820"/>
-                  </a:lnTo>
-                  <a:lnTo>
-                    <a:pt x="6589272" y="27738"/>
-                  </a:lnTo>
-                  <a:lnTo>
-                    <a:pt x="6517649" y="31642"/>
-                  </a:lnTo>
-                  <a:lnTo>
-                    <a:pt x="6446027" y="35531"/>
-                  </a:lnTo>
-                  <a:lnTo>
-                    <a:pt x="6374404" y="39406"/>
-                  </a:lnTo>
-                  <a:lnTo>
-                    <a:pt x="6302782" y="43266"/>
-                  </a:lnTo>
-                  <a:lnTo>
-                    <a:pt x="6231159" y="47112"/>
-                  </a:lnTo>
-                  <a:lnTo>
-                    <a:pt x="6159537" y="50944"/>
-                  </a:lnTo>
-                  <a:lnTo>
-                    <a:pt x="6087914" y="54761"/>
-                  </a:lnTo>
-                  <a:lnTo>
-                    <a:pt x="6016292" y="58564"/>
-                  </a:lnTo>
-                  <a:lnTo>
-                    <a:pt x="5944669" y="62352"/>
-                  </a:lnTo>
-                  <a:lnTo>
-                    <a:pt x="5873047" y="66127"/>
-                  </a:lnTo>
-                  <a:lnTo>
-                    <a:pt x="5801424" y="69888"/>
-                  </a:lnTo>
-                  <a:lnTo>
-                    <a:pt x="5729802" y="73634"/>
-                  </a:lnTo>
-                  <a:lnTo>
-                    <a:pt x="5658179" y="77367"/>
-                  </a:lnTo>
-                  <a:lnTo>
-                    <a:pt x="5586557" y="81085"/>
-                  </a:lnTo>
-                  <a:lnTo>
-                    <a:pt x="5514934" y="84790"/>
-                  </a:lnTo>
-                  <a:lnTo>
-                    <a:pt x="5443311" y="88481"/>
-                  </a:lnTo>
-                  <a:lnTo>
-                    <a:pt x="5371689" y="92158"/>
-                  </a:lnTo>
-                  <a:lnTo>
-                    <a:pt x="5300066" y="95821"/>
-                  </a:lnTo>
-                  <a:lnTo>
-                    <a:pt x="5228444" y="99471"/>
-                  </a:lnTo>
-                  <a:lnTo>
-                    <a:pt x="5156821" y="103107"/>
-                  </a:lnTo>
-                  <a:lnTo>
-                    <a:pt x="5085199" y="106730"/>
-                  </a:lnTo>
-                  <a:lnTo>
-                    <a:pt x="5013576" y="110339"/>
-                  </a:lnTo>
-                  <a:lnTo>
-                    <a:pt x="4941954" y="113934"/>
-                  </a:lnTo>
-                  <a:lnTo>
-                    <a:pt x="4870331" y="117516"/>
-                  </a:lnTo>
-                  <a:lnTo>
-                    <a:pt x="4798709" y="121085"/>
-                  </a:lnTo>
-                  <a:lnTo>
-                    <a:pt x="4727086" y="124640"/>
-                  </a:lnTo>
-                  <a:lnTo>
-                    <a:pt x="4655464" y="128183"/>
-                  </a:lnTo>
-                  <a:lnTo>
-                    <a:pt x="4583841" y="131712"/>
-                  </a:lnTo>
-                  <a:lnTo>
-                    <a:pt x="4512219" y="135227"/>
-                  </a:lnTo>
-                  <a:lnTo>
-                    <a:pt x="4440596" y="138730"/>
-                  </a:lnTo>
-                  <a:lnTo>
-                    <a:pt x="4368974" y="142220"/>
-                  </a:lnTo>
-                  <a:lnTo>
-                    <a:pt x="4297351" y="145696"/>
-                  </a:lnTo>
-                  <a:lnTo>
-                    <a:pt x="4225729" y="149160"/>
-                  </a:lnTo>
-                  <a:lnTo>
-                    <a:pt x="4154106" y="152610"/>
-                  </a:lnTo>
-                  <a:lnTo>
-                    <a:pt x="4082483" y="156048"/>
-                  </a:lnTo>
-                  <a:lnTo>
-                    <a:pt x="4010861" y="159473"/>
-                  </a:lnTo>
-                  <a:lnTo>
-                    <a:pt x="3939238" y="162885"/>
-                  </a:lnTo>
-                  <a:lnTo>
-                    <a:pt x="3867616" y="166285"/>
-                  </a:lnTo>
-                  <a:lnTo>
-                    <a:pt x="3795993" y="169672"/>
-                  </a:lnTo>
-                  <a:lnTo>
-                    <a:pt x="3724371" y="173046"/>
-                  </a:lnTo>
-                  <a:lnTo>
-                    <a:pt x="3652748" y="176407"/>
-                  </a:lnTo>
-                  <a:lnTo>
-                    <a:pt x="3581126" y="179756"/>
-                  </a:lnTo>
-                  <a:lnTo>
-                    <a:pt x="3509503" y="183093"/>
-                  </a:lnTo>
-                  <a:lnTo>
-                    <a:pt x="3437881" y="186417"/>
-                  </a:lnTo>
-                  <a:lnTo>
-                    <a:pt x="3366258" y="189729"/>
-                  </a:lnTo>
-                  <a:lnTo>
-                    <a:pt x="3294636" y="193028"/>
-                  </a:lnTo>
-                  <a:lnTo>
-                    <a:pt x="3223013" y="196315"/>
-                  </a:lnTo>
-                  <a:lnTo>
-                    <a:pt x="3151391" y="199589"/>
-                  </a:lnTo>
-                  <a:lnTo>
-                    <a:pt x="3079768" y="202852"/>
-                  </a:lnTo>
-                  <a:lnTo>
-                    <a:pt x="3008146" y="223063"/>
-                  </a:lnTo>
-                  <a:lnTo>
-                    <a:pt x="2936523" y="254317"/>
-                  </a:lnTo>
-                  <a:lnTo>
-                    <a:pt x="2864901" y="284422"/>
-                  </a:lnTo>
-                  <a:lnTo>
-                    <a:pt x="2793278" y="313421"/>
-                  </a:lnTo>
-                  <a:lnTo>
-                    <a:pt x="2721655" y="341355"/>
-                  </a:lnTo>
-                  <a:lnTo>
-                    <a:pt x="2650033" y="368263"/>
-                  </a:lnTo>
-                  <a:lnTo>
-                    <a:pt x="2578410" y="394182"/>
-                  </a:lnTo>
-                  <a:lnTo>
-                    <a:pt x="2506788" y="419150"/>
-                  </a:lnTo>
-                  <a:lnTo>
-                    <a:pt x="2435165" y="443200"/>
-                  </a:lnTo>
-                  <a:lnTo>
-                    <a:pt x="2363543" y="466367"/>
-                  </a:lnTo>
-                  <a:lnTo>
-                    <a:pt x="2291920" y="488683"/>
-                  </a:lnTo>
-                  <a:lnTo>
-                    <a:pt x="2220298" y="510179"/>
-                  </a:lnTo>
-                  <a:lnTo>
-                    <a:pt x="2148675" y="530885"/>
-                  </a:lnTo>
-                  <a:lnTo>
-                    <a:pt x="2077053" y="550831"/>
-                  </a:lnTo>
-                  <a:lnTo>
-                    <a:pt x="2005430" y="570044"/>
-                  </a:lnTo>
-                  <a:lnTo>
-                    <a:pt x="1933808" y="588552"/>
-                  </a:lnTo>
-                  <a:lnTo>
-                    <a:pt x="1862185" y="606379"/>
-                  </a:lnTo>
-                  <a:lnTo>
-                    <a:pt x="1790563" y="623552"/>
-                  </a:lnTo>
-                  <a:lnTo>
-                    <a:pt x="1718940" y="640094"/>
-                  </a:lnTo>
-                  <a:lnTo>
-                    <a:pt x="1647318" y="656028"/>
-                  </a:lnTo>
-                  <a:lnTo>
-                    <a:pt x="1575695" y="671377"/>
-                  </a:lnTo>
-                  <a:lnTo>
-                    <a:pt x="1504073" y="686162"/>
-                  </a:lnTo>
-                  <a:lnTo>
-                    <a:pt x="1432450" y="700404"/>
-                  </a:lnTo>
-                  <a:lnTo>
-                    <a:pt x="1360827" y="714123"/>
-                  </a:lnTo>
-                  <a:lnTo>
-                    <a:pt x="1289205" y="727338"/>
-                  </a:lnTo>
-                  <a:lnTo>
-                    <a:pt x="1217582" y="740067"/>
-                  </a:lnTo>
-                  <a:lnTo>
-                    <a:pt x="1145960" y="752329"/>
-                  </a:lnTo>
-                  <a:lnTo>
-                    <a:pt x="1074337" y="764141"/>
-                  </a:lnTo>
-                  <a:lnTo>
-                    <a:pt x="1002715" y="775518"/>
-                  </a:lnTo>
-                  <a:lnTo>
-                    <a:pt x="931092" y="786478"/>
-                  </a:lnTo>
-                  <a:lnTo>
-                    <a:pt x="859470" y="797035"/>
-                  </a:lnTo>
-                  <a:lnTo>
-                    <a:pt x="787847" y="807205"/>
-                  </a:lnTo>
-                  <a:lnTo>
-                    <a:pt x="716225" y="817000"/>
-                  </a:lnTo>
-                  <a:lnTo>
-                    <a:pt x="644602" y="826436"/>
-                  </a:lnTo>
-                  <a:lnTo>
-                    <a:pt x="572980" y="835525"/>
-                  </a:lnTo>
-                  <a:lnTo>
-                    <a:pt x="501357" y="844281"/>
-                  </a:lnTo>
-                  <a:lnTo>
-                    <a:pt x="429735" y="852715"/>
-                  </a:lnTo>
-                  <a:lnTo>
-                    <a:pt x="358112" y="860839"/>
-                  </a:lnTo>
-                  <a:lnTo>
-                    <a:pt x="286490" y="868664"/>
-                  </a:lnTo>
-                  <a:lnTo>
-                    <a:pt x="214867" y="876202"/>
-                  </a:lnTo>
-                  <a:lnTo>
-                    <a:pt x="143245" y="883464"/>
-                  </a:lnTo>
-                  <a:lnTo>
-                    <a:pt x="71622" y="890458"/>
-                  </a:lnTo>
-                  <a:lnTo>
-                    <a:pt x="0" y="897196"/>
+                    <a:pt x="7019007" y="4269"/>
+                  </a:lnTo>
+                  <a:lnTo>
+                    <a:pt x="6947385" y="8521"/>
+                  </a:lnTo>
+                  <a:lnTo>
+                    <a:pt x="6875762" y="12757"/>
+                  </a:lnTo>
+                  <a:lnTo>
+                    <a:pt x="6804139" y="16976"/>
+                  </a:lnTo>
+                  <a:lnTo>
+                    <a:pt x="6732517" y="21179"/>
+                  </a:lnTo>
+                  <a:lnTo>
+                    <a:pt x="6660894" y="25365"/>
+                  </a:lnTo>
+                  <a:lnTo>
+                    <a:pt x="6589272" y="29534"/>
+                  </a:lnTo>
+                  <a:lnTo>
+                    <a:pt x="6517649" y="33687"/>
+                  </a:lnTo>
+                  <a:lnTo>
+                    <a:pt x="6446027" y="37824"/>
+                  </a:lnTo>
+                  <a:lnTo>
+                    <a:pt x="6374404" y="41945"/>
+                  </a:lnTo>
+                  <a:lnTo>
+                    <a:pt x="6302782" y="46049"/>
+                  </a:lnTo>
+                  <a:lnTo>
+                    <a:pt x="6231159" y="50137"/>
+                  </a:lnTo>
+                  <a:lnTo>
+                    <a:pt x="6159537" y="54209"/>
+                  </a:lnTo>
+                  <a:lnTo>
+                    <a:pt x="6087914" y="58265"/>
+                  </a:lnTo>
+                  <a:lnTo>
+                    <a:pt x="6016292" y="62306"/>
+                  </a:lnTo>
+                  <a:lnTo>
+                    <a:pt x="5944669" y="66330"/>
+                  </a:lnTo>
+                  <a:lnTo>
+                    <a:pt x="5873047" y="70338"/>
+                  </a:lnTo>
+                  <a:lnTo>
+                    <a:pt x="5801424" y="74331"/>
+                  </a:lnTo>
+                  <a:lnTo>
+                    <a:pt x="5729802" y="78308"/>
+                  </a:lnTo>
+                  <a:lnTo>
+                    <a:pt x="5658179" y="82270"/>
+                  </a:lnTo>
+                  <a:lnTo>
+                    <a:pt x="5586557" y="86215"/>
+                  </a:lnTo>
+                  <a:lnTo>
+                    <a:pt x="5514934" y="90146"/>
+                  </a:lnTo>
+                  <a:lnTo>
+                    <a:pt x="5443311" y="94061"/>
+                  </a:lnTo>
+                  <a:lnTo>
+                    <a:pt x="5371689" y="97960"/>
+                  </a:lnTo>
+                  <a:lnTo>
+                    <a:pt x="5300066" y="101844"/>
+                  </a:lnTo>
+                  <a:lnTo>
+                    <a:pt x="5228444" y="105713"/>
+                  </a:lnTo>
+                  <a:lnTo>
+                    <a:pt x="5156821" y="109567"/>
+                  </a:lnTo>
+                  <a:lnTo>
+                    <a:pt x="5085199" y="113405"/>
+                  </a:lnTo>
+                  <a:lnTo>
+                    <a:pt x="5013576" y="117229"/>
+                  </a:lnTo>
+                  <a:lnTo>
+                    <a:pt x="4941954" y="121037"/>
+                  </a:lnTo>
+                  <a:lnTo>
+                    <a:pt x="4870331" y="124831"/>
+                  </a:lnTo>
+                  <a:lnTo>
+                    <a:pt x="4798709" y="128609"/>
+                  </a:lnTo>
+                  <a:lnTo>
+                    <a:pt x="4727086" y="132373"/>
+                  </a:lnTo>
+                  <a:lnTo>
+                    <a:pt x="4655464" y="136122"/>
+                  </a:lnTo>
+                  <a:lnTo>
+                    <a:pt x="4583841" y="139856"/>
+                  </a:lnTo>
+                  <a:lnTo>
+                    <a:pt x="4512219" y="143576"/>
+                  </a:lnTo>
+                  <a:lnTo>
+                    <a:pt x="4440596" y="147280"/>
+                  </a:lnTo>
+                  <a:lnTo>
+                    <a:pt x="4368974" y="150971"/>
+                  </a:lnTo>
+                  <a:lnTo>
+                    <a:pt x="4297351" y="154646"/>
+                  </a:lnTo>
+                  <a:lnTo>
+                    <a:pt x="4225729" y="158308"/>
+                  </a:lnTo>
+                  <a:lnTo>
+                    <a:pt x="4154106" y="161955"/>
+                  </a:lnTo>
+                  <a:lnTo>
+                    <a:pt x="4082483" y="165587"/>
+                  </a:lnTo>
+                  <a:lnTo>
+                    <a:pt x="4010861" y="169206"/>
+                  </a:lnTo>
+                  <a:lnTo>
+                    <a:pt x="3939238" y="172810"/>
+                  </a:lnTo>
+                  <a:lnTo>
+                    <a:pt x="3867616" y="176400"/>
+                  </a:lnTo>
+                  <a:lnTo>
+                    <a:pt x="3795993" y="179976"/>
+                  </a:lnTo>
+                  <a:lnTo>
+                    <a:pt x="3724371" y="183537"/>
+                  </a:lnTo>
+                  <a:lnTo>
+                    <a:pt x="3652748" y="187085"/>
+                  </a:lnTo>
+                  <a:lnTo>
+                    <a:pt x="3581126" y="190619"/>
+                  </a:lnTo>
+                  <a:lnTo>
+                    <a:pt x="3509503" y="194139"/>
+                  </a:lnTo>
+                  <a:lnTo>
+                    <a:pt x="3437881" y="197645"/>
+                  </a:lnTo>
+                  <a:lnTo>
+                    <a:pt x="3366258" y="201137"/>
+                  </a:lnTo>
+                  <a:lnTo>
+                    <a:pt x="3294636" y="204616"/>
+                  </a:lnTo>
+                  <a:lnTo>
+                    <a:pt x="3223013" y="208081"/>
+                  </a:lnTo>
+                  <a:lnTo>
+                    <a:pt x="3151391" y="211532"/>
+                  </a:lnTo>
+                  <a:lnTo>
+                    <a:pt x="3079768" y="214970"/>
+                  </a:lnTo>
+                  <a:lnTo>
+                    <a:pt x="3008146" y="234894"/>
+                  </a:lnTo>
+                  <a:lnTo>
+                    <a:pt x="2936523" y="265568"/>
+                  </a:lnTo>
+                  <a:lnTo>
+                    <a:pt x="2864901" y="295138"/>
+                  </a:lnTo>
+                  <a:lnTo>
+                    <a:pt x="2793278" y="323641"/>
+                  </a:lnTo>
+                  <a:lnTo>
+                    <a:pt x="2721655" y="351118"/>
+                  </a:lnTo>
+                  <a:lnTo>
+                    <a:pt x="2650033" y="377604"/>
+                  </a:lnTo>
+                  <a:lnTo>
+                    <a:pt x="2578410" y="403136"/>
+                  </a:lnTo>
+                  <a:lnTo>
+                    <a:pt x="2506788" y="427748"/>
+                  </a:lnTo>
+                  <a:lnTo>
+                    <a:pt x="2435165" y="451472"/>
+                  </a:lnTo>
+                  <a:lnTo>
+                    <a:pt x="2363543" y="474342"/>
+                  </a:lnTo>
+                  <a:lnTo>
+                    <a:pt x="2291920" y="496387"/>
+                  </a:lnTo>
+                  <a:lnTo>
+                    <a:pt x="2220298" y="517638"/>
+                  </a:lnTo>
+                  <a:lnTo>
+                    <a:pt x="2148675" y="538124"/>
+                  </a:lnTo>
+                  <a:lnTo>
+                    <a:pt x="2077053" y="557870"/>
+                  </a:lnTo>
+                  <a:lnTo>
+                    <a:pt x="2005430" y="576906"/>
+                  </a:lnTo>
+                  <a:lnTo>
+                    <a:pt x="1933808" y="595255"/>
+                  </a:lnTo>
+                  <a:lnTo>
+                    <a:pt x="1862185" y="612943"/>
+                  </a:lnTo>
+                  <a:lnTo>
+                    <a:pt x="1790563" y="629994"/>
+                  </a:lnTo>
+                  <a:lnTo>
+                    <a:pt x="1718940" y="646430"/>
+                  </a:lnTo>
+                  <a:lnTo>
+                    <a:pt x="1647318" y="662273"/>
+                  </a:lnTo>
+                  <a:lnTo>
+                    <a:pt x="1575695" y="677546"/>
+                  </a:lnTo>
+                  <a:lnTo>
+                    <a:pt x="1504073" y="692268"/>
+                  </a:lnTo>
+                  <a:lnTo>
+                    <a:pt x="1432450" y="706460"/>
+                  </a:lnTo>
+                  <a:lnTo>
+                    <a:pt x="1360827" y="720141"/>
+                  </a:lnTo>
+                  <a:lnTo>
+                    <a:pt x="1289205" y="733328"/>
+                  </a:lnTo>
+                  <a:lnTo>
+                    <a:pt x="1217582" y="746040"/>
+                  </a:lnTo>
+                  <a:lnTo>
+                    <a:pt x="1145960" y="758294"/>
+                  </a:lnTo>
+                  <a:lnTo>
+                    <a:pt x="1074337" y="770106"/>
+                  </a:lnTo>
+                  <a:lnTo>
+                    <a:pt x="1002715" y="781493"/>
+                  </a:lnTo>
+                  <a:lnTo>
+                    <a:pt x="931092" y="792469"/>
+                  </a:lnTo>
+                  <a:lnTo>
+                    <a:pt x="859470" y="803050"/>
+                  </a:lnTo>
+                  <a:lnTo>
+                    <a:pt x="787847" y="813249"/>
+                  </a:lnTo>
+                  <a:lnTo>
+                    <a:pt x="716225" y="823081"/>
+                  </a:lnTo>
+                  <a:lnTo>
+                    <a:pt x="644602" y="832559"/>
+                  </a:lnTo>
+                  <a:lnTo>
+                    <a:pt x="572980" y="841695"/>
+                  </a:lnTo>
+                  <a:lnTo>
+                    <a:pt x="501357" y="850501"/>
+                  </a:lnTo>
+                  <a:lnTo>
+                    <a:pt x="429735" y="858991"/>
+                  </a:lnTo>
+                  <a:lnTo>
+                    <a:pt x="358112" y="867174"/>
+                  </a:lnTo>
+                  <a:lnTo>
+                    <a:pt x="286490" y="875063"/>
+                  </a:lnTo>
+                  <a:lnTo>
+                    <a:pt x="214867" y="882667"/>
+                  </a:lnTo>
+                  <a:lnTo>
+                    <a:pt x="143245" y="889997"/>
+                  </a:lnTo>
+                  <a:lnTo>
+                    <a:pt x="71622" y="897063"/>
+                  </a:lnTo>
+                  <a:lnTo>
+                    <a:pt x="0" y="903874"/>
                   </a:lnTo>
                 </a:path>
               </a:pathLst>
@@ -4307,309 +4313,309 @@
           </p:nvSpPr>
           <p:spPr>
             <a:xfrm>
-              <a:off x="1172049" y="2771940"/>
-              <a:ext cx="7090630" cy="2415272"/>
+              <a:off x="1172049" y="2812470"/>
+              <a:ext cx="7090630" cy="2370703"/>
             </a:xfrm>
             <a:custGeom>
               <a:avLst/>
               <a:pathLst>
-                <a:path w="7090630" h="2415272">
+                <a:path w="7090630" h="2370703">
                   <a:moveTo>
-                    <a:pt x="0" y="2415272"/>
+                    <a:pt x="0" y="2370703"/>
                   </a:moveTo>
                   <a:lnTo>
-                    <a:pt x="71622" y="2407745"/>
-                  </a:lnTo>
-                  <a:lnTo>
-                    <a:pt x="143245" y="2400061"/>
-                  </a:lnTo>
-                  <a:lnTo>
-                    <a:pt x="214867" y="2392217"/>
-                  </a:lnTo>
-                  <a:lnTo>
-                    <a:pt x="286490" y="2384209"/>
-                  </a:lnTo>
-                  <a:lnTo>
-                    <a:pt x="358112" y="2376036"/>
-                  </a:lnTo>
-                  <a:lnTo>
-                    <a:pt x="429735" y="2367692"/>
-                  </a:lnTo>
-                  <a:lnTo>
-                    <a:pt x="501357" y="2359175"/>
-                  </a:lnTo>
-                  <a:lnTo>
-                    <a:pt x="572980" y="2350481"/>
-                  </a:lnTo>
-                  <a:lnTo>
-                    <a:pt x="644602" y="2341606"/>
-                  </a:lnTo>
-                  <a:lnTo>
-                    <a:pt x="716225" y="2332546"/>
-                  </a:lnTo>
-                  <a:lnTo>
-                    <a:pt x="787847" y="2323298"/>
-                  </a:lnTo>
-                  <a:lnTo>
-                    <a:pt x="859470" y="2313858"/>
-                  </a:lnTo>
-                  <a:lnTo>
-                    <a:pt x="931092" y="2304221"/>
-                  </a:lnTo>
-                  <a:lnTo>
-                    <a:pt x="1002715" y="2294384"/>
-                  </a:lnTo>
-                  <a:lnTo>
-                    <a:pt x="1074337" y="2284343"/>
-                  </a:lnTo>
-                  <a:lnTo>
-                    <a:pt x="1145960" y="2274093"/>
-                  </a:lnTo>
-                  <a:lnTo>
-                    <a:pt x="1217582" y="2263629"/>
-                  </a:lnTo>
-                  <a:lnTo>
-                    <a:pt x="1289205" y="2252948"/>
-                  </a:lnTo>
-                  <a:lnTo>
-                    <a:pt x="1360827" y="2242045"/>
-                  </a:lnTo>
-                  <a:lnTo>
-                    <a:pt x="1432450" y="2230915"/>
-                  </a:lnTo>
-                  <a:lnTo>
-                    <a:pt x="1504073" y="2219553"/>
-                  </a:lnTo>
-                  <a:lnTo>
-                    <a:pt x="1575695" y="2207956"/>
-                  </a:lnTo>
-                  <a:lnTo>
-                    <a:pt x="1647318" y="2196117"/>
-                  </a:lnTo>
-                  <a:lnTo>
-                    <a:pt x="1718940" y="2184032"/>
-                  </a:lnTo>
-                  <a:lnTo>
-                    <a:pt x="1790563" y="2171696"/>
-                  </a:lnTo>
-                  <a:lnTo>
-                    <a:pt x="1862185" y="2159103"/>
-                  </a:lnTo>
-                  <a:lnTo>
-                    <a:pt x="1933808" y="2146248"/>
-                  </a:lnTo>
-                  <a:lnTo>
-                    <a:pt x="2005430" y="2133126"/>
-                  </a:lnTo>
-                  <a:lnTo>
-                    <a:pt x="2077053" y="2119731"/>
-                  </a:lnTo>
-                  <a:lnTo>
-                    <a:pt x="2148675" y="2106057"/>
-                  </a:lnTo>
-                  <a:lnTo>
-                    <a:pt x="2220298" y="2092100"/>
-                  </a:lnTo>
-                  <a:lnTo>
-                    <a:pt x="2291920" y="2077852"/>
-                  </a:lnTo>
-                  <a:lnTo>
-                    <a:pt x="2363543" y="2063307"/>
-                  </a:lnTo>
-                  <a:lnTo>
-                    <a:pt x="2435165" y="2048460"/>
-                  </a:lnTo>
-                  <a:lnTo>
-                    <a:pt x="2506788" y="2033305"/>
-                  </a:lnTo>
-                  <a:lnTo>
-                    <a:pt x="2578410" y="2017834"/>
-                  </a:lnTo>
-                  <a:lnTo>
-                    <a:pt x="2650033" y="2002042"/>
-                  </a:lnTo>
-                  <a:lnTo>
-                    <a:pt x="2721655" y="1985921"/>
-                  </a:lnTo>
-                  <a:lnTo>
-                    <a:pt x="2793278" y="1969465"/>
-                  </a:lnTo>
-                  <a:lnTo>
-                    <a:pt x="2864901" y="1952667"/>
-                  </a:lnTo>
-                  <a:lnTo>
-                    <a:pt x="2936523" y="1935519"/>
-                  </a:lnTo>
-                  <a:lnTo>
-                    <a:pt x="3008146" y="1918015"/>
-                  </a:lnTo>
-                  <a:lnTo>
-                    <a:pt x="3079768" y="1900147"/>
-                  </a:lnTo>
-                  <a:lnTo>
-                    <a:pt x="3151391" y="1881907"/>
-                  </a:lnTo>
-                  <a:lnTo>
-                    <a:pt x="3223013" y="1863288"/>
-                  </a:lnTo>
-                  <a:lnTo>
-                    <a:pt x="3294636" y="1844282"/>
-                  </a:lnTo>
-                  <a:lnTo>
-                    <a:pt x="3366258" y="1824880"/>
-                  </a:lnTo>
-                  <a:lnTo>
-                    <a:pt x="3437881" y="1805075"/>
-                  </a:lnTo>
-                  <a:lnTo>
-                    <a:pt x="3509503" y="1784859"/>
-                  </a:lnTo>
-                  <a:lnTo>
-                    <a:pt x="3581126" y="1764221"/>
-                  </a:lnTo>
-                  <a:lnTo>
-                    <a:pt x="3652748" y="1743155"/>
-                  </a:lnTo>
-                  <a:lnTo>
-                    <a:pt x="3724371" y="1721651"/>
-                  </a:lnTo>
-                  <a:lnTo>
-                    <a:pt x="3795993" y="1699699"/>
-                  </a:lnTo>
-                  <a:lnTo>
-                    <a:pt x="3867616" y="1677291"/>
-                  </a:lnTo>
-                  <a:lnTo>
-                    <a:pt x="3939238" y="1654417"/>
-                  </a:lnTo>
-                  <a:lnTo>
-                    <a:pt x="4010861" y="1631067"/>
-                  </a:lnTo>
-                  <a:lnTo>
-                    <a:pt x="4082483" y="1607232"/>
-                  </a:lnTo>
-                  <a:lnTo>
-                    <a:pt x="4154106" y="1582901"/>
-                  </a:lnTo>
-                  <a:lnTo>
-                    <a:pt x="4225729" y="1558064"/>
-                  </a:lnTo>
-                  <a:lnTo>
-                    <a:pt x="4297351" y="1532711"/>
-                  </a:lnTo>
-                  <a:lnTo>
-                    <a:pt x="4368974" y="1506830"/>
-                  </a:lnTo>
-                  <a:lnTo>
-                    <a:pt x="4440596" y="1480412"/>
-                  </a:lnTo>
-                  <a:lnTo>
-                    <a:pt x="4512219" y="1453444"/>
-                  </a:lnTo>
-                  <a:lnTo>
-                    <a:pt x="4583841" y="1425915"/>
-                  </a:lnTo>
-                  <a:lnTo>
-                    <a:pt x="4655464" y="1397813"/>
-                  </a:lnTo>
-                  <a:lnTo>
-                    <a:pt x="4727086" y="1369127"/>
-                  </a:lnTo>
-                  <a:lnTo>
-                    <a:pt x="4798709" y="1339845"/>
-                  </a:lnTo>
-                  <a:lnTo>
-                    <a:pt x="4870331" y="1309954"/>
-                  </a:lnTo>
-                  <a:lnTo>
-                    <a:pt x="4941954" y="1279441"/>
-                  </a:lnTo>
-                  <a:lnTo>
-                    <a:pt x="5013576" y="1248294"/>
-                  </a:lnTo>
-                  <a:lnTo>
-                    <a:pt x="5085199" y="1216499"/>
-                  </a:lnTo>
-                  <a:lnTo>
-                    <a:pt x="5156821" y="1184043"/>
-                  </a:lnTo>
-                  <a:lnTo>
-                    <a:pt x="5228444" y="1150911"/>
-                  </a:lnTo>
-                  <a:lnTo>
-                    <a:pt x="5300066" y="1117091"/>
-                  </a:lnTo>
-                  <a:lnTo>
-                    <a:pt x="5371689" y="1082568"/>
-                  </a:lnTo>
-                  <a:lnTo>
-                    <a:pt x="5443311" y="1047327"/>
-                  </a:lnTo>
-                  <a:lnTo>
-                    <a:pt x="5514934" y="1011352"/>
-                  </a:lnTo>
-                  <a:lnTo>
-                    <a:pt x="5586557" y="974630"/>
-                  </a:lnTo>
-                  <a:lnTo>
-                    <a:pt x="5658179" y="937144"/>
-                  </a:lnTo>
-                  <a:lnTo>
-                    <a:pt x="5729802" y="898879"/>
-                  </a:lnTo>
-                  <a:lnTo>
-                    <a:pt x="5801424" y="859818"/>
-                  </a:lnTo>
-                  <a:lnTo>
-                    <a:pt x="5873047" y="819944"/>
-                  </a:lnTo>
-                  <a:lnTo>
-                    <a:pt x="5944669" y="779242"/>
-                  </a:lnTo>
-                  <a:lnTo>
-                    <a:pt x="6016292" y="737693"/>
-                  </a:lnTo>
-                  <a:lnTo>
-                    <a:pt x="6087914" y="695280"/>
-                  </a:lnTo>
-                  <a:lnTo>
-                    <a:pt x="6159537" y="651985"/>
-                  </a:lnTo>
-                  <a:lnTo>
-                    <a:pt x="6231159" y="607789"/>
-                  </a:lnTo>
-                  <a:lnTo>
-                    <a:pt x="6302782" y="562675"/>
-                  </a:lnTo>
-                  <a:lnTo>
-                    <a:pt x="6374404" y="516623"/>
-                  </a:lnTo>
-                  <a:lnTo>
-                    <a:pt x="6446027" y="469612"/>
-                  </a:lnTo>
-                  <a:lnTo>
-                    <a:pt x="6517649" y="421625"/>
-                  </a:lnTo>
-                  <a:lnTo>
-                    <a:pt x="6589272" y="372639"/>
-                  </a:lnTo>
-                  <a:lnTo>
-                    <a:pt x="6660894" y="322635"/>
-                  </a:lnTo>
-                  <a:lnTo>
-                    <a:pt x="6732517" y="271591"/>
-                  </a:lnTo>
-                  <a:lnTo>
-                    <a:pt x="6804139" y="219485"/>
-                  </a:lnTo>
-                  <a:lnTo>
-                    <a:pt x="6875762" y="166296"/>
-                  </a:lnTo>
-                  <a:lnTo>
-                    <a:pt x="6947385" y="112001"/>
-                  </a:lnTo>
-                  <a:lnTo>
-                    <a:pt x="7019007" y="56576"/>
+                    <a:pt x="71622" y="2363189"/>
+                  </a:lnTo>
+                  <a:lnTo>
+                    <a:pt x="143245" y="2355520"/>
+                  </a:lnTo>
+                  <a:lnTo>
+                    <a:pt x="214867" y="2347694"/>
+                  </a:lnTo>
+                  <a:lnTo>
+                    <a:pt x="286490" y="2339707"/>
+                  </a:lnTo>
+                  <a:lnTo>
+                    <a:pt x="358112" y="2331557"/>
+                  </a:lnTo>
+                  <a:lnTo>
+                    <a:pt x="429735" y="2323239"/>
+                  </a:lnTo>
+                  <a:lnTo>
+                    <a:pt x="501357" y="2314750"/>
+                  </a:lnTo>
+                  <a:lnTo>
+                    <a:pt x="572980" y="2306087"/>
+                  </a:lnTo>
+                  <a:lnTo>
+                    <a:pt x="644602" y="2297246"/>
+                  </a:lnTo>
+                  <a:lnTo>
+                    <a:pt x="716225" y="2288224"/>
+                  </a:lnTo>
+                  <a:lnTo>
+                    <a:pt x="787847" y="2279016"/>
+                  </a:lnTo>
+                  <a:lnTo>
+                    <a:pt x="859470" y="2269620"/>
+                  </a:lnTo>
+                  <a:lnTo>
+                    <a:pt x="931092" y="2260030"/>
+                  </a:lnTo>
+                  <a:lnTo>
+                    <a:pt x="1002715" y="2250244"/>
+                  </a:lnTo>
+                  <a:lnTo>
+                    <a:pt x="1074337" y="2240257"/>
+                  </a:lnTo>
+                  <a:lnTo>
+                    <a:pt x="1145960" y="2230065"/>
+                  </a:lnTo>
+                  <a:lnTo>
+                    <a:pt x="1217582" y="2219663"/>
+                  </a:lnTo>
+                  <a:lnTo>
+                    <a:pt x="1289205" y="2209048"/>
+                  </a:lnTo>
+                  <a:lnTo>
+                    <a:pt x="1360827" y="2198215"/>
+                  </a:lnTo>
+                  <a:lnTo>
+                    <a:pt x="1432450" y="2187160"/>
+                  </a:lnTo>
+                  <a:lnTo>
+                    <a:pt x="1504073" y="2175877"/>
+                  </a:lnTo>
+                  <a:lnTo>
+                    <a:pt x="1575695" y="2164364"/>
+                  </a:lnTo>
+                  <a:lnTo>
+                    <a:pt x="1647318" y="2152613"/>
+                  </a:lnTo>
+                  <a:lnTo>
+                    <a:pt x="1718940" y="2140622"/>
+                  </a:lnTo>
+                  <a:lnTo>
+                    <a:pt x="1790563" y="2128384"/>
+                  </a:lnTo>
+                  <a:lnTo>
+                    <a:pt x="1862185" y="2115895"/>
+                  </a:lnTo>
+                  <a:lnTo>
+                    <a:pt x="1933808" y="2103150"/>
+                  </a:lnTo>
+                  <a:lnTo>
+                    <a:pt x="2005430" y="2090143"/>
+                  </a:lnTo>
+                  <a:lnTo>
+                    <a:pt x="2077053" y="2076869"/>
+                  </a:lnTo>
+                  <a:lnTo>
+                    <a:pt x="2148675" y="2063323"/>
+                  </a:lnTo>
+                  <a:lnTo>
+                    <a:pt x="2220298" y="2049498"/>
+                  </a:lnTo>
+                  <a:lnTo>
+                    <a:pt x="2291920" y="2035390"/>
+                  </a:lnTo>
+                  <a:lnTo>
+                    <a:pt x="2363543" y="2020992"/>
+                  </a:lnTo>
+                  <a:lnTo>
+                    <a:pt x="2435165" y="2006298"/>
+                  </a:lnTo>
+                  <a:lnTo>
+                    <a:pt x="2506788" y="1991303"/>
+                  </a:lnTo>
+                  <a:lnTo>
+                    <a:pt x="2578410" y="1976000"/>
+                  </a:lnTo>
+                  <a:lnTo>
+                    <a:pt x="2650033" y="1960383"/>
+                  </a:lnTo>
+                  <a:lnTo>
+                    <a:pt x="2721655" y="1944445"/>
+                  </a:lnTo>
+                  <a:lnTo>
+                    <a:pt x="2793278" y="1928180"/>
+                  </a:lnTo>
+                  <a:lnTo>
+                    <a:pt x="2864901" y="1911581"/>
+                  </a:lnTo>
+                  <a:lnTo>
+                    <a:pt x="2936523" y="1894641"/>
+                  </a:lnTo>
+                  <a:lnTo>
+                    <a:pt x="3008146" y="1877354"/>
+                  </a:lnTo>
+                  <a:lnTo>
+                    <a:pt x="3079768" y="1859711"/>
+                  </a:lnTo>
+                  <a:lnTo>
+                    <a:pt x="3151391" y="1841707"/>
+                  </a:lnTo>
+                  <a:lnTo>
+                    <a:pt x="3223013" y="1823333"/>
+                  </a:lnTo>
+                  <a:lnTo>
+                    <a:pt x="3294636" y="1804581"/>
+                  </a:lnTo>
+                  <a:lnTo>
+                    <a:pt x="3366258" y="1785445"/>
+                  </a:lnTo>
+                  <a:lnTo>
+                    <a:pt x="3437881" y="1765916"/>
+                  </a:lnTo>
+                  <a:lnTo>
+                    <a:pt x="3509503" y="1745986"/>
+                  </a:lnTo>
+                  <a:lnTo>
+                    <a:pt x="3581126" y="1725647"/>
+                  </a:lnTo>
+                  <a:lnTo>
+                    <a:pt x="3652748" y="1704890"/>
+                  </a:lnTo>
+                  <a:lnTo>
+                    <a:pt x="3724371" y="1683707"/>
+                  </a:lnTo>
+                  <a:lnTo>
+                    <a:pt x="3795993" y="1662090"/>
+                  </a:lnTo>
+                  <a:lnTo>
+                    <a:pt x="3867616" y="1640028"/>
+                  </a:lnTo>
+                  <a:lnTo>
+                    <a:pt x="3939238" y="1617514"/>
+                  </a:lnTo>
+                  <a:lnTo>
+                    <a:pt x="4010861" y="1594537"/>
+                  </a:lnTo>
+                  <a:lnTo>
+                    <a:pt x="4082483" y="1571089"/>
+                  </a:lnTo>
+                  <a:lnTo>
+                    <a:pt x="4154106" y="1547159"/>
+                  </a:lnTo>
+                  <a:lnTo>
+                    <a:pt x="4225729" y="1522738"/>
+                  </a:lnTo>
+                  <a:lnTo>
+                    <a:pt x="4297351" y="1497816"/>
+                  </a:lnTo>
+                  <a:lnTo>
+                    <a:pt x="4368974" y="1472382"/>
+                  </a:lnTo>
+                  <a:lnTo>
+                    <a:pt x="4440596" y="1446426"/>
+                  </a:lnTo>
+                  <a:lnTo>
+                    <a:pt x="4512219" y="1419937"/>
+                  </a:lnTo>
+                  <a:lnTo>
+                    <a:pt x="4583841" y="1392905"/>
+                  </a:lnTo>
+                  <a:lnTo>
+                    <a:pt x="4655464" y="1365317"/>
+                  </a:lnTo>
+                  <a:lnTo>
+                    <a:pt x="4727086" y="1337163"/>
+                  </a:lnTo>
+                  <a:lnTo>
+                    <a:pt x="4798709" y="1308431"/>
+                  </a:lnTo>
+                  <a:lnTo>
+                    <a:pt x="4870331" y="1279109"/>
+                  </a:lnTo>
+                  <a:lnTo>
+                    <a:pt x="4941954" y="1249186"/>
+                  </a:lnTo>
+                  <a:lnTo>
+                    <a:pt x="5013576" y="1218648"/>
+                  </a:lnTo>
+                  <a:lnTo>
+                    <a:pt x="5085199" y="1187483"/>
+                  </a:lnTo>
+                  <a:lnTo>
+                    <a:pt x="5156821" y="1155678"/>
+                  </a:lnTo>
+                  <a:lnTo>
+                    <a:pt x="5228444" y="1123220"/>
+                  </a:lnTo>
+                  <a:lnTo>
+                    <a:pt x="5300066" y="1090096"/>
+                  </a:lnTo>
+                  <a:lnTo>
+                    <a:pt x="5371689" y="1056293"/>
+                  </a:lnTo>
+                  <a:lnTo>
+                    <a:pt x="5443311" y="1021795"/>
+                  </a:lnTo>
+                  <a:lnTo>
+                    <a:pt x="5514934" y="986588"/>
+                  </a:lnTo>
+                  <a:lnTo>
+                    <a:pt x="5586557" y="950660"/>
+                  </a:lnTo>
+                  <a:lnTo>
+                    <a:pt x="5658179" y="913993"/>
+                  </a:lnTo>
+                  <a:lnTo>
+                    <a:pt x="5729802" y="876574"/>
+                  </a:lnTo>
+                  <a:lnTo>
+                    <a:pt x="5801424" y="838386"/>
+                  </a:lnTo>
+                  <a:lnTo>
+                    <a:pt x="5873047" y="799415"/>
+                  </a:lnTo>
+                  <a:lnTo>
+                    <a:pt x="5944669" y="759644"/>
+                  </a:lnTo>
+                  <a:lnTo>
+                    <a:pt x="6016292" y="719056"/>
+                  </a:lnTo>
+                  <a:lnTo>
+                    <a:pt x="6087914" y="677635"/>
+                  </a:lnTo>
+                  <a:lnTo>
+                    <a:pt x="6159537" y="635363"/>
+                  </a:lnTo>
+                  <a:lnTo>
+                    <a:pt x="6231159" y="592224"/>
+                  </a:lnTo>
+                  <a:lnTo>
+                    <a:pt x="6302782" y="548199"/>
+                  </a:lnTo>
+                  <a:lnTo>
+                    <a:pt x="6374404" y="503271"/>
+                  </a:lnTo>
+                  <a:lnTo>
+                    <a:pt x="6446027" y="457420"/>
+                  </a:lnTo>
+                  <a:lnTo>
+                    <a:pt x="6517649" y="410628"/>
+                  </a:lnTo>
+                  <a:lnTo>
+                    <a:pt x="6589272" y="362875"/>
+                  </a:lnTo>
+                  <a:lnTo>
+                    <a:pt x="6660894" y="314142"/>
+                  </a:lnTo>
+                  <a:lnTo>
+                    <a:pt x="6732517" y="264408"/>
+                  </a:lnTo>
+                  <a:lnTo>
+                    <a:pt x="6804139" y="213653"/>
+                  </a:lnTo>
+                  <a:lnTo>
+                    <a:pt x="6875762" y="161857"/>
+                  </a:lnTo>
+                  <a:lnTo>
+                    <a:pt x="6947385" y="108997"/>
+                  </a:lnTo>
+                  <a:lnTo>
+                    <a:pt x="7019007" y="55052"/>
                   </a:lnTo>
                   <a:lnTo>
                     <a:pt x="7090630" y="0"/>

--- a/docs/plots/carbo/jx_carbo_linsubhr_dosedisc_grade2.pptx
+++ b/docs/plots/carbo/jx_carbo_linsubhr_dosedisc_grade2.pptx
@@ -3132,563 +3132,560 @@
           <p:spPr>
             <a:xfrm>
               <a:off x="1172049" y="1896563"/>
-              <a:ext cx="7090630" cy="3470452"/>
+              <a:ext cx="7090630" cy="3475963"/>
             </a:xfrm>
             <a:custGeom>
               <a:avLst/>
               <a:pathLst>
-                <a:path w="7090630" h="3470452">
+                <a:path w="7090630" h="3475963">
                   <a:moveTo>
-                    <a:pt x="0" y="2917261"/>
+                    <a:pt x="0" y="2910969"/>
                   </a:moveTo>
                   <a:lnTo>
-                    <a:pt x="71622" y="2914359"/>
-                  </a:lnTo>
-                  <a:lnTo>
-                    <a:pt x="143245" y="2911446"/>
-                  </a:lnTo>
-                  <a:lnTo>
-                    <a:pt x="214867" y="2908520"/>
-                  </a:lnTo>
-                  <a:lnTo>
-                    <a:pt x="286490" y="2905584"/>
-                  </a:lnTo>
-                  <a:lnTo>
-                    <a:pt x="358112" y="2902636"/>
-                  </a:lnTo>
-                  <a:lnTo>
-                    <a:pt x="429735" y="2899676"/>
-                  </a:lnTo>
-                  <a:lnTo>
-                    <a:pt x="501357" y="2896704"/>
-                  </a:lnTo>
-                  <a:lnTo>
-                    <a:pt x="572980" y="2893721"/>
-                  </a:lnTo>
-                  <a:lnTo>
-                    <a:pt x="644602" y="2890726"/>
-                  </a:lnTo>
-                  <a:lnTo>
-                    <a:pt x="716225" y="2887719"/>
-                  </a:lnTo>
-                  <a:lnTo>
-                    <a:pt x="787847" y="2884700"/>
-                  </a:lnTo>
-                  <a:lnTo>
-                    <a:pt x="859470" y="2881670"/>
-                  </a:lnTo>
-                  <a:lnTo>
-                    <a:pt x="931092" y="2878627"/>
-                  </a:lnTo>
-                  <a:lnTo>
-                    <a:pt x="1002715" y="2875572"/>
-                  </a:lnTo>
-                  <a:lnTo>
-                    <a:pt x="1074337" y="2872506"/>
-                  </a:lnTo>
-                  <a:lnTo>
-                    <a:pt x="1145960" y="2869427"/>
-                  </a:lnTo>
-                  <a:lnTo>
-                    <a:pt x="1217582" y="2866336"/>
-                  </a:lnTo>
-                  <a:lnTo>
-                    <a:pt x="1289205" y="2863233"/>
-                  </a:lnTo>
-                  <a:lnTo>
-                    <a:pt x="1360827" y="2860118"/>
-                  </a:lnTo>
-                  <a:lnTo>
-                    <a:pt x="1432450" y="2856990"/>
-                  </a:lnTo>
-                  <a:lnTo>
-                    <a:pt x="1504073" y="2853850"/>
-                  </a:lnTo>
-                  <a:lnTo>
-                    <a:pt x="1575695" y="2850698"/>
-                  </a:lnTo>
-                  <a:lnTo>
-                    <a:pt x="1647318" y="2847533"/>
-                  </a:lnTo>
-                  <a:lnTo>
-                    <a:pt x="1718940" y="2844356"/>
-                  </a:lnTo>
-                  <a:lnTo>
-                    <a:pt x="1790563" y="2841166"/>
-                  </a:lnTo>
-                  <a:lnTo>
-                    <a:pt x="1862185" y="2837963"/>
-                  </a:lnTo>
-                  <a:lnTo>
-                    <a:pt x="1933808" y="2834748"/>
-                  </a:lnTo>
-                  <a:lnTo>
-                    <a:pt x="2005430" y="2831520"/>
-                  </a:lnTo>
-                  <a:lnTo>
-                    <a:pt x="2077053" y="2828280"/>
-                  </a:lnTo>
-                  <a:lnTo>
-                    <a:pt x="2148675" y="2825027"/>
-                  </a:lnTo>
-                  <a:lnTo>
-                    <a:pt x="2220298" y="2821760"/>
-                  </a:lnTo>
-                  <a:lnTo>
-                    <a:pt x="2291920" y="2818481"/>
-                  </a:lnTo>
-                  <a:lnTo>
-                    <a:pt x="2363543" y="2815190"/>
-                  </a:lnTo>
-                  <a:lnTo>
-                    <a:pt x="2435165" y="2811885"/>
-                  </a:lnTo>
-                  <a:lnTo>
-                    <a:pt x="2506788" y="2808567"/>
-                  </a:lnTo>
-                  <a:lnTo>
-                    <a:pt x="2578410" y="2805235"/>
-                  </a:lnTo>
-                  <a:lnTo>
-                    <a:pt x="2650033" y="2801891"/>
-                  </a:lnTo>
-                  <a:lnTo>
-                    <a:pt x="2721655" y="2798534"/>
-                  </a:lnTo>
-                  <a:lnTo>
-                    <a:pt x="2793278" y="2795163"/>
-                  </a:lnTo>
-                  <a:lnTo>
-                    <a:pt x="2864901" y="2791779"/>
-                  </a:lnTo>
-                  <a:lnTo>
-                    <a:pt x="2936523" y="2788382"/>
-                  </a:lnTo>
-                  <a:lnTo>
-                    <a:pt x="3008146" y="2784971"/>
-                  </a:lnTo>
-                  <a:lnTo>
-                    <a:pt x="3079768" y="2769649"/>
-                  </a:lnTo>
-                  <a:lnTo>
-                    <a:pt x="3151391" y="2736638"/>
-                  </a:lnTo>
-                  <a:lnTo>
-                    <a:pt x="3223013" y="2702392"/>
-                  </a:lnTo>
-                  <a:lnTo>
-                    <a:pt x="3294636" y="2666867"/>
-                  </a:lnTo>
-                  <a:lnTo>
-                    <a:pt x="3366258" y="2630013"/>
-                  </a:lnTo>
-                  <a:lnTo>
-                    <a:pt x="3437881" y="2591781"/>
-                  </a:lnTo>
-                  <a:lnTo>
-                    <a:pt x="3509503" y="2552120"/>
-                  </a:lnTo>
-                  <a:lnTo>
-                    <a:pt x="3581126" y="2510977"/>
-                  </a:lnTo>
-                  <a:lnTo>
-                    <a:pt x="3652748" y="2468295"/>
-                  </a:lnTo>
-                  <a:lnTo>
-                    <a:pt x="3724371" y="2424017"/>
-                  </a:lnTo>
-                  <a:lnTo>
-                    <a:pt x="3795993" y="2378084"/>
-                  </a:lnTo>
-                  <a:lnTo>
-                    <a:pt x="3867616" y="2330434"/>
-                  </a:lnTo>
-                  <a:lnTo>
-                    <a:pt x="3939238" y="2281003"/>
-                  </a:lnTo>
-                  <a:lnTo>
-                    <a:pt x="4010861" y="2229723"/>
-                  </a:lnTo>
-                  <a:lnTo>
-                    <a:pt x="4082483" y="2176526"/>
-                  </a:lnTo>
-                  <a:lnTo>
-                    <a:pt x="4154106" y="2121341"/>
-                  </a:lnTo>
-                  <a:lnTo>
-                    <a:pt x="4225729" y="2064092"/>
-                  </a:lnTo>
-                  <a:lnTo>
-                    <a:pt x="4297351" y="2004703"/>
-                  </a:lnTo>
-                  <a:lnTo>
-                    <a:pt x="4368974" y="1943094"/>
-                  </a:lnTo>
-                  <a:lnTo>
-                    <a:pt x="4440596" y="1879181"/>
-                  </a:lnTo>
-                  <a:lnTo>
-                    <a:pt x="4512219" y="1812880"/>
-                  </a:lnTo>
-                  <a:lnTo>
-                    <a:pt x="4583841" y="1744099"/>
-                  </a:lnTo>
-                  <a:lnTo>
-                    <a:pt x="4655464" y="1672747"/>
-                  </a:lnTo>
-                  <a:lnTo>
-                    <a:pt x="4727086" y="1598727"/>
-                  </a:lnTo>
-                  <a:lnTo>
-                    <a:pt x="4798709" y="1521940"/>
-                  </a:lnTo>
-                  <a:lnTo>
-                    <a:pt x="4870331" y="1442283"/>
-                  </a:lnTo>
-                  <a:lnTo>
-                    <a:pt x="4941954" y="1359647"/>
-                  </a:lnTo>
-                  <a:lnTo>
-                    <a:pt x="5013576" y="1273922"/>
-                  </a:lnTo>
-                  <a:lnTo>
-                    <a:pt x="5085199" y="1184992"/>
-                  </a:lnTo>
-                  <a:lnTo>
-                    <a:pt x="5156821" y="1092738"/>
-                  </a:lnTo>
-                  <a:lnTo>
-                    <a:pt x="5228444" y="997034"/>
-                  </a:lnTo>
-                  <a:lnTo>
-                    <a:pt x="5300066" y="897753"/>
-                  </a:lnTo>
-                  <a:lnTo>
-                    <a:pt x="5371689" y="794759"/>
-                  </a:lnTo>
-                  <a:lnTo>
-                    <a:pt x="5443311" y="687916"/>
-                  </a:lnTo>
-                  <a:lnTo>
-                    <a:pt x="5514934" y="577078"/>
-                  </a:lnTo>
-                  <a:lnTo>
-                    <a:pt x="5586557" y="462096"/>
-                  </a:lnTo>
-                  <a:lnTo>
-                    <a:pt x="5658179" y="342815"/>
-                  </a:lnTo>
-                  <a:lnTo>
-                    <a:pt x="5729802" y="219075"/>
-                  </a:lnTo>
-                  <a:lnTo>
-                    <a:pt x="5801424" y="90709"/>
-                  </a:lnTo>
-                  <a:lnTo>
-                    <a:pt x="5850212" y="0"/>
+                    <a:pt x="71622" y="2908191"/>
+                  </a:lnTo>
+                  <a:lnTo>
+                    <a:pt x="143245" y="2905402"/>
+                  </a:lnTo>
+                  <a:lnTo>
+                    <a:pt x="214867" y="2902603"/>
+                  </a:lnTo>
+                  <a:lnTo>
+                    <a:pt x="286490" y="2899794"/>
+                  </a:lnTo>
+                  <a:lnTo>
+                    <a:pt x="358112" y="2896974"/>
+                  </a:lnTo>
+                  <a:lnTo>
+                    <a:pt x="429735" y="2894144"/>
+                  </a:lnTo>
+                  <a:lnTo>
+                    <a:pt x="501357" y="2891303"/>
+                  </a:lnTo>
+                  <a:lnTo>
+                    <a:pt x="572980" y="2888451"/>
+                  </a:lnTo>
+                  <a:lnTo>
+                    <a:pt x="644602" y="2885589"/>
+                  </a:lnTo>
+                  <a:lnTo>
+                    <a:pt x="716225" y="2882716"/>
+                  </a:lnTo>
+                  <a:lnTo>
+                    <a:pt x="787847" y="2879832"/>
+                  </a:lnTo>
+                  <a:lnTo>
+                    <a:pt x="859470" y="2876937"/>
+                  </a:lnTo>
+                  <a:lnTo>
+                    <a:pt x="931092" y="2874032"/>
+                  </a:lnTo>
+                  <a:lnTo>
+                    <a:pt x="1002715" y="2871115"/>
+                  </a:lnTo>
+                  <a:lnTo>
+                    <a:pt x="1074337" y="2868188"/>
+                  </a:lnTo>
+                  <a:lnTo>
+                    <a:pt x="1145960" y="2865250"/>
+                  </a:lnTo>
+                  <a:lnTo>
+                    <a:pt x="1217582" y="2862301"/>
+                  </a:lnTo>
+                  <a:lnTo>
+                    <a:pt x="1289205" y="2859340"/>
+                  </a:lnTo>
+                  <a:lnTo>
+                    <a:pt x="1360827" y="2856369"/>
+                  </a:lnTo>
+                  <a:lnTo>
+                    <a:pt x="1432450" y="2853386"/>
+                  </a:lnTo>
+                  <a:lnTo>
+                    <a:pt x="1504073" y="2850393"/>
+                  </a:lnTo>
+                  <a:lnTo>
+                    <a:pt x="1575695" y="2847388"/>
+                  </a:lnTo>
+                  <a:lnTo>
+                    <a:pt x="1647318" y="2844372"/>
+                  </a:lnTo>
+                  <a:lnTo>
+                    <a:pt x="1718940" y="2841344"/>
+                  </a:lnTo>
+                  <a:lnTo>
+                    <a:pt x="1790563" y="2838305"/>
+                  </a:lnTo>
+                  <a:lnTo>
+                    <a:pt x="1862185" y="2835255"/>
+                  </a:lnTo>
+                  <a:lnTo>
+                    <a:pt x="1933808" y="2832194"/>
+                  </a:lnTo>
+                  <a:lnTo>
+                    <a:pt x="2005430" y="2829121"/>
+                  </a:lnTo>
+                  <a:lnTo>
+                    <a:pt x="2077053" y="2826036"/>
+                  </a:lnTo>
+                  <a:lnTo>
+                    <a:pt x="2148675" y="2822940"/>
+                  </a:lnTo>
+                  <a:lnTo>
+                    <a:pt x="2220298" y="2819832"/>
+                  </a:lnTo>
+                  <a:lnTo>
+                    <a:pt x="2291920" y="2816713"/>
+                  </a:lnTo>
+                  <a:lnTo>
+                    <a:pt x="2363543" y="2813582"/>
+                  </a:lnTo>
+                  <a:lnTo>
+                    <a:pt x="2435165" y="2810439"/>
+                  </a:lnTo>
+                  <a:lnTo>
+                    <a:pt x="2506788" y="2807284"/>
+                  </a:lnTo>
+                  <a:lnTo>
+                    <a:pt x="2578410" y="2804118"/>
+                  </a:lnTo>
+                  <a:lnTo>
+                    <a:pt x="2650033" y="2800940"/>
+                  </a:lnTo>
+                  <a:lnTo>
+                    <a:pt x="2721655" y="2797750"/>
+                  </a:lnTo>
+                  <a:lnTo>
+                    <a:pt x="2793278" y="2794548"/>
+                  </a:lnTo>
+                  <a:lnTo>
+                    <a:pt x="2864901" y="2791334"/>
+                  </a:lnTo>
+                  <a:lnTo>
+                    <a:pt x="2936523" y="2788107"/>
+                  </a:lnTo>
+                  <a:lnTo>
+                    <a:pt x="3008146" y="2784869"/>
+                  </a:lnTo>
+                  <a:lnTo>
+                    <a:pt x="3079768" y="2769385"/>
+                  </a:lnTo>
+                  <a:lnTo>
+                    <a:pt x="3151391" y="2735703"/>
+                  </a:lnTo>
+                  <a:lnTo>
+                    <a:pt x="3223013" y="2700736"/>
+                  </a:lnTo>
+                  <a:lnTo>
+                    <a:pt x="3294636" y="2664436"/>
+                  </a:lnTo>
+                  <a:lnTo>
+                    <a:pt x="3366258" y="2626752"/>
+                  </a:lnTo>
+                  <a:lnTo>
+                    <a:pt x="3437881" y="2587631"/>
+                  </a:lnTo>
+                  <a:lnTo>
+                    <a:pt x="3509503" y="2547017"/>
+                  </a:lnTo>
+                  <a:lnTo>
+                    <a:pt x="3581126" y="2504855"/>
+                  </a:lnTo>
+                  <a:lnTo>
+                    <a:pt x="3652748" y="2461085"/>
+                  </a:lnTo>
+                  <a:lnTo>
+                    <a:pt x="3724371" y="2415646"/>
+                  </a:lnTo>
+                  <a:lnTo>
+                    <a:pt x="3795993" y="2368475"/>
+                  </a:lnTo>
+                  <a:lnTo>
+                    <a:pt x="3867616" y="2319504"/>
+                  </a:lnTo>
+                  <a:lnTo>
+                    <a:pt x="3939238" y="2268666"/>
+                  </a:lnTo>
+                  <a:lnTo>
+                    <a:pt x="4010861" y="2215889"/>
+                  </a:lnTo>
+                  <a:lnTo>
+                    <a:pt x="4082483" y="2161100"/>
+                  </a:lnTo>
+                  <a:lnTo>
+                    <a:pt x="4154106" y="2104221"/>
+                  </a:lnTo>
+                  <a:lnTo>
+                    <a:pt x="4225729" y="2045174"/>
+                  </a:lnTo>
+                  <a:lnTo>
+                    <a:pt x="4297351" y="1983874"/>
+                  </a:lnTo>
+                  <a:lnTo>
+                    <a:pt x="4368974" y="1920237"/>
+                  </a:lnTo>
+                  <a:lnTo>
+                    <a:pt x="4440596" y="1854174"/>
+                  </a:lnTo>
+                  <a:lnTo>
+                    <a:pt x="4512219" y="1785591"/>
+                  </a:lnTo>
+                  <a:lnTo>
+                    <a:pt x="4583841" y="1714392"/>
+                  </a:lnTo>
+                  <a:lnTo>
+                    <a:pt x="4655464" y="1640479"/>
+                  </a:lnTo>
+                  <a:lnTo>
+                    <a:pt x="4727086" y="1563747"/>
+                  </a:lnTo>
+                  <a:lnTo>
+                    <a:pt x="4798709" y="1484089"/>
+                  </a:lnTo>
+                  <a:lnTo>
+                    <a:pt x="4870331" y="1401393"/>
+                  </a:lnTo>
+                  <a:lnTo>
+                    <a:pt x="4941954" y="1315544"/>
+                  </a:lnTo>
+                  <a:lnTo>
+                    <a:pt x="5013576" y="1226420"/>
+                  </a:lnTo>
+                  <a:lnTo>
+                    <a:pt x="5085199" y="1133899"/>
+                  </a:lnTo>
+                  <a:lnTo>
+                    <a:pt x="5156821" y="1037849"/>
+                  </a:lnTo>
+                  <a:lnTo>
+                    <a:pt x="5228444" y="938136"/>
+                  </a:lnTo>
+                  <a:lnTo>
+                    <a:pt x="5300066" y="834620"/>
+                  </a:lnTo>
+                  <a:lnTo>
+                    <a:pt x="5371689" y="727158"/>
+                  </a:lnTo>
+                  <a:lnTo>
+                    <a:pt x="5443311" y="615597"/>
+                  </a:lnTo>
+                  <a:lnTo>
+                    <a:pt x="5514934" y="499782"/>
+                  </a:lnTo>
+                  <a:lnTo>
+                    <a:pt x="5586557" y="379551"/>
+                  </a:lnTo>
+                  <a:lnTo>
+                    <a:pt x="5658179" y="254734"/>
+                  </a:lnTo>
+                  <a:lnTo>
+                    <a:pt x="5729802" y="125158"/>
+                  </a:lnTo>
+                  <a:lnTo>
+                    <a:pt x="5796441" y="0"/>
                   </a:lnTo>
                   <a:lnTo>
                     <a:pt x="7090630" y="0"/>
                   </a:lnTo>
                   <a:lnTo>
-                    <a:pt x="7090630" y="2566577"/>
-                  </a:lnTo>
-                  <a:lnTo>
-                    <a:pt x="7019007" y="2570846"/>
-                  </a:lnTo>
-                  <a:lnTo>
-                    <a:pt x="6947385" y="2575098"/>
-                  </a:lnTo>
-                  <a:lnTo>
-                    <a:pt x="6875762" y="2579334"/>
-                  </a:lnTo>
-                  <a:lnTo>
-                    <a:pt x="6804139" y="2583553"/>
-                  </a:lnTo>
-                  <a:lnTo>
-                    <a:pt x="6732517" y="2587756"/>
-                  </a:lnTo>
-                  <a:lnTo>
-                    <a:pt x="6660894" y="2591942"/>
-                  </a:lnTo>
-                  <a:lnTo>
-                    <a:pt x="6589272" y="2596111"/>
-                  </a:lnTo>
-                  <a:lnTo>
-                    <a:pt x="6517649" y="2600264"/>
-                  </a:lnTo>
-                  <a:lnTo>
-                    <a:pt x="6446027" y="2604401"/>
-                  </a:lnTo>
-                  <a:lnTo>
-                    <a:pt x="6374404" y="2608522"/>
-                  </a:lnTo>
-                  <a:lnTo>
-                    <a:pt x="6302782" y="2612626"/>
-                  </a:lnTo>
-                  <a:lnTo>
-                    <a:pt x="6231159" y="2616714"/>
-                  </a:lnTo>
-                  <a:lnTo>
-                    <a:pt x="6159537" y="2620786"/>
-                  </a:lnTo>
-                  <a:lnTo>
-                    <a:pt x="6087914" y="2624843"/>
-                  </a:lnTo>
-                  <a:lnTo>
-                    <a:pt x="6016292" y="2628883"/>
-                  </a:lnTo>
-                  <a:lnTo>
-                    <a:pt x="5944669" y="2632907"/>
-                  </a:lnTo>
-                  <a:lnTo>
-                    <a:pt x="5873047" y="2636916"/>
-                  </a:lnTo>
-                  <a:lnTo>
-                    <a:pt x="5801424" y="2640908"/>
-                  </a:lnTo>
-                  <a:lnTo>
-                    <a:pt x="5729802" y="2644885"/>
-                  </a:lnTo>
-                  <a:lnTo>
-                    <a:pt x="5658179" y="2648847"/>
-                  </a:lnTo>
-                  <a:lnTo>
-                    <a:pt x="5586557" y="2652793"/>
-                  </a:lnTo>
-                  <a:lnTo>
-                    <a:pt x="5514934" y="2656723"/>
-                  </a:lnTo>
-                  <a:lnTo>
-                    <a:pt x="5443311" y="2660638"/>
-                  </a:lnTo>
-                  <a:lnTo>
-                    <a:pt x="5371689" y="2664537"/>
-                  </a:lnTo>
-                  <a:lnTo>
-                    <a:pt x="5300066" y="2668421"/>
-                  </a:lnTo>
-                  <a:lnTo>
-                    <a:pt x="5228444" y="2672290"/>
-                  </a:lnTo>
-                  <a:lnTo>
-                    <a:pt x="5156821" y="2676144"/>
-                  </a:lnTo>
-                  <a:lnTo>
-                    <a:pt x="5085199" y="2679983"/>
-                  </a:lnTo>
-                  <a:lnTo>
-                    <a:pt x="5013576" y="2683806"/>
-                  </a:lnTo>
-                  <a:lnTo>
-                    <a:pt x="4941954" y="2687614"/>
-                  </a:lnTo>
-                  <a:lnTo>
-                    <a:pt x="4870331" y="2691408"/>
-                  </a:lnTo>
-                  <a:lnTo>
-                    <a:pt x="4798709" y="2695186"/>
-                  </a:lnTo>
-                  <a:lnTo>
-                    <a:pt x="4727086" y="2698950"/>
-                  </a:lnTo>
-                  <a:lnTo>
-                    <a:pt x="4655464" y="2702699"/>
-                  </a:lnTo>
-                  <a:lnTo>
-                    <a:pt x="4583841" y="2706433"/>
-                  </a:lnTo>
-                  <a:lnTo>
-                    <a:pt x="4512219" y="2710153"/>
-                  </a:lnTo>
-                  <a:lnTo>
-                    <a:pt x="4440596" y="2713857"/>
-                  </a:lnTo>
-                  <a:lnTo>
-                    <a:pt x="4368974" y="2717548"/>
-                  </a:lnTo>
-                  <a:lnTo>
-                    <a:pt x="4297351" y="2721224"/>
-                  </a:lnTo>
-                  <a:lnTo>
-                    <a:pt x="4225729" y="2724885"/>
-                  </a:lnTo>
-                  <a:lnTo>
-                    <a:pt x="4154106" y="2728532"/>
-                  </a:lnTo>
-                  <a:lnTo>
-                    <a:pt x="4082483" y="2732164"/>
-                  </a:lnTo>
-                  <a:lnTo>
-                    <a:pt x="4010861" y="2735783"/>
-                  </a:lnTo>
-                  <a:lnTo>
-                    <a:pt x="3939238" y="2739387"/>
-                  </a:lnTo>
-                  <a:lnTo>
-                    <a:pt x="3867616" y="2742977"/>
-                  </a:lnTo>
-                  <a:lnTo>
-                    <a:pt x="3795993" y="2746553"/>
-                  </a:lnTo>
-                  <a:lnTo>
-                    <a:pt x="3724371" y="2750114"/>
-                  </a:lnTo>
-                  <a:lnTo>
-                    <a:pt x="3652748" y="2753662"/>
-                  </a:lnTo>
-                  <a:lnTo>
-                    <a:pt x="3581126" y="2757196"/>
-                  </a:lnTo>
-                  <a:lnTo>
-                    <a:pt x="3509503" y="2760716"/>
-                  </a:lnTo>
-                  <a:lnTo>
-                    <a:pt x="3437881" y="2764222"/>
-                  </a:lnTo>
-                  <a:lnTo>
-                    <a:pt x="3366258" y="2767714"/>
-                  </a:lnTo>
-                  <a:lnTo>
-                    <a:pt x="3294636" y="2771193"/>
-                  </a:lnTo>
-                  <a:lnTo>
-                    <a:pt x="3223013" y="2774658"/>
-                  </a:lnTo>
-                  <a:lnTo>
-                    <a:pt x="3151391" y="2778109"/>
-                  </a:lnTo>
-                  <a:lnTo>
-                    <a:pt x="3079768" y="2781547"/>
-                  </a:lnTo>
-                  <a:lnTo>
-                    <a:pt x="3008146" y="2801471"/>
-                  </a:lnTo>
-                  <a:lnTo>
-                    <a:pt x="2936523" y="2832146"/>
-                  </a:lnTo>
-                  <a:lnTo>
-                    <a:pt x="2864901" y="2861715"/>
-                  </a:lnTo>
-                  <a:lnTo>
-                    <a:pt x="2793278" y="2890219"/>
-                  </a:lnTo>
-                  <a:lnTo>
-                    <a:pt x="2721655" y="2917695"/>
-                  </a:lnTo>
-                  <a:lnTo>
-                    <a:pt x="2650033" y="2944181"/>
-                  </a:lnTo>
-                  <a:lnTo>
-                    <a:pt x="2578410" y="2969713"/>
-                  </a:lnTo>
-                  <a:lnTo>
-                    <a:pt x="2506788" y="2994325"/>
-                  </a:lnTo>
-                  <a:lnTo>
-                    <a:pt x="2435165" y="3018049"/>
-                  </a:lnTo>
-                  <a:lnTo>
-                    <a:pt x="2363543" y="3040919"/>
-                  </a:lnTo>
-                  <a:lnTo>
-                    <a:pt x="2291920" y="3062965"/>
-                  </a:lnTo>
-                  <a:lnTo>
-                    <a:pt x="2220298" y="3084216"/>
-                  </a:lnTo>
-                  <a:lnTo>
-                    <a:pt x="2148675" y="3104701"/>
-                  </a:lnTo>
-                  <a:lnTo>
-                    <a:pt x="2077053" y="3124448"/>
-                  </a:lnTo>
-                  <a:lnTo>
-                    <a:pt x="2005430" y="3143483"/>
-                  </a:lnTo>
-                  <a:lnTo>
-                    <a:pt x="1933808" y="3161832"/>
-                  </a:lnTo>
-                  <a:lnTo>
-                    <a:pt x="1862185" y="3179520"/>
-                  </a:lnTo>
-                  <a:lnTo>
-                    <a:pt x="1790563" y="3196571"/>
-                  </a:lnTo>
-                  <a:lnTo>
-                    <a:pt x="1718940" y="3213007"/>
-                  </a:lnTo>
-                  <a:lnTo>
-                    <a:pt x="1647318" y="3228850"/>
-                  </a:lnTo>
-                  <a:lnTo>
-                    <a:pt x="1575695" y="3244123"/>
-                  </a:lnTo>
-                  <a:lnTo>
-                    <a:pt x="1504073" y="3258846"/>
-                  </a:lnTo>
-                  <a:lnTo>
-                    <a:pt x="1432450" y="3273037"/>
-                  </a:lnTo>
-                  <a:lnTo>
-                    <a:pt x="1360827" y="3286718"/>
-                  </a:lnTo>
-                  <a:lnTo>
-                    <a:pt x="1289205" y="3299905"/>
-                  </a:lnTo>
-                  <a:lnTo>
-                    <a:pt x="1217582" y="3312617"/>
-                  </a:lnTo>
-                  <a:lnTo>
-                    <a:pt x="1145960" y="3324871"/>
-                  </a:lnTo>
-                  <a:lnTo>
-                    <a:pt x="1074337" y="3336683"/>
-                  </a:lnTo>
-                  <a:lnTo>
-                    <a:pt x="1002715" y="3348070"/>
-                  </a:lnTo>
-                  <a:lnTo>
-                    <a:pt x="931092" y="3359046"/>
-                  </a:lnTo>
-                  <a:lnTo>
-                    <a:pt x="859470" y="3369627"/>
-                  </a:lnTo>
-                  <a:lnTo>
-                    <a:pt x="787847" y="3379827"/>
-                  </a:lnTo>
-                  <a:lnTo>
-                    <a:pt x="716225" y="3389658"/>
-                  </a:lnTo>
-                  <a:lnTo>
-                    <a:pt x="644602" y="3399136"/>
-                  </a:lnTo>
-                  <a:lnTo>
-                    <a:pt x="572980" y="3408272"/>
-                  </a:lnTo>
-                  <a:lnTo>
-                    <a:pt x="501357" y="3417079"/>
-                  </a:lnTo>
-                  <a:lnTo>
-                    <a:pt x="429735" y="3425568"/>
-                  </a:lnTo>
-                  <a:lnTo>
-                    <a:pt x="358112" y="3433751"/>
-                  </a:lnTo>
-                  <a:lnTo>
-                    <a:pt x="286490" y="3441640"/>
-                  </a:lnTo>
-                  <a:lnTo>
-                    <a:pt x="214867" y="3449244"/>
-                  </a:lnTo>
-                  <a:lnTo>
-                    <a:pt x="143245" y="3456574"/>
-                  </a:lnTo>
-                  <a:lnTo>
-                    <a:pt x="71622" y="3463640"/>
-                  </a:lnTo>
-                  <a:lnTo>
-                    <a:pt x="0" y="3470452"/>
+                    <a:pt x="7090630" y="2578766"/>
+                  </a:lnTo>
+                  <a:lnTo>
+                    <a:pt x="7019007" y="2582774"/>
+                  </a:lnTo>
+                  <a:lnTo>
+                    <a:pt x="6947385" y="2586766"/>
+                  </a:lnTo>
+                  <a:lnTo>
+                    <a:pt x="6875762" y="2590744"/>
+                  </a:lnTo>
+                  <a:lnTo>
+                    <a:pt x="6804139" y="2594706"/>
+                  </a:lnTo>
+                  <a:lnTo>
+                    <a:pt x="6732517" y="2598654"/>
+                  </a:lnTo>
+                  <a:lnTo>
+                    <a:pt x="6660894" y="2602587"/>
+                  </a:lnTo>
+                  <a:lnTo>
+                    <a:pt x="6589272" y="2606505"/>
+                  </a:lnTo>
+                  <a:lnTo>
+                    <a:pt x="6517649" y="2610409"/>
+                  </a:lnTo>
+                  <a:lnTo>
+                    <a:pt x="6446027" y="2614298"/>
+                  </a:lnTo>
+                  <a:lnTo>
+                    <a:pt x="6374404" y="2618173"/>
+                  </a:lnTo>
+                  <a:lnTo>
+                    <a:pt x="6302782" y="2622033"/>
+                  </a:lnTo>
+                  <a:lnTo>
+                    <a:pt x="6231159" y="2625879"/>
+                  </a:lnTo>
+                  <a:lnTo>
+                    <a:pt x="6159537" y="2629711"/>
+                  </a:lnTo>
+                  <a:lnTo>
+                    <a:pt x="6087914" y="2633528"/>
+                  </a:lnTo>
+                  <a:lnTo>
+                    <a:pt x="6016292" y="2637331"/>
+                  </a:lnTo>
+                  <a:lnTo>
+                    <a:pt x="5944669" y="2641119"/>
+                  </a:lnTo>
+                  <a:lnTo>
+                    <a:pt x="5873047" y="2644894"/>
+                  </a:lnTo>
+                  <a:lnTo>
+                    <a:pt x="5801424" y="2648655"/>
+                  </a:lnTo>
+                  <a:lnTo>
+                    <a:pt x="5729802" y="2652401"/>
+                  </a:lnTo>
+                  <a:lnTo>
+                    <a:pt x="5658179" y="2656134"/>
+                  </a:lnTo>
+                  <a:lnTo>
+                    <a:pt x="5586557" y="2659852"/>
+                  </a:lnTo>
+                  <a:lnTo>
+                    <a:pt x="5514934" y="2663557"/>
+                  </a:lnTo>
+                  <a:lnTo>
+                    <a:pt x="5443311" y="2667248"/>
+                  </a:lnTo>
+                  <a:lnTo>
+                    <a:pt x="5371689" y="2670925"/>
+                  </a:lnTo>
+                  <a:lnTo>
+                    <a:pt x="5300066" y="2674588"/>
+                  </a:lnTo>
+                  <a:lnTo>
+                    <a:pt x="5228444" y="2678238"/>
+                  </a:lnTo>
+                  <a:lnTo>
+                    <a:pt x="5156821" y="2681874"/>
+                  </a:lnTo>
+                  <a:lnTo>
+                    <a:pt x="5085199" y="2685497"/>
+                  </a:lnTo>
+                  <a:lnTo>
+                    <a:pt x="5013576" y="2689106"/>
+                  </a:lnTo>
+                  <a:lnTo>
+                    <a:pt x="4941954" y="2692701"/>
+                  </a:lnTo>
+                  <a:lnTo>
+                    <a:pt x="4870331" y="2696283"/>
+                  </a:lnTo>
+                  <a:lnTo>
+                    <a:pt x="4798709" y="2699852"/>
+                  </a:lnTo>
+                  <a:lnTo>
+                    <a:pt x="4727086" y="2703407"/>
+                  </a:lnTo>
+                  <a:lnTo>
+                    <a:pt x="4655464" y="2706950"/>
+                  </a:lnTo>
+                  <a:lnTo>
+                    <a:pt x="4583841" y="2710479"/>
+                  </a:lnTo>
+                  <a:lnTo>
+                    <a:pt x="4512219" y="2713994"/>
+                  </a:lnTo>
+                  <a:lnTo>
+                    <a:pt x="4440596" y="2717497"/>
+                  </a:lnTo>
+                  <a:lnTo>
+                    <a:pt x="4368974" y="2720987"/>
+                  </a:lnTo>
+                  <a:lnTo>
+                    <a:pt x="4297351" y="2724463"/>
+                  </a:lnTo>
+                  <a:lnTo>
+                    <a:pt x="4225729" y="2727927"/>
+                  </a:lnTo>
+                  <a:lnTo>
+                    <a:pt x="4154106" y="2731377"/>
+                  </a:lnTo>
+                  <a:lnTo>
+                    <a:pt x="4082483" y="2734815"/>
+                  </a:lnTo>
+                  <a:lnTo>
+                    <a:pt x="4010861" y="2738240"/>
+                  </a:lnTo>
+                  <a:lnTo>
+                    <a:pt x="3939238" y="2741652"/>
+                  </a:lnTo>
+                  <a:lnTo>
+                    <a:pt x="3867616" y="2745052"/>
+                  </a:lnTo>
+                  <a:lnTo>
+                    <a:pt x="3795993" y="2748439"/>
+                  </a:lnTo>
+                  <a:lnTo>
+                    <a:pt x="3724371" y="2751813"/>
+                  </a:lnTo>
+                  <a:lnTo>
+                    <a:pt x="3652748" y="2755174"/>
+                  </a:lnTo>
+                  <a:lnTo>
+                    <a:pt x="3581126" y="2758523"/>
+                  </a:lnTo>
+                  <a:lnTo>
+                    <a:pt x="3509503" y="2761860"/>
+                  </a:lnTo>
+                  <a:lnTo>
+                    <a:pt x="3437881" y="2765184"/>
+                  </a:lnTo>
+                  <a:lnTo>
+                    <a:pt x="3366258" y="2768496"/>
+                  </a:lnTo>
+                  <a:lnTo>
+                    <a:pt x="3294636" y="2771795"/>
+                  </a:lnTo>
+                  <a:lnTo>
+                    <a:pt x="3223013" y="2775082"/>
+                  </a:lnTo>
+                  <a:lnTo>
+                    <a:pt x="3151391" y="2778356"/>
+                  </a:lnTo>
+                  <a:lnTo>
+                    <a:pt x="3079768" y="2781619"/>
+                  </a:lnTo>
+                  <a:lnTo>
+                    <a:pt x="3008146" y="2801830"/>
+                  </a:lnTo>
+                  <a:lnTo>
+                    <a:pt x="2936523" y="2833084"/>
+                  </a:lnTo>
+                  <a:lnTo>
+                    <a:pt x="2864901" y="2863189"/>
+                  </a:lnTo>
+                  <a:lnTo>
+                    <a:pt x="2793278" y="2892188"/>
+                  </a:lnTo>
+                  <a:lnTo>
+                    <a:pt x="2721655" y="2920122"/>
+                  </a:lnTo>
+                  <a:lnTo>
+                    <a:pt x="2650033" y="2947030"/>
+                  </a:lnTo>
+                  <a:lnTo>
+                    <a:pt x="2578410" y="2972949"/>
+                  </a:lnTo>
+                  <a:lnTo>
+                    <a:pt x="2506788" y="2997917"/>
+                  </a:lnTo>
+                  <a:lnTo>
+                    <a:pt x="2435165" y="3021967"/>
+                  </a:lnTo>
+                  <a:lnTo>
+                    <a:pt x="2363543" y="3045134"/>
+                  </a:lnTo>
+                  <a:lnTo>
+                    <a:pt x="2291920" y="3067450"/>
+                  </a:lnTo>
+                  <a:lnTo>
+                    <a:pt x="2220298" y="3088946"/>
+                  </a:lnTo>
+                  <a:lnTo>
+                    <a:pt x="2148675" y="3109652"/>
+                  </a:lnTo>
+                  <a:lnTo>
+                    <a:pt x="2077053" y="3129598"/>
+                  </a:lnTo>
+                  <a:lnTo>
+                    <a:pt x="2005430" y="3148811"/>
+                  </a:lnTo>
+                  <a:lnTo>
+                    <a:pt x="1933808" y="3167319"/>
+                  </a:lnTo>
+                  <a:lnTo>
+                    <a:pt x="1862185" y="3185146"/>
+                  </a:lnTo>
+                  <a:lnTo>
+                    <a:pt x="1790563" y="3202319"/>
+                  </a:lnTo>
+                  <a:lnTo>
+                    <a:pt x="1718940" y="3218861"/>
+                  </a:lnTo>
+                  <a:lnTo>
+                    <a:pt x="1647318" y="3234795"/>
+                  </a:lnTo>
+                  <a:lnTo>
+                    <a:pt x="1575695" y="3250144"/>
+                  </a:lnTo>
+                  <a:lnTo>
+                    <a:pt x="1504073" y="3264929"/>
+                  </a:lnTo>
+                  <a:lnTo>
+                    <a:pt x="1432450" y="3279171"/>
+                  </a:lnTo>
+                  <a:lnTo>
+                    <a:pt x="1360827" y="3292890"/>
+                  </a:lnTo>
+                  <a:lnTo>
+                    <a:pt x="1289205" y="3306105"/>
+                  </a:lnTo>
+                  <a:lnTo>
+                    <a:pt x="1217582" y="3318834"/>
+                  </a:lnTo>
+                  <a:lnTo>
+                    <a:pt x="1145960" y="3331096"/>
+                  </a:lnTo>
+                  <a:lnTo>
+                    <a:pt x="1074337" y="3342908"/>
+                  </a:lnTo>
+                  <a:lnTo>
+                    <a:pt x="1002715" y="3354285"/>
+                  </a:lnTo>
+                  <a:lnTo>
+                    <a:pt x="931092" y="3365245"/>
+                  </a:lnTo>
+                  <a:lnTo>
+                    <a:pt x="859470" y="3375802"/>
+                  </a:lnTo>
+                  <a:lnTo>
+                    <a:pt x="787847" y="3385972"/>
+                  </a:lnTo>
+                  <a:lnTo>
+                    <a:pt x="716225" y="3395767"/>
+                  </a:lnTo>
+                  <a:lnTo>
+                    <a:pt x="644602" y="3405203"/>
+                  </a:lnTo>
+                  <a:lnTo>
+                    <a:pt x="572980" y="3414292"/>
+                  </a:lnTo>
+                  <a:lnTo>
+                    <a:pt x="501357" y="3423048"/>
+                  </a:lnTo>
+                  <a:lnTo>
+                    <a:pt x="429735" y="3431482"/>
+                  </a:lnTo>
+                  <a:lnTo>
+                    <a:pt x="358112" y="3439606"/>
+                  </a:lnTo>
+                  <a:lnTo>
+                    <a:pt x="286490" y="3447431"/>
+                  </a:lnTo>
+                  <a:lnTo>
+                    <a:pt x="214867" y="3454969"/>
+                  </a:lnTo>
+                  <a:lnTo>
+                    <a:pt x="143245" y="3462231"/>
+                  </a:lnTo>
+                  <a:lnTo>
+                    <a:pt x="71622" y="3469225"/>
+                  </a:lnTo>
+                  <a:lnTo>
+                    <a:pt x="0" y="3475963"/>
                   </a:lnTo>
                   <a:close/>
                 </a:path>
@@ -3715,260 +3712,257 @@
           <p:spPr>
             <a:xfrm>
               <a:off x="1172049" y="1896563"/>
-              <a:ext cx="5850212" cy="2917261"/>
+              <a:ext cx="5796441" cy="2910969"/>
             </a:xfrm>
             <a:custGeom>
               <a:avLst/>
               <a:pathLst>
-                <a:path w="5850212" h="2917261">
+                <a:path w="5796441" h="2910969">
                   <a:moveTo>
-                    <a:pt x="0" y="2917261"/>
+                    <a:pt x="0" y="2910969"/>
                   </a:moveTo>
                   <a:lnTo>
-                    <a:pt x="71622" y="2914359"/>
-                  </a:lnTo>
-                  <a:lnTo>
-                    <a:pt x="143245" y="2911446"/>
-                  </a:lnTo>
-                  <a:lnTo>
-                    <a:pt x="214867" y="2908520"/>
-                  </a:lnTo>
-                  <a:lnTo>
-                    <a:pt x="286490" y="2905584"/>
-                  </a:lnTo>
-                  <a:lnTo>
-                    <a:pt x="358112" y="2902636"/>
-                  </a:lnTo>
-                  <a:lnTo>
-                    <a:pt x="429735" y="2899676"/>
-                  </a:lnTo>
-                  <a:lnTo>
-                    <a:pt x="501357" y="2896704"/>
-                  </a:lnTo>
-                  <a:lnTo>
-                    <a:pt x="572980" y="2893721"/>
-                  </a:lnTo>
-                  <a:lnTo>
-                    <a:pt x="644602" y="2890726"/>
-                  </a:lnTo>
-                  <a:lnTo>
-                    <a:pt x="716225" y="2887719"/>
-                  </a:lnTo>
-                  <a:lnTo>
-                    <a:pt x="787847" y="2884700"/>
-                  </a:lnTo>
-                  <a:lnTo>
-                    <a:pt x="859470" y="2881670"/>
-                  </a:lnTo>
-                  <a:lnTo>
-                    <a:pt x="931092" y="2878627"/>
-                  </a:lnTo>
-                  <a:lnTo>
-                    <a:pt x="1002715" y="2875572"/>
-                  </a:lnTo>
-                  <a:lnTo>
-                    <a:pt x="1074337" y="2872506"/>
-                  </a:lnTo>
-                  <a:lnTo>
-                    <a:pt x="1145960" y="2869427"/>
-                  </a:lnTo>
-                  <a:lnTo>
-                    <a:pt x="1217582" y="2866336"/>
-                  </a:lnTo>
-                  <a:lnTo>
-                    <a:pt x="1289205" y="2863233"/>
-                  </a:lnTo>
-                  <a:lnTo>
-                    <a:pt x="1360827" y="2860118"/>
-                  </a:lnTo>
-                  <a:lnTo>
-                    <a:pt x="1432450" y="2856990"/>
-                  </a:lnTo>
-                  <a:lnTo>
-                    <a:pt x="1504073" y="2853850"/>
-                  </a:lnTo>
-                  <a:lnTo>
-                    <a:pt x="1575695" y="2850698"/>
-                  </a:lnTo>
-                  <a:lnTo>
-                    <a:pt x="1647318" y="2847533"/>
-                  </a:lnTo>
-                  <a:lnTo>
-                    <a:pt x="1718940" y="2844356"/>
-                  </a:lnTo>
-                  <a:lnTo>
-                    <a:pt x="1790563" y="2841166"/>
-                  </a:lnTo>
-                  <a:lnTo>
-                    <a:pt x="1862185" y="2837963"/>
-                  </a:lnTo>
-                  <a:lnTo>
-                    <a:pt x="1933808" y="2834748"/>
-                  </a:lnTo>
-                  <a:lnTo>
-                    <a:pt x="2005430" y="2831520"/>
-                  </a:lnTo>
-                  <a:lnTo>
-                    <a:pt x="2077053" y="2828280"/>
-                  </a:lnTo>
-                  <a:lnTo>
-                    <a:pt x="2148675" y="2825027"/>
-                  </a:lnTo>
-                  <a:lnTo>
-                    <a:pt x="2220298" y="2821760"/>
-                  </a:lnTo>
-                  <a:lnTo>
-                    <a:pt x="2291920" y="2818481"/>
-                  </a:lnTo>
-                  <a:lnTo>
-                    <a:pt x="2363543" y="2815190"/>
-                  </a:lnTo>
-                  <a:lnTo>
-                    <a:pt x="2435165" y="2811885"/>
-                  </a:lnTo>
-                  <a:lnTo>
-                    <a:pt x="2506788" y="2808567"/>
-                  </a:lnTo>
-                  <a:lnTo>
-                    <a:pt x="2578410" y="2805235"/>
-                  </a:lnTo>
-                  <a:lnTo>
-                    <a:pt x="2650033" y="2801891"/>
-                  </a:lnTo>
-                  <a:lnTo>
-                    <a:pt x="2721655" y="2798534"/>
-                  </a:lnTo>
-                  <a:lnTo>
-                    <a:pt x="2793278" y="2795163"/>
-                  </a:lnTo>
-                  <a:lnTo>
-                    <a:pt x="2864901" y="2791779"/>
-                  </a:lnTo>
-                  <a:lnTo>
-                    <a:pt x="2936523" y="2788382"/>
-                  </a:lnTo>
-                  <a:lnTo>
-                    <a:pt x="3008146" y="2784971"/>
-                  </a:lnTo>
-                  <a:lnTo>
-                    <a:pt x="3079768" y="2769649"/>
-                  </a:lnTo>
-                  <a:lnTo>
-                    <a:pt x="3151391" y="2736638"/>
-                  </a:lnTo>
-                  <a:lnTo>
-                    <a:pt x="3223013" y="2702392"/>
-                  </a:lnTo>
-                  <a:lnTo>
-                    <a:pt x="3294636" y="2666867"/>
-                  </a:lnTo>
-                  <a:lnTo>
-                    <a:pt x="3366258" y="2630013"/>
-                  </a:lnTo>
-                  <a:lnTo>
-                    <a:pt x="3437881" y="2591781"/>
-                  </a:lnTo>
-                  <a:lnTo>
-                    <a:pt x="3509503" y="2552120"/>
-                  </a:lnTo>
-                  <a:lnTo>
-                    <a:pt x="3581126" y="2510977"/>
-                  </a:lnTo>
-                  <a:lnTo>
-                    <a:pt x="3652748" y="2468295"/>
-                  </a:lnTo>
-                  <a:lnTo>
-                    <a:pt x="3724371" y="2424017"/>
-                  </a:lnTo>
-                  <a:lnTo>
-                    <a:pt x="3795993" y="2378084"/>
-                  </a:lnTo>
-                  <a:lnTo>
-                    <a:pt x="3867616" y="2330434"/>
-                  </a:lnTo>
-                  <a:lnTo>
-                    <a:pt x="3939238" y="2281003"/>
-                  </a:lnTo>
-                  <a:lnTo>
-                    <a:pt x="4010861" y="2229723"/>
-                  </a:lnTo>
-                  <a:lnTo>
-                    <a:pt x="4082483" y="2176526"/>
-                  </a:lnTo>
-                  <a:lnTo>
-                    <a:pt x="4154106" y="2121341"/>
-                  </a:lnTo>
-                  <a:lnTo>
-                    <a:pt x="4225729" y="2064092"/>
-                  </a:lnTo>
-                  <a:lnTo>
-                    <a:pt x="4297351" y="2004703"/>
-                  </a:lnTo>
-                  <a:lnTo>
-                    <a:pt x="4368974" y="1943094"/>
-                  </a:lnTo>
-                  <a:lnTo>
-                    <a:pt x="4440596" y="1879181"/>
-                  </a:lnTo>
-                  <a:lnTo>
-                    <a:pt x="4512219" y="1812880"/>
-                  </a:lnTo>
-                  <a:lnTo>
-                    <a:pt x="4583841" y="1744099"/>
-                  </a:lnTo>
-                  <a:lnTo>
-                    <a:pt x="4655464" y="1672747"/>
-                  </a:lnTo>
-                  <a:lnTo>
-                    <a:pt x="4727086" y="1598727"/>
-                  </a:lnTo>
-                  <a:lnTo>
-                    <a:pt x="4798709" y="1521940"/>
-                  </a:lnTo>
-                  <a:lnTo>
-                    <a:pt x="4870331" y="1442283"/>
-                  </a:lnTo>
-                  <a:lnTo>
-                    <a:pt x="4941954" y="1359647"/>
-                  </a:lnTo>
-                  <a:lnTo>
-                    <a:pt x="5013576" y="1273922"/>
-                  </a:lnTo>
-                  <a:lnTo>
-                    <a:pt x="5085199" y="1184992"/>
-                  </a:lnTo>
-                  <a:lnTo>
-                    <a:pt x="5156821" y="1092738"/>
-                  </a:lnTo>
-                  <a:lnTo>
-                    <a:pt x="5228444" y="997034"/>
-                  </a:lnTo>
-                  <a:lnTo>
-                    <a:pt x="5300066" y="897753"/>
-                  </a:lnTo>
-                  <a:lnTo>
-                    <a:pt x="5371689" y="794759"/>
-                  </a:lnTo>
-                  <a:lnTo>
-                    <a:pt x="5443311" y="687916"/>
-                  </a:lnTo>
-                  <a:lnTo>
-                    <a:pt x="5514934" y="577078"/>
-                  </a:lnTo>
-                  <a:lnTo>
-                    <a:pt x="5586557" y="462096"/>
-                  </a:lnTo>
-                  <a:lnTo>
-                    <a:pt x="5658179" y="342815"/>
-                  </a:lnTo>
-                  <a:lnTo>
-                    <a:pt x="5729802" y="219075"/>
-                  </a:lnTo>
-                  <a:lnTo>
-                    <a:pt x="5801424" y="90709"/>
-                  </a:lnTo>
-                  <a:lnTo>
-                    <a:pt x="5850212" y="0"/>
+                    <a:pt x="71622" y="2908191"/>
+                  </a:lnTo>
+                  <a:lnTo>
+                    <a:pt x="143245" y="2905402"/>
+                  </a:lnTo>
+                  <a:lnTo>
+                    <a:pt x="214867" y="2902603"/>
+                  </a:lnTo>
+                  <a:lnTo>
+                    <a:pt x="286490" y="2899794"/>
+                  </a:lnTo>
+                  <a:lnTo>
+                    <a:pt x="358112" y="2896974"/>
+                  </a:lnTo>
+                  <a:lnTo>
+                    <a:pt x="429735" y="2894144"/>
+                  </a:lnTo>
+                  <a:lnTo>
+                    <a:pt x="501357" y="2891303"/>
+                  </a:lnTo>
+                  <a:lnTo>
+                    <a:pt x="572980" y="2888451"/>
+                  </a:lnTo>
+                  <a:lnTo>
+                    <a:pt x="644602" y="2885589"/>
+                  </a:lnTo>
+                  <a:lnTo>
+                    <a:pt x="716225" y="2882716"/>
+                  </a:lnTo>
+                  <a:lnTo>
+                    <a:pt x="787847" y="2879832"/>
+                  </a:lnTo>
+                  <a:lnTo>
+                    <a:pt x="859470" y="2876937"/>
+                  </a:lnTo>
+                  <a:lnTo>
+                    <a:pt x="931092" y="2874032"/>
+                  </a:lnTo>
+                  <a:lnTo>
+                    <a:pt x="1002715" y="2871115"/>
+                  </a:lnTo>
+                  <a:lnTo>
+                    <a:pt x="1074337" y="2868188"/>
+                  </a:lnTo>
+                  <a:lnTo>
+                    <a:pt x="1145960" y="2865250"/>
+                  </a:lnTo>
+                  <a:lnTo>
+                    <a:pt x="1217582" y="2862301"/>
+                  </a:lnTo>
+                  <a:lnTo>
+                    <a:pt x="1289205" y="2859340"/>
+                  </a:lnTo>
+                  <a:lnTo>
+                    <a:pt x="1360827" y="2856369"/>
+                  </a:lnTo>
+                  <a:lnTo>
+                    <a:pt x="1432450" y="2853386"/>
+                  </a:lnTo>
+                  <a:lnTo>
+                    <a:pt x="1504073" y="2850393"/>
+                  </a:lnTo>
+                  <a:lnTo>
+                    <a:pt x="1575695" y="2847388"/>
+                  </a:lnTo>
+                  <a:lnTo>
+                    <a:pt x="1647318" y="2844372"/>
+                  </a:lnTo>
+                  <a:lnTo>
+                    <a:pt x="1718940" y="2841344"/>
+                  </a:lnTo>
+                  <a:lnTo>
+                    <a:pt x="1790563" y="2838305"/>
+                  </a:lnTo>
+                  <a:lnTo>
+                    <a:pt x="1862185" y="2835255"/>
+                  </a:lnTo>
+                  <a:lnTo>
+                    <a:pt x="1933808" y="2832194"/>
+                  </a:lnTo>
+                  <a:lnTo>
+                    <a:pt x="2005430" y="2829121"/>
+                  </a:lnTo>
+                  <a:lnTo>
+                    <a:pt x="2077053" y="2826036"/>
+                  </a:lnTo>
+                  <a:lnTo>
+                    <a:pt x="2148675" y="2822940"/>
+                  </a:lnTo>
+                  <a:lnTo>
+                    <a:pt x="2220298" y="2819832"/>
+                  </a:lnTo>
+                  <a:lnTo>
+                    <a:pt x="2291920" y="2816713"/>
+                  </a:lnTo>
+                  <a:lnTo>
+                    <a:pt x="2363543" y="2813582"/>
+                  </a:lnTo>
+                  <a:lnTo>
+                    <a:pt x="2435165" y="2810439"/>
+                  </a:lnTo>
+                  <a:lnTo>
+                    <a:pt x="2506788" y="2807284"/>
+                  </a:lnTo>
+                  <a:lnTo>
+                    <a:pt x="2578410" y="2804118"/>
+                  </a:lnTo>
+                  <a:lnTo>
+                    <a:pt x="2650033" y="2800940"/>
+                  </a:lnTo>
+                  <a:lnTo>
+                    <a:pt x="2721655" y="2797750"/>
+                  </a:lnTo>
+                  <a:lnTo>
+                    <a:pt x="2793278" y="2794548"/>
+                  </a:lnTo>
+                  <a:lnTo>
+                    <a:pt x="2864901" y="2791334"/>
+                  </a:lnTo>
+                  <a:lnTo>
+                    <a:pt x="2936523" y="2788107"/>
+                  </a:lnTo>
+                  <a:lnTo>
+                    <a:pt x="3008146" y="2784869"/>
+                  </a:lnTo>
+                  <a:lnTo>
+                    <a:pt x="3079768" y="2769385"/>
+                  </a:lnTo>
+                  <a:lnTo>
+                    <a:pt x="3151391" y="2735703"/>
+                  </a:lnTo>
+                  <a:lnTo>
+                    <a:pt x="3223013" y="2700736"/>
+                  </a:lnTo>
+                  <a:lnTo>
+                    <a:pt x="3294636" y="2664436"/>
+                  </a:lnTo>
+                  <a:lnTo>
+                    <a:pt x="3366258" y="2626752"/>
+                  </a:lnTo>
+                  <a:lnTo>
+                    <a:pt x="3437881" y="2587631"/>
+                  </a:lnTo>
+                  <a:lnTo>
+                    <a:pt x="3509503" y="2547017"/>
+                  </a:lnTo>
+                  <a:lnTo>
+                    <a:pt x="3581126" y="2504855"/>
+                  </a:lnTo>
+                  <a:lnTo>
+                    <a:pt x="3652748" y="2461085"/>
+                  </a:lnTo>
+                  <a:lnTo>
+                    <a:pt x="3724371" y="2415646"/>
+                  </a:lnTo>
+                  <a:lnTo>
+                    <a:pt x="3795993" y="2368475"/>
+                  </a:lnTo>
+                  <a:lnTo>
+                    <a:pt x="3867616" y="2319504"/>
+                  </a:lnTo>
+                  <a:lnTo>
+                    <a:pt x="3939238" y="2268666"/>
+                  </a:lnTo>
+                  <a:lnTo>
+                    <a:pt x="4010861" y="2215889"/>
+                  </a:lnTo>
+                  <a:lnTo>
+                    <a:pt x="4082483" y="2161100"/>
+                  </a:lnTo>
+                  <a:lnTo>
+                    <a:pt x="4154106" y="2104221"/>
+                  </a:lnTo>
+                  <a:lnTo>
+                    <a:pt x="4225729" y="2045174"/>
+                  </a:lnTo>
+                  <a:lnTo>
+                    <a:pt x="4297351" y="1983874"/>
+                  </a:lnTo>
+                  <a:lnTo>
+                    <a:pt x="4368974" y="1920237"/>
+                  </a:lnTo>
+                  <a:lnTo>
+                    <a:pt x="4440596" y="1854174"/>
+                  </a:lnTo>
+                  <a:lnTo>
+                    <a:pt x="4512219" y="1785591"/>
+                  </a:lnTo>
+                  <a:lnTo>
+                    <a:pt x="4583841" y="1714392"/>
+                  </a:lnTo>
+                  <a:lnTo>
+                    <a:pt x="4655464" y="1640479"/>
+                  </a:lnTo>
+                  <a:lnTo>
+                    <a:pt x="4727086" y="1563747"/>
+                  </a:lnTo>
+                  <a:lnTo>
+                    <a:pt x="4798709" y="1484089"/>
+                  </a:lnTo>
+                  <a:lnTo>
+                    <a:pt x="4870331" y="1401393"/>
+                  </a:lnTo>
+                  <a:lnTo>
+                    <a:pt x="4941954" y="1315544"/>
+                  </a:lnTo>
+                  <a:lnTo>
+                    <a:pt x="5013576" y="1226420"/>
+                  </a:lnTo>
+                  <a:lnTo>
+                    <a:pt x="5085199" y="1133899"/>
+                  </a:lnTo>
+                  <a:lnTo>
+                    <a:pt x="5156821" y="1037849"/>
+                  </a:lnTo>
+                  <a:lnTo>
+                    <a:pt x="5228444" y="938136"/>
+                  </a:lnTo>
+                  <a:lnTo>
+                    <a:pt x="5300066" y="834620"/>
+                  </a:lnTo>
+                  <a:lnTo>
+                    <a:pt x="5371689" y="727158"/>
+                  </a:lnTo>
+                  <a:lnTo>
+                    <a:pt x="5443311" y="615597"/>
+                  </a:lnTo>
+                  <a:lnTo>
+                    <a:pt x="5514934" y="499782"/>
+                  </a:lnTo>
+                  <a:lnTo>
+                    <a:pt x="5586557" y="379551"/>
+                  </a:lnTo>
+                  <a:lnTo>
+                    <a:pt x="5658179" y="254734"/>
+                  </a:lnTo>
+                  <a:lnTo>
+                    <a:pt x="5729802" y="125158"/>
+                  </a:lnTo>
+                  <a:lnTo>
+                    <a:pt x="5796441" y="0"/>
                   </a:lnTo>
                 </a:path>
               </a:pathLst>
@@ -3988,312 +3982,312 @@
           </p:nvSpPr>
           <p:spPr>
             <a:xfrm>
-              <a:off x="1172049" y="4463140"/>
-              <a:ext cx="7090630" cy="903874"/>
+              <a:off x="1172049" y="4475330"/>
+              <a:ext cx="7090630" cy="897196"/>
             </a:xfrm>
             <a:custGeom>
               <a:avLst/>
               <a:pathLst>
-                <a:path w="7090630" h="903874">
+                <a:path w="7090630" h="897196">
                   <a:moveTo>
                     <a:pt x="7090630" y="0"/>
                   </a:moveTo>
                   <a:lnTo>
-                    <a:pt x="7019007" y="4269"/>
-                  </a:lnTo>
-                  <a:lnTo>
-                    <a:pt x="6947385" y="8521"/>
-                  </a:lnTo>
-                  <a:lnTo>
-                    <a:pt x="6875762" y="12757"/>
-                  </a:lnTo>
-                  <a:lnTo>
-                    <a:pt x="6804139" y="16976"/>
-                  </a:lnTo>
-                  <a:lnTo>
-                    <a:pt x="6732517" y="21179"/>
-                  </a:lnTo>
-                  <a:lnTo>
-                    <a:pt x="6660894" y="25365"/>
-                  </a:lnTo>
-                  <a:lnTo>
-                    <a:pt x="6589272" y="29534"/>
-                  </a:lnTo>
-                  <a:lnTo>
-                    <a:pt x="6517649" y="33687"/>
-                  </a:lnTo>
-                  <a:lnTo>
-                    <a:pt x="6446027" y="37824"/>
-                  </a:lnTo>
-                  <a:lnTo>
-                    <a:pt x="6374404" y="41945"/>
-                  </a:lnTo>
-                  <a:lnTo>
-                    <a:pt x="6302782" y="46049"/>
-                  </a:lnTo>
-                  <a:lnTo>
-                    <a:pt x="6231159" y="50137"/>
-                  </a:lnTo>
-                  <a:lnTo>
-                    <a:pt x="6159537" y="54209"/>
-                  </a:lnTo>
-                  <a:lnTo>
-                    <a:pt x="6087914" y="58265"/>
-                  </a:lnTo>
-                  <a:lnTo>
-                    <a:pt x="6016292" y="62306"/>
-                  </a:lnTo>
-                  <a:lnTo>
-                    <a:pt x="5944669" y="66330"/>
-                  </a:lnTo>
-                  <a:lnTo>
-                    <a:pt x="5873047" y="70338"/>
-                  </a:lnTo>
-                  <a:lnTo>
-                    <a:pt x="5801424" y="74331"/>
-                  </a:lnTo>
-                  <a:lnTo>
-                    <a:pt x="5729802" y="78308"/>
-                  </a:lnTo>
-                  <a:lnTo>
-                    <a:pt x="5658179" y="82270"/>
-                  </a:lnTo>
-                  <a:lnTo>
-                    <a:pt x="5586557" y="86215"/>
-                  </a:lnTo>
-                  <a:lnTo>
-                    <a:pt x="5514934" y="90146"/>
-                  </a:lnTo>
-                  <a:lnTo>
-                    <a:pt x="5443311" y="94061"/>
-                  </a:lnTo>
-                  <a:lnTo>
-                    <a:pt x="5371689" y="97960"/>
-                  </a:lnTo>
-                  <a:lnTo>
-                    <a:pt x="5300066" y="101844"/>
-                  </a:lnTo>
-                  <a:lnTo>
-                    <a:pt x="5228444" y="105713"/>
-                  </a:lnTo>
-                  <a:lnTo>
-                    <a:pt x="5156821" y="109567"/>
-                  </a:lnTo>
-                  <a:lnTo>
-                    <a:pt x="5085199" y="113405"/>
-                  </a:lnTo>
-                  <a:lnTo>
-                    <a:pt x="5013576" y="117229"/>
-                  </a:lnTo>
-                  <a:lnTo>
-                    <a:pt x="4941954" y="121037"/>
-                  </a:lnTo>
-                  <a:lnTo>
-                    <a:pt x="4870331" y="124831"/>
-                  </a:lnTo>
-                  <a:lnTo>
-                    <a:pt x="4798709" y="128609"/>
-                  </a:lnTo>
-                  <a:lnTo>
-                    <a:pt x="4727086" y="132373"/>
-                  </a:lnTo>
-                  <a:lnTo>
-                    <a:pt x="4655464" y="136122"/>
-                  </a:lnTo>
-                  <a:lnTo>
-                    <a:pt x="4583841" y="139856"/>
-                  </a:lnTo>
-                  <a:lnTo>
-                    <a:pt x="4512219" y="143576"/>
-                  </a:lnTo>
-                  <a:lnTo>
-                    <a:pt x="4440596" y="147280"/>
-                  </a:lnTo>
-                  <a:lnTo>
-                    <a:pt x="4368974" y="150971"/>
-                  </a:lnTo>
-                  <a:lnTo>
-                    <a:pt x="4297351" y="154646"/>
-                  </a:lnTo>
-                  <a:lnTo>
-                    <a:pt x="4225729" y="158308"/>
-                  </a:lnTo>
-                  <a:lnTo>
-                    <a:pt x="4154106" y="161955"/>
-                  </a:lnTo>
-                  <a:lnTo>
-                    <a:pt x="4082483" y="165587"/>
-                  </a:lnTo>
-                  <a:lnTo>
-                    <a:pt x="4010861" y="169206"/>
-                  </a:lnTo>
-                  <a:lnTo>
-                    <a:pt x="3939238" y="172810"/>
-                  </a:lnTo>
-                  <a:lnTo>
-                    <a:pt x="3867616" y="176400"/>
-                  </a:lnTo>
-                  <a:lnTo>
-                    <a:pt x="3795993" y="179976"/>
-                  </a:lnTo>
-                  <a:lnTo>
-                    <a:pt x="3724371" y="183537"/>
-                  </a:lnTo>
-                  <a:lnTo>
-                    <a:pt x="3652748" y="187085"/>
-                  </a:lnTo>
-                  <a:lnTo>
-                    <a:pt x="3581126" y="190619"/>
-                  </a:lnTo>
-                  <a:lnTo>
-                    <a:pt x="3509503" y="194139"/>
-                  </a:lnTo>
-                  <a:lnTo>
-                    <a:pt x="3437881" y="197645"/>
-                  </a:lnTo>
-                  <a:lnTo>
-                    <a:pt x="3366258" y="201137"/>
-                  </a:lnTo>
-                  <a:lnTo>
-                    <a:pt x="3294636" y="204616"/>
-                  </a:lnTo>
-                  <a:lnTo>
-                    <a:pt x="3223013" y="208081"/>
-                  </a:lnTo>
-                  <a:lnTo>
-                    <a:pt x="3151391" y="211532"/>
-                  </a:lnTo>
-                  <a:lnTo>
-                    <a:pt x="3079768" y="214970"/>
-                  </a:lnTo>
-                  <a:lnTo>
-                    <a:pt x="3008146" y="234894"/>
-                  </a:lnTo>
-                  <a:lnTo>
-                    <a:pt x="2936523" y="265568"/>
-                  </a:lnTo>
-                  <a:lnTo>
-                    <a:pt x="2864901" y="295138"/>
-                  </a:lnTo>
-                  <a:lnTo>
-                    <a:pt x="2793278" y="323641"/>
-                  </a:lnTo>
-                  <a:lnTo>
-                    <a:pt x="2721655" y="351118"/>
-                  </a:lnTo>
-                  <a:lnTo>
-                    <a:pt x="2650033" y="377604"/>
-                  </a:lnTo>
-                  <a:lnTo>
-                    <a:pt x="2578410" y="403136"/>
-                  </a:lnTo>
-                  <a:lnTo>
-                    <a:pt x="2506788" y="427748"/>
-                  </a:lnTo>
-                  <a:lnTo>
-                    <a:pt x="2435165" y="451472"/>
-                  </a:lnTo>
-                  <a:lnTo>
-                    <a:pt x="2363543" y="474342"/>
-                  </a:lnTo>
-                  <a:lnTo>
-                    <a:pt x="2291920" y="496387"/>
-                  </a:lnTo>
-                  <a:lnTo>
-                    <a:pt x="2220298" y="517638"/>
-                  </a:lnTo>
-                  <a:lnTo>
-                    <a:pt x="2148675" y="538124"/>
-                  </a:lnTo>
-                  <a:lnTo>
-                    <a:pt x="2077053" y="557870"/>
-                  </a:lnTo>
-                  <a:lnTo>
-                    <a:pt x="2005430" y="576906"/>
-                  </a:lnTo>
-                  <a:lnTo>
-                    <a:pt x="1933808" y="595255"/>
-                  </a:lnTo>
-                  <a:lnTo>
-                    <a:pt x="1862185" y="612943"/>
-                  </a:lnTo>
-                  <a:lnTo>
-                    <a:pt x="1790563" y="629994"/>
-                  </a:lnTo>
-                  <a:lnTo>
-                    <a:pt x="1718940" y="646430"/>
-                  </a:lnTo>
-                  <a:lnTo>
-                    <a:pt x="1647318" y="662273"/>
-                  </a:lnTo>
-                  <a:lnTo>
-                    <a:pt x="1575695" y="677546"/>
-                  </a:lnTo>
-                  <a:lnTo>
-                    <a:pt x="1504073" y="692268"/>
-                  </a:lnTo>
-                  <a:lnTo>
-                    <a:pt x="1432450" y="706460"/>
-                  </a:lnTo>
-                  <a:lnTo>
-                    <a:pt x="1360827" y="720141"/>
-                  </a:lnTo>
-                  <a:lnTo>
-                    <a:pt x="1289205" y="733328"/>
-                  </a:lnTo>
-                  <a:lnTo>
-                    <a:pt x="1217582" y="746040"/>
-                  </a:lnTo>
-                  <a:lnTo>
-                    <a:pt x="1145960" y="758294"/>
-                  </a:lnTo>
-                  <a:lnTo>
-                    <a:pt x="1074337" y="770106"/>
-                  </a:lnTo>
-                  <a:lnTo>
-                    <a:pt x="1002715" y="781493"/>
-                  </a:lnTo>
-                  <a:lnTo>
-                    <a:pt x="931092" y="792469"/>
-                  </a:lnTo>
-                  <a:lnTo>
-                    <a:pt x="859470" y="803050"/>
-                  </a:lnTo>
-                  <a:lnTo>
-                    <a:pt x="787847" y="813249"/>
-                  </a:lnTo>
-                  <a:lnTo>
-                    <a:pt x="716225" y="823081"/>
-                  </a:lnTo>
-                  <a:lnTo>
-                    <a:pt x="644602" y="832559"/>
-                  </a:lnTo>
-                  <a:lnTo>
-                    <a:pt x="572980" y="841695"/>
-                  </a:lnTo>
-                  <a:lnTo>
-                    <a:pt x="501357" y="850501"/>
-                  </a:lnTo>
-                  <a:lnTo>
-                    <a:pt x="429735" y="858991"/>
-                  </a:lnTo>
-                  <a:lnTo>
-                    <a:pt x="358112" y="867174"/>
-                  </a:lnTo>
-                  <a:lnTo>
-                    <a:pt x="286490" y="875063"/>
-                  </a:lnTo>
-                  <a:lnTo>
-                    <a:pt x="214867" y="882667"/>
-                  </a:lnTo>
-                  <a:lnTo>
-                    <a:pt x="143245" y="889997"/>
-                  </a:lnTo>
-                  <a:lnTo>
-                    <a:pt x="71622" y="897063"/>
-                  </a:lnTo>
-                  <a:lnTo>
-                    <a:pt x="0" y="903874"/>
+                    <a:pt x="7019007" y="4007"/>
+                  </a:lnTo>
+                  <a:lnTo>
+                    <a:pt x="6947385" y="7999"/>
+                  </a:lnTo>
+                  <a:lnTo>
+                    <a:pt x="6875762" y="11977"/>
+                  </a:lnTo>
+                  <a:lnTo>
+                    <a:pt x="6804139" y="15939"/>
+                  </a:lnTo>
+                  <a:lnTo>
+                    <a:pt x="6732517" y="19887"/>
+                  </a:lnTo>
+                  <a:lnTo>
+                    <a:pt x="6660894" y="23820"/>
+                  </a:lnTo>
+                  <a:lnTo>
+                    <a:pt x="6589272" y="27738"/>
+                  </a:lnTo>
+                  <a:lnTo>
+                    <a:pt x="6517649" y="31642"/>
+                  </a:lnTo>
+                  <a:lnTo>
+                    <a:pt x="6446027" y="35531"/>
+                  </a:lnTo>
+                  <a:lnTo>
+                    <a:pt x="6374404" y="39406"/>
+                  </a:lnTo>
+                  <a:lnTo>
+                    <a:pt x="6302782" y="43266"/>
+                  </a:lnTo>
+                  <a:lnTo>
+                    <a:pt x="6231159" y="47112"/>
+                  </a:lnTo>
+                  <a:lnTo>
+                    <a:pt x="6159537" y="50944"/>
+                  </a:lnTo>
+                  <a:lnTo>
+                    <a:pt x="6087914" y="54761"/>
+                  </a:lnTo>
+                  <a:lnTo>
+                    <a:pt x="6016292" y="58564"/>
+                  </a:lnTo>
+                  <a:lnTo>
+                    <a:pt x="5944669" y="62352"/>
+                  </a:lnTo>
+                  <a:lnTo>
+                    <a:pt x="5873047" y="66127"/>
+                  </a:lnTo>
+                  <a:lnTo>
+                    <a:pt x="5801424" y="69888"/>
+                  </a:lnTo>
+                  <a:lnTo>
+                    <a:pt x="5729802" y="73634"/>
+                  </a:lnTo>
+                  <a:lnTo>
+                    <a:pt x="5658179" y="77367"/>
+                  </a:lnTo>
+                  <a:lnTo>
+                    <a:pt x="5586557" y="81085"/>
+                  </a:lnTo>
+                  <a:lnTo>
+                    <a:pt x="5514934" y="84790"/>
+                  </a:lnTo>
+                  <a:lnTo>
+                    <a:pt x="5443311" y="88481"/>
+                  </a:lnTo>
+                  <a:lnTo>
+                    <a:pt x="5371689" y="92158"/>
+                  </a:lnTo>
+                  <a:lnTo>
+                    <a:pt x="5300066" y="95821"/>
+                  </a:lnTo>
+                  <a:lnTo>
+                    <a:pt x="5228444" y="99471"/>
+                  </a:lnTo>
+                  <a:lnTo>
+                    <a:pt x="5156821" y="103107"/>
+                  </a:lnTo>
+                  <a:lnTo>
+                    <a:pt x="5085199" y="106730"/>
+                  </a:lnTo>
+                  <a:lnTo>
+                    <a:pt x="5013576" y="110339"/>
+                  </a:lnTo>
+                  <a:lnTo>
+                    <a:pt x="4941954" y="113934"/>
+                  </a:lnTo>
+                  <a:lnTo>
+                    <a:pt x="4870331" y="117516"/>
+                  </a:lnTo>
+                  <a:lnTo>
+                    <a:pt x="4798709" y="121085"/>
+                  </a:lnTo>
+                  <a:lnTo>
+                    <a:pt x="4727086" y="124640"/>
+                  </a:lnTo>
+                  <a:lnTo>
+                    <a:pt x="4655464" y="128183"/>
+                  </a:lnTo>
+                  <a:lnTo>
+                    <a:pt x="4583841" y="131712"/>
+                  </a:lnTo>
+                  <a:lnTo>
+                    <a:pt x="4512219" y="135227"/>
+                  </a:lnTo>
+                  <a:lnTo>
+                    <a:pt x="4440596" y="138730"/>
+                  </a:lnTo>
+                  <a:lnTo>
+                    <a:pt x="4368974" y="142220"/>
+                  </a:lnTo>
+                  <a:lnTo>
+                    <a:pt x="4297351" y="145696"/>
+                  </a:lnTo>
+                  <a:lnTo>
+                    <a:pt x="4225729" y="149160"/>
+                  </a:lnTo>
+                  <a:lnTo>
+                    <a:pt x="4154106" y="152610"/>
+                  </a:lnTo>
+                  <a:lnTo>
+                    <a:pt x="4082483" y="156048"/>
+                  </a:lnTo>
+                  <a:lnTo>
+                    <a:pt x="4010861" y="159473"/>
+                  </a:lnTo>
+                  <a:lnTo>
+                    <a:pt x="3939238" y="162885"/>
+                  </a:lnTo>
+                  <a:lnTo>
+                    <a:pt x="3867616" y="166285"/>
+                  </a:lnTo>
+                  <a:lnTo>
+                    <a:pt x="3795993" y="169672"/>
+                  </a:lnTo>
+                  <a:lnTo>
+                    <a:pt x="3724371" y="173046"/>
+                  </a:lnTo>
+                  <a:lnTo>
+                    <a:pt x="3652748" y="176407"/>
+                  </a:lnTo>
+                  <a:lnTo>
+                    <a:pt x="3581126" y="179756"/>
+                  </a:lnTo>
+                  <a:lnTo>
+                    <a:pt x="3509503" y="183093"/>
+                  </a:lnTo>
+                  <a:lnTo>
+                    <a:pt x="3437881" y="186417"/>
+                  </a:lnTo>
+                  <a:lnTo>
+                    <a:pt x="3366258" y="189729"/>
+                  </a:lnTo>
+                  <a:lnTo>
+                    <a:pt x="3294636" y="193028"/>
+                  </a:lnTo>
+                  <a:lnTo>
+                    <a:pt x="3223013" y="196315"/>
+                  </a:lnTo>
+                  <a:lnTo>
+                    <a:pt x="3151391" y="199589"/>
+                  </a:lnTo>
+                  <a:lnTo>
+                    <a:pt x="3079768" y="202852"/>
+                  </a:lnTo>
+                  <a:lnTo>
+                    <a:pt x="3008146" y="223063"/>
+                  </a:lnTo>
+                  <a:lnTo>
+                    <a:pt x="2936523" y="254317"/>
+                  </a:lnTo>
+                  <a:lnTo>
+                    <a:pt x="2864901" y="284422"/>
+                  </a:lnTo>
+                  <a:lnTo>
+                    <a:pt x="2793278" y="313421"/>
+                  </a:lnTo>
+                  <a:lnTo>
+                    <a:pt x="2721655" y="341355"/>
+                  </a:lnTo>
+                  <a:lnTo>
+                    <a:pt x="2650033" y="368263"/>
+                  </a:lnTo>
+                  <a:lnTo>
+                    <a:pt x="2578410" y="394182"/>
+                  </a:lnTo>
+                  <a:lnTo>
+                    <a:pt x="2506788" y="419150"/>
+                  </a:lnTo>
+                  <a:lnTo>
+                    <a:pt x="2435165" y="443200"/>
+                  </a:lnTo>
+                  <a:lnTo>
+                    <a:pt x="2363543" y="466367"/>
+                  </a:lnTo>
+                  <a:lnTo>
+                    <a:pt x="2291920" y="488683"/>
+                  </a:lnTo>
+                  <a:lnTo>
+                    <a:pt x="2220298" y="510179"/>
+                  </a:lnTo>
+                  <a:lnTo>
+                    <a:pt x="2148675" y="530885"/>
+                  </a:lnTo>
+                  <a:lnTo>
+                    <a:pt x="2077053" y="550831"/>
+                  </a:lnTo>
+                  <a:lnTo>
+                    <a:pt x="2005430" y="570044"/>
+                  </a:lnTo>
+                  <a:lnTo>
+                    <a:pt x="1933808" y="588552"/>
+                  </a:lnTo>
+                  <a:lnTo>
+                    <a:pt x="1862185" y="606379"/>
+                  </a:lnTo>
+                  <a:lnTo>
+                    <a:pt x="1790563" y="623552"/>
+                  </a:lnTo>
+                  <a:lnTo>
+                    <a:pt x="1718940" y="640094"/>
+                  </a:lnTo>
+                  <a:lnTo>
+                    <a:pt x="1647318" y="656028"/>
+                  </a:lnTo>
+                  <a:lnTo>
+                    <a:pt x="1575695" y="671377"/>
+                  </a:lnTo>
+                  <a:lnTo>
+                    <a:pt x="1504073" y="686162"/>
+                  </a:lnTo>
+                  <a:lnTo>
+                    <a:pt x="1432450" y="700404"/>
+                  </a:lnTo>
+                  <a:lnTo>
+                    <a:pt x="1360827" y="714123"/>
+                  </a:lnTo>
+                  <a:lnTo>
+                    <a:pt x="1289205" y="727338"/>
+                  </a:lnTo>
+                  <a:lnTo>
+                    <a:pt x="1217582" y="740067"/>
+                  </a:lnTo>
+                  <a:lnTo>
+                    <a:pt x="1145960" y="752329"/>
+                  </a:lnTo>
+                  <a:lnTo>
+                    <a:pt x="1074337" y="764141"/>
+                  </a:lnTo>
+                  <a:lnTo>
+                    <a:pt x="1002715" y="775518"/>
+                  </a:lnTo>
+                  <a:lnTo>
+                    <a:pt x="931092" y="786478"/>
+                  </a:lnTo>
+                  <a:lnTo>
+                    <a:pt x="859470" y="797035"/>
+                  </a:lnTo>
+                  <a:lnTo>
+                    <a:pt x="787847" y="807205"/>
+                  </a:lnTo>
+                  <a:lnTo>
+                    <a:pt x="716225" y="817000"/>
+                  </a:lnTo>
+                  <a:lnTo>
+                    <a:pt x="644602" y="826436"/>
+                  </a:lnTo>
+                  <a:lnTo>
+                    <a:pt x="572980" y="835525"/>
+                  </a:lnTo>
+                  <a:lnTo>
+                    <a:pt x="501357" y="844281"/>
+                  </a:lnTo>
+                  <a:lnTo>
+                    <a:pt x="429735" y="852715"/>
+                  </a:lnTo>
+                  <a:lnTo>
+                    <a:pt x="358112" y="860839"/>
+                  </a:lnTo>
+                  <a:lnTo>
+                    <a:pt x="286490" y="868664"/>
+                  </a:lnTo>
+                  <a:lnTo>
+                    <a:pt x="214867" y="876202"/>
+                  </a:lnTo>
+                  <a:lnTo>
+                    <a:pt x="143245" y="883464"/>
+                  </a:lnTo>
+                  <a:lnTo>
+                    <a:pt x="71622" y="890458"/>
+                  </a:lnTo>
+                  <a:lnTo>
+                    <a:pt x="0" y="897196"/>
                   </a:lnTo>
                 </a:path>
               </a:pathLst>
@@ -4313,309 +4307,309 @@
           </p:nvSpPr>
           <p:spPr>
             <a:xfrm>
-              <a:off x="1172049" y="2812470"/>
-              <a:ext cx="7090630" cy="2370703"/>
+              <a:off x="1172049" y="2771940"/>
+              <a:ext cx="7090630" cy="2415272"/>
             </a:xfrm>
             <a:custGeom>
               <a:avLst/>
               <a:pathLst>
-                <a:path w="7090630" h="2370703">
+                <a:path w="7090630" h="2415272">
                   <a:moveTo>
-                    <a:pt x="0" y="2370703"/>
+                    <a:pt x="0" y="2415272"/>
                   </a:moveTo>
                   <a:lnTo>
-                    <a:pt x="71622" y="2363189"/>
-                  </a:lnTo>
-                  <a:lnTo>
-                    <a:pt x="143245" y="2355520"/>
-                  </a:lnTo>
-                  <a:lnTo>
-                    <a:pt x="214867" y="2347694"/>
-                  </a:lnTo>
-                  <a:lnTo>
-                    <a:pt x="286490" y="2339707"/>
-                  </a:lnTo>
-                  <a:lnTo>
-                    <a:pt x="358112" y="2331557"/>
-                  </a:lnTo>
-                  <a:lnTo>
-                    <a:pt x="429735" y="2323239"/>
-                  </a:lnTo>
-                  <a:lnTo>
-                    <a:pt x="501357" y="2314750"/>
-                  </a:lnTo>
-                  <a:lnTo>
-                    <a:pt x="572980" y="2306087"/>
-                  </a:lnTo>
-                  <a:lnTo>
-                    <a:pt x="644602" y="2297246"/>
-                  </a:lnTo>
-                  <a:lnTo>
-                    <a:pt x="716225" y="2288224"/>
-                  </a:lnTo>
-                  <a:lnTo>
-                    <a:pt x="787847" y="2279016"/>
-                  </a:lnTo>
-                  <a:lnTo>
-                    <a:pt x="859470" y="2269620"/>
-                  </a:lnTo>
-                  <a:lnTo>
-                    <a:pt x="931092" y="2260030"/>
-                  </a:lnTo>
-                  <a:lnTo>
-                    <a:pt x="1002715" y="2250244"/>
-                  </a:lnTo>
-                  <a:lnTo>
-                    <a:pt x="1074337" y="2240257"/>
-                  </a:lnTo>
-                  <a:lnTo>
-                    <a:pt x="1145960" y="2230065"/>
-                  </a:lnTo>
-                  <a:lnTo>
-                    <a:pt x="1217582" y="2219663"/>
-                  </a:lnTo>
-                  <a:lnTo>
-                    <a:pt x="1289205" y="2209048"/>
-                  </a:lnTo>
-                  <a:lnTo>
-                    <a:pt x="1360827" y="2198215"/>
-                  </a:lnTo>
-                  <a:lnTo>
-                    <a:pt x="1432450" y="2187160"/>
-                  </a:lnTo>
-                  <a:lnTo>
-                    <a:pt x="1504073" y="2175877"/>
-                  </a:lnTo>
-                  <a:lnTo>
-                    <a:pt x="1575695" y="2164364"/>
-                  </a:lnTo>
-                  <a:lnTo>
-                    <a:pt x="1647318" y="2152613"/>
-                  </a:lnTo>
-                  <a:lnTo>
-                    <a:pt x="1718940" y="2140622"/>
-                  </a:lnTo>
-                  <a:lnTo>
-                    <a:pt x="1790563" y="2128384"/>
-                  </a:lnTo>
-                  <a:lnTo>
-                    <a:pt x="1862185" y="2115895"/>
-                  </a:lnTo>
-                  <a:lnTo>
-                    <a:pt x="1933808" y="2103150"/>
-                  </a:lnTo>
-                  <a:lnTo>
-                    <a:pt x="2005430" y="2090143"/>
-                  </a:lnTo>
-                  <a:lnTo>
-                    <a:pt x="2077053" y="2076869"/>
-                  </a:lnTo>
-                  <a:lnTo>
-                    <a:pt x="2148675" y="2063323"/>
-                  </a:lnTo>
-                  <a:lnTo>
-                    <a:pt x="2220298" y="2049498"/>
-                  </a:lnTo>
-                  <a:lnTo>
-                    <a:pt x="2291920" y="2035390"/>
-                  </a:lnTo>
-                  <a:lnTo>
-                    <a:pt x="2363543" y="2020992"/>
-                  </a:lnTo>
-                  <a:lnTo>
-                    <a:pt x="2435165" y="2006298"/>
-                  </a:lnTo>
-                  <a:lnTo>
-                    <a:pt x="2506788" y="1991303"/>
-                  </a:lnTo>
-                  <a:lnTo>
-                    <a:pt x="2578410" y="1976000"/>
-                  </a:lnTo>
-                  <a:lnTo>
-                    <a:pt x="2650033" y="1960383"/>
-                  </a:lnTo>
-                  <a:lnTo>
-                    <a:pt x="2721655" y="1944445"/>
-                  </a:lnTo>
-                  <a:lnTo>
-                    <a:pt x="2793278" y="1928180"/>
-                  </a:lnTo>
-                  <a:lnTo>
-                    <a:pt x="2864901" y="1911581"/>
-                  </a:lnTo>
-                  <a:lnTo>
-                    <a:pt x="2936523" y="1894641"/>
-                  </a:lnTo>
-                  <a:lnTo>
-                    <a:pt x="3008146" y="1877354"/>
-                  </a:lnTo>
-                  <a:lnTo>
-                    <a:pt x="3079768" y="1859711"/>
-                  </a:lnTo>
-                  <a:lnTo>
-                    <a:pt x="3151391" y="1841707"/>
-                  </a:lnTo>
-                  <a:lnTo>
-                    <a:pt x="3223013" y="1823333"/>
-                  </a:lnTo>
-                  <a:lnTo>
-                    <a:pt x="3294636" y="1804581"/>
-                  </a:lnTo>
-                  <a:lnTo>
-                    <a:pt x="3366258" y="1785445"/>
-                  </a:lnTo>
-                  <a:lnTo>
-                    <a:pt x="3437881" y="1765916"/>
-                  </a:lnTo>
-                  <a:lnTo>
-                    <a:pt x="3509503" y="1745986"/>
-                  </a:lnTo>
-                  <a:lnTo>
-                    <a:pt x="3581126" y="1725647"/>
-                  </a:lnTo>
-                  <a:lnTo>
-                    <a:pt x="3652748" y="1704890"/>
-                  </a:lnTo>
-                  <a:lnTo>
-                    <a:pt x="3724371" y="1683707"/>
-                  </a:lnTo>
-                  <a:lnTo>
-                    <a:pt x="3795993" y="1662090"/>
-                  </a:lnTo>
-                  <a:lnTo>
-                    <a:pt x="3867616" y="1640028"/>
-                  </a:lnTo>
-                  <a:lnTo>
-                    <a:pt x="3939238" y="1617514"/>
-                  </a:lnTo>
-                  <a:lnTo>
-                    <a:pt x="4010861" y="1594537"/>
-                  </a:lnTo>
-                  <a:lnTo>
-                    <a:pt x="4082483" y="1571089"/>
-                  </a:lnTo>
-                  <a:lnTo>
-                    <a:pt x="4154106" y="1547159"/>
-                  </a:lnTo>
-                  <a:lnTo>
-                    <a:pt x="4225729" y="1522738"/>
-                  </a:lnTo>
-                  <a:lnTo>
-                    <a:pt x="4297351" y="1497816"/>
-                  </a:lnTo>
-                  <a:lnTo>
-                    <a:pt x="4368974" y="1472382"/>
-                  </a:lnTo>
-                  <a:lnTo>
-                    <a:pt x="4440596" y="1446426"/>
-                  </a:lnTo>
-                  <a:lnTo>
-                    <a:pt x="4512219" y="1419937"/>
-                  </a:lnTo>
-                  <a:lnTo>
-                    <a:pt x="4583841" y="1392905"/>
-                  </a:lnTo>
-                  <a:lnTo>
-                    <a:pt x="4655464" y="1365317"/>
-                  </a:lnTo>
-                  <a:lnTo>
-                    <a:pt x="4727086" y="1337163"/>
-                  </a:lnTo>
-                  <a:lnTo>
-                    <a:pt x="4798709" y="1308431"/>
-                  </a:lnTo>
-                  <a:lnTo>
-                    <a:pt x="4870331" y="1279109"/>
-                  </a:lnTo>
-                  <a:lnTo>
-                    <a:pt x="4941954" y="1249186"/>
-                  </a:lnTo>
-                  <a:lnTo>
-                    <a:pt x="5013576" y="1218648"/>
-                  </a:lnTo>
-                  <a:lnTo>
-                    <a:pt x="5085199" y="1187483"/>
-                  </a:lnTo>
-                  <a:lnTo>
-                    <a:pt x="5156821" y="1155678"/>
-                  </a:lnTo>
-                  <a:lnTo>
-                    <a:pt x="5228444" y="1123220"/>
-                  </a:lnTo>
-                  <a:lnTo>
-                    <a:pt x="5300066" y="1090096"/>
-                  </a:lnTo>
-                  <a:lnTo>
-                    <a:pt x="5371689" y="1056293"/>
-                  </a:lnTo>
-                  <a:lnTo>
-                    <a:pt x="5443311" y="1021795"/>
-                  </a:lnTo>
-                  <a:lnTo>
-                    <a:pt x="5514934" y="986588"/>
-                  </a:lnTo>
-                  <a:lnTo>
-                    <a:pt x="5586557" y="950660"/>
-                  </a:lnTo>
-                  <a:lnTo>
-                    <a:pt x="5658179" y="913993"/>
-                  </a:lnTo>
-                  <a:lnTo>
-                    <a:pt x="5729802" y="876574"/>
-                  </a:lnTo>
-                  <a:lnTo>
-                    <a:pt x="5801424" y="838386"/>
-                  </a:lnTo>
-                  <a:lnTo>
-                    <a:pt x="5873047" y="799415"/>
-                  </a:lnTo>
-                  <a:lnTo>
-                    <a:pt x="5944669" y="759644"/>
-                  </a:lnTo>
-                  <a:lnTo>
-                    <a:pt x="6016292" y="719056"/>
-                  </a:lnTo>
-                  <a:lnTo>
-                    <a:pt x="6087914" y="677635"/>
-                  </a:lnTo>
-                  <a:lnTo>
-                    <a:pt x="6159537" y="635363"/>
-                  </a:lnTo>
-                  <a:lnTo>
-                    <a:pt x="6231159" y="592224"/>
-                  </a:lnTo>
-                  <a:lnTo>
-                    <a:pt x="6302782" y="548199"/>
-                  </a:lnTo>
-                  <a:lnTo>
-                    <a:pt x="6374404" y="503271"/>
-                  </a:lnTo>
-                  <a:lnTo>
-                    <a:pt x="6446027" y="457420"/>
-                  </a:lnTo>
-                  <a:lnTo>
-                    <a:pt x="6517649" y="410628"/>
-                  </a:lnTo>
-                  <a:lnTo>
-                    <a:pt x="6589272" y="362875"/>
-                  </a:lnTo>
-                  <a:lnTo>
-                    <a:pt x="6660894" y="314142"/>
-                  </a:lnTo>
-                  <a:lnTo>
-                    <a:pt x="6732517" y="264408"/>
-                  </a:lnTo>
-                  <a:lnTo>
-                    <a:pt x="6804139" y="213653"/>
-                  </a:lnTo>
-                  <a:lnTo>
-                    <a:pt x="6875762" y="161857"/>
-                  </a:lnTo>
-                  <a:lnTo>
-                    <a:pt x="6947385" y="108997"/>
-                  </a:lnTo>
-                  <a:lnTo>
-                    <a:pt x="7019007" y="55052"/>
+                    <a:pt x="71622" y="2407745"/>
+                  </a:lnTo>
+                  <a:lnTo>
+                    <a:pt x="143245" y="2400061"/>
+                  </a:lnTo>
+                  <a:lnTo>
+                    <a:pt x="214867" y="2392217"/>
+                  </a:lnTo>
+                  <a:lnTo>
+                    <a:pt x="286490" y="2384209"/>
+                  </a:lnTo>
+                  <a:lnTo>
+                    <a:pt x="358112" y="2376036"/>
+                  </a:lnTo>
+                  <a:lnTo>
+                    <a:pt x="429735" y="2367692"/>
+                  </a:lnTo>
+                  <a:lnTo>
+                    <a:pt x="501357" y="2359175"/>
+                  </a:lnTo>
+                  <a:lnTo>
+                    <a:pt x="572980" y="2350481"/>
+                  </a:lnTo>
+                  <a:lnTo>
+                    <a:pt x="644602" y="2341606"/>
+                  </a:lnTo>
+                  <a:lnTo>
+                    <a:pt x="716225" y="2332546"/>
+                  </a:lnTo>
+                  <a:lnTo>
+                    <a:pt x="787847" y="2323298"/>
+                  </a:lnTo>
+                  <a:lnTo>
+                    <a:pt x="859470" y="2313858"/>
+                  </a:lnTo>
+                  <a:lnTo>
+                    <a:pt x="931092" y="2304221"/>
+                  </a:lnTo>
+                  <a:lnTo>
+                    <a:pt x="1002715" y="2294384"/>
+                  </a:lnTo>
+                  <a:lnTo>
+                    <a:pt x="1074337" y="2284343"/>
+                  </a:lnTo>
+                  <a:lnTo>
+                    <a:pt x="1145960" y="2274093"/>
+                  </a:lnTo>
+                  <a:lnTo>
+                    <a:pt x="1217582" y="2263629"/>
+                  </a:lnTo>
+                  <a:lnTo>
+                    <a:pt x="1289205" y="2252948"/>
+                  </a:lnTo>
+                  <a:lnTo>
+                    <a:pt x="1360827" y="2242045"/>
+                  </a:lnTo>
+                  <a:lnTo>
+                    <a:pt x="1432450" y="2230915"/>
+                  </a:lnTo>
+                  <a:lnTo>
+                    <a:pt x="1504073" y="2219553"/>
+                  </a:lnTo>
+                  <a:lnTo>
+                    <a:pt x="1575695" y="2207956"/>
+                  </a:lnTo>
+                  <a:lnTo>
+                    <a:pt x="1647318" y="2196117"/>
+                  </a:lnTo>
+                  <a:lnTo>
+                    <a:pt x="1718940" y="2184032"/>
+                  </a:lnTo>
+                  <a:lnTo>
+                    <a:pt x="1790563" y="2171696"/>
+                  </a:lnTo>
+                  <a:lnTo>
+                    <a:pt x="1862185" y="2159103"/>
+                  </a:lnTo>
+                  <a:lnTo>
+                    <a:pt x="1933808" y="2146248"/>
+                  </a:lnTo>
+                  <a:lnTo>
+                    <a:pt x="2005430" y="2133126"/>
+                  </a:lnTo>
+                  <a:lnTo>
+                    <a:pt x="2077053" y="2119731"/>
+                  </a:lnTo>
+                  <a:lnTo>
+                    <a:pt x="2148675" y="2106057"/>
+                  </a:lnTo>
+                  <a:lnTo>
+                    <a:pt x="2220298" y="2092100"/>
+                  </a:lnTo>
+                  <a:lnTo>
+                    <a:pt x="2291920" y="2077852"/>
+                  </a:lnTo>
+                  <a:lnTo>
+                    <a:pt x="2363543" y="2063307"/>
+                  </a:lnTo>
+                  <a:lnTo>
+                    <a:pt x="2435165" y="2048460"/>
+                  </a:lnTo>
+                  <a:lnTo>
+                    <a:pt x="2506788" y="2033305"/>
+                  </a:lnTo>
+                  <a:lnTo>
+                    <a:pt x="2578410" y="2017834"/>
+                  </a:lnTo>
+                  <a:lnTo>
+                    <a:pt x="2650033" y="2002042"/>
+                  </a:lnTo>
+                  <a:lnTo>
+                    <a:pt x="2721655" y="1985921"/>
+                  </a:lnTo>
+                  <a:lnTo>
+                    <a:pt x="2793278" y="1969465"/>
+                  </a:lnTo>
+                  <a:lnTo>
+                    <a:pt x="2864901" y="1952667"/>
+                  </a:lnTo>
+                  <a:lnTo>
+                    <a:pt x="2936523" y="1935519"/>
+                  </a:lnTo>
+                  <a:lnTo>
+                    <a:pt x="3008146" y="1918015"/>
+                  </a:lnTo>
+                  <a:lnTo>
+                    <a:pt x="3079768" y="1900147"/>
+                  </a:lnTo>
+                  <a:lnTo>
+                    <a:pt x="3151391" y="1881907"/>
+                  </a:lnTo>
+                  <a:lnTo>
+                    <a:pt x="3223013" y="1863288"/>
+                  </a:lnTo>
+                  <a:lnTo>
+                    <a:pt x="3294636" y="1844282"/>
+                  </a:lnTo>
+                  <a:lnTo>
+                    <a:pt x="3366258" y="1824880"/>
+                  </a:lnTo>
+                  <a:lnTo>
+                    <a:pt x="3437881" y="1805075"/>
+                  </a:lnTo>
+                  <a:lnTo>
+                    <a:pt x="3509503" y="1784859"/>
+                  </a:lnTo>
+                  <a:lnTo>
+                    <a:pt x="3581126" y="1764221"/>
+                  </a:lnTo>
+                  <a:lnTo>
+                    <a:pt x="3652748" y="1743155"/>
+                  </a:lnTo>
+                  <a:lnTo>
+                    <a:pt x="3724371" y="1721651"/>
+                  </a:lnTo>
+                  <a:lnTo>
+                    <a:pt x="3795993" y="1699699"/>
+                  </a:lnTo>
+                  <a:lnTo>
+                    <a:pt x="3867616" y="1677291"/>
+                  </a:lnTo>
+                  <a:lnTo>
+                    <a:pt x="3939238" y="1654417"/>
+                  </a:lnTo>
+                  <a:lnTo>
+                    <a:pt x="4010861" y="1631067"/>
+                  </a:lnTo>
+                  <a:lnTo>
+                    <a:pt x="4082483" y="1607232"/>
+                  </a:lnTo>
+                  <a:lnTo>
+                    <a:pt x="4154106" y="1582901"/>
+                  </a:lnTo>
+                  <a:lnTo>
+                    <a:pt x="4225729" y="1558064"/>
+                  </a:lnTo>
+                  <a:lnTo>
+                    <a:pt x="4297351" y="1532711"/>
+                  </a:lnTo>
+                  <a:lnTo>
+                    <a:pt x="4368974" y="1506830"/>
+                  </a:lnTo>
+                  <a:lnTo>
+                    <a:pt x="4440596" y="1480412"/>
+                  </a:lnTo>
+                  <a:lnTo>
+                    <a:pt x="4512219" y="1453444"/>
+                  </a:lnTo>
+                  <a:lnTo>
+                    <a:pt x="4583841" y="1425915"/>
+                  </a:lnTo>
+                  <a:lnTo>
+                    <a:pt x="4655464" y="1397813"/>
+                  </a:lnTo>
+                  <a:lnTo>
+                    <a:pt x="4727086" y="1369127"/>
+                  </a:lnTo>
+                  <a:lnTo>
+                    <a:pt x="4798709" y="1339845"/>
+                  </a:lnTo>
+                  <a:lnTo>
+                    <a:pt x="4870331" y="1309954"/>
+                  </a:lnTo>
+                  <a:lnTo>
+                    <a:pt x="4941954" y="1279441"/>
+                  </a:lnTo>
+                  <a:lnTo>
+                    <a:pt x="5013576" y="1248294"/>
+                  </a:lnTo>
+                  <a:lnTo>
+                    <a:pt x="5085199" y="1216499"/>
+                  </a:lnTo>
+                  <a:lnTo>
+                    <a:pt x="5156821" y="1184043"/>
+                  </a:lnTo>
+                  <a:lnTo>
+                    <a:pt x="5228444" y="1150911"/>
+                  </a:lnTo>
+                  <a:lnTo>
+                    <a:pt x="5300066" y="1117091"/>
+                  </a:lnTo>
+                  <a:lnTo>
+                    <a:pt x="5371689" y="1082568"/>
+                  </a:lnTo>
+                  <a:lnTo>
+                    <a:pt x="5443311" y="1047327"/>
+                  </a:lnTo>
+                  <a:lnTo>
+                    <a:pt x="5514934" y="1011352"/>
+                  </a:lnTo>
+                  <a:lnTo>
+                    <a:pt x="5586557" y="974630"/>
+                  </a:lnTo>
+                  <a:lnTo>
+                    <a:pt x="5658179" y="937144"/>
+                  </a:lnTo>
+                  <a:lnTo>
+                    <a:pt x="5729802" y="898879"/>
+                  </a:lnTo>
+                  <a:lnTo>
+                    <a:pt x="5801424" y="859818"/>
+                  </a:lnTo>
+                  <a:lnTo>
+                    <a:pt x="5873047" y="819944"/>
+                  </a:lnTo>
+                  <a:lnTo>
+                    <a:pt x="5944669" y="779242"/>
+                  </a:lnTo>
+                  <a:lnTo>
+                    <a:pt x="6016292" y="737693"/>
+                  </a:lnTo>
+                  <a:lnTo>
+                    <a:pt x="6087914" y="695280"/>
+                  </a:lnTo>
+                  <a:lnTo>
+                    <a:pt x="6159537" y="651985"/>
+                  </a:lnTo>
+                  <a:lnTo>
+                    <a:pt x="6231159" y="607789"/>
+                  </a:lnTo>
+                  <a:lnTo>
+                    <a:pt x="6302782" y="562675"/>
+                  </a:lnTo>
+                  <a:lnTo>
+                    <a:pt x="6374404" y="516623"/>
+                  </a:lnTo>
+                  <a:lnTo>
+                    <a:pt x="6446027" y="469612"/>
+                  </a:lnTo>
+                  <a:lnTo>
+                    <a:pt x="6517649" y="421625"/>
+                  </a:lnTo>
+                  <a:lnTo>
+                    <a:pt x="6589272" y="372639"/>
+                  </a:lnTo>
+                  <a:lnTo>
+                    <a:pt x="6660894" y="322635"/>
+                  </a:lnTo>
+                  <a:lnTo>
+                    <a:pt x="6732517" y="271591"/>
+                  </a:lnTo>
+                  <a:lnTo>
+                    <a:pt x="6804139" y="219485"/>
+                  </a:lnTo>
+                  <a:lnTo>
+                    <a:pt x="6875762" y="166296"/>
+                  </a:lnTo>
+                  <a:lnTo>
+                    <a:pt x="6947385" y="112001"/>
+                  </a:lnTo>
+                  <a:lnTo>
+                    <a:pt x="7019007" y="56576"/>
                   </a:lnTo>
                   <a:lnTo>
                     <a:pt x="7090630" y="0"/>

--- a/docs/plots/carbo/jx_carbo_linsubhr_dosedisc_grade2.pptx
+++ b/docs/plots/carbo/jx_carbo_linsubhr_dosedisc_grade2.pptx
@@ -3325,10 +3325,10 @@
                     <a:pt x="4368974" y="1920237"/>
                   </a:lnTo>
                   <a:lnTo>
-                    <a:pt x="4440596" y="1854174"/>
-                  </a:lnTo>
-                  <a:lnTo>
-                    <a:pt x="4512219" y="1785591"/>
+                    <a:pt x="4440596" y="1854173"/>
+                  </a:lnTo>
+                  <a:lnTo>
+                    <a:pt x="4512219" y="1785590"/>
                   </a:lnTo>
                   <a:lnTo>
                     <a:pt x="4583841" y="1714392"/>
@@ -3340,49 +3340,49 @@
                     <a:pt x="4727086" y="1563747"/>
                   </a:lnTo>
                   <a:lnTo>
-                    <a:pt x="4798709" y="1484089"/>
-                  </a:lnTo>
-                  <a:lnTo>
-                    <a:pt x="4870331" y="1401393"/>
-                  </a:lnTo>
-                  <a:lnTo>
-                    <a:pt x="4941954" y="1315544"/>
+                    <a:pt x="4798709" y="1484088"/>
+                  </a:lnTo>
+                  <a:lnTo>
+                    <a:pt x="4870331" y="1401392"/>
+                  </a:lnTo>
+                  <a:lnTo>
+                    <a:pt x="4941954" y="1315543"/>
                   </a:lnTo>
                   <a:lnTo>
                     <a:pt x="5013576" y="1226420"/>
                   </a:lnTo>
                   <a:lnTo>
-                    <a:pt x="5085199" y="1133899"/>
-                  </a:lnTo>
-                  <a:lnTo>
-                    <a:pt x="5156821" y="1037849"/>
-                  </a:lnTo>
-                  <a:lnTo>
-                    <a:pt x="5228444" y="938136"/>
+                    <a:pt x="5085199" y="1133898"/>
+                  </a:lnTo>
+                  <a:lnTo>
+                    <a:pt x="5156821" y="1037848"/>
+                  </a:lnTo>
+                  <a:lnTo>
+                    <a:pt x="5228444" y="938135"/>
                   </a:lnTo>
                   <a:lnTo>
                     <a:pt x="5300066" y="834620"/>
                   </a:lnTo>
                   <a:lnTo>
-                    <a:pt x="5371689" y="727158"/>
-                  </a:lnTo>
-                  <a:lnTo>
-                    <a:pt x="5443311" y="615597"/>
-                  </a:lnTo>
-                  <a:lnTo>
-                    <a:pt x="5514934" y="499782"/>
-                  </a:lnTo>
-                  <a:lnTo>
-                    <a:pt x="5586557" y="379551"/>
-                  </a:lnTo>
-                  <a:lnTo>
-                    <a:pt x="5658179" y="254734"/>
-                  </a:lnTo>
-                  <a:lnTo>
-                    <a:pt x="5729802" y="125158"/>
-                  </a:lnTo>
-                  <a:lnTo>
-                    <a:pt x="5796441" y="0"/>
+                    <a:pt x="5371689" y="727157"/>
+                  </a:lnTo>
+                  <a:lnTo>
+                    <a:pt x="5443311" y="615596"/>
+                  </a:lnTo>
+                  <a:lnTo>
+                    <a:pt x="5514934" y="499781"/>
+                  </a:lnTo>
+                  <a:lnTo>
+                    <a:pt x="5586557" y="379550"/>
+                  </a:lnTo>
+                  <a:lnTo>
+                    <a:pt x="5658179" y="254733"/>
+                  </a:lnTo>
+                  <a:lnTo>
+                    <a:pt x="5729802" y="125157"/>
+                  </a:lnTo>
+                  <a:lnTo>
+                    <a:pt x="5796440" y="0"/>
                   </a:lnTo>
                   <a:lnTo>
                     <a:pt x="7090630" y="0"/>
@@ -3391,13 +3391,13 @@
                     <a:pt x="7090630" y="2578766"/>
                   </a:lnTo>
                   <a:lnTo>
-                    <a:pt x="7019007" y="2582774"/>
+                    <a:pt x="7019007" y="2582773"/>
                   </a:lnTo>
                   <a:lnTo>
                     <a:pt x="6947385" y="2586766"/>
                   </a:lnTo>
                   <a:lnTo>
-                    <a:pt x="6875762" y="2590744"/>
+                    <a:pt x="6875762" y="2590743"/>
                   </a:lnTo>
                   <a:lnTo>
                     <a:pt x="6804139" y="2594706"/>
@@ -3427,7 +3427,7 @@
                     <a:pt x="6231159" y="2625879"/>
                   </a:lnTo>
                   <a:lnTo>
-                    <a:pt x="6159537" y="2629711"/>
+                    <a:pt x="6159537" y="2629710"/>
                   </a:lnTo>
                   <a:lnTo>
                     <a:pt x="6087914" y="2633528"/>
@@ -3442,13 +3442,13 @@
                     <a:pt x="5873047" y="2644894"/>
                   </a:lnTo>
                   <a:lnTo>
-                    <a:pt x="5801424" y="2648655"/>
+                    <a:pt x="5801424" y="2648654"/>
                   </a:lnTo>
                   <a:lnTo>
                     <a:pt x="5729802" y="2652401"/>
                   </a:lnTo>
                   <a:lnTo>
-                    <a:pt x="5658179" y="2656134"/>
+                    <a:pt x="5658179" y="2656133"/>
                   </a:lnTo>
                   <a:lnTo>
                     <a:pt x="5586557" y="2659852"/>
@@ -3472,10 +3472,10 @@
                     <a:pt x="5156821" y="2681874"/>
                   </a:lnTo>
                   <a:lnTo>
-                    <a:pt x="5085199" y="2685497"/>
-                  </a:lnTo>
-                  <a:lnTo>
-                    <a:pt x="5013576" y="2689106"/>
+                    <a:pt x="5085199" y="2685496"/>
+                  </a:lnTo>
+                  <a:lnTo>
+                    <a:pt x="5013576" y="2689105"/>
                   </a:lnTo>
                   <a:lnTo>
                     <a:pt x="4941954" y="2692701"/>
@@ -3493,7 +3493,7 @@
                     <a:pt x="4655464" y="2706950"/>
                   </a:lnTo>
                   <a:lnTo>
-                    <a:pt x="4583841" y="2710479"/>
+                    <a:pt x="4583841" y="2710478"/>
                   </a:lnTo>
                   <a:lnTo>
                     <a:pt x="4512219" y="2713994"/>
@@ -3544,7 +3544,7 @@
                     <a:pt x="3437881" y="2765184"/>
                   </a:lnTo>
                   <a:lnTo>
-                    <a:pt x="3366258" y="2768496"/>
+                    <a:pt x="3366258" y="2768495"/>
                   </a:lnTo>
                   <a:lnTo>
                     <a:pt x="3294636" y="2771795"/>
@@ -3634,7 +3634,7 @@
                     <a:pt x="1289205" y="3306105"/>
                   </a:lnTo>
                   <a:lnTo>
-                    <a:pt x="1217582" y="3318834"/>
+                    <a:pt x="1217582" y="3318835"/>
                   </a:lnTo>
                   <a:lnTo>
                     <a:pt x="1145960" y="3331096"/>
@@ -3643,7 +3643,7 @@
                     <a:pt x="1074337" y="3342908"/>
                   </a:lnTo>
                   <a:lnTo>
-                    <a:pt x="1002715" y="3354285"/>
+                    <a:pt x="1002715" y="3354286"/>
                   </a:lnTo>
                   <a:lnTo>
                     <a:pt x="931092" y="3365245"/>
@@ -3712,12 +3712,12 @@
           <p:spPr>
             <a:xfrm>
               <a:off x="1172049" y="1896563"/>
-              <a:ext cx="5796441" cy="2910969"/>
+              <a:ext cx="5796440" cy="2910969"/>
             </a:xfrm>
             <a:custGeom>
               <a:avLst/>
               <a:pathLst>
-                <a:path w="5796441" h="2910969">
+                <a:path w="5796440" h="2910969">
                   <a:moveTo>
                     <a:pt x="0" y="2910969"/>
                   </a:moveTo>
@@ -3905,10 +3905,10 @@
                     <a:pt x="4368974" y="1920237"/>
                   </a:lnTo>
                   <a:lnTo>
-                    <a:pt x="4440596" y="1854174"/>
-                  </a:lnTo>
-                  <a:lnTo>
-                    <a:pt x="4512219" y="1785591"/>
+                    <a:pt x="4440596" y="1854173"/>
+                  </a:lnTo>
+                  <a:lnTo>
+                    <a:pt x="4512219" y="1785590"/>
                   </a:lnTo>
                   <a:lnTo>
                     <a:pt x="4583841" y="1714392"/>
@@ -3920,49 +3920,49 @@
                     <a:pt x="4727086" y="1563747"/>
                   </a:lnTo>
                   <a:lnTo>
-                    <a:pt x="4798709" y="1484089"/>
-                  </a:lnTo>
-                  <a:lnTo>
-                    <a:pt x="4870331" y="1401393"/>
-                  </a:lnTo>
-                  <a:lnTo>
-                    <a:pt x="4941954" y="1315544"/>
+                    <a:pt x="4798709" y="1484088"/>
+                  </a:lnTo>
+                  <a:lnTo>
+                    <a:pt x="4870331" y="1401392"/>
+                  </a:lnTo>
+                  <a:lnTo>
+                    <a:pt x="4941954" y="1315543"/>
                   </a:lnTo>
                   <a:lnTo>
                     <a:pt x="5013576" y="1226420"/>
                   </a:lnTo>
                   <a:lnTo>
-                    <a:pt x="5085199" y="1133899"/>
-                  </a:lnTo>
-                  <a:lnTo>
-                    <a:pt x="5156821" y="1037849"/>
-                  </a:lnTo>
-                  <a:lnTo>
-                    <a:pt x="5228444" y="938136"/>
+                    <a:pt x="5085199" y="1133898"/>
+                  </a:lnTo>
+                  <a:lnTo>
+                    <a:pt x="5156821" y="1037848"/>
+                  </a:lnTo>
+                  <a:lnTo>
+                    <a:pt x="5228444" y="938135"/>
                   </a:lnTo>
                   <a:lnTo>
                     <a:pt x="5300066" y="834620"/>
                   </a:lnTo>
                   <a:lnTo>
-                    <a:pt x="5371689" y="727158"/>
-                  </a:lnTo>
-                  <a:lnTo>
-                    <a:pt x="5443311" y="615597"/>
-                  </a:lnTo>
-                  <a:lnTo>
-                    <a:pt x="5514934" y="499782"/>
-                  </a:lnTo>
-                  <a:lnTo>
-                    <a:pt x="5586557" y="379551"/>
-                  </a:lnTo>
-                  <a:lnTo>
-                    <a:pt x="5658179" y="254734"/>
-                  </a:lnTo>
-                  <a:lnTo>
-                    <a:pt x="5729802" y="125158"/>
-                  </a:lnTo>
-                  <a:lnTo>
-                    <a:pt x="5796441" y="0"/>
+                    <a:pt x="5371689" y="727157"/>
+                  </a:lnTo>
+                  <a:lnTo>
+                    <a:pt x="5443311" y="615596"/>
+                  </a:lnTo>
+                  <a:lnTo>
+                    <a:pt x="5514934" y="499781"/>
+                  </a:lnTo>
+                  <a:lnTo>
+                    <a:pt x="5586557" y="379550"/>
+                  </a:lnTo>
+                  <a:lnTo>
+                    <a:pt x="5658179" y="254733"/>
+                  </a:lnTo>
+                  <a:lnTo>
+                    <a:pt x="5729802" y="125157"/>
+                  </a:lnTo>
+                  <a:lnTo>
+                    <a:pt x="5796440" y="0"/>
                   </a:lnTo>
                 </a:path>
               </a:pathLst>
@@ -4038,7 +4038,7 @@
                     <a:pt x="6016292" y="58564"/>
                   </a:lnTo>
                   <a:lnTo>
-                    <a:pt x="5944669" y="62352"/>
+                    <a:pt x="5944669" y="62353"/>
                   </a:lnTo>
                   <a:lnTo>
                     <a:pt x="5873047" y="66127"/>
@@ -4089,7 +4089,7 @@
                     <a:pt x="4798709" y="121085"/>
                   </a:lnTo>
                   <a:lnTo>
-                    <a:pt x="4727086" y="124640"/>
+                    <a:pt x="4727086" y="124641"/>
                   </a:lnTo>
                   <a:lnTo>
                     <a:pt x="4655464" y="128183"/>
@@ -4098,7 +4098,7 @@
                     <a:pt x="4583841" y="131712"/>
                   </a:lnTo>
                   <a:lnTo>
-                    <a:pt x="4512219" y="135227"/>
+                    <a:pt x="4512219" y="135228"/>
                   </a:lnTo>
                   <a:lnTo>
                     <a:pt x="4440596" y="138730"/>
@@ -4113,7 +4113,7 @@
                     <a:pt x="4225729" y="149160"/>
                   </a:lnTo>
                   <a:lnTo>
-                    <a:pt x="4154106" y="152610"/>
+                    <a:pt x="4154106" y="152611"/>
                   </a:lnTo>
                   <a:lnTo>
                     <a:pt x="4082483" y="156048"/>
@@ -4122,7 +4122,7 @@
                     <a:pt x="4010861" y="159473"/>
                   </a:lnTo>
                   <a:lnTo>
-                    <a:pt x="3939238" y="162885"/>
+                    <a:pt x="3939238" y="162886"/>
                   </a:lnTo>
                   <a:lnTo>
                     <a:pt x="3867616" y="166285"/>
@@ -4134,10 +4134,10 @@
                     <a:pt x="3724371" y="173046"/>
                   </a:lnTo>
                   <a:lnTo>
-                    <a:pt x="3652748" y="176407"/>
-                  </a:lnTo>
-                  <a:lnTo>
-                    <a:pt x="3581126" y="179756"/>
+                    <a:pt x="3652748" y="176408"/>
+                  </a:lnTo>
+                  <a:lnTo>
+                    <a:pt x="3581126" y="179757"/>
                   </a:lnTo>
                   <a:lnTo>
                     <a:pt x="3509503" y="183093"/>
@@ -4155,13 +4155,13 @@
                     <a:pt x="3223013" y="196315"/>
                   </a:lnTo>
                   <a:lnTo>
-                    <a:pt x="3151391" y="199589"/>
+                    <a:pt x="3151391" y="199590"/>
                   </a:lnTo>
                   <a:lnTo>
                     <a:pt x="3079768" y="202852"/>
                   </a:lnTo>
                   <a:lnTo>
-                    <a:pt x="3008146" y="223063"/>
+                    <a:pt x="3008146" y="223064"/>
                   </a:lnTo>
                   <a:lnTo>
                     <a:pt x="2936523" y="254317"/>
@@ -4179,7 +4179,7 @@
                     <a:pt x="2650033" y="368263"/>
                   </a:lnTo>
                   <a:lnTo>
-                    <a:pt x="2578410" y="394182"/>
+                    <a:pt x="2578410" y="394183"/>
                   </a:lnTo>
                   <a:lnTo>
                     <a:pt x="2506788" y="419150"/>
@@ -4197,19 +4197,19 @@
                     <a:pt x="2220298" y="510179"/>
                   </a:lnTo>
                   <a:lnTo>
-                    <a:pt x="2148675" y="530885"/>
+                    <a:pt x="2148675" y="530886"/>
                   </a:lnTo>
                   <a:lnTo>
                     <a:pt x="2077053" y="550831"/>
                   </a:lnTo>
                   <a:lnTo>
-                    <a:pt x="2005430" y="570044"/>
+                    <a:pt x="2005430" y="570045"/>
                   </a:lnTo>
                   <a:lnTo>
                     <a:pt x="1933808" y="588552"/>
                   </a:lnTo>
                   <a:lnTo>
-                    <a:pt x="1862185" y="606379"/>
+                    <a:pt x="1862185" y="606380"/>
                   </a:lnTo>
                   <a:lnTo>
                     <a:pt x="1790563" y="623552"/>
@@ -4224,10 +4224,10 @@
                     <a:pt x="1575695" y="671377"/>
                   </a:lnTo>
                   <a:lnTo>
-                    <a:pt x="1504073" y="686162"/>
-                  </a:lnTo>
-                  <a:lnTo>
-                    <a:pt x="1432450" y="700404"/>
+                    <a:pt x="1504073" y="686163"/>
+                  </a:lnTo>
+                  <a:lnTo>
+                    <a:pt x="1432450" y="700405"/>
                   </a:lnTo>
                   <a:lnTo>
                     <a:pt x="1360827" y="714123"/>
@@ -4236,34 +4236,34 @@
                     <a:pt x="1289205" y="727338"/>
                   </a:lnTo>
                   <a:lnTo>
-                    <a:pt x="1217582" y="740067"/>
-                  </a:lnTo>
-                  <a:lnTo>
-                    <a:pt x="1145960" y="752329"/>
+                    <a:pt x="1217582" y="740068"/>
+                  </a:lnTo>
+                  <a:lnTo>
+                    <a:pt x="1145960" y="752330"/>
                   </a:lnTo>
                   <a:lnTo>
                     <a:pt x="1074337" y="764141"/>
                   </a:lnTo>
                   <a:lnTo>
-                    <a:pt x="1002715" y="775518"/>
+                    <a:pt x="1002715" y="775519"/>
                   </a:lnTo>
                   <a:lnTo>
                     <a:pt x="931092" y="786478"/>
                   </a:lnTo>
                   <a:lnTo>
-                    <a:pt x="859470" y="797035"/>
+                    <a:pt x="859470" y="797036"/>
                   </a:lnTo>
                   <a:lnTo>
                     <a:pt x="787847" y="807205"/>
                   </a:lnTo>
                   <a:lnTo>
-                    <a:pt x="716225" y="817000"/>
-                  </a:lnTo>
-                  <a:lnTo>
-                    <a:pt x="644602" y="826436"/>
-                  </a:lnTo>
-                  <a:lnTo>
-                    <a:pt x="572980" y="835525"/>
+                    <a:pt x="716225" y="817001"/>
+                  </a:lnTo>
+                  <a:lnTo>
+                    <a:pt x="644602" y="826437"/>
+                  </a:lnTo>
+                  <a:lnTo>
+                    <a:pt x="572980" y="835526"/>
                   </a:lnTo>
                   <a:lnTo>
                     <a:pt x="501357" y="844281"/>
@@ -4275,10 +4275,10 @@
                     <a:pt x="358112" y="860839"/>
                   </a:lnTo>
                   <a:lnTo>
-                    <a:pt x="286490" y="868664"/>
-                  </a:lnTo>
-                  <a:lnTo>
-                    <a:pt x="214867" y="876202"/>
+                    <a:pt x="286490" y="868665"/>
+                  </a:lnTo>
+                  <a:lnTo>
+                    <a:pt x="214867" y="876203"/>
                   </a:lnTo>
                   <a:lnTo>
                     <a:pt x="143245" y="883464"/>
@@ -4307,201 +4307,201 @@
           </p:nvSpPr>
           <p:spPr>
             <a:xfrm>
-              <a:off x="1172049" y="2771940"/>
-              <a:ext cx="7090630" cy="2415272"/>
+              <a:off x="1172049" y="2771939"/>
+              <a:ext cx="7090630" cy="2415274"/>
             </a:xfrm>
             <a:custGeom>
               <a:avLst/>
               <a:pathLst>
-                <a:path w="7090630" h="2415272">
+                <a:path w="7090630" h="2415274">
                   <a:moveTo>
-                    <a:pt x="0" y="2415272"/>
+                    <a:pt x="0" y="2415274"/>
                   </a:moveTo>
                   <a:lnTo>
-                    <a:pt x="71622" y="2407745"/>
-                  </a:lnTo>
-                  <a:lnTo>
-                    <a:pt x="143245" y="2400061"/>
-                  </a:lnTo>
-                  <a:lnTo>
-                    <a:pt x="214867" y="2392217"/>
-                  </a:lnTo>
-                  <a:lnTo>
-                    <a:pt x="286490" y="2384209"/>
-                  </a:lnTo>
-                  <a:lnTo>
-                    <a:pt x="358112" y="2376036"/>
-                  </a:lnTo>
-                  <a:lnTo>
-                    <a:pt x="429735" y="2367692"/>
-                  </a:lnTo>
-                  <a:lnTo>
-                    <a:pt x="501357" y="2359175"/>
-                  </a:lnTo>
-                  <a:lnTo>
-                    <a:pt x="572980" y="2350481"/>
-                  </a:lnTo>
-                  <a:lnTo>
-                    <a:pt x="644602" y="2341606"/>
-                  </a:lnTo>
-                  <a:lnTo>
-                    <a:pt x="716225" y="2332546"/>
-                  </a:lnTo>
-                  <a:lnTo>
-                    <a:pt x="787847" y="2323298"/>
-                  </a:lnTo>
-                  <a:lnTo>
-                    <a:pt x="859470" y="2313858"/>
-                  </a:lnTo>
-                  <a:lnTo>
-                    <a:pt x="931092" y="2304221"/>
-                  </a:lnTo>
-                  <a:lnTo>
-                    <a:pt x="1002715" y="2294384"/>
-                  </a:lnTo>
-                  <a:lnTo>
-                    <a:pt x="1074337" y="2284343"/>
-                  </a:lnTo>
-                  <a:lnTo>
-                    <a:pt x="1145960" y="2274093"/>
-                  </a:lnTo>
-                  <a:lnTo>
-                    <a:pt x="1217582" y="2263629"/>
-                  </a:lnTo>
-                  <a:lnTo>
-                    <a:pt x="1289205" y="2252948"/>
-                  </a:lnTo>
-                  <a:lnTo>
-                    <a:pt x="1360827" y="2242045"/>
-                  </a:lnTo>
-                  <a:lnTo>
-                    <a:pt x="1432450" y="2230915"/>
-                  </a:lnTo>
-                  <a:lnTo>
-                    <a:pt x="1504073" y="2219553"/>
-                  </a:lnTo>
-                  <a:lnTo>
-                    <a:pt x="1575695" y="2207956"/>
-                  </a:lnTo>
-                  <a:lnTo>
-                    <a:pt x="1647318" y="2196117"/>
-                  </a:lnTo>
-                  <a:lnTo>
-                    <a:pt x="1718940" y="2184032"/>
-                  </a:lnTo>
-                  <a:lnTo>
-                    <a:pt x="1790563" y="2171696"/>
-                  </a:lnTo>
-                  <a:lnTo>
-                    <a:pt x="1862185" y="2159103"/>
-                  </a:lnTo>
-                  <a:lnTo>
-                    <a:pt x="1933808" y="2146248"/>
-                  </a:lnTo>
-                  <a:lnTo>
-                    <a:pt x="2005430" y="2133126"/>
-                  </a:lnTo>
-                  <a:lnTo>
-                    <a:pt x="2077053" y="2119731"/>
-                  </a:lnTo>
-                  <a:lnTo>
-                    <a:pt x="2148675" y="2106057"/>
-                  </a:lnTo>
-                  <a:lnTo>
-                    <a:pt x="2220298" y="2092100"/>
-                  </a:lnTo>
-                  <a:lnTo>
-                    <a:pt x="2291920" y="2077852"/>
-                  </a:lnTo>
-                  <a:lnTo>
-                    <a:pt x="2363543" y="2063307"/>
-                  </a:lnTo>
-                  <a:lnTo>
-                    <a:pt x="2435165" y="2048460"/>
-                  </a:lnTo>
-                  <a:lnTo>
-                    <a:pt x="2506788" y="2033305"/>
-                  </a:lnTo>
-                  <a:lnTo>
-                    <a:pt x="2578410" y="2017834"/>
-                  </a:lnTo>
-                  <a:lnTo>
-                    <a:pt x="2650033" y="2002042"/>
-                  </a:lnTo>
-                  <a:lnTo>
-                    <a:pt x="2721655" y="1985921"/>
-                  </a:lnTo>
-                  <a:lnTo>
-                    <a:pt x="2793278" y="1969465"/>
-                  </a:lnTo>
-                  <a:lnTo>
-                    <a:pt x="2864901" y="1952667"/>
-                  </a:lnTo>
-                  <a:lnTo>
-                    <a:pt x="2936523" y="1935519"/>
-                  </a:lnTo>
-                  <a:lnTo>
-                    <a:pt x="3008146" y="1918015"/>
-                  </a:lnTo>
-                  <a:lnTo>
-                    <a:pt x="3079768" y="1900147"/>
-                  </a:lnTo>
-                  <a:lnTo>
-                    <a:pt x="3151391" y="1881907"/>
-                  </a:lnTo>
-                  <a:lnTo>
-                    <a:pt x="3223013" y="1863288"/>
-                  </a:lnTo>
-                  <a:lnTo>
-                    <a:pt x="3294636" y="1844282"/>
-                  </a:lnTo>
-                  <a:lnTo>
-                    <a:pt x="3366258" y="1824880"/>
-                  </a:lnTo>
-                  <a:lnTo>
-                    <a:pt x="3437881" y="1805075"/>
-                  </a:lnTo>
-                  <a:lnTo>
-                    <a:pt x="3509503" y="1784859"/>
-                  </a:lnTo>
-                  <a:lnTo>
-                    <a:pt x="3581126" y="1764221"/>
-                  </a:lnTo>
-                  <a:lnTo>
-                    <a:pt x="3652748" y="1743155"/>
-                  </a:lnTo>
-                  <a:lnTo>
-                    <a:pt x="3724371" y="1721651"/>
-                  </a:lnTo>
-                  <a:lnTo>
-                    <a:pt x="3795993" y="1699699"/>
-                  </a:lnTo>
-                  <a:lnTo>
-                    <a:pt x="3867616" y="1677291"/>
-                  </a:lnTo>
-                  <a:lnTo>
-                    <a:pt x="3939238" y="1654417"/>
-                  </a:lnTo>
-                  <a:lnTo>
-                    <a:pt x="4010861" y="1631067"/>
-                  </a:lnTo>
-                  <a:lnTo>
-                    <a:pt x="4082483" y="1607232"/>
-                  </a:lnTo>
-                  <a:lnTo>
-                    <a:pt x="4154106" y="1582901"/>
-                  </a:lnTo>
-                  <a:lnTo>
-                    <a:pt x="4225729" y="1558064"/>
-                  </a:lnTo>
-                  <a:lnTo>
-                    <a:pt x="4297351" y="1532711"/>
-                  </a:lnTo>
-                  <a:lnTo>
-                    <a:pt x="4368974" y="1506830"/>
-                  </a:lnTo>
-                  <a:lnTo>
-                    <a:pt x="4440596" y="1480412"/>
+                    <a:pt x="71622" y="2407746"/>
+                  </a:lnTo>
+                  <a:lnTo>
+                    <a:pt x="143245" y="2400062"/>
+                  </a:lnTo>
+                  <a:lnTo>
+                    <a:pt x="214867" y="2392218"/>
+                  </a:lnTo>
+                  <a:lnTo>
+                    <a:pt x="286490" y="2384211"/>
+                  </a:lnTo>
+                  <a:lnTo>
+                    <a:pt x="358112" y="2376037"/>
+                  </a:lnTo>
+                  <a:lnTo>
+                    <a:pt x="429735" y="2367693"/>
+                  </a:lnTo>
+                  <a:lnTo>
+                    <a:pt x="501357" y="2359176"/>
+                  </a:lnTo>
+                  <a:lnTo>
+                    <a:pt x="572980" y="2350482"/>
+                  </a:lnTo>
+                  <a:lnTo>
+                    <a:pt x="644602" y="2341607"/>
+                  </a:lnTo>
+                  <a:lnTo>
+                    <a:pt x="716225" y="2332547"/>
+                  </a:lnTo>
+                  <a:lnTo>
+                    <a:pt x="787847" y="2323299"/>
+                  </a:lnTo>
+                  <a:lnTo>
+                    <a:pt x="859470" y="2313859"/>
+                  </a:lnTo>
+                  <a:lnTo>
+                    <a:pt x="931092" y="2304223"/>
+                  </a:lnTo>
+                  <a:lnTo>
+                    <a:pt x="1002715" y="2294386"/>
+                  </a:lnTo>
+                  <a:lnTo>
+                    <a:pt x="1074337" y="2284344"/>
+                  </a:lnTo>
+                  <a:lnTo>
+                    <a:pt x="1145960" y="2274094"/>
+                  </a:lnTo>
+                  <a:lnTo>
+                    <a:pt x="1217582" y="2263630"/>
+                  </a:lnTo>
+                  <a:lnTo>
+                    <a:pt x="1289205" y="2252949"/>
+                  </a:lnTo>
+                  <a:lnTo>
+                    <a:pt x="1360827" y="2242046"/>
+                  </a:lnTo>
+                  <a:lnTo>
+                    <a:pt x="1432450" y="2230916"/>
+                  </a:lnTo>
+                  <a:lnTo>
+                    <a:pt x="1504073" y="2219554"/>
+                  </a:lnTo>
+                  <a:lnTo>
+                    <a:pt x="1575695" y="2207957"/>
+                  </a:lnTo>
+                  <a:lnTo>
+                    <a:pt x="1647318" y="2196118"/>
+                  </a:lnTo>
+                  <a:lnTo>
+                    <a:pt x="1718940" y="2184033"/>
+                  </a:lnTo>
+                  <a:lnTo>
+                    <a:pt x="1790563" y="2171697"/>
+                  </a:lnTo>
+                  <a:lnTo>
+                    <a:pt x="1862185" y="2159104"/>
+                  </a:lnTo>
+                  <a:lnTo>
+                    <a:pt x="1933808" y="2146249"/>
+                  </a:lnTo>
+                  <a:lnTo>
+                    <a:pt x="2005430" y="2133127"/>
+                  </a:lnTo>
+                  <a:lnTo>
+                    <a:pt x="2077053" y="2119732"/>
+                  </a:lnTo>
+                  <a:lnTo>
+                    <a:pt x="2148675" y="2106058"/>
+                  </a:lnTo>
+                  <a:lnTo>
+                    <a:pt x="2220298" y="2092101"/>
+                  </a:lnTo>
+                  <a:lnTo>
+                    <a:pt x="2291920" y="2077853"/>
+                  </a:lnTo>
+                  <a:lnTo>
+                    <a:pt x="2363543" y="2063308"/>
+                  </a:lnTo>
+                  <a:lnTo>
+                    <a:pt x="2435165" y="2048461"/>
+                  </a:lnTo>
+                  <a:lnTo>
+                    <a:pt x="2506788" y="2033306"/>
+                  </a:lnTo>
+                  <a:lnTo>
+                    <a:pt x="2578410" y="2017835"/>
+                  </a:lnTo>
+                  <a:lnTo>
+                    <a:pt x="2650033" y="2002043"/>
+                  </a:lnTo>
+                  <a:lnTo>
+                    <a:pt x="2721655" y="1985922"/>
+                  </a:lnTo>
+                  <a:lnTo>
+                    <a:pt x="2793278" y="1969466"/>
+                  </a:lnTo>
+                  <a:lnTo>
+                    <a:pt x="2864901" y="1952668"/>
+                  </a:lnTo>
+                  <a:lnTo>
+                    <a:pt x="2936523" y="1935520"/>
+                  </a:lnTo>
+                  <a:lnTo>
+                    <a:pt x="3008146" y="1918016"/>
+                  </a:lnTo>
+                  <a:lnTo>
+                    <a:pt x="3079768" y="1900148"/>
+                  </a:lnTo>
+                  <a:lnTo>
+                    <a:pt x="3151391" y="1881908"/>
+                  </a:lnTo>
+                  <a:lnTo>
+                    <a:pt x="3223013" y="1863289"/>
+                  </a:lnTo>
+                  <a:lnTo>
+                    <a:pt x="3294636" y="1844283"/>
+                  </a:lnTo>
+                  <a:lnTo>
+                    <a:pt x="3366258" y="1824881"/>
+                  </a:lnTo>
+                  <a:lnTo>
+                    <a:pt x="3437881" y="1805076"/>
+                  </a:lnTo>
+                  <a:lnTo>
+                    <a:pt x="3509503" y="1784860"/>
+                  </a:lnTo>
+                  <a:lnTo>
+                    <a:pt x="3581126" y="1764222"/>
+                  </a:lnTo>
+                  <a:lnTo>
+                    <a:pt x="3652748" y="1743156"/>
+                  </a:lnTo>
+                  <a:lnTo>
+                    <a:pt x="3724371" y="1721652"/>
+                  </a:lnTo>
+                  <a:lnTo>
+                    <a:pt x="3795993" y="1699700"/>
+                  </a:lnTo>
+                  <a:lnTo>
+                    <a:pt x="3867616" y="1677292"/>
+                  </a:lnTo>
+                  <a:lnTo>
+                    <a:pt x="3939238" y="1654418"/>
+                  </a:lnTo>
+                  <a:lnTo>
+                    <a:pt x="4010861" y="1631068"/>
+                  </a:lnTo>
+                  <a:lnTo>
+                    <a:pt x="4082483" y="1607233"/>
+                  </a:lnTo>
+                  <a:lnTo>
+                    <a:pt x="4154106" y="1582902"/>
+                  </a:lnTo>
+                  <a:lnTo>
+                    <a:pt x="4225729" y="1558065"/>
+                  </a:lnTo>
+                  <a:lnTo>
+                    <a:pt x="4297351" y="1532712"/>
+                  </a:lnTo>
+                  <a:lnTo>
+                    <a:pt x="4368974" y="1506831"/>
+                  </a:lnTo>
+                  <a:lnTo>
+                    <a:pt x="4440596" y="1480413"/>
                   </a:lnTo>
                   <a:lnTo>
                     <a:pt x="4512219" y="1453444"/>
@@ -4510,22 +4510,22 @@
                     <a:pt x="4583841" y="1425915"/>
                   </a:lnTo>
                   <a:lnTo>
-                    <a:pt x="4655464" y="1397813"/>
-                  </a:lnTo>
-                  <a:lnTo>
-                    <a:pt x="4727086" y="1369127"/>
-                  </a:lnTo>
-                  <a:lnTo>
-                    <a:pt x="4798709" y="1339845"/>
-                  </a:lnTo>
-                  <a:lnTo>
-                    <a:pt x="4870331" y="1309954"/>
-                  </a:lnTo>
-                  <a:lnTo>
-                    <a:pt x="4941954" y="1279441"/>
-                  </a:lnTo>
-                  <a:lnTo>
-                    <a:pt x="5013576" y="1248294"/>
+                    <a:pt x="4655464" y="1397814"/>
+                  </a:lnTo>
+                  <a:lnTo>
+                    <a:pt x="4727086" y="1369128"/>
+                  </a:lnTo>
+                  <a:lnTo>
+                    <a:pt x="4798709" y="1339846"/>
+                  </a:lnTo>
+                  <a:lnTo>
+                    <a:pt x="4870331" y="1309955"/>
+                  </a:lnTo>
+                  <a:lnTo>
+                    <a:pt x="4941954" y="1279442"/>
+                  </a:lnTo>
+                  <a:lnTo>
+                    <a:pt x="5013576" y="1248295"/>
                   </a:lnTo>
                   <a:lnTo>
                     <a:pt x="5085199" y="1216499"/>
@@ -4534,25 +4534,25 @@
                     <a:pt x="5156821" y="1184043"/>
                   </a:lnTo>
                   <a:lnTo>
-                    <a:pt x="5228444" y="1150911"/>
-                  </a:lnTo>
-                  <a:lnTo>
-                    <a:pt x="5300066" y="1117091"/>
-                  </a:lnTo>
-                  <a:lnTo>
-                    <a:pt x="5371689" y="1082568"/>
+                    <a:pt x="5228444" y="1150912"/>
+                  </a:lnTo>
+                  <a:lnTo>
+                    <a:pt x="5300066" y="1117092"/>
+                  </a:lnTo>
+                  <a:lnTo>
+                    <a:pt x="5371689" y="1082569"/>
                   </a:lnTo>
                   <a:lnTo>
                     <a:pt x="5443311" y="1047327"/>
                   </a:lnTo>
                   <a:lnTo>
-                    <a:pt x="5514934" y="1011352"/>
-                  </a:lnTo>
-                  <a:lnTo>
-                    <a:pt x="5586557" y="974630"/>
-                  </a:lnTo>
-                  <a:lnTo>
-                    <a:pt x="5658179" y="937144"/>
+                    <a:pt x="5514934" y="1011353"/>
+                  </a:lnTo>
+                  <a:lnTo>
+                    <a:pt x="5586557" y="974631"/>
+                  </a:lnTo>
+                  <a:lnTo>
+                    <a:pt x="5658179" y="937145"/>
                   </a:lnTo>
                   <a:lnTo>
                     <a:pt x="5729802" y="898879"/>
@@ -4561,7 +4561,7 @@
                     <a:pt x="5801424" y="859818"/>
                   </a:lnTo>
                   <a:lnTo>
-                    <a:pt x="5873047" y="819944"/>
+                    <a:pt x="5873047" y="819945"/>
                   </a:lnTo>
                   <a:lnTo>
                     <a:pt x="5944669" y="779242"/>
@@ -4576,7 +4576,7 @@
                     <a:pt x="6159537" y="651985"/>
                   </a:lnTo>
                   <a:lnTo>
-                    <a:pt x="6231159" y="607789"/>
+                    <a:pt x="6231159" y="607790"/>
                   </a:lnTo>
                   <a:lnTo>
                     <a:pt x="6302782" y="562675"/>
@@ -4585,7 +4585,7 @@
                     <a:pt x="6374404" y="516623"/>
                   </a:lnTo>
                   <a:lnTo>
-                    <a:pt x="6446027" y="469612"/>
+                    <a:pt x="6446027" y="469613"/>
                   </a:lnTo>
                   <a:lnTo>
                     <a:pt x="6517649" y="421625"/>

--- a/docs/plots/carbo/jx_carbo_linsubhr_dosedisc_grade2.pptx
+++ b/docs/plots/carbo/jx_carbo_linsubhr_dosedisc_grade2.pptx
@@ -3132,560 +3132,611 @@
           <p:spPr>
             <a:xfrm>
               <a:off x="1172049" y="1896563"/>
-              <a:ext cx="7090630" cy="3475963"/>
+              <a:ext cx="7090630" cy="3366598"/>
             </a:xfrm>
             <a:custGeom>
               <a:avLst/>
               <a:pathLst>
-                <a:path w="7090630" h="3475963">
+                <a:path w="7090630" h="3366598">
                   <a:moveTo>
-                    <a:pt x="0" y="2910969"/>
+                    <a:pt x="0" y="2445105"/>
                   </a:moveTo>
                   <a:lnTo>
-                    <a:pt x="71622" y="2908191"/>
-                  </a:lnTo>
-                  <a:lnTo>
-                    <a:pt x="143245" y="2905402"/>
-                  </a:lnTo>
-                  <a:lnTo>
-                    <a:pt x="214867" y="2902603"/>
-                  </a:lnTo>
-                  <a:lnTo>
-                    <a:pt x="286490" y="2899794"/>
-                  </a:lnTo>
-                  <a:lnTo>
-                    <a:pt x="358112" y="2896974"/>
-                  </a:lnTo>
-                  <a:lnTo>
-                    <a:pt x="429735" y="2894144"/>
-                  </a:lnTo>
-                  <a:lnTo>
-                    <a:pt x="501357" y="2891303"/>
-                  </a:lnTo>
-                  <a:lnTo>
-                    <a:pt x="572980" y="2888451"/>
-                  </a:lnTo>
-                  <a:lnTo>
-                    <a:pt x="644602" y="2885589"/>
-                  </a:lnTo>
-                  <a:lnTo>
-                    <a:pt x="716225" y="2882716"/>
-                  </a:lnTo>
-                  <a:lnTo>
-                    <a:pt x="787847" y="2879832"/>
-                  </a:lnTo>
-                  <a:lnTo>
-                    <a:pt x="859470" y="2876937"/>
-                  </a:lnTo>
-                  <a:lnTo>
-                    <a:pt x="931092" y="2874032"/>
-                  </a:lnTo>
-                  <a:lnTo>
-                    <a:pt x="1002715" y="2871115"/>
-                  </a:lnTo>
-                  <a:lnTo>
-                    <a:pt x="1074337" y="2868188"/>
-                  </a:lnTo>
-                  <a:lnTo>
-                    <a:pt x="1145960" y="2865250"/>
-                  </a:lnTo>
-                  <a:lnTo>
-                    <a:pt x="1217582" y="2862301"/>
-                  </a:lnTo>
-                  <a:lnTo>
-                    <a:pt x="1289205" y="2859340"/>
-                  </a:lnTo>
-                  <a:lnTo>
-                    <a:pt x="1360827" y="2856369"/>
-                  </a:lnTo>
-                  <a:lnTo>
-                    <a:pt x="1432450" y="2853386"/>
-                  </a:lnTo>
-                  <a:lnTo>
-                    <a:pt x="1504073" y="2850393"/>
-                  </a:lnTo>
-                  <a:lnTo>
-                    <a:pt x="1575695" y="2847388"/>
-                  </a:lnTo>
-                  <a:lnTo>
-                    <a:pt x="1647318" y="2844372"/>
-                  </a:lnTo>
-                  <a:lnTo>
-                    <a:pt x="1718940" y="2841344"/>
-                  </a:lnTo>
-                  <a:lnTo>
-                    <a:pt x="1790563" y="2838305"/>
-                  </a:lnTo>
-                  <a:lnTo>
-                    <a:pt x="1862185" y="2835255"/>
-                  </a:lnTo>
-                  <a:lnTo>
-                    <a:pt x="1933808" y="2832194"/>
-                  </a:lnTo>
-                  <a:lnTo>
-                    <a:pt x="2005430" y="2829121"/>
-                  </a:lnTo>
-                  <a:lnTo>
-                    <a:pt x="2077053" y="2826036"/>
-                  </a:lnTo>
-                  <a:lnTo>
-                    <a:pt x="2148675" y="2822940"/>
-                  </a:lnTo>
-                  <a:lnTo>
-                    <a:pt x="2220298" y="2819832"/>
-                  </a:lnTo>
-                  <a:lnTo>
-                    <a:pt x="2291920" y="2816713"/>
-                  </a:lnTo>
-                  <a:lnTo>
-                    <a:pt x="2363543" y="2813582"/>
-                  </a:lnTo>
-                  <a:lnTo>
-                    <a:pt x="2435165" y="2810439"/>
-                  </a:lnTo>
-                  <a:lnTo>
-                    <a:pt x="2506788" y="2807284"/>
-                  </a:lnTo>
-                  <a:lnTo>
-                    <a:pt x="2578410" y="2804118"/>
-                  </a:lnTo>
-                  <a:lnTo>
-                    <a:pt x="2650033" y="2800940"/>
-                  </a:lnTo>
-                  <a:lnTo>
-                    <a:pt x="2721655" y="2797750"/>
-                  </a:lnTo>
-                  <a:lnTo>
-                    <a:pt x="2793278" y="2794548"/>
-                  </a:lnTo>
-                  <a:lnTo>
-                    <a:pt x="2864901" y="2791334"/>
-                  </a:lnTo>
-                  <a:lnTo>
-                    <a:pt x="2936523" y="2788107"/>
-                  </a:lnTo>
-                  <a:lnTo>
-                    <a:pt x="3008146" y="2784869"/>
-                  </a:lnTo>
-                  <a:lnTo>
-                    <a:pt x="3079768" y="2769385"/>
-                  </a:lnTo>
-                  <a:lnTo>
-                    <a:pt x="3151391" y="2735703"/>
-                  </a:lnTo>
-                  <a:lnTo>
-                    <a:pt x="3223013" y="2700736"/>
-                  </a:lnTo>
-                  <a:lnTo>
-                    <a:pt x="3294636" y="2664436"/>
-                  </a:lnTo>
-                  <a:lnTo>
-                    <a:pt x="3366258" y="2626752"/>
-                  </a:lnTo>
-                  <a:lnTo>
-                    <a:pt x="3437881" y="2587631"/>
-                  </a:lnTo>
-                  <a:lnTo>
-                    <a:pt x="3509503" y="2547017"/>
-                  </a:lnTo>
-                  <a:lnTo>
-                    <a:pt x="3581126" y="2504855"/>
-                  </a:lnTo>
-                  <a:lnTo>
-                    <a:pt x="3652748" y="2461085"/>
-                  </a:lnTo>
-                  <a:lnTo>
-                    <a:pt x="3724371" y="2415646"/>
-                  </a:lnTo>
-                  <a:lnTo>
-                    <a:pt x="3795993" y="2368475"/>
-                  </a:lnTo>
-                  <a:lnTo>
-                    <a:pt x="3867616" y="2319504"/>
-                  </a:lnTo>
-                  <a:lnTo>
-                    <a:pt x="3939238" y="2268666"/>
-                  </a:lnTo>
-                  <a:lnTo>
-                    <a:pt x="4010861" y="2215889"/>
-                  </a:lnTo>
-                  <a:lnTo>
-                    <a:pt x="4082483" y="2161100"/>
-                  </a:lnTo>
-                  <a:lnTo>
-                    <a:pt x="4154106" y="2104221"/>
-                  </a:lnTo>
-                  <a:lnTo>
-                    <a:pt x="4225729" y="2045174"/>
-                  </a:lnTo>
-                  <a:lnTo>
-                    <a:pt x="4297351" y="1983874"/>
-                  </a:lnTo>
-                  <a:lnTo>
-                    <a:pt x="4368974" y="1920237"/>
-                  </a:lnTo>
-                  <a:lnTo>
-                    <a:pt x="4440596" y="1854173"/>
-                  </a:lnTo>
-                  <a:lnTo>
-                    <a:pt x="4512219" y="1785590"/>
-                  </a:lnTo>
-                  <a:lnTo>
-                    <a:pt x="4583841" y="1714392"/>
-                  </a:lnTo>
-                  <a:lnTo>
-                    <a:pt x="4655464" y="1640479"/>
-                  </a:lnTo>
-                  <a:lnTo>
-                    <a:pt x="4727086" y="1563747"/>
-                  </a:lnTo>
-                  <a:lnTo>
-                    <a:pt x="4798709" y="1484088"/>
-                  </a:lnTo>
-                  <a:lnTo>
-                    <a:pt x="4870331" y="1401392"/>
-                  </a:lnTo>
-                  <a:lnTo>
-                    <a:pt x="4941954" y="1315543"/>
-                  </a:lnTo>
-                  <a:lnTo>
-                    <a:pt x="5013576" y="1226420"/>
-                  </a:lnTo>
-                  <a:lnTo>
-                    <a:pt x="5085199" y="1133898"/>
-                  </a:lnTo>
-                  <a:lnTo>
-                    <a:pt x="5156821" y="1037848"/>
-                  </a:lnTo>
-                  <a:lnTo>
-                    <a:pt x="5228444" y="938135"/>
-                  </a:lnTo>
-                  <a:lnTo>
-                    <a:pt x="5300066" y="834620"/>
-                  </a:lnTo>
-                  <a:lnTo>
-                    <a:pt x="5371689" y="727157"/>
-                  </a:lnTo>
-                  <a:lnTo>
-                    <a:pt x="5443311" y="615596"/>
-                  </a:lnTo>
-                  <a:lnTo>
-                    <a:pt x="5514934" y="499781"/>
-                  </a:lnTo>
-                  <a:lnTo>
-                    <a:pt x="5586557" y="379550"/>
-                  </a:lnTo>
-                  <a:lnTo>
-                    <a:pt x="5658179" y="254733"/>
-                  </a:lnTo>
-                  <a:lnTo>
-                    <a:pt x="5729802" y="125157"/>
-                  </a:lnTo>
-                  <a:lnTo>
-                    <a:pt x="5796440" y="0"/>
+                    <a:pt x="71622" y="2454376"/>
+                  </a:lnTo>
+                  <a:lnTo>
+                    <a:pt x="143245" y="2463576"/>
+                  </a:lnTo>
+                  <a:lnTo>
+                    <a:pt x="214867" y="2472705"/>
+                  </a:lnTo>
+                  <a:lnTo>
+                    <a:pt x="286490" y="2481764"/>
+                  </a:lnTo>
+                  <a:lnTo>
+                    <a:pt x="358112" y="2490754"/>
+                  </a:lnTo>
+                  <a:lnTo>
+                    <a:pt x="429735" y="2499674"/>
+                  </a:lnTo>
+                  <a:lnTo>
+                    <a:pt x="501357" y="2508526"/>
+                  </a:lnTo>
+                  <a:lnTo>
+                    <a:pt x="572980" y="2517310"/>
+                  </a:lnTo>
+                  <a:lnTo>
+                    <a:pt x="644602" y="2526027"/>
+                  </a:lnTo>
+                  <a:lnTo>
+                    <a:pt x="716225" y="2534676"/>
+                  </a:lnTo>
+                  <a:lnTo>
+                    <a:pt x="787847" y="2543259"/>
+                  </a:lnTo>
+                  <a:lnTo>
+                    <a:pt x="859470" y="2551777"/>
+                  </a:lnTo>
+                  <a:lnTo>
+                    <a:pt x="931092" y="2560229"/>
+                  </a:lnTo>
+                  <a:lnTo>
+                    <a:pt x="1002715" y="2568616"/>
+                  </a:lnTo>
+                  <a:lnTo>
+                    <a:pt x="1074337" y="2576938"/>
+                  </a:lnTo>
+                  <a:lnTo>
+                    <a:pt x="1145960" y="2585197"/>
+                  </a:lnTo>
+                  <a:lnTo>
+                    <a:pt x="1217582" y="2593393"/>
+                  </a:lnTo>
+                  <a:lnTo>
+                    <a:pt x="1289205" y="2601525"/>
+                  </a:lnTo>
+                  <a:lnTo>
+                    <a:pt x="1360827" y="2609595"/>
+                  </a:lnTo>
+                  <a:lnTo>
+                    <a:pt x="1432450" y="2617603"/>
+                  </a:lnTo>
+                  <a:lnTo>
+                    <a:pt x="1504073" y="2625550"/>
+                  </a:lnTo>
+                  <a:lnTo>
+                    <a:pt x="1575695" y="2633435"/>
+                  </a:lnTo>
+                  <a:lnTo>
+                    <a:pt x="1647318" y="2641260"/>
+                  </a:lnTo>
+                  <a:lnTo>
+                    <a:pt x="1718940" y="2649025"/>
+                  </a:lnTo>
+                  <a:lnTo>
+                    <a:pt x="1790563" y="2656730"/>
+                  </a:lnTo>
+                  <a:lnTo>
+                    <a:pt x="1862185" y="2664377"/>
+                  </a:lnTo>
+                  <a:lnTo>
+                    <a:pt x="1933808" y="2671964"/>
+                  </a:lnTo>
+                  <a:lnTo>
+                    <a:pt x="2005430" y="2679493"/>
+                  </a:lnTo>
+                  <a:lnTo>
+                    <a:pt x="2077053" y="2686965"/>
+                  </a:lnTo>
+                  <a:lnTo>
+                    <a:pt x="2148675" y="2694379"/>
+                  </a:lnTo>
+                  <a:lnTo>
+                    <a:pt x="2220298" y="2701736"/>
+                  </a:lnTo>
+                  <a:lnTo>
+                    <a:pt x="2291920" y="2709036"/>
+                  </a:lnTo>
+                  <a:lnTo>
+                    <a:pt x="2363543" y="2716281"/>
+                  </a:lnTo>
+                  <a:lnTo>
+                    <a:pt x="2435165" y="2723470"/>
+                  </a:lnTo>
+                  <a:lnTo>
+                    <a:pt x="2506788" y="2730604"/>
+                  </a:lnTo>
+                  <a:lnTo>
+                    <a:pt x="2578410" y="2737683"/>
+                  </a:lnTo>
+                  <a:lnTo>
+                    <a:pt x="2650033" y="2744707"/>
+                  </a:lnTo>
+                  <a:lnTo>
+                    <a:pt x="2721655" y="2751678"/>
+                  </a:lnTo>
+                  <a:lnTo>
+                    <a:pt x="2793278" y="2758595"/>
+                  </a:lnTo>
+                  <a:lnTo>
+                    <a:pt x="2864901" y="2765459"/>
+                  </a:lnTo>
+                  <a:lnTo>
+                    <a:pt x="2936523" y="2772271"/>
+                  </a:lnTo>
+                  <a:lnTo>
+                    <a:pt x="3008146" y="2779030"/>
+                  </a:lnTo>
+                  <a:lnTo>
+                    <a:pt x="3079768" y="2773513"/>
+                  </a:lnTo>
+                  <a:lnTo>
+                    <a:pt x="3151391" y="2750256"/>
+                  </a:lnTo>
+                  <a:lnTo>
+                    <a:pt x="3223013" y="2726383"/>
+                  </a:lnTo>
+                  <a:lnTo>
+                    <a:pt x="3294636" y="2701879"/>
+                  </a:lnTo>
+                  <a:lnTo>
+                    <a:pt x="3366258" y="2676726"/>
+                  </a:lnTo>
+                  <a:lnTo>
+                    <a:pt x="3437881" y="2650908"/>
+                  </a:lnTo>
+                  <a:lnTo>
+                    <a:pt x="3509503" y="2624407"/>
+                  </a:lnTo>
+                  <a:lnTo>
+                    <a:pt x="3581126" y="2597205"/>
+                  </a:lnTo>
+                  <a:lnTo>
+                    <a:pt x="3652748" y="2569283"/>
+                  </a:lnTo>
+                  <a:lnTo>
+                    <a:pt x="3724371" y="2540623"/>
+                  </a:lnTo>
+                  <a:lnTo>
+                    <a:pt x="3795993" y="2511204"/>
+                  </a:lnTo>
+                  <a:lnTo>
+                    <a:pt x="3867616" y="2481008"/>
+                  </a:lnTo>
+                  <a:lnTo>
+                    <a:pt x="3939238" y="2450012"/>
+                  </a:lnTo>
+                  <a:lnTo>
+                    <a:pt x="4010861" y="2418196"/>
+                  </a:lnTo>
+                  <a:lnTo>
+                    <a:pt x="4082483" y="2385539"/>
+                  </a:lnTo>
+                  <a:lnTo>
+                    <a:pt x="4154106" y="2352017"/>
+                  </a:lnTo>
+                  <a:lnTo>
+                    <a:pt x="4225729" y="2317609"/>
+                  </a:lnTo>
+                  <a:lnTo>
+                    <a:pt x="4297351" y="2282291"/>
+                  </a:lnTo>
+                  <a:lnTo>
+                    <a:pt x="4368974" y="2246038"/>
+                  </a:lnTo>
+                  <a:lnTo>
+                    <a:pt x="4440596" y="2208826"/>
+                  </a:lnTo>
+                  <a:lnTo>
+                    <a:pt x="4512219" y="2170630"/>
+                  </a:lnTo>
+                  <a:lnTo>
+                    <a:pt x="4583841" y="2131423"/>
+                  </a:lnTo>
+                  <a:lnTo>
+                    <a:pt x="4655464" y="2091179"/>
+                  </a:lnTo>
+                  <a:lnTo>
+                    <a:pt x="4727086" y="2049870"/>
+                  </a:lnTo>
+                  <a:lnTo>
+                    <a:pt x="4798709" y="2007469"/>
+                  </a:lnTo>
+                  <a:lnTo>
+                    <a:pt x="4870331" y="1963946"/>
+                  </a:lnTo>
+                  <a:lnTo>
+                    <a:pt x="4941954" y="1919271"/>
+                  </a:lnTo>
+                  <a:lnTo>
+                    <a:pt x="5013576" y="1873414"/>
+                  </a:lnTo>
+                  <a:lnTo>
+                    <a:pt x="5085199" y="1826345"/>
+                  </a:lnTo>
+                  <a:lnTo>
+                    <a:pt x="5156821" y="1778030"/>
+                  </a:lnTo>
+                  <a:lnTo>
+                    <a:pt x="5228444" y="1728437"/>
+                  </a:lnTo>
+                  <a:lnTo>
+                    <a:pt x="5300066" y="1677532"/>
+                  </a:lnTo>
+                  <a:lnTo>
+                    <a:pt x="5371689" y="1625280"/>
+                  </a:lnTo>
+                  <a:lnTo>
+                    <a:pt x="5443311" y="1571646"/>
+                  </a:lnTo>
+                  <a:lnTo>
+                    <a:pt x="5514934" y="1516593"/>
+                  </a:lnTo>
+                  <a:lnTo>
+                    <a:pt x="5586557" y="1460084"/>
+                  </a:lnTo>
+                  <a:lnTo>
+                    <a:pt x="5658179" y="1402079"/>
+                  </a:lnTo>
+                  <a:lnTo>
+                    <a:pt x="5729802" y="1342541"/>
+                  </a:lnTo>
+                  <a:lnTo>
+                    <a:pt x="5801424" y="1281427"/>
+                  </a:lnTo>
+                  <a:lnTo>
+                    <a:pt x="5873047" y="1218696"/>
+                  </a:lnTo>
+                  <a:lnTo>
+                    <a:pt x="5944669" y="1154306"/>
+                  </a:lnTo>
+                  <a:lnTo>
+                    <a:pt x="6016292" y="1088212"/>
+                  </a:lnTo>
+                  <a:lnTo>
+                    <a:pt x="6087914" y="1020370"/>
+                  </a:lnTo>
+                  <a:lnTo>
+                    <a:pt x="6159537" y="950733"/>
+                  </a:lnTo>
+                  <a:lnTo>
+                    <a:pt x="6231159" y="879253"/>
+                  </a:lnTo>
+                  <a:lnTo>
+                    <a:pt x="6302782" y="805883"/>
+                  </a:lnTo>
+                  <a:lnTo>
+                    <a:pt x="6374404" y="730572"/>
+                  </a:lnTo>
+                  <a:lnTo>
+                    <a:pt x="6446027" y="653268"/>
+                  </a:lnTo>
+                  <a:lnTo>
+                    <a:pt x="6517649" y="573919"/>
+                  </a:lnTo>
+                  <a:lnTo>
+                    <a:pt x="6589272" y="492471"/>
+                  </a:lnTo>
+                  <a:lnTo>
+                    <a:pt x="6660894" y="408869"/>
+                  </a:lnTo>
+                  <a:lnTo>
+                    <a:pt x="6732517" y="323055"/>
+                  </a:lnTo>
+                  <a:lnTo>
+                    <a:pt x="6804139" y="234970"/>
+                  </a:lnTo>
+                  <a:lnTo>
+                    <a:pt x="6875762" y="144555"/>
+                  </a:lnTo>
+                  <a:lnTo>
+                    <a:pt x="6947385" y="51748"/>
+                  </a:lnTo>
+                  <a:lnTo>
+                    <a:pt x="6986292" y="0"/>
                   </a:lnTo>
                   <a:lnTo>
                     <a:pt x="7090630" y="0"/>
                   </a:lnTo>
                   <a:lnTo>
-                    <a:pt x="7090630" y="2578766"/>
-                  </a:lnTo>
-                  <a:lnTo>
-                    <a:pt x="7019007" y="2582773"/>
-                  </a:lnTo>
-                  <a:lnTo>
-                    <a:pt x="6947385" y="2586766"/>
-                  </a:lnTo>
-                  <a:lnTo>
-                    <a:pt x="6875762" y="2590743"/>
-                  </a:lnTo>
-                  <a:lnTo>
-                    <a:pt x="6804139" y="2594706"/>
-                  </a:lnTo>
-                  <a:lnTo>
-                    <a:pt x="6732517" y="2598654"/>
-                  </a:lnTo>
-                  <a:lnTo>
-                    <a:pt x="6660894" y="2602587"/>
-                  </a:lnTo>
-                  <a:lnTo>
-                    <a:pt x="6589272" y="2606505"/>
-                  </a:lnTo>
-                  <a:lnTo>
-                    <a:pt x="6517649" y="2610409"/>
-                  </a:lnTo>
-                  <a:lnTo>
-                    <a:pt x="6446027" y="2614298"/>
-                  </a:lnTo>
-                  <a:lnTo>
-                    <a:pt x="6374404" y="2618173"/>
-                  </a:lnTo>
-                  <a:lnTo>
-                    <a:pt x="6302782" y="2622033"/>
-                  </a:lnTo>
-                  <a:lnTo>
-                    <a:pt x="6231159" y="2625879"/>
-                  </a:lnTo>
-                  <a:lnTo>
-                    <a:pt x="6159537" y="2629710"/>
-                  </a:lnTo>
-                  <a:lnTo>
-                    <a:pt x="6087914" y="2633528"/>
-                  </a:lnTo>
-                  <a:lnTo>
-                    <a:pt x="6016292" y="2637331"/>
-                  </a:lnTo>
-                  <a:lnTo>
-                    <a:pt x="5944669" y="2641119"/>
-                  </a:lnTo>
-                  <a:lnTo>
-                    <a:pt x="5873047" y="2644894"/>
-                  </a:lnTo>
-                  <a:lnTo>
-                    <a:pt x="5801424" y="2648654"/>
-                  </a:lnTo>
-                  <a:lnTo>
-                    <a:pt x="5729802" y="2652401"/>
-                  </a:lnTo>
-                  <a:lnTo>
-                    <a:pt x="5658179" y="2656133"/>
-                  </a:lnTo>
-                  <a:lnTo>
-                    <a:pt x="5586557" y="2659852"/>
-                  </a:lnTo>
-                  <a:lnTo>
-                    <a:pt x="5514934" y="2663557"/>
-                  </a:lnTo>
-                  <a:lnTo>
-                    <a:pt x="5443311" y="2667248"/>
-                  </a:lnTo>
-                  <a:lnTo>
-                    <a:pt x="5371689" y="2670925"/>
-                  </a:lnTo>
-                  <a:lnTo>
-                    <a:pt x="5300066" y="2674588"/>
-                  </a:lnTo>
-                  <a:lnTo>
-                    <a:pt x="5228444" y="2678238"/>
-                  </a:lnTo>
-                  <a:lnTo>
-                    <a:pt x="5156821" y="2681874"/>
-                  </a:lnTo>
-                  <a:lnTo>
-                    <a:pt x="5085199" y="2685496"/>
-                  </a:lnTo>
-                  <a:lnTo>
-                    <a:pt x="5013576" y="2689105"/>
-                  </a:lnTo>
-                  <a:lnTo>
-                    <a:pt x="4941954" y="2692701"/>
-                  </a:lnTo>
-                  <a:lnTo>
-                    <a:pt x="4870331" y="2696283"/>
-                  </a:lnTo>
-                  <a:lnTo>
-                    <a:pt x="4798709" y="2699852"/>
-                  </a:lnTo>
-                  <a:lnTo>
-                    <a:pt x="4727086" y="2703407"/>
-                  </a:lnTo>
-                  <a:lnTo>
-                    <a:pt x="4655464" y="2706950"/>
-                  </a:lnTo>
-                  <a:lnTo>
-                    <a:pt x="4583841" y="2710478"/>
-                  </a:lnTo>
-                  <a:lnTo>
-                    <a:pt x="4512219" y="2713994"/>
-                  </a:lnTo>
-                  <a:lnTo>
-                    <a:pt x="4440596" y="2717497"/>
-                  </a:lnTo>
-                  <a:lnTo>
-                    <a:pt x="4368974" y="2720987"/>
-                  </a:lnTo>
-                  <a:lnTo>
-                    <a:pt x="4297351" y="2724463"/>
-                  </a:lnTo>
-                  <a:lnTo>
-                    <a:pt x="4225729" y="2727927"/>
-                  </a:lnTo>
-                  <a:lnTo>
-                    <a:pt x="4154106" y="2731377"/>
-                  </a:lnTo>
-                  <a:lnTo>
-                    <a:pt x="4082483" y="2734815"/>
-                  </a:lnTo>
-                  <a:lnTo>
-                    <a:pt x="4010861" y="2738240"/>
-                  </a:lnTo>
-                  <a:lnTo>
-                    <a:pt x="3939238" y="2741652"/>
-                  </a:lnTo>
-                  <a:lnTo>
-                    <a:pt x="3867616" y="2745052"/>
-                  </a:lnTo>
-                  <a:lnTo>
-                    <a:pt x="3795993" y="2748439"/>
-                  </a:lnTo>
-                  <a:lnTo>
-                    <a:pt x="3724371" y="2751813"/>
-                  </a:lnTo>
-                  <a:lnTo>
-                    <a:pt x="3652748" y="2755174"/>
-                  </a:lnTo>
-                  <a:lnTo>
-                    <a:pt x="3581126" y="2758523"/>
-                  </a:lnTo>
-                  <a:lnTo>
-                    <a:pt x="3509503" y="2761860"/>
-                  </a:lnTo>
-                  <a:lnTo>
-                    <a:pt x="3437881" y="2765184"/>
-                  </a:lnTo>
-                  <a:lnTo>
-                    <a:pt x="3366258" y="2768495"/>
-                  </a:lnTo>
-                  <a:lnTo>
-                    <a:pt x="3294636" y="2771795"/>
-                  </a:lnTo>
-                  <a:lnTo>
-                    <a:pt x="3223013" y="2775082"/>
-                  </a:lnTo>
-                  <a:lnTo>
-                    <a:pt x="3151391" y="2778356"/>
-                  </a:lnTo>
-                  <a:lnTo>
-                    <a:pt x="3079768" y="2781619"/>
-                  </a:lnTo>
-                  <a:lnTo>
-                    <a:pt x="3008146" y="2801830"/>
-                  </a:lnTo>
-                  <a:lnTo>
-                    <a:pt x="2936523" y="2833084"/>
-                  </a:lnTo>
-                  <a:lnTo>
-                    <a:pt x="2864901" y="2863189"/>
-                  </a:lnTo>
-                  <a:lnTo>
-                    <a:pt x="2793278" y="2892188"/>
-                  </a:lnTo>
-                  <a:lnTo>
-                    <a:pt x="2721655" y="2920122"/>
-                  </a:lnTo>
-                  <a:lnTo>
-                    <a:pt x="2650033" y="2947030"/>
-                  </a:lnTo>
-                  <a:lnTo>
-                    <a:pt x="2578410" y="2972949"/>
-                  </a:lnTo>
-                  <a:lnTo>
-                    <a:pt x="2506788" y="2997917"/>
-                  </a:lnTo>
-                  <a:lnTo>
-                    <a:pt x="2435165" y="3021967"/>
-                  </a:lnTo>
-                  <a:lnTo>
-                    <a:pt x="2363543" y="3045134"/>
-                  </a:lnTo>
-                  <a:lnTo>
-                    <a:pt x="2291920" y="3067450"/>
-                  </a:lnTo>
-                  <a:lnTo>
-                    <a:pt x="2220298" y="3088946"/>
-                  </a:lnTo>
-                  <a:lnTo>
-                    <a:pt x="2148675" y="3109652"/>
-                  </a:lnTo>
-                  <a:lnTo>
-                    <a:pt x="2077053" y="3129598"/>
-                  </a:lnTo>
-                  <a:lnTo>
-                    <a:pt x="2005430" y="3148811"/>
-                  </a:lnTo>
-                  <a:lnTo>
-                    <a:pt x="1933808" y="3167319"/>
-                  </a:lnTo>
-                  <a:lnTo>
-                    <a:pt x="1862185" y="3185146"/>
-                  </a:lnTo>
-                  <a:lnTo>
-                    <a:pt x="1790563" y="3202319"/>
-                  </a:lnTo>
-                  <a:lnTo>
-                    <a:pt x="1718940" y="3218861"/>
-                  </a:lnTo>
-                  <a:lnTo>
-                    <a:pt x="1647318" y="3234795"/>
-                  </a:lnTo>
-                  <a:lnTo>
-                    <a:pt x="1575695" y="3250144"/>
-                  </a:lnTo>
-                  <a:lnTo>
-                    <a:pt x="1504073" y="3264929"/>
-                  </a:lnTo>
-                  <a:lnTo>
-                    <a:pt x="1432450" y="3279171"/>
-                  </a:lnTo>
-                  <a:lnTo>
-                    <a:pt x="1360827" y="3292890"/>
-                  </a:lnTo>
-                  <a:lnTo>
-                    <a:pt x="1289205" y="3306105"/>
-                  </a:lnTo>
-                  <a:lnTo>
-                    <a:pt x="1217582" y="3318835"/>
-                  </a:lnTo>
-                  <a:lnTo>
-                    <a:pt x="1145960" y="3331096"/>
-                  </a:lnTo>
-                  <a:lnTo>
-                    <a:pt x="1074337" y="3342908"/>
-                  </a:lnTo>
-                  <a:lnTo>
-                    <a:pt x="1002715" y="3354286"/>
-                  </a:lnTo>
-                  <a:lnTo>
-                    <a:pt x="931092" y="3365245"/>
-                  </a:lnTo>
-                  <a:lnTo>
-                    <a:pt x="859470" y="3375802"/>
-                  </a:lnTo>
-                  <a:lnTo>
-                    <a:pt x="787847" y="3385972"/>
-                  </a:lnTo>
-                  <a:lnTo>
-                    <a:pt x="716225" y="3395767"/>
-                  </a:lnTo>
-                  <a:lnTo>
-                    <a:pt x="644602" y="3405203"/>
-                  </a:lnTo>
-                  <a:lnTo>
-                    <a:pt x="572980" y="3414292"/>
-                  </a:lnTo>
-                  <a:lnTo>
-                    <a:pt x="501357" y="3423048"/>
-                  </a:lnTo>
-                  <a:lnTo>
-                    <a:pt x="429735" y="3431482"/>
-                  </a:lnTo>
-                  <a:lnTo>
-                    <a:pt x="358112" y="3439606"/>
-                  </a:lnTo>
-                  <a:lnTo>
-                    <a:pt x="286490" y="3447431"/>
-                  </a:lnTo>
-                  <a:lnTo>
-                    <a:pt x="214867" y="3454969"/>
-                  </a:lnTo>
-                  <a:lnTo>
-                    <a:pt x="143245" y="3462231"/>
-                  </a:lnTo>
-                  <a:lnTo>
-                    <a:pt x="71622" y="3469225"/>
-                  </a:lnTo>
-                  <a:lnTo>
-                    <a:pt x="0" y="3475963"/>
+                    <a:pt x="7090630" y="3089615"/>
+                  </a:lnTo>
+                  <a:lnTo>
+                    <a:pt x="7019007" y="3085259"/>
+                  </a:lnTo>
+                  <a:lnTo>
+                    <a:pt x="6947385" y="3080869"/>
+                  </a:lnTo>
+                  <a:lnTo>
+                    <a:pt x="6875762" y="3076445"/>
+                  </a:lnTo>
+                  <a:lnTo>
+                    <a:pt x="6804139" y="3071987"/>
+                  </a:lnTo>
+                  <a:lnTo>
+                    <a:pt x="6732517" y="3067495"/>
+                  </a:lnTo>
+                  <a:lnTo>
+                    <a:pt x="6660894" y="3062967"/>
+                  </a:lnTo>
+                  <a:lnTo>
+                    <a:pt x="6589272" y="3058405"/>
+                  </a:lnTo>
+                  <a:lnTo>
+                    <a:pt x="6517649" y="3053808"/>
+                  </a:lnTo>
+                  <a:lnTo>
+                    <a:pt x="6446027" y="3049174"/>
+                  </a:lnTo>
+                  <a:lnTo>
+                    <a:pt x="6374404" y="3044505"/>
+                  </a:lnTo>
+                  <a:lnTo>
+                    <a:pt x="6302782" y="3039800"/>
+                  </a:lnTo>
+                  <a:lnTo>
+                    <a:pt x="6231159" y="3035059"/>
+                  </a:lnTo>
+                  <a:lnTo>
+                    <a:pt x="6159537" y="3030281"/>
+                  </a:lnTo>
+                  <a:lnTo>
+                    <a:pt x="6087914" y="3025465"/>
+                  </a:lnTo>
+                  <a:lnTo>
+                    <a:pt x="6016292" y="3020613"/>
+                  </a:lnTo>
+                  <a:lnTo>
+                    <a:pt x="5944669" y="3015723"/>
+                  </a:lnTo>
+                  <a:lnTo>
+                    <a:pt x="5873047" y="3010795"/>
+                  </a:lnTo>
+                  <a:lnTo>
+                    <a:pt x="5801424" y="3005829"/>
+                  </a:lnTo>
+                  <a:lnTo>
+                    <a:pt x="5729802" y="3000825"/>
+                  </a:lnTo>
+                  <a:lnTo>
+                    <a:pt x="5658179" y="2995782"/>
+                  </a:lnTo>
+                  <a:lnTo>
+                    <a:pt x="5586557" y="2990700"/>
+                  </a:lnTo>
+                  <a:lnTo>
+                    <a:pt x="5514934" y="2985578"/>
+                  </a:lnTo>
+                  <a:lnTo>
+                    <a:pt x="5443311" y="2980417"/>
+                  </a:lnTo>
+                  <a:lnTo>
+                    <a:pt x="5371689" y="2975216"/>
+                  </a:lnTo>
+                  <a:lnTo>
+                    <a:pt x="5300066" y="2969975"/>
+                  </a:lnTo>
+                  <a:lnTo>
+                    <a:pt x="5228444" y="2964693"/>
+                  </a:lnTo>
+                  <a:lnTo>
+                    <a:pt x="5156821" y="2959371"/>
+                  </a:lnTo>
+                  <a:lnTo>
+                    <a:pt x="5085199" y="2954007"/>
+                  </a:lnTo>
+                  <a:lnTo>
+                    <a:pt x="5013576" y="2948602"/>
+                  </a:lnTo>
+                  <a:lnTo>
+                    <a:pt x="4941954" y="2943154"/>
+                  </a:lnTo>
+                  <a:lnTo>
+                    <a:pt x="4870331" y="2937665"/>
+                  </a:lnTo>
+                  <a:lnTo>
+                    <a:pt x="4798709" y="2932133"/>
+                  </a:lnTo>
+                  <a:lnTo>
+                    <a:pt x="4727086" y="2926559"/>
+                  </a:lnTo>
+                  <a:lnTo>
+                    <a:pt x="4655464" y="2920941"/>
+                  </a:lnTo>
+                  <a:lnTo>
+                    <a:pt x="4583841" y="2915280"/>
+                  </a:lnTo>
+                  <a:lnTo>
+                    <a:pt x="4512219" y="2909575"/>
+                  </a:lnTo>
+                  <a:lnTo>
+                    <a:pt x="4440596" y="2903826"/>
+                  </a:lnTo>
+                  <a:lnTo>
+                    <a:pt x="4368974" y="2898033"/>
+                  </a:lnTo>
+                  <a:lnTo>
+                    <a:pt x="4297351" y="2892194"/>
+                  </a:lnTo>
+                  <a:lnTo>
+                    <a:pt x="4225729" y="2886311"/>
+                  </a:lnTo>
+                  <a:lnTo>
+                    <a:pt x="4154106" y="2880382"/>
+                  </a:lnTo>
+                  <a:lnTo>
+                    <a:pt x="4082483" y="2874407"/>
+                  </a:lnTo>
+                  <a:lnTo>
+                    <a:pt x="4010861" y="2868385"/>
+                  </a:lnTo>
+                  <a:lnTo>
+                    <a:pt x="3939238" y="2862318"/>
+                  </a:lnTo>
+                  <a:lnTo>
+                    <a:pt x="3867616" y="2856203"/>
+                  </a:lnTo>
+                  <a:lnTo>
+                    <a:pt x="3795993" y="2850041"/>
+                  </a:lnTo>
+                  <a:lnTo>
+                    <a:pt x="3724371" y="2843831"/>
+                  </a:lnTo>
+                  <a:lnTo>
+                    <a:pt x="3652748" y="2837574"/>
+                  </a:lnTo>
+                  <a:lnTo>
+                    <a:pt x="3581126" y="2831267"/>
+                  </a:lnTo>
+                  <a:lnTo>
+                    <a:pt x="3509503" y="2824912"/>
+                  </a:lnTo>
+                  <a:lnTo>
+                    <a:pt x="3437881" y="2818508"/>
+                  </a:lnTo>
+                  <a:lnTo>
+                    <a:pt x="3366258" y="2812055"/>
+                  </a:lnTo>
+                  <a:lnTo>
+                    <a:pt x="3294636" y="2805551"/>
+                  </a:lnTo>
+                  <a:lnTo>
+                    <a:pt x="3223013" y="2798997"/>
+                  </a:lnTo>
+                  <a:lnTo>
+                    <a:pt x="3151391" y="2792393"/>
+                  </a:lnTo>
+                  <a:lnTo>
+                    <a:pt x="3079768" y="2785737"/>
+                  </a:lnTo>
+                  <a:lnTo>
+                    <a:pt x="3008146" y="2796171"/>
+                  </a:lnTo>
+                  <a:lnTo>
+                    <a:pt x="2936523" y="2818245"/>
+                  </a:lnTo>
+                  <a:lnTo>
+                    <a:pt x="2864901" y="2839750"/>
+                  </a:lnTo>
+                  <a:lnTo>
+                    <a:pt x="2793278" y="2860701"/>
+                  </a:lnTo>
+                  <a:lnTo>
+                    <a:pt x="2721655" y="2881112"/>
+                  </a:lnTo>
+                  <a:lnTo>
+                    <a:pt x="2650033" y="2900997"/>
+                  </a:lnTo>
+                  <a:lnTo>
+                    <a:pt x="2578410" y="2920369"/>
+                  </a:lnTo>
+                  <a:lnTo>
+                    <a:pt x="2506788" y="2939243"/>
+                  </a:lnTo>
+                  <a:lnTo>
+                    <a:pt x="2435165" y="2957629"/>
+                  </a:lnTo>
+                  <a:lnTo>
+                    <a:pt x="2363543" y="2975542"/>
+                  </a:lnTo>
+                  <a:lnTo>
+                    <a:pt x="2291920" y="2992993"/>
+                  </a:lnTo>
+                  <a:lnTo>
+                    <a:pt x="2220298" y="3009994"/>
+                  </a:lnTo>
+                  <a:lnTo>
+                    <a:pt x="2148675" y="3026558"/>
+                  </a:lnTo>
+                  <a:lnTo>
+                    <a:pt x="2077053" y="3042694"/>
+                  </a:lnTo>
+                  <a:lnTo>
+                    <a:pt x="2005430" y="3058414"/>
+                  </a:lnTo>
+                  <a:lnTo>
+                    <a:pt x="1933808" y="3073729"/>
+                  </a:lnTo>
+                  <a:lnTo>
+                    <a:pt x="1862185" y="3088650"/>
+                  </a:lnTo>
+                  <a:lnTo>
+                    <a:pt x="1790563" y="3103186"/>
+                  </a:lnTo>
+                  <a:lnTo>
+                    <a:pt x="1718940" y="3117347"/>
+                  </a:lnTo>
+                  <a:lnTo>
+                    <a:pt x="1647318" y="3131143"/>
+                  </a:lnTo>
+                  <a:lnTo>
+                    <a:pt x="1575695" y="3144584"/>
+                  </a:lnTo>
+                  <a:lnTo>
+                    <a:pt x="1504073" y="3157679"/>
+                  </a:lnTo>
+                  <a:lnTo>
+                    <a:pt x="1432450" y="3170435"/>
+                  </a:lnTo>
+                  <a:lnTo>
+                    <a:pt x="1360827" y="3182863"/>
+                  </a:lnTo>
+                  <a:lnTo>
+                    <a:pt x="1289205" y="3194971"/>
+                  </a:lnTo>
+                  <a:lnTo>
+                    <a:pt x="1217582" y="3206767"/>
+                  </a:lnTo>
+                  <a:lnTo>
+                    <a:pt x="1145960" y="3218259"/>
+                  </a:lnTo>
+                  <a:lnTo>
+                    <a:pt x="1074337" y="3229454"/>
+                  </a:lnTo>
+                  <a:lnTo>
+                    <a:pt x="1002715" y="3240361"/>
+                  </a:lnTo>
+                  <a:lnTo>
+                    <a:pt x="931092" y="3250987"/>
+                  </a:lnTo>
+                  <a:lnTo>
+                    <a:pt x="859470" y="3261339"/>
+                  </a:lnTo>
+                  <a:lnTo>
+                    <a:pt x="787847" y="3271424"/>
+                  </a:lnTo>
+                  <a:lnTo>
+                    <a:pt x="716225" y="3281249"/>
+                  </a:lnTo>
+                  <a:lnTo>
+                    <a:pt x="644602" y="3290821"/>
+                  </a:lnTo>
+                  <a:lnTo>
+                    <a:pt x="572980" y="3300147"/>
+                  </a:lnTo>
+                  <a:lnTo>
+                    <a:pt x="501357" y="3309232"/>
+                  </a:lnTo>
+                  <a:lnTo>
+                    <a:pt x="429735" y="3318083"/>
+                  </a:lnTo>
+                  <a:lnTo>
+                    <a:pt x="358112" y="3326705"/>
+                  </a:lnTo>
+                  <a:lnTo>
+                    <a:pt x="286490" y="3335106"/>
+                  </a:lnTo>
+                  <a:lnTo>
+                    <a:pt x="214867" y="3343290"/>
+                  </a:lnTo>
+                  <a:lnTo>
+                    <a:pt x="143245" y="3351263"/>
+                  </a:lnTo>
+                  <a:lnTo>
+                    <a:pt x="71622" y="3359030"/>
+                  </a:lnTo>
+                  <a:lnTo>
+                    <a:pt x="0" y="3366598"/>
                   </a:lnTo>
                   <a:close/>
                 </a:path>
@@ -3712,257 +3763,308 @@
           <p:spPr>
             <a:xfrm>
               <a:off x="1172049" y="1896563"/>
-              <a:ext cx="5796440" cy="2910969"/>
+              <a:ext cx="6986292" cy="2779030"/>
             </a:xfrm>
             <a:custGeom>
               <a:avLst/>
               <a:pathLst>
-                <a:path w="5796440" h="2910969">
+                <a:path w="6986292" h="2779030">
                   <a:moveTo>
-                    <a:pt x="0" y="2910969"/>
+                    <a:pt x="0" y="2445105"/>
                   </a:moveTo>
                   <a:lnTo>
-                    <a:pt x="71622" y="2908191"/>
-                  </a:lnTo>
-                  <a:lnTo>
-                    <a:pt x="143245" y="2905402"/>
-                  </a:lnTo>
-                  <a:lnTo>
-                    <a:pt x="214867" y="2902603"/>
-                  </a:lnTo>
-                  <a:lnTo>
-                    <a:pt x="286490" y="2899794"/>
-                  </a:lnTo>
-                  <a:lnTo>
-                    <a:pt x="358112" y="2896974"/>
-                  </a:lnTo>
-                  <a:lnTo>
-                    <a:pt x="429735" y="2894144"/>
-                  </a:lnTo>
-                  <a:lnTo>
-                    <a:pt x="501357" y="2891303"/>
-                  </a:lnTo>
-                  <a:lnTo>
-                    <a:pt x="572980" y="2888451"/>
-                  </a:lnTo>
-                  <a:lnTo>
-                    <a:pt x="644602" y="2885589"/>
-                  </a:lnTo>
-                  <a:lnTo>
-                    <a:pt x="716225" y="2882716"/>
-                  </a:lnTo>
-                  <a:lnTo>
-                    <a:pt x="787847" y="2879832"/>
-                  </a:lnTo>
-                  <a:lnTo>
-                    <a:pt x="859470" y="2876937"/>
-                  </a:lnTo>
-                  <a:lnTo>
-                    <a:pt x="931092" y="2874032"/>
-                  </a:lnTo>
-                  <a:lnTo>
-                    <a:pt x="1002715" y="2871115"/>
-                  </a:lnTo>
-                  <a:lnTo>
-                    <a:pt x="1074337" y="2868188"/>
-                  </a:lnTo>
-                  <a:lnTo>
-                    <a:pt x="1145960" y="2865250"/>
-                  </a:lnTo>
-                  <a:lnTo>
-                    <a:pt x="1217582" y="2862301"/>
-                  </a:lnTo>
-                  <a:lnTo>
-                    <a:pt x="1289205" y="2859340"/>
-                  </a:lnTo>
-                  <a:lnTo>
-                    <a:pt x="1360827" y="2856369"/>
-                  </a:lnTo>
-                  <a:lnTo>
-                    <a:pt x="1432450" y="2853386"/>
-                  </a:lnTo>
-                  <a:lnTo>
-                    <a:pt x="1504073" y="2850393"/>
-                  </a:lnTo>
-                  <a:lnTo>
-                    <a:pt x="1575695" y="2847388"/>
-                  </a:lnTo>
-                  <a:lnTo>
-                    <a:pt x="1647318" y="2844372"/>
-                  </a:lnTo>
-                  <a:lnTo>
-                    <a:pt x="1718940" y="2841344"/>
-                  </a:lnTo>
-                  <a:lnTo>
-                    <a:pt x="1790563" y="2838305"/>
-                  </a:lnTo>
-                  <a:lnTo>
-                    <a:pt x="1862185" y="2835255"/>
-                  </a:lnTo>
-                  <a:lnTo>
-                    <a:pt x="1933808" y="2832194"/>
-                  </a:lnTo>
-                  <a:lnTo>
-                    <a:pt x="2005430" y="2829121"/>
-                  </a:lnTo>
-                  <a:lnTo>
-                    <a:pt x="2077053" y="2826036"/>
-                  </a:lnTo>
-                  <a:lnTo>
-                    <a:pt x="2148675" y="2822940"/>
-                  </a:lnTo>
-                  <a:lnTo>
-                    <a:pt x="2220298" y="2819832"/>
-                  </a:lnTo>
-                  <a:lnTo>
-                    <a:pt x="2291920" y="2816713"/>
-                  </a:lnTo>
-                  <a:lnTo>
-                    <a:pt x="2363543" y="2813582"/>
-                  </a:lnTo>
-                  <a:lnTo>
-                    <a:pt x="2435165" y="2810439"/>
-                  </a:lnTo>
-                  <a:lnTo>
-                    <a:pt x="2506788" y="2807284"/>
-                  </a:lnTo>
-                  <a:lnTo>
-                    <a:pt x="2578410" y="2804118"/>
-                  </a:lnTo>
-                  <a:lnTo>
-                    <a:pt x="2650033" y="2800940"/>
-                  </a:lnTo>
-                  <a:lnTo>
-                    <a:pt x="2721655" y="2797750"/>
-                  </a:lnTo>
-                  <a:lnTo>
-                    <a:pt x="2793278" y="2794548"/>
-                  </a:lnTo>
-                  <a:lnTo>
-                    <a:pt x="2864901" y="2791334"/>
-                  </a:lnTo>
-                  <a:lnTo>
-                    <a:pt x="2936523" y="2788107"/>
-                  </a:lnTo>
-                  <a:lnTo>
-                    <a:pt x="3008146" y="2784869"/>
-                  </a:lnTo>
-                  <a:lnTo>
-                    <a:pt x="3079768" y="2769385"/>
-                  </a:lnTo>
-                  <a:lnTo>
-                    <a:pt x="3151391" y="2735703"/>
-                  </a:lnTo>
-                  <a:lnTo>
-                    <a:pt x="3223013" y="2700736"/>
-                  </a:lnTo>
-                  <a:lnTo>
-                    <a:pt x="3294636" y="2664436"/>
-                  </a:lnTo>
-                  <a:lnTo>
-                    <a:pt x="3366258" y="2626752"/>
-                  </a:lnTo>
-                  <a:lnTo>
-                    <a:pt x="3437881" y="2587631"/>
-                  </a:lnTo>
-                  <a:lnTo>
-                    <a:pt x="3509503" y="2547017"/>
-                  </a:lnTo>
-                  <a:lnTo>
-                    <a:pt x="3581126" y="2504855"/>
-                  </a:lnTo>
-                  <a:lnTo>
-                    <a:pt x="3652748" y="2461085"/>
-                  </a:lnTo>
-                  <a:lnTo>
-                    <a:pt x="3724371" y="2415646"/>
-                  </a:lnTo>
-                  <a:lnTo>
-                    <a:pt x="3795993" y="2368475"/>
-                  </a:lnTo>
-                  <a:lnTo>
-                    <a:pt x="3867616" y="2319504"/>
-                  </a:lnTo>
-                  <a:lnTo>
-                    <a:pt x="3939238" y="2268666"/>
-                  </a:lnTo>
-                  <a:lnTo>
-                    <a:pt x="4010861" y="2215889"/>
-                  </a:lnTo>
-                  <a:lnTo>
-                    <a:pt x="4082483" y="2161100"/>
-                  </a:lnTo>
-                  <a:lnTo>
-                    <a:pt x="4154106" y="2104221"/>
-                  </a:lnTo>
-                  <a:lnTo>
-                    <a:pt x="4225729" y="2045174"/>
-                  </a:lnTo>
-                  <a:lnTo>
-                    <a:pt x="4297351" y="1983874"/>
-                  </a:lnTo>
-                  <a:lnTo>
-                    <a:pt x="4368974" y="1920237"/>
-                  </a:lnTo>
-                  <a:lnTo>
-                    <a:pt x="4440596" y="1854173"/>
-                  </a:lnTo>
-                  <a:lnTo>
-                    <a:pt x="4512219" y="1785590"/>
-                  </a:lnTo>
-                  <a:lnTo>
-                    <a:pt x="4583841" y="1714392"/>
-                  </a:lnTo>
-                  <a:lnTo>
-                    <a:pt x="4655464" y="1640479"/>
-                  </a:lnTo>
-                  <a:lnTo>
-                    <a:pt x="4727086" y="1563747"/>
-                  </a:lnTo>
-                  <a:lnTo>
-                    <a:pt x="4798709" y="1484088"/>
-                  </a:lnTo>
-                  <a:lnTo>
-                    <a:pt x="4870331" y="1401392"/>
-                  </a:lnTo>
-                  <a:lnTo>
-                    <a:pt x="4941954" y="1315543"/>
-                  </a:lnTo>
-                  <a:lnTo>
-                    <a:pt x="5013576" y="1226420"/>
-                  </a:lnTo>
-                  <a:lnTo>
-                    <a:pt x="5085199" y="1133898"/>
-                  </a:lnTo>
-                  <a:lnTo>
-                    <a:pt x="5156821" y="1037848"/>
-                  </a:lnTo>
-                  <a:lnTo>
-                    <a:pt x="5228444" y="938135"/>
-                  </a:lnTo>
-                  <a:lnTo>
-                    <a:pt x="5300066" y="834620"/>
-                  </a:lnTo>
-                  <a:lnTo>
-                    <a:pt x="5371689" y="727157"/>
-                  </a:lnTo>
-                  <a:lnTo>
-                    <a:pt x="5443311" y="615596"/>
-                  </a:lnTo>
-                  <a:lnTo>
-                    <a:pt x="5514934" y="499781"/>
-                  </a:lnTo>
-                  <a:lnTo>
-                    <a:pt x="5586557" y="379550"/>
-                  </a:lnTo>
-                  <a:lnTo>
-                    <a:pt x="5658179" y="254733"/>
-                  </a:lnTo>
-                  <a:lnTo>
-                    <a:pt x="5729802" y="125157"/>
-                  </a:lnTo>
-                  <a:lnTo>
-                    <a:pt x="5796440" y="0"/>
+                    <a:pt x="71622" y="2454376"/>
+                  </a:lnTo>
+                  <a:lnTo>
+                    <a:pt x="143245" y="2463576"/>
+                  </a:lnTo>
+                  <a:lnTo>
+                    <a:pt x="214867" y="2472705"/>
+                  </a:lnTo>
+                  <a:lnTo>
+                    <a:pt x="286490" y="2481764"/>
+                  </a:lnTo>
+                  <a:lnTo>
+                    <a:pt x="358112" y="2490754"/>
+                  </a:lnTo>
+                  <a:lnTo>
+                    <a:pt x="429735" y="2499674"/>
+                  </a:lnTo>
+                  <a:lnTo>
+                    <a:pt x="501357" y="2508526"/>
+                  </a:lnTo>
+                  <a:lnTo>
+                    <a:pt x="572980" y="2517310"/>
+                  </a:lnTo>
+                  <a:lnTo>
+                    <a:pt x="644602" y="2526027"/>
+                  </a:lnTo>
+                  <a:lnTo>
+                    <a:pt x="716225" y="2534676"/>
+                  </a:lnTo>
+                  <a:lnTo>
+                    <a:pt x="787847" y="2543259"/>
+                  </a:lnTo>
+                  <a:lnTo>
+                    <a:pt x="859470" y="2551777"/>
+                  </a:lnTo>
+                  <a:lnTo>
+                    <a:pt x="931092" y="2560229"/>
+                  </a:lnTo>
+                  <a:lnTo>
+                    <a:pt x="1002715" y="2568616"/>
+                  </a:lnTo>
+                  <a:lnTo>
+                    <a:pt x="1074337" y="2576938"/>
+                  </a:lnTo>
+                  <a:lnTo>
+                    <a:pt x="1145960" y="2585197"/>
+                  </a:lnTo>
+                  <a:lnTo>
+                    <a:pt x="1217582" y="2593393"/>
+                  </a:lnTo>
+                  <a:lnTo>
+                    <a:pt x="1289205" y="2601525"/>
+                  </a:lnTo>
+                  <a:lnTo>
+                    <a:pt x="1360827" y="2609595"/>
+                  </a:lnTo>
+                  <a:lnTo>
+                    <a:pt x="1432450" y="2617603"/>
+                  </a:lnTo>
+                  <a:lnTo>
+                    <a:pt x="1504073" y="2625550"/>
+                  </a:lnTo>
+                  <a:lnTo>
+                    <a:pt x="1575695" y="2633435"/>
+                  </a:lnTo>
+                  <a:lnTo>
+                    <a:pt x="1647318" y="2641260"/>
+                  </a:lnTo>
+                  <a:lnTo>
+                    <a:pt x="1718940" y="2649025"/>
+                  </a:lnTo>
+                  <a:lnTo>
+                    <a:pt x="1790563" y="2656730"/>
+                  </a:lnTo>
+                  <a:lnTo>
+                    <a:pt x="1862185" y="2664377"/>
+                  </a:lnTo>
+                  <a:lnTo>
+                    <a:pt x="1933808" y="2671964"/>
+                  </a:lnTo>
+                  <a:lnTo>
+                    <a:pt x="2005430" y="2679493"/>
+                  </a:lnTo>
+                  <a:lnTo>
+                    <a:pt x="2077053" y="2686965"/>
+                  </a:lnTo>
+                  <a:lnTo>
+                    <a:pt x="2148675" y="2694379"/>
+                  </a:lnTo>
+                  <a:lnTo>
+                    <a:pt x="2220298" y="2701736"/>
+                  </a:lnTo>
+                  <a:lnTo>
+                    <a:pt x="2291920" y="2709036"/>
+                  </a:lnTo>
+                  <a:lnTo>
+                    <a:pt x="2363543" y="2716281"/>
+                  </a:lnTo>
+                  <a:lnTo>
+                    <a:pt x="2435165" y="2723470"/>
+                  </a:lnTo>
+                  <a:lnTo>
+                    <a:pt x="2506788" y="2730604"/>
+                  </a:lnTo>
+                  <a:lnTo>
+                    <a:pt x="2578410" y="2737683"/>
+                  </a:lnTo>
+                  <a:lnTo>
+                    <a:pt x="2650033" y="2744707"/>
+                  </a:lnTo>
+                  <a:lnTo>
+                    <a:pt x="2721655" y="2751678"/>
+                  </a:lnTo>
+                  <a:lnTo>
+                    <a:pt x="2793278" y="2758595"/>
+                  </a:lnTo>
+                  <a:lnTo>
+                    <a:pt x="2864901" y="2765459"/>
+                  </a:lnTo>
+                  <a:lnTo>
+                    <a:pt x="2936523" y="2772271"/>
+                  </a:lnTo>
+                  <a:lnTo>
+                    <a:pt x="3008146" y="2779030"/>
+                  </a:lnTo>
+                  <a:lnTo>
+                    <a:pt x="3079768" y="2773513"/>
+                  </a:lnTo>
+                  <a:lnTo>
+                    <a:pt x="3151391" y="2750256"/>
+                  </a:lnTo>
+                  <a:lnTo>
+                    <a:pt x="3223013" y="2726383"/>
+                  </a:lnTo>
+                  <a:lnTo>
+                    <a:pt x="3294636" y="2701879"/>
+                  </a:lnTo>
+                  <a:lnTo>
+                    <a:pt x="3366258" y="2676726"/>
+                  </a:lnTo>
+                  <a:lnTo>
+                    <a:pt x="3437881" y="2650908"/>
+                  </a:lnTo>
+                  <a:lnTo>
+                    <a:pt x="3509503" y="2624407"/>
+                  </a:lnTo>
+                  <a:lnTo>
+                    <a:pt x="3581126" y="2597205"/>
+                  </a:lnTo>
+                  <a:lnTo>
+                    <a:pt x="3652748" y="2569283"/>
+                  </a:lnTo>
+                  <a:lnTo>
+                    <a:pt x="3724371" y="2540623"/>
+                  </a:lnTo>
+                  <a:lnTo>
+                    <a:pt x="3795993" y="2511204"/>
+                  </a:lnTo>
+                  <a:lnTo>
+                    <a:pt x="3867616" y="2481008"/>
+                  </a:lnTo>
+                  <a:lnTo>
+                    <a:pt x="3939238" y="2450012"/>
+                  </a:lnTo>
+                  <a:lnTo>
+                    <a:pt x="4010861" y="2418196"/>
+                  </a:lnTo>
+                  <a:lnTo>
+                    <a:pt x="4082483" y="2385539"/>
+                  </a:lnTo>
+                  <a:lnTo>
+                    <a:pt x="4154106" y="2352017"/>
+                  </a:lnTo>
+                  <a:lnTo>
+                    <a:pt x="4225729" y="2317609"/>
+                  </a:lnTo>
+                  <a:lnTo>
+                    <a:pt x="4297351" y="2282291"/>
+                  </a:lnTo>
+                  <a:lnTo>
+                    <a:pt x="4368974" y="2246038"/>
+                  </a:lnTo>
+                  <a:lnTo>
+                    <a:pt x="4440596" y="2208826"/>
+                  </a:lnTo>
+                  <a:lnTo>
+                    <a:pt x="4512219" y="2170630"/>
+                  </a:lnTo>
+                  <a:lnTo>
+                    <a:pt x="4583841" y="2131423"/>
+                  </a:lnTo>
+                  <a:lnTo>
+                    <a:pt x="4655464" y="2091179"/>
+                  </a:lnTo>
+                  <a:lnTo>
+                    <a:pt x="4727086" y="2049870"/>
+                  </a:lnTo>
+                  <a:lnTo>
+                    <a:pt x="4798709" y="2007469"/>
+                  </a:lnTo>
+                  <a:lnTo>
+                    <a:pt x="4870331" y="1963946"/>
+                  </a:lnTo>
+                  <a:lnTo>
+                    <a:pt x="4941954" y="1919271"/>
+                  </a:lnTo>
+                  <a:lnTo>
+                    <a:pt x="5013576" y="1873414"/>
+                  </a:lnTo>
+                  <a:lnTo>
+                    <a:pt x="5085199" y="1826345"/>
+                  </a:lnTo>
+                  <a:lnTo>
+                    <a:pt x="5156821" y="1778030"/>
+                  </a:lnTo>
+                  <a:lnTo>
+                    <a:pt x="5228444" y="1728437"/>
+                  </a:lnTo>
+                  <a:lnTo>
+                    <a:pt x="5300066" y="1677532"/>
+                  </a:lnTo>
+                  <a:lnTo>
+                    <a:pt x="5371689" y="1625280"/>
+                  </a:lnTo>
+                  <a:lnTo>
+                    <a:pt x="5443311" y="1571646"/>
+                  </a:lnTo>
+                  <a:lnTo>
+                    <a:pt x="5514934" y="1516593"/>
+                  </a:lnTo>
+                  <a:lnTo>
+                    <a:pt x="5586557" y="1460084"/>
+                  </a:lnTo>
+                  <a:lnTo>
+                    <a:pt x="5658179" y="1402079"/>
+                  </a:lnTo>
+                  <a:lnTo>
+                    <a:pt x="5729802" y="1342541"/>
+                  </a:lnTo>
+                  <a:lnTo>
+                    <a:pt x="5801424" y="1281427"/>
+                  </a:lnTo>
+                  <a:lnTo>
+                    <a:pt x="5873047" y="1218696"/>
+                  </a:lnTo>
+                  <a:lnTo>
+                    <a:pt x="5944669" y="1154306"/>
+                  </a:lnTo>
+                  <a:lnTo>
+                    <a:pt x="6016292" y="1088212"/>
+                  </a:lnTo>
+                  <a:lnTo>
+                    <a:pt x="6087914" y="1020370"/>
+                  </a:lnTo>
+                  <a:lnTo>
+                    <a:pt x="6159537" y="950733"/>
+                  </a:lnTo>
+                  <a:lnTo>
+                    <a:pt x="6231159" y="879253"/>
+                  </a:lnTo>
+                  <a:lnTo>
+                    <a:pt x="6302782" y="805883"/>
+                  </a:lnTo>
+                  <a:lnTo>
+                    <a:pt x="6374404" y="730572"/>
+                  </a:lnTo>
+                  <a:lnTo>
+                    <a:pt x="6446027" y="653268"/>
+                  </a:lnTo>
+                  <a:lnTo>
+                    <a:pt x="6517649" y="573919"/>
+                  </a:lnTo>
+                  <a:lnTo>
+                    <a:pt x="6589272" y="492471"/>
+                  </a:lnTo>
+                  <a:lnTo>
+                    <a:pt x="6660894" y="408869"/>
+                  </a:lnTo>
+                  <a:lnTo>
+                    <a:pt x="6732517" y="323055"/>
+                  </a:lnTo>
+                  <a:lnTo>
+                    <a:pt x="6804139" y="234970"/>
+                  </a:lnTo>
+                  <a:lnTo>
+                    <a:pt x="6875762" y="144555"/>
+                  </a:lnTo>
+                  <a:lnTo>
+                    <a:pt x="6947385" y="51748"/>
+                  </a:lnTo>
+                  <a:lnTo>
+                    <a:pt x="6986292" y="0"/>
                   </a:lnTo>
                 </a:path>
               </a:pathLst>
@@ -3982,312 +4084,312 @@
           </p:nvSpPr>
           <p:spPr>
             <a:xfrm>
-              <a:off x="1172049" y="4475330"/>
-              <a:ext cx="7090630" cy="897196"/>
+              <a:off x="1172049" y="4682300"/>
+              <a:ext cx="7090630" cy="580860"/>
             </a:xfrm>
             <a:custGeom>
               <a:avLst/>
               <a:pathLst>
-                <a:path w="7090630" h="897196">
+                <a:path w="7090630" h="580860">
                   <a:moveTo>
-                    <a:pt x="7090630" y="0"/>
+                    <a:pt x="7090630" y="303878"/>
                   </a:moveTo>
                   <a:lnTo>
-                    <a:pt x="7019007" y="4007"/>
-                  </a:lnTo>
-                  <a:lnTo>
-                    <a:pt x="6947385" y="7999"/>
-                  </a:lnTo>
-                  <a:lnTo>
-                    <a:pt x="6875762" y="11977"/>
-                  </a:lnTo>
-                  <a:lnTo>
-                    <a:pt x="6804139" y="15939"/>
-                  </a:lnTo>
-                  <a:lnTo>
-                    <a:pt x="6732517" y="19887"/>
-                  </a:lnTo>
-                  <a:lnTo>
-                    <a:pt x="6660894" y="23820"/>
-                  </a:lnTo>
-                  <a:lnTo>
-                    <a:pt x="6589272" y="27738"/>
-                  </a:lnTo>
-                  <a:lnTo>
-                    <a:pt x="6517649" y="31642"/>
-                  </a:lnTo>
-                  <a:lnTo>
-                    <a:pt x="6446027" y="35531"/>
-                  </a:lnTo>
-                  <a:lnTo>
-                    <a:pt x="6374404" y="39406"/>
-                  </a:lnTo>
-                  <a:lnTo>
-                    <a:pt x="6302782" y="43266"/>
-                  </a:lnTo>
-                  <a:lnTo>
-                    <a:pt x="6231159" y="47112"/>
-                  </a:lnTo>
-                  <a:lnTo>
-                    <a:pt x="6159537" y="50944"/>
-                  </a:lnTo>
-                  <a:lnTo>
-                    <a:pt x="6087914" y="54761"/>
-                  </a:lnTo>
-                  <a:lnTo>
-                    <a:pt x="6016292" y="58564"/>
-                  </a:lnTo>
-                  <a:lnTo>
-                    <a:pt x="5944669" y="62353"/>
-                  </a:lnTo>
-                  <a:lnTo>
-                    <a:pt x="5873047" y="66127"/>
-                  </a:lnTo>
-                  <a:lnTo>
-                    <a:pt x="5801424" y="69888"/>
-                  </a:lnTo>
-                  <a:lnTo>
-                    <a:pt x="5729802" y="73634"/>
-                  </a:lnTo>
-                  <a:lnTo>
-                    <a:pt x="5658179" y="77367"/>
-                  </a:lnTo>
-                  <a:lnTo>
-                    <a:pt x="5586557" y="81085"/>
-                  </a:lnTo>
-                  <a:lnTo>
-                    <a:pt x="5514934" y="84790"/>
-                  </a:lnTo>
-                  <a:lnTo>
-                    <a:pt x="5443311" y="88481"/>
-                  </a:lnTo>
-                  <a:lnTo>
-                    <a:pt x="5371689" y="92158"/>
-                  </a:lnTo>
-                  <a:lnTo>
-                    <a:pt x="5300066" y="95821"/>
-                  </a:lnTo>
-                  <a:lnTo>
-                    <a:pt x="5228444" y="99471"/>
-                  </a:lnTo>
-                  <a:lnTo>
-                    <a:pt x="5156821" y="103107"/>
-                  </a:lnTo>
-                  <a:lnTo>
-                    <a:pt x="5085199" y="106730"/>
-                  </a:lnTo>
-                  <a:lnTo>
-                    <a:pt x="5013576" y="110339"/>
-                  </a:lnTo>
-                  <a:lnTo>
-                    <a:pt x="4941954" y="113934"/>
-                  </a:lnTo>
-                  <a:lnTo>
-                    <a:pt x="4870331" y="117516"/>
-                  </a:lnTo>
-                  <a:lnTo>
-                    <a:pt x="4798709" y="121085"/>
-                  </a:lnTo>
-                  <a:lnTo>
-                    <a:pt x="4727086" y="124641"/>
-                  </a:lnTo>
-                  <a:lnTo>
-                    <a:pt x="4655464" y="128183"/>
-                  </a:lnTo>
-                  <a:lnTo>
-                    <a:pt x="4583841" y="131712"/>
-                  </a:lnTo>
-                  <a:lnTo>
-                    <a:pt x="4512219" y="135228"/>
-                  </a:lnTo>
-                  <a:lnTo>
-                    <a:pt x="4440596" y="138730"/>
-                  </a:lnTo>
-                  <a:lnTo>
-                    <a:pt x="4368974" y="142220"/>
-                  </a:lnTo>
-                  <a:lnTo>
-                    <a:pt x="4297351" y="145696"/>
-                  </a:lnTo>
-                  <a:lnTo>
-                    <a:pt x="4225729" y="149160"/>
-                  </a:lnTo>
-                  <a:lnTo>
-                    <a:pt x="4154106" y="152611"/>
-                  </a:lnTo>
-                  <a:lnTo>
-                    <a:pt x="4082483" y="156048"/>
-                  </a:lnTo>
-                  <a:lnTo>
-                    <a:pt x="4010861" y="159473"/>
-                  </a:lnTo>
-                  <a:lnTo>
-                    <a:pt x="3939238" y="162886"/>
-                  </a:lnTo>
-                  <a:lnTo>
-                    <a:pt x="3867616" y="166285"/>
-                  </a:lnTo>
-                  <a:lnTo>
-                    <a:pt x="3795993" y="169672"/>
-                  </a:lnTo>
-                  <a:lnTo>
-                    <a:pt x="3724371" y="173046"/>
-                  </a:lnTo>
-                  <a:lnTo>
-                    <a:pt x="3652748" y="176408"/>
-                  </a:lnTo>
-                  <a:lnTo>
-                    <a:pt x="3581126" y="179757"/>
-                  </a:lnTo>
-                  <a:lnTo>
-                    <a:pt x="3509503" y="183093"/>
-                  </a:lnTo>
-                  <a:lnTo>
-                    <a:pt x="3437881" y="186417"/>
-                  </a:lnTo>
-                  <a:lnTo>
-                    <a:pt x="3366258" y="189729"/>
-                  </a:lnTo>
-                  <a:lnTo>
-                    <a:pt x="3294636" y="193028"/>
-                  </a:lnTo>
-                  <a:lnTo>
-                    <a:pt x="3223013" y="196315"/>
-                  </a:lnTo>
-                  <a:lnTo>
-                    <a:pt x="3151391" y="199590"/>
-                  </a:lnTo>
-                  <a:lnTo>
-                    <a:pt x="3079768" y="202852"/>
-                  </a:lnTo>
-                  <a:lnTo>
-                    <a:pt x="3008146" y="223064"/>
-                  </a:lnTo>
-                  <a:lnTo>
-                    <a:pt x="2936523" y="254317"/>
-                  </a:lnTo>
-                  <a:lnTo>
-                    <a:pt x="2864901" y="284422"/>
-                  </a:lnTo>
-                  <a:lnTo>
-                    <a:pt x="2793278" y="313421"/>
-                  </a:lnTo>
-                  <a:lnTo>
-                    <a:pt x="2721655" y="341355"/>
-                  </a:lnTo>
-                  <a:lnTo>
-                    <a:pt x="2650033" y="368263"/>
-                  </a:lnTo>
-                  <a:lnTo>
-                    <a:pt x="2578410" y="394183"/>
-                  </a:lnTo>
-                  <a:lnTo>
-                    <a:pt x="2506788" y="419150"/>
-                  </a:lnTo>
-                  <a:lnTo>
-                    <a:pt x="2435165" y="443200"/>
-                  </a:lnTo>
-                  <a:lnTo>
-                    <a:pt x="2363543" y="466367"/>
-                  </a:lnTo>
-                  <a:lnTo>
-                    <a:pt x="2291920" y="488683"/>
-                  </a:lnTo>
-                  <a:lnTo>
-                    <a:pt x="2220298" y="510179"/>
-                  </a:lnTo>
-                  <a:lnTo>
-                    <a:pt x="2148675" y="530886"/>
-                  </a:lnTo>
-                  <a:lnTo>
-                    <a:pt x="2077053" y="550831"/>
-                  </a:lnTo>
-                  <a:lnTo>
-                    <a:pt x="2005430" y="570045"/>
-                  </a:lnTo>
-                  <a:lnTo>
-                    <a:pt x="1933808" y="588552"/>
-                  </a:lnTo>
-                  <a:lnTo>
-                    <a:pt x="1862185" y="606380"/>
-                  </a:lnTo>
-                  <a:lnTo>
-                    <a:pt x="1790563" y="623552"/>
-                  </a:lnTo>
-                  <a:lnTo>
-                    <a:pt x="1718940" y="640094"/>
-                  </a:lnTo>
-                  <a:lnTo>
-                    <a:pt x="1647318" y="656028"/>
-                  </a:lnTo>
-                  <a:lnTo>
-                    <a:pt x="1575695" y="671377"/>
-                  </a:lnTo>
-                  <a:lnTo>
-                    <a:pt x="1504073" y="686163"/>
-                  </a:lnTo>
-                  <a:lnTo>
-                    <a:pt x="1432450" y="700405"/>
-                  </a:lnTo>
-                  <a:lnTo>
-                    <a:pt x="1360827" y="714123"/>
-                  </a:lnTo>
-                  <a:lnTo>
-                    <a:pt x="1289205" y="727338"/>
-                  </a:lnTo>
-                  <a:lnTo>
-                    <a:pt x="1217582" y="740068"/>
-                  </a:lnTo>
-                  <a:lnTo>
-                    <a:pt x="1145960" y="752330"/>
-                  </a:lnTo>
-                  <a:lnTo>
-                    <a:pt x="1074337" y="764141"/>
-                  </a:lnTo>
-                  <a:lnTo>
-                    <a:pt x="1002715" y="775519"/>
-                  </a:lnTo>
-                  <a:lnTo>
-                    <a:pt x="931092" y="786478"/>
-                  </a:lnTo>
-                  <a:lnTo>
-                    <a:pt x="859470" y="797036"/>
-                  </a:lnTo>
-                  <a:lnTo>
-                    <a:pt x="787847" y="807205"/>
-                  </a:lnTo>
-                  <a:lnTo>
-                    <a:pt x="716225" y="817001"/>
-                  </a:lnTo>
-                  <a:lnTo>
-                    <a:pt x="644602" y="826437"/>
-                  </a:lnTo>
-                  <a:lnTo>
-                    <a:pt x="572980" y="835526"/>
-                  </a:lnTo>
-                  <a:lnTo>
-                    <a:pt x="501357" y="844281"/>
-                  </a:lnTo>
-                  <a:lnTo>
-                    <a:pt x="429735" y="852715"/>
-                  </a:lnTo>
-                  <a:lnTo>
-                    <a:pt x="358112" y="860839"/>
-                  </a:lnTo>
-                  <a:lnTo>
-                    <a:pt x="286490" y="868665"/>
-                  </a:lnTo>
-                  <a:lnTo>
-                    <a:pt x="214867" y="876203"/>
-                  </a:lnTo>
-                  <a:lnTo>
-                    <a:pt x="143245" y="883464"/>
-                  </a:lnTo>
-                  <a:lnTo>
-                    <a:pt x="71622" y="890458"/>
-                  </a:lnTo>
-                  <a:lnTo>
-                    <a:pt x="0" y="897196"/>
+                    <a:pt x="7019007" y="299521"/>
+                  </a:lnTo>
+                  <a:lnTo>
+                    <a:pt x="6947385" y="295132"/>
+                  </a:lnTo>
+                  <a:lnTo>
+                    <a:pt x="6875762" y="290708"/>
+                  </a:lnTo>
+                  <a:lnTo>
+                    <a:pt x="6804139" y="286250"/>
+                  </a:lnTo>
+                  <a:lnTo>
+                    <a:pt x="6732517" y="281757"/>
+                  </a:lnTo>
+                  <a:lnTo>
+                    <a:pt x="6660894" y="277230"/>
+                  </a:lnTo>
+                  <a:lnTo>
+                    <a:pt x="6589272" y="272668"/>
+                  </a:lnTo>
+                  <a:lnTo>
+                    <a:pt x="6517649" y="268070"/>
+                  </a:lnTo>
+                  <a:lnTo>
+                    <a:pt x="6446027" y="263437"/>
+                  </a:lnTo>
+                  <a:lnTo>
+                    <a:pt x="6374404" y="258768"/>
+                  </a:lnTo>
+                  <a:lnTo>
+                    <a:pt x="6302782" y="254063"/>
+                  </a:lnTo>
+                  <a:lnTo>
+                    <a:pt x="6231159" y="249321"/>
+                  </a:lnTo>
+                  <a:lnTo>
+                    <a:pt x="6159537" y="244543"/>
+                  </a:lnTo>
+                  <a:lnTo>
+                    <a:pt x="6087914" y="239728"/>
+                  </a:lnTo>
+                  <a:lnTo>
+                    <a:pt x="6016292" y="234876"/>
+                  </a:lnTo>
+                  <a:lnTo>
+                    <a:pt x="5944669" y="229986"/>
+                  </a:lnTo>
+                  <a:lnTo>
+                    <a:pt x="5873047" y="225058"/>
+                  </a:lnTo>
+                  <a:lnTo>
+                    <a:pt x="5801424" y="220092"/>
+                  </a:lnTo>
+                  <a:lnTo>
+                    <a:pt x="5729802" y="215087"/>
+                  </a:lnTo>
+                  <a:lnTo>
+                    <a:pt x="5658179" y="210044"/>
+                  </a:lnTo>
+                  <a:lnTo>
+                    <a:pt x="5586557" y="204962"/>
+                  </a:lnTo>
+                  <a:lnTo>
+                    <a:pt x="5514934" y="199841"/>
+                  </a:lnTo>
+                  <a:lnTo>
+                    <a:pt x="5443311" y="194680"/>
+                  </a:lnTo>
+                  <a:lnTo>
+                    <a:pt x="5371689" y="189479"/>
+                  </a:lnTo>
+                  <a:lnTo>
+                    <a:pt x="5300066" y="184238"/>
+                  </a:lnTo>
+                  <a:lnTo>
+                    <a:pt x="5228444" y="178956"/>
+                  </a:lnTo>
+                  <a:lnTo>
+                    <a:pt x="5156821" y="173633"/>
+                  </a:lnTo>
+                  <a:lnTo>
+                    <a:pt x="5085199" y="168269"/>
+                  </a:lnTo>
+                  <a:lnTo>
+                    <a:pt x="5013576" y="162864"/>
+                  </a:lnTo>
+                  <a:lnTo>
+                    <a:pt x="4941954" y="157417"/>
+                  </a:lnTo>
+                  <a:lnTo>
+                    <a:pt x="4870331" y="151928"/>
+                  </a:lnTo>
+                  <a:lnTo>
+                    <a:pt x="4798709" y="146396"/>
+                  </a:lnTo>
+                  <a:lnTo>
+                    <a:pt x="4727086" y="140821"/>
+                  </a:lnTo>
+                  <a:lnTo>
+                    <a:pt x="4655464" y="135204"/>
+                  </a:lnTo>
+                  <a:lnTo>
+                    <a:pt x="4583841" y="129543"/>
+                  </a:lnTo>
+                  <a:lnTo>
+                    <a:pt x="4512219" y="123838"/>
+                  </a:lnTo>
+                  <a:lnTo>
+                    <a:pt x="4440596" y="118089"/>
+                  </a:lnTo>
+                  <a:lnTo>
+                    <a:pt x="4368974" y="112295"/>
+                  </a:lnTo>
+                  <a:lnTo>
+                    <a:pt x="4297351" y="106457"/>
+                  </a:lnTo>
+                  <a:lnTo>
+                    <a:pt x="4225729" y="100573"/>
+                  </a:lnTo>
+                  <a:lnTo>
+                    <a:pt x="4154106" y="94644"/>
+                  </a:lnTo>
+                  <a:lnTo>
+                    <a:pt x="4082483" y="88669"/>
+                  </a:lnTo>
+                  <a:lnTo>
+                    <a:pt x="4010861" y="82648"/>
+                  </a:lnTo>
+                  <a:lnTo>
+                    <a:pt x="3939238" y="76580"/>
+                  </a:lnTo>
+                  <a:lnTo>
+                    <a:pt x="3867616" y="70466"/>
+                  </a:lnTo>
+                  <a:lnTo>
+                    <a:pt x="3795993" y="64304"/>
+                  </a:lnTo>
+                  <a:lnTo>
+                    <a:pt x="3724371" y="58094"/>
+                  </a:lnTo>
+                  <a:lnTo>
+                    <a:pt x="3652748" y="51836"/>
+                  </a:lnTo>
+                  <a:lnTo>
+                    <a:pt x="3581126" y="45530"/>
+                  </a:lnTo>
+                  <a:lnTo>
+                    <a:pt x="3509503" y="39175"/>
+                  </a:lnTo>
+                  <a:lnTo>
+                    <a:pt x="3437881" y="32771"/>
+                  </a:lnTo>
+                  <a:lnTo>
+                    <a:pt x="3366258" y="26317"/>
+                  </a:lnTo>
+                  <a:lnTo>
+                    <a:pt x="3294636" y="19814"/>
+                  </a:lnTo>
+                  <a:lnTo>
+                    <a:pt x="3223013" y="13260"/>
+                  </a:lnTo>
+                  <a:lnTo>
+                    <a:pt x="3151391" y="6655"/>
+                  </a:lnTo>
+                  <a:lnTo>
+                    <a:pt x="3079768" y="0"/>
+                  </a:lnTo>
+                  <a:lnTo>
+                    <a:pt x="3008146" y="10434"/>
+                  </a:lnTo>
+                  <a:lnTo>
+                    <a:pt x="2936523" y="32508"/>
+                  </a:lnTo>
+                  <a:lnTo>
+                    <a:pt x="2864901" y="54013"/>
+                  </a:lnTo>
+                  <a:lnTo>
+                    <a:pt x="2793278" y="74964"/>
+                  </a:lnTo>
+                  <a:lnTo>
+                    <a:pt x="2721655" y="95375"/>
+                  </a:lnTo>
+                  <a:lnTo>
+                    <a:pt x="2650033" y="115260"/>
+                  </a:lnTo>
+                  <a:lnTo>
+                    <a:pt x="2578410" y="134632"/>
+                  </a:lnTo>
+                  <a:lnTo>
+                    <a:pt x="2506788" y="153505"/>
+                  </a:lnTo>
+                  <a:lnTo>
+                    <a:pt x="2435165" y="171892"/>
+                  </a:lnTo>
+                  <a:lnTo>
+                    <a:pt x="2363543" y="189805"/>
+                  </a:lnTo>
+                  <a:lnTo>
+                    <a:pt x="2291920" y="207256"/>
+                  </a:lnTo>
+                  <a:lnTo>
+                    <a:pt x="2220298" y="224257"/>
+                  </a:lnTo>
+                  <a:lnTo>
+                    <a:pt x="2148675" y="240820"/>
+                  </a:lnTo>
+                  <a:lnTo>
+                    <a:pt x="2077053" y="256956"/>
+                  </a:lnTo>
+                  <a:lnTo>
+                    <a:pt x="2005430" y="272677"/>
+                  </a:lnTo>
+                  <a:lnTo>
+                    <a:pt x="1933808" y="287992"/>
+                  </a:lnTo>
+                  <a:lnTo>
+                    <a:pt x="1862185" y="302912"/>
+                  </a:lnTo>
+                  <a:lnTo>
+                    <a:pt x="1790563" y="317448"/>
+                  </a:lnTo>
+                  <a:lnTo>
+                    <a:pt x="1718940" y="331610"/>
+                  </a:lnTo>
+                  <a:lnTo>
+                    <a:pt x="1647318" y="345406"/>
+                  </a:lnTo>
+                  <a:lnTo>
+                    <a:pt x="1575695" y="358847"/>
+                  </a:lnTo>
+                  <a:lnTo>
+                    <a:pt x="1504073" y="371941"/>
+                  </a:lnTo>
+                  <a:lnTo>
+                    <a:pt x="1432450" y="384698"/>
+                  </a:lnTo>
+                  <a:lnTo>
+                    <a:pt x="1360827" y="397126"/>
+                  </a:lnTo>
+                  <a:lnTo>
+                    <a:pt x="1289205" y="409234"/>
+                  </a:lnTo>
+                  <a:lnTo>
+                    <a:pt x="1217582" y="421029"/>
+                  </a:lnTo>
+                  <a:lnTo>
+                    <a:pt x="1145960" y="432521"/>
+                  </a:lnTo>
+                  <a:lnTo>
+                    <a:pt x="1074337" y="443717"/>
+                  </a:lnTo>
+                  <a:lnTo>
+                    <a:pt x="1002715" y="454624"/>
+                  </a:lnTo>
+                  <a:lnTo>
+                    <a:pt x="931092" y="465249"/>
+                  </a:lnTo>
+                  <a:lnTo>
+                    <a:pt x="859470" y="475601"/>
+                  </a:lnTo>
+                  <a:lnTo>
+                    <a:pt x="787847" y="485687"/>
+                  </a:lnTo>
+                  <a:lnTo>
+                    <a:pt x="716225" y="495512"/>
+                  </a:lnTo>
+                  <a:lnTo>
+                    <a:pt x="644602" y="505084"/>
+                  </a:lnTo>
+                  <a:lnTo>
+                    <a:pt x="572980" y="514409"/>
+                  </a:lnTo>
+                  <a:lnTo>
+                    <a:pt x="501357" y="523494"/>
+                  </a:lnTo>
+                  <a:lnTo>
+                    <a:pt x="429735" y="532345"/>
+                  </a:lnTo>
+                  <a:lnTo>
+                    <a:pt x="358112" y="540968"/>
+                  </a:lnTo>
+                  <a:lnTo>
+                    <a:pt x="286490" y="549368"/>
+                  </a:lnTo>
+                  <a:lnTo>
+                    <a:pt x="214867" y="557552"/>
+                  </a:lnTo>
+                  <a:lnTo>
+                    <a:pt x="143245" y="565525"/>
+                  </a:lnTo>
+                  <a:lnTo>
+                    <a:pt x="71622" y="573293"/>
+                  </a:lnTo>
+                  <a:lnTo>
+                    <a:pt x="0" y="580860"/>
                   </a:lnTo>
                 </a:path>
               </a:pathLst>
@@ -4307,309 +4409,309 @@
           </p:nvSpPr>
           <p:spPr>
             <a:xfrm>
-              <a:off x="1172049" y="2771939"/>
-              <a:ext cx="7090630" cy="2415274"/>
+              <a:off x="1172049" y="4087668"/>
+              <a:ext cx="7090630" cy="873821"/>
             </a:xfrm>
             <a:custGeom>
               <a:avLst/>
               <a:pathLst>
-                <a:path w="7090630" h="2415274">
+                <a:path w="7090630" h="873821">
                   <a:moveTo>
-                    <a:pt x="0" y="2415274"/>
+                    <a:pt x="0" y="873821"/>
                   </a:moveTo>
                   <a:lnTo>
-                    <a:pt x="71622" y="2407746"/>
-                  </a:lnTo>
-                  <a:lnTo>
-                    <a:pt x="143245" y="2400062"/>
-                  </a:lnTo>
-                  <a:lnTo>
-                    <a:pt x="214867" y="2392218"/>
-                  </a:lnTo>
-                  <a:lnTo>
-                    <a:pt x="286490" y="2384211"/>
-                  </a:lnTo>
-                  <a:lnTo>
-                    <a:pt x="358112" y="2376037"/>
-                  </a:lnTo>
-                  <a:lnTo>
-                    <a:pt x="429735" y="2367693"/>
-                  </a:lnTo>
-                  <a:lnTo>
-                    <a:pt x="501357" y="2359176"/>
-                  </a:lnTo>
-                  <a:lnTo>
-                    <a:pt x="572980" y="2350482"/>
-                  </a:lnTo>
-                  <a:lnTo>
-                    <a:pt x="644602" y="2341607"/>
-                  </a:lnTo>
-                  <a:lnTo>
-                    <a:pt x="716225" y="2332547"/>
-                  </a:lnTo>
-                  <a:lnTo>
-                    <a:pt x="787847" y="2323299"/>
-                  </a:lnTo>
-                  <a:lnTo>
-                    <a:pt x="859470" y="2313859"/>
-                  </a:lnTo>
-                  <a:lnTo>
-                    <a:pt x="931092" y="2304223"/>
-                  </a:lnTo>
-                  <a:lnTo>
-                    <a:pt x="1002715" y="2294386"/>
-                  </a:lnTo>
-                  <a:lnTo>
-                    <a:pt x="1074337" y="2284344"/>
-                  </a:lnTo>
-                  <a:lnTo>
-                    <a:pt x="1145960" y="2274094"/>
-                  </a:lnTo>
-                  <a:lnTo>
-                    <a:pt x="1217582" y="2263630"/>
-                  </a:lnTo>
-                  <a:lnTo>
-                    <a:pt x="1289205" y="2252949"/>
-                  </a:lnTo>
-                  <a:lnTo>
-                    <a:pt x="1360827" y="2242046"/>
-                  </a:lnTo>
-                  <a:lnTo>
-                    <a:pt x="1432450" y="2230916"/>
-                  </a:lnTo>
-                  <a:lnTo>
-                    <a:pt x="1504073" y="2219554"/>
-                  </a:lnTo>
-                  <a:lnTo>
-                    <a:pt x="1575695" y="2207957"/>
-                  </a:lnTo>
-                  <a:lnTo>
-                    <a:pt x="1647318" y="2196118"/>
-                  </a:lnTo>
-                  <a:lnTo>
-                    <a:pt x="1718940" y="2184033"/>
-                  </a:lnTo>
-                  <a:lnTo>
-                    <a:pt x="1790563" y="2171697"/>
-                  </a:lnTo>
-                  <a:lnTo>
-                    <a:pt x="1862185" y="2159104"/>
-                  </a:lnTo>
-                  <a:lnTo>
-                    <a:pt x="1933808" y="2146249"/>
-                  </a:lnTo>
-                  <a:lnTo>
-                    <a:pt x="2005430" y="2133127"/>
-                  </a:lnTo>
-                  <a:lnTo>
-                    <a:pt x="2077053" y="2119732"/>
-                  </a:lnTo>
-                  <a:lnTo>
-                    <a:pt x="2148675" y="2106058"/>
-                  </a:lnTo>
-                  <a:lnTo>
-                    <a:pt x="2220298" y="2092101"/>
-                  </a:lnTo>
-                  <a:lnTo>
-                    <a:pt x="2291920" y="2077853"/>
-                  </a:lnTo>
-                  <a:lnTo>
-                    <a:pt x="2363543" y="2063308"/>
-                  </a:lnTo>
-                  <a:lnTo>
-                    <a:pt x="2435165" y="2048461"/>
-                  </a:lnTo>
-                  <a:lnTo>
-                    <a:pt x="2506788" y="2033306"/>
-                  </a:lnTo>
-                  <a:lnTo>
-                    <a:pt x="2578410" y="2017835"/>
-                  </a:lnTo>
-                  <a:lnTo>
-                    <a:pt x="2650033" y="2002043"/>
-                  </a:lnTo>
-                  <a:lnTo>
-                    <a:pt x="2721655" y="1985922"/>
-                  </a:lnTo>
-                  <a:lnTo>
-                    <a:pt x="2793278" y="1969466"/>
-                  </a:lnTo>
-                  <a:lnTo>
-                    <a:pt x="2864901" y="1952668"/>
-                  </a:lnTo>
-                  <a:lnTo>
-                    <a:pt x="2936523" y="1935520"/>
-                  </a:lnTo>
-                  <a:lnTo>
-                    <a:pt x="3008146" y="1918016"/>
-                  </a:lnTo>
-                  <a:lnTo>
-                    <a:pt x="3079768" y="1900148"/>
-                  </a:lnTo>
-                  <a:lnTo>
-                    <a:pt x="3151391" y="1881908"/>
-                  </a:lnTo>
-                  <a:lnTo>
-                    <a:pt x="3223013" y="1863289"/>
-                  </a:lnTo>
-                  <a:lnTo>
-                    <a:pt x="3294636" y="1844283"/>
-                  </a:lnTo>
-                  <a:lnTo>
-                    <a:pt x="3366258" y="1824881"/>
-                  </a:lnTo>
-                  <a:lnTo>
-                    <a:pt x="3437881" y="1805076"/>
-                  </a:lnTo>
-                  <a:lnTo>
-                    <a:pt x="3509503" y="1784860"/>
-                  </a:lnTo>
-                  <a:lnTo>
-                    <a:pt x="3581126" y="1764222"/>
-                  </a:lnTo>
-                  <a:lnTo>
-                    <a:pt x="3652748" y="1743156"/>
-                  </a:lnTo>
-                  <a:lnTo>
-                    <a:pt x="3724371" y="1721652"/>
-                  </a:lnTo>
-                  <a:lnTo>
-                    <a:pt x="3795993" y="1699700"/>
-                  </a:lnTo>
-                  <a:lnTo>
-                    <a:pt x="3867616" y="1677292"/>
-                  </a:lnTo>
-                  <a:lnTo>
-                    <a:pt x="3939238" y="1654418"/>
-                  </a:lnTo>
-                  <a:lnTo>
-                    <a:pt x="4010861" y="1631068"/>
-                  </a:lnTo>
-                  <a:lnTo>
-                    <a:pt x="4082483" y="1607233"/>
-                  </a:lnTo>
-                  <a:lnTo>
-                    <a:pt x="4154106" y="1582902"/>
-                  </a:lnTo>
-                  <a:lnTo>
-                    <a:pt x="4225729" y="1558065"/>
-                  </a:lnTo>
-                  <a:lnTo>
-                    <a:pt x="4297351" y="1532712"/>
-                  </a:lnTo>
-                  <a:lnTo>
-                    <a:pt x="4368974" y="1506831"/>
-                  </a:lnTo>
-                  <a:lnTo>
-                    <a:pt x="4440596" y="1480413"/>
-                  </a:lnTo>
-                  <a:lnTo>
-                    <a:pt x="4512219" y="1453444"/>
-                  </a:lnTo>
-                  <a:lnTo>
-                    <a:pt x="4583841" y="1425915"/>
-                  </a:lnTo>
-                  <a:lnTo>
-                    <a:pt x="4655464" y="1397814"/>
-                  </a:lnTo>
-                  <a:lnTo>
-                    <a:pt x="4727086" y="1369128"/>
-                  </a:lnTo>
-                  <a:lnTo>
-                    <a:pt x="4798709" y="1339846"/>
-                  </a:lnTo>
-                  <a:lnTo>
-                    <a:pt x="4870331" y="1309955"/>
-                  </a:lnTo>
-                  <a:lnTo>
-                    <a:pt x="4941954" y="1279442"/>
-                  </a:lnTo>
-                  <a:lnTo>
-                    <a:pt x="5013576" y="1248295"/>
-                  </a:lnTo>
-                  <a:lnTo>
-                    <a:pt x="5085199" y="1216499"/>
-                  </a:lnTo>
-                  <a:lnTo>
-                    <a:pt x="5156821" y="1184043"/>
-                  </a:lnTo>
-                  <a:lnTo>
-                    <a:pt x="5228444" y="1150912"/>
-                  </a:lnTo>
-                  <a:lnTo>
-                    <a:pt x="5300066" y="1117092"/>
-                  </a:lnTo>
-                  <a:lnTo>
-                    <a:pt x="5371689" y="1082569"/>
-                  </a:lnTo>
-                  <a:lnTo>
-                    <a:pt x="5443311" y="1047327"/>
-                  </a:lnTo>
-                  <a:lnTo>
-                    <a:pt x="5514934" y="1011353"/>
-                  </a:lnTo>
-                  <a:lnTo>
-                    <a:pt x="5586557" y="974631"/>
-                  </a:lnTo>
-                  <a:lnTo>
-                    <a:pt x="5658179" y="937145"/>
-                  </a:lnTo>
-                  <a:lnTo>
-                    <a:pt x="5729802" y="898879"/>
-                  </a:lnTo>
-                  <a:lnTo>
-                    <a:pt x="5801424" y="859818"/>
-                  </a:lnTo>
-                  <a:lnTo>
-                    <a:pt x="5873047" y="819945"/>
-                  </a:lnTo>
-                  <a:lnTo>
-                    <a:pt x="5944669" y="779242"/>
-                  </a:lnTo>
-                  <a:lnTo>
-                    <a:pt x="6016292" y="737693"/>
-                  </a:lnTo>
-                  <a:lnTo>
-                    <a:pt x="6087914" y="695280"/>
-                  </a:lnTo>
-                  <a:lnTo>
-                    <a:pt x="6159537" y="651985"/>
-                  </a:lnTo>
-                  <a:lnTo>
-                    <a:pt x="6231159" y="607790"/>
-                  </a:lnTo>
-                  <a:lnTo>
-                    <a:pt x="6302782" y="562675"/>
-                  </a:lnTo>
-                  <a:lnTo>
-                    <a:pt x="6374404" y="516623"/>
-                  </a:lnTo>
-                  <a:lnTo>
-                    <a:pt x="6446027" y="469613"/>
-                  </a:lnTo>
-                  <a:lnTo>
-                    <a:pt x="6517649" y="421625"/>
-                  </a:lnTo>
-                  <a:lnTo>
-                    <a:pt x="6589272" y="372639"/>
-                  </a:lnTo>
-                  <a:lnTo>
-                    <a:pt x="6660894" y="322635"/>
-                  </a:lnTo>
-                  <a:lnTo>
-                    <a:pt x="6732517" y="271591"/>
-                  </a:lnTo>
-                  <a:lnTo>
-                    <a:pt x="6804139" y="219485"/>
-                  </a:lnTo>
-                  <a:lnTo>
-                    <a:pt x="6875762" y="166296"/>
-                  </a:lnTo>
-                  <a:lnTo>
-                    <a:pt x="6947385" y="112001"/>
-                  </a:lnTo>
-                  <a:lnTo>
-                    <a:pt x="7019007" y="56576"/>
+                    <a:pt x="71622" y="868388"/>
+                  </a:lnTo>
+                  <a:lnTo>
+                    <a:pt x="143245" y="862905"/>
+                  </a:lnTo>
+                  <a:lnTo>
+                    <a:pt x="214867" y="857371"/>
+                  </a:lnTo>
+                  <a:lnTo>
+                    <a:pt x="286490" y="851786"/>
+                  </a:lnTo>
+                  <a:lnTo>
+                    <a:pt x="358112" y="846149"/>
+                  </a:lnTo>
+                  <a:lnTo>
+                    <a:pt x="429735" y="840460"/>
+                  </a:lnTo>
+                  <a:lnTo>
+                    <a:pt x="501357" y="834718"/>
+                  </a:lnTo>
+                  <a:lnTo>
+                    <a:pt x="572980" y="828924"/>
+                  </a:lnTo>
+                  <a:lnTo>
+                    <a:pt x="644602" y="823075"/>
+                  </a:lnTo>
+                  <a:lnTo>
+                    <a:pt x="716225" y="817173"/>
+                  </a:lnTo>
+                  <a:lnTo>
+                    <a:pt x="787847" y="811216"/>
+                  </a:lnTo>
+                  <a:lnTo>
+                    <a:pt x="859470" y="805204"/>
+                  </a:lnTo>
+                  <a:lnTo>
+                    <a:pt x="931092" y="799137"/>
+                  </a:lnTo>
+                  <a:lnTo>
+                    <a:pt x="1002715" y="793013"/>
+                  </a:lnTo>
+                  <a:lnTo>
+                    <a:pt x="1074337" y="786833"/>
+                  </a:lnTo>
+                  <a:lnTo>
+                    <a:pt x="1145960" y="780596"/>
+                  </a:lnTo>
+                  <a:lnTo>
+                    <a:pt x="1217582" y="774301"/>
+                  </a:lnTo>
+                  <a:lnTo>
+                    <a:pt x="1289205" y="767948"/>
+                  </a:lnTo>
+                  <a:lnTo>
+                    <a:pt x="1360827" y="761536"/>
+                  </a:lnTo>
+                  <a:lnTo>
+                    <a:pt x="1432450" y="755065"/>
+                  </a:lnTo>
+                  <a:lnTo>
+                    <a:pt x="1504073" y="748534"/>
+                  </a:lnTo>
+                  <a:lnTo>
+                    <a:pt x="1575695" y="741942"/>
+                  </a:lnTo>
+                  <a:lnTo>
+                    <a:pt x="1647318" y="735290"/>
+                  </a:lnTo>
+                  <a:lnTo>
+                    <a:pt x="1718940" y="728576"/>
+                  </a:lnTo>
+                  <a:lnTo>
+                    <a:pt x="1790563" y="721800"/>
+                  </a:lnTo>
+                  <a:lnTo>
+                    <a:pt x="1862185" y="714962"/>
+                  </a:lnTo>
+                  <a:lnTo>
+                    <a:pt x="1933808" y="708060"/>
+                  </a:lnTo>
+                  <a:lnTo>
+                    <a:pt x="2005430" y="701095"/>
+                  </a:lnTo>
+                  <a:lnTo>
+                    <a:pt x="2077053" y="694065"/>
+                  </a:lnTo>
+                  <a:lnTo>
+                    <a:pt x="2148675" y="686970"/>
+                  </a:lnTo>
+                  <a:lnTo>
+                    <a:pt x="2220298" y="679809"/>
+                  </a:lnTo>
+                  <a:lnTo>
+                    <a:pt x="2291920" y="672583"/>
+                  </a:lnTo>
+                  <a:lnTo>
+                    <a:pt x="2363543" y="665289"/>
+                  </a:lnTo>
+                  <a:lnTo>
+                    <a:pt x="2435165" y="657928"/>
+                  </a:lnTo>
+                  <a:lnTo>
+                    <a:pt x="2506788" y="650499"/>
+                  </a:lnTo>
+                  <a:lnTo>
+                    <a:pt x="2578410" y="643002"/>
+                  </a:lnTo>
+                  <a:lnTo>
+                    <a:pt x="2650033" y="635435"/>
+                  </a:lnTo>
+                  <a:lnTo>
+                    <a:pt x="2721655" y="627798"/>
+                  </a:lnTo>
+                  <a:lnTo>
+                    <a:pt x="2793278" y="620090"/>
+                  </a:lnTo>
+                  <a:lnTo>
+                    <a:pt x="2864901" y="612312"/>
+                  </a:lnTo>
+                  <a:lnTo>
+                    <a:pt x="2936523" y="604461"/>
+                  </a:lnTo>
+                  <a:lnTo>
+                    <a:pt x="3008146" y="596538"/>
+                  </a:lnTo>
+                  <a:lnTo>
+                    <a:pt x="3079768" y="588541"/>
+                  </a:lnTo>
+                  <a:lnTo>
+                    <a:pt x="3151391" y="580471"/>
+                  </a:lnTo>
+                  <a:lnTo>
+                    <a:pt x="3223013" y="572326"/>
+                  </a:lnTo>
+                  <a:lnTo>
+                    <a:pt x="3294636" y="564106"/>
+                  </a:lnTo>
+                  <a:lnTo>
+                    <a:pt x="3366258" y="555809"/>
+                  </a:lnTo>
+                  <a:lnTo>
+                    <a:pt x="3437881" y="547436"/>
+                  </a:lnTo>
+                  <a:lnTo>
+                    <a:pt x="3509503" y="538986"/>
+                  </a:lnTo>
+                  <a:lnTo>
+                    <a:pt x="3581126" y="530457"/>
+                  </a:lnTo>
+                  <a:lnTo>
+                    <a:pt x="3652748" y="521850"/>
+                  </a:lnTo>
+                  <a:lnTo>
+                    <a:pt x="3724371" y="513163"/>
+                  </a:lnTo>
+                  <a:lnTo>
+                    <a:pt x="3795993" y="504396"/>
+                  </a:lnTo>
+                  <a:lnTo>
+                    <a:pt x="3867616" y="495547"/>
+                  </a:lnTo>
+                  <a:lnTo>
+                    <a:pt x="3939238" y="486617"/>
+                  </a:lnTo>
+                  <a:lnTo>
+                    <a:pt x="4010861" y="477605"/>
+                  </a:lnTo>
+                  <a:lnTo>
+                    <a:pt x="4082483" y="468509"/>
+                  </a:lnTo>
+                  <a:lnTo>
+                    <a:pt x="4154106" y="459329"/>
+                  </a:lnTo>
+                  <a:lnTo>
+                    <a:pt x="4225729" y="450064"/>
+                  </a:lnTo>
+                  <a:lnTo>
+                    <a:pt x="4297351" y="440713"/>
+                  </a:lnTo>
+                  <a:lnTo>
+                    <a:pt x="4368974" y="431276"/>
+                  </a:lnTo>
+                  <a:lnTo>
+                    <a:pt x="4440596" y="421752"/>
+                  </a:lnTo>
+                  <a:lnTo>
+                    <a:pt x="4512219" y="412140"/>
+                  </a:lnTo>
+                  <a:lnTo>
+                    <a:pt x="4583841" y="402439"/>
+                  </a:lnTo>
+                  <a:lnTo>
+                    <a:pt x="4655464" y="392648"/>
+                  </a:lnTo>
+                  <a:lnTo>
+                    <a:pt x="4727086" y="382766"/>
+                  </a:lnTo>
+                  <a:lnTo>
+                    <a:pt x="4798709" y="372794"/>
+                  </a:lnTo>
+                  <a:lnTo>
+                    <a:pt x="4870331" y="362729"/>
+                  </a:lnTo>
+                  <a:lnTo>
+                    <a:pt x="4941954" y="352571"/>
+                  </a:lnTo>
+                  <a:lnTo>
+                    <a:pt x="5013576" y="342319"/>
+                  </a:lnTo>
+                  <a:lnTo>
+                    <a:pt x="5085199" y="331972"/>
+                  </a:lnTo>
+                  <a:lnTo>
+                    <a:pt x="5156821" y="321530"/>
+                  </a:lnTo>
+                  <a:lnTo>
+                    <a:pt x="5228444" y="310991"/>
+                  </a:lnTo>
+                  <a:lnTo>
+                    <a:pt x="5300066" y="300355"/>
+                  </a:lnTo>
+                  <a:lnTo>
+                    <a:pt x="5371689" y="289621"/>
+                  </a:lnTo>
+                  <a:lnTo>
+                    <a:pt x="5443311" y="278787"/>
+                  </a:lnTo>
+                  <a:lnTo>
+                    <a:pt x="5514934" y="267853"/>
+                  </a:lnTo>
+                  <a:lnTo>
+                    <a:pt x="5586557" y="256818"/>
+                  </a:lnTo>
+                  <a:lnTo>
+                    <a:pt x="5658179" y="245681"/>
+                  </a:lnTo>
+                  <a:lnTo>
+                    <a:pt x="5729802" y="234441"/>
+                  </a:lnTo>
+                  <a:lnTo>
+                    <a:pt x="5801424" y="223097"/>
+                  </a:lnTo>
+                  <a:lnTo>
+                    <a:pt x="5873047" y="211648"/>
+                  </a:lnTo>
+                  <a:lnTo>
+                    <a:pt x="5944669" y="200094"/>
+                  </a:lnTo>
+                  <a:lnTo>
+                    <a:pt x="6016292" y="188432"/>
+                  </a:lnTo>
+                  <a:lnTo>
+                    <a:pt x="6087914" y="176663"/>
+                  </a:lnTo>
+                  <a:lnTo>
+                    <a:pt x="6159537" y="164785"/>
+                  </a:lnTo>
+                  <a:lnTo>
+                    <a:pt x="6231159" y="152797"/>
+                  </a:lnTo>
+                  <a:lnTo>
+                    <a:pt x="6302782" y="140699"/>
+                  </a:lnTo>
+                  <a:lnTo>
+                    <a:pt x="6374404" y="128488"/>
+                  </a:lnTo>
+                  <a:lnTo>
+                    <a:pt x="6446027" y="116165"/>
+                  </a:lnTo>
+                  <a:lnTo>
+                    <a:pt x="6517649" y="103727"/>
+                  </a:lnTo>
+                  <a:lnTo>
+                    <a:pt x="6589272" y="91175"/>
+                  </a:lnTo>
+                  <a:lnTo>
+                    <a:pt x="6660894" y="78507"/>
+                  </a:lnTo>
+                  <a:lnTo>
+                    <a:pt x="6732517" y="65722"/>
+                  </a:lnTo>
+                  <a:lnTo>
+                    <a:pt x="6804139" y="52818"/>
+                  </a:lnTo>
+                  <a:lnTo>
+                    <a:pt x="6875762" y="39795"/>
+                  </a:lnTo>
+                  <a:lnTo>
+                    <a:pt x="6947385" y="26652"/>
+                  </a:lnTo>
+                  <a:lnTo>
+                    <a:pt x="7019007" y="13387"/>
                   </a:lnTo>
                   <a:lnTo>
                     <a:pt x="7090630" y="0"/>

--- a/docs/plots/carbo/jx_carbo_linsubhr_dosedisc_grade2.pptx
+++ b/docs/plots/carbo/jx_carbo_linsubhr_dosedisc_grade2.pptx
@@ -2271,7 +2271,7 @@
           </p:nvSpPr>
           <p:spPr>
             <a:xfrm>
-              <a:off x="817517" y="5114368"/>
+              <a:off x="817517" y="5142518"/>
               <a:ext cx="7799693" cy="0"/>
             </a:xfrm>
             <a:custGeom>
@@ -2314,7 +2314,7 @@
           </p:nvSpPr>
           <p:spPr>
             <a:xfrm>
-              <a:off x="817517" y="4244691"/>
+              <a:off x="817517" y="4313054"/>
               <a:ext cx="7799693" cy="0"/>
             </a:xfrm>
             <a:custGeom>
@@ -2357,7 +2357,7 @@
           </p:nvSpPr>
           <p:spPr>
             <a:xfrm>
-              <a:off x="817517" y="3375014"/>
+              <a:off x="817517" y="3483591"/>
               <a:ext cx="7799693" cy="0"/>
             </a:xfrm>
             <a:custGeom>
@@ -2400,7 +2400,7 @@
           </p:nvSpPr>
           <p:spPr>
             <a:xfrm>
-              <a:off x="817517" y="2505337"/>
+              <a:off x="817517" y="2654127"/>
               <a:ext cx="7799693" cy="0"/>
             </a:xfrm>
             <a:custGeom>
@@ -2443,15 +2443,15 @@
           </p:nvSpPr>
           <p:spPr>
             <a:xfrm>
-              <a:off x="2122745" y="1896563"/>
-              <a:ext cx="0" cy="3826579"/>
+              <a:off x="2122745" y="2073503"/>
+              <a:ext cx="0" cy="3649639"/>
             </a:xfrm>
             <a:custGeom>
               <a:avLst/>
               <a:pathLst>
-                <a:path w="0" h="3826579">
+                <a:path w="0" h="3649639">
                   <a:moveTo>
-                    <a:pt x="0" y="3826579"/>
+                    <a:pt x="0" y="3649639"/>
                   </a:moveTo>
                   <a:lnTo>
                     <a:pt x="0" y="0"/>
@@ -2486,15 +2486,15 @@
           </p:nvSpPr>
           <p:spPr>
             <a:xfrm>
-              <a:off x="3487174" y="1896563"/>
-              <a:ext cx="0" cy="3826579"/>
+              <a:off x="3487174" y="2073503"/>
+              <a:ext cx="0" cy="3649639"/>
             </a:xfrm>
             <a:custGeom>
               <a:avLst/>
               <a:pathLst>
-                <a:path w="0" h="3826579">
+                <a:path w="0" h="3649639">
                   <a:moveTo>
-                    <a:pt x="0" y="3826579"/>
+                    <a:pt x="0" y="3649639"/>
                   </a:moveTo>
                   <a:lnTo>
                     <a:pt x="0" y="0"/>
@@ -2529,15 +2529,15 @@
           </p:nvSpPr>
           <p:spPr>
             <a:xfrm>
-              <a:off x="4851604" y="1896563"/>
-              <a:ext cx="0" cy="3826579"/>
+              <a:off x="4851604" y="2073503"/>
+              <a:ext cx="0" cy="3649639"/>
             </a:xfrm>
             <a:custGeom>
               <a:avLst/>
               <a:pathLst>
-                <a:path w="0" h="3826579">
+                <a:path w="0" h="3649639">
                   <a:moveTo>
-                    <a:pt x="0" y="3826579"/>
+                    <a:pt x="0" y="3649639"/>
                   </a:moveTo>
                   <a:lnTo>
                     <a:pt x="0" y="0"/>
@@ -2572,15 +2572,15 @@
           </p:nvSpPr>
           <p:spPr>
             <a:xfrm>
-              <a:off x="6216034" y="1896563"/>
-              <a:ext cx="0" cy="3826579"/>
+              <a:off x="6216034" y="2073503"/>
+              <a:ext cx="0" cy="3649639"/>
             </a:xfrm>
             <a:custGeom>
               <a:avLst/>
               <a:pathLst>
-                <a:path w="0" h="3826579">
+                <a:path w="0" h="3649639">
                   <a:moveTo>
-                    <a:pt x="0" y="3826579"/>
+                    <a:pt x="0" y="3649639"/>
                   </a:moveTo>
                   <a:lnTo>
                     <a:pt x="0" y="0"/>
@@ -2615,15 +2615,15 @@
           </p:nvSpPr>
           <p:spPr>
             <a:xfrm>
-              <a:off x="7580464" y="1896563"/>
-              <a:ext cx="0" cy="3826579"/>
+              <a:off x="7580464" y="2073503"/>
+              <a:ext cx="0" cy="3649639"/>
             </a:xfrm>
             <a:custGeom>
               <a:avLst/>
               <a:pathLst>
-                <a:path w="0" h="3826579">
+                <a:path w="0" h="3649639">
                   <a:moveTo>
-                    <a:pt x="0" y="3826579"/>
+                    <a:pt x="0" y="3649639"/>
                   </a:moveTo>
                   <a:lnTo>
                     <a:pt x="0" y="0"/>
@@ -2658,7 +2658,7 @@
           </p:nvSpPr>
           <p:spPr>
             <a:xfrm>
-              <a:off x="817517" y="5549207"/>
+              <a:off x="817517" y="5557249"/>
               <a:ext cx="7799693" cy="0"/>
             </a:xfrm>
             <a:custGeom>
@@ -2701,7 +2701,7 @@
           </p:nvSpPr>
           <p:spPr>
             <a:xfrm>
-              <a:off x="817517" y="4679530"/>
+              <a:off x="817517" y="4727786"/>
               <a:ext cx="7799693" cy="0"/>
             </a:xfrm>
             <a:custGeom>
@@ -2744,7 +2744,7 @@
           </p:nvSpPr>
           <p:spPr>
             <a:xfrm>
-              <a:off x="817517" y="3809853"/>
+              <a:off x="817517" y="3898322"/>
               <a:ext cx="7799693" cy="0"/>
             </a:xfrm>
             <a:custGeom>
@@ -2787,7 +2787,7 @@
           </p:nvSpPr>
           <p:spPr>
             <a:xfrm>
-              <a:off x="817517" y="2940175"/>
+              <a:off x="817517" y="3068859"/>
               <a:ext cx="7799693" cy="0"/>
             </a:xfrm>
             <a:custGeom>
@@ -2830,7 +2830,7 @@
           </p:nvSpPr>
           <p:spPr>
             <a:xfrm>
-              <a:off x="817517" y="2070498"/>
+              <a:off x="817517" y="2239395"/>
               <a:ext cx="7799693" cy="0"/>
             </a:xfrm>
             <a:custGeom>
@@ -2873,15 +2873,15 @@
           </p:nvSpPr>
           <p:spPr>
             <a:xfrm>
-              <a:off x="1440530" y="1896563"/>
-              <a:ext cx="0" cy="3826579"/>
+              <a:off x="1440530" y="2073503"/>
+              <a:ext cx="0" cy="3649639"/>
             </a:xfrm>
             <a:custGeom>
               <a:avLst/>
               <a:pathLst>
-                <a:path w="0" h="3826579">
+                <a:path w="0" h="3649639">
                   <a:moveTo>
-                    <a:pt x="0" y="3826579"/>
+                    <a:pt x="0" y="3649639"/>
                   </a:moveTo>
                   <a:lnTo>
                     <a:pt x="0" y="0"/>
@@ -2916,15 +2916,15 @@
           </p:nvSpPr>
           <p:spPr>
             <a:xfrm>
-              <a:off x="2804959" y="1896563"/>
-              <a:ext cx="0" cy="3826579"/>
+              <a:off x="2804959" y="2073503"/>
+              <a:ext cx="0" cy="3649639"/>
             </a:xfrm>
             <a:custGeom>
               <a:avLst/>
               <a:pathLst>
-                <a:path w="0" h="3826579">
+                <a:path w="0" h="3649639">
                   <a:moveTo>
-                    <a:pt x="0" y="3826579"/>
+                    <a:pt x="0" y="3649639"/>
                   </a:moveTo>
                   <a:lnTo>
                     <a:pt x="0" y="0"/>
@@ -2959,15 +2959,15 @@
           </p:nvSpPr>
           <p:spPr>
             <a:xfrm>
-              <a:off x="4169389" y="1896563"/>
-              <a:ext cx="0" cy="3826579"/>
+              <a:off x="4169389" y="2073503"/>
+              <a:ext cx="0" cy="3649639"/>
             </a:xfrm>
             <a:custGeom>
               <a:avLst/>
               <a:pathLst>
-                <a:path w="0" h="3826579">
+                <a:path w="0" h="3649639">
                   <a:moveTo>
-                    <a:pt x="0" y="3826579"/>
+                    <a:pt x="0" y="3649639"/>
                   </a:moveTo>
                   <a:lnTo>
                     <a:pt x="0" y="0"/>
@@ -3002,15 +3002,15 @@
           </p:nvSpPr>
           <p:spPr>
             <a:xfrm>
-              <a:off x="5533819" y="1896563"/>
-              <a:ext cx="0" cy="3826579"/>
+              <a:off x="5533819" y="2073503"/>
+              <a:ext cx="0" cy="3649639"/>
             </a:xfrm>
             <a:custGeom>
               <a:avLst/>
               <a:pathLst>
-                <a:path w="0" h="3826579">
+                <a:path w="0" h="3649639">
                   <a:moveTo>
-                    <a:pt x="0" y="3826579"/>
+                    <a:pt x="0" y="3649639"/>
                   </a:moveTo>
                   <a:lnTo>
                     <a:pt x="0" y="0"/>
@@ -3045,15 +3045,15 @@
           </p:nvSpPr>
           <p:spPr>
             <a:xfrm>
-              <a:off x="6898249" y="1896563"/>
-              <a:ext cx="0" cy="3826579"/>
+              <a:off x="6898249" y="2073503"/>
+              <a:ext cx="0" cy="3649639"/>
             </a:xfrm>
             <a:custGeom>
               <a:avLst/>
               <a:pathLst>
-                <a:path w="0" h="3826579">
+                <a:path w="0" h="3649639">
                   <a:moveTo>
-                    <a:pt x="0" y="3826579"/>
+                    <a:pt x="0" y="3649639"/>
                   </a:moveTo>
                   <a:lnTo>
                     <a:pt x="0" y="0"/>
@@ -3088,15 +3088,15 @@
           </p:nvSpPr>
           <p:spPr>
             <a:xfrm>
-              <a:off x="8262679" y="1896563"/>
-              <a:ext cx="0" cy="3826579"/>
+              <a:off x="8262679" y="2073503"/>
+              <a:ext cx="0" cy="3649639"/>
             </a:xfrm>
             <a:custGeom>
               <a:avLst/>
               <a:pathLst>
-                <a:path w="0" h="3826579">
+                <a:path w="0" h="3649639">
                   <a:moveTo>
-                    <a:pt x="0" y="3826579"/>
+                    <a:pt x="0" y="3649639"/>
                   </a:moveTo>
                   <a:lnTo>
                     <a:pt x="0" y="0"/>
@@ -3131,306 +3131,306 @@
           </p:nvSpPr>
           <p:spPr>
             <a:xfrm>
-              <a:off x="1172049" y="1896563"/>
-              <a:ext cx="7090630" cy="3366598"/>
+              <a:off x="1172049" y="2073503"/>
+              <a:ext cx="7090630" cy="3210927"/>
             </a:xfrm>
             <a:custGeom>
               <a:avLst/>
               <a:pathLst>
-                <a:path w="7090630" h="3366598">
+                <a:path w="7090630" h="3210927">
                   <a:moveTo>
-                    <a:pt x="0" y="2445105"/>
+                    <a:pt x="0" y="2332045"/>
                   </a:moveTo>
                   <a:lnTo>
-                    <a:pt x="71622" y="2454376"/>
-                  </a:lnTo>
-                  <a:lnTo>
-                    <a:pt x="143245" y="2463576"/>
-                  </a:lnTo>
-                  <a:lnTo>
-                    <a:pt x="214867" y="2472705"/>
-                  </a:lnTo>
-                  <a:lnTo>
-                    <a:pt x="286490" y="2481764"/>
-                  </a:lnTo>
-                  <a:lnTo>
-                    <a:pt x="358112" y="2490754"/>
-                  </a:lnTo>
-                  <a:lnTo>
-                    <a:pt x="429735" y="2499674"/>
-                  </a:lnTo>
-                  <a:lnTo>
-                    <a:pt x="501357" y="2508526"/>
-                  </a:lnTo>
-                  <a:lnTo>
-                    <a:pt x="572980" y="2517310"/>
-                  </a:lnTo>
-                  <a:lnTo>
-                    <a:pt x="644602" y="2526027"/>
-                  </a:lnTo>
-                  <a:lnTo>
-                    <a:pt x="716225" y="2534676"/>
-                  </a:lnTo>
-                  <a:lnTo>
-                    <a:pt x="787847" y="2543259"/>
-                  </a:lnTo>
-                  <a:lnTo>
-                    <a:pt x="859470" y="2551777"/>
-                  </a:lnTo>
-                  <a:lnTo>
-                    <a:pt x="931092" y="2560229"/>
-                  </a:lnTo>
-                  <a:lnTo>
-                    <a:pt x="1002715" y="2568616"/>
-                  </a:lnTo>
-                  <a:lnTo>
-                    <a:pt x="1074337" y="2576938"/>
-                  </a:lnTo>
-                  <a:lnTo>
-                    <a:pt x="1145960" y="2585197"/>
-                  </a:lnTo>
-                  <a:lnTo>
-                    <a:pt x="1217582" y="2593393"/>
-                  </a:lnTo>
-                  <a:lnTo>
-                    <a:pt x="1289205" y="2601525"/>
-                  </a:lnTo>
-                  <a:lnTo>
-                    <a:pt x="1360827" y="2609595"/>
-                  </a:lnTo>
-                  <a:lnTo>
-                    <a:pt x="1432450" y="2617603"/>
-                  </a:lnTo>
-                  <a:lnTo>
-                    <a:pt x="1504073" y="2625550"/>
-                  </a:lnTo>
-                  <a:lnTo>
-                    <a:pt x="1575695" y="2633435"/>
-                  </a:lnTo>
-                  <a:lnTo>
-                    <a:pt x="1647318" y="2641260"/>
-                  </a:lnTo>
-                  <a:lnTo>
-                    <a:pt x="1718940" y="2649025"/>
-                  </a:lnTo>
-                  <a:lnTo>
-                    <a:pt x="1790563" y="2656730"/>
-                  </a:lnTo>
-                  <a:lnTo>
-                    <a:pt x="1862185" y="2664377"/>
-                  </a:lnTo>
-                  <a:lnTo>
-                    <a:pt x="1933808" y="2671964"/>
-                  </a:lnTo>
-                  <a:lnTo>
-                    <a:pt x="2005430" y="2679493"/>
-                  </a:lnTo>
-                  <a:lnTo>
-                    <a:pt x="2077053" y="2686965"/>
-                  </a:lnTo>
-                  <a:lnTo>
-                    <a:pt x="2148675" y="2694379"/>
-                  </a:lnTo>
-                  <a:lnTo>
-                    <a:pt x="2220298" y="2701736"/>
-                  </a:lnTo>
-                  <a:lnTo>
-                    <a:pt x="2291920" y="2709036"/>
-                  </a:lnTo>
-                  <a:lnTo>
-                    <a:pt x="2363543" y="2716281"/>
-                  </a:lnTo>
-                  <a:lnTo>
-                    <a:pt x="2435165" y="2723470"/>
-                  </a:lnTo>
-                  <a:lnTo>
-                    <a:pt x="2506788" y="2730604"/>
-                  </a:lnTo>
-                  <a:lnTo>
-                    <a:pt x="2578410" y="2737683"/>
-                  </a:lnTo>
-                  <a:lnTo>
-                    <a:pt x="2650033" y="2744707"/>
-                  </a:lnTo>
-                  <a:lnTo>
-                    <a:pt x="2721655" y="2751678"/>
-                  </a:lnTo>
-                  <a:lnTo>
-                    <a:pt x="2793278" y="2758595"/>
-                  </a:lnTo>
-                  <a:lnTo>
-                    <a:pt x="2864901" y="2765459"/>
-                  </a:lnTo>
-                  <a:lnTo>
-                    <a:pt x="2936523" y="2772271"/>
-                  </a:lnTo>
-                  <a:lnTo>
-                    <a:pt x="3008146" y="2779030"/>
-                  </a:lnTo>
-                  <a:lnTo>
-                    <a:pt x="3079768" y="2773513"/>
-                  </a:lnTo>
-                  <a:lnTo>
-                    <a:pt x="3151391" y="2750256"/>
-                  </a:lnTo>
-                  <a:lnTo>
-                    <a:pt x="3223013" y="2726383"/>
-                  </a:lnTo>
-                  <a:lnTo>
-                    <a:pt x="3294636" y="2701879"/>
-                  </a:lnTo>
-                  <a:lnTo>
-                    <a:pt x="3366258" y="2676726"/>
-                  </a:lnTo>
-                  <a:lnTo>
-                    <a:pt x="3437881" y="2650908"/>
-                  </a:lnTo>
-                  <a:lnTo>
-                    <a:pt x="3509503" y="2624407"/>
-                  </a:lnTo>
-                  <a:lnTo>
-                    <a:pt x="3581126" y="2597205"/>
-                  </a:lnTo>
-                  <a:lnTo>
-                    <a:pt x="3652748" y="2569283"/>
-                  </a:lnTo>
-                  <a:lnTo>
-                    <a:pt x="3724371" y="2540623"/>
-                  </a:lnTo>
-                  <a:lnTo>
-                    <a:pt x="3795993" y="2511204"/>
-                  </a:lnTo>
-                  <a:lnTo>
-                    <a:pt x="3867616" y="2481008"/>
-                  </a:lnTo>
-                  <a:lnTo>
-                    <a:pt x="3939238" y="2450012"/>
-                  </a:lnTo>
-                  <a:lnTo>
-                    <a:pt x="4010861" y="2418196"/>
-                  </a:lnTo>
-                  <a:lnTo>
-                    <a:pt x="4082483" y="2385539"/>
-                  </a:lnTo>
-                  <a:lnTo>
-                    <a:pt x="4154106" y="2352017"/>
-                  </a:lnTo>
-                  <a:lnTo>
-                    <a:pt x="4225729" y="2317609"/>
-                  </a:lnTo>
-                  <a:lnTo>
-                    <a:pt x="4297351" y="2282291"/>
-                  </a:lnTo>
-                  <a:lnTo>
-                    <a:pt x="4368974" y="2246038"/>
-                  </a:lnTo>
-                  <a:lnTo>
-                    <a:pt x="4440596" y="2208826"/>
-                  </a:lnTo>
-                  <a:lnTo>
-                    <a:pt x="4512219" y="2170630"/>
-                  </a:lnTo>
-                  <a:lnTo>
-                    <a:pt x="4583841" y="2131423"/>
-                  </a:lnTo>
-                  <a:lnTo>
-                    <a:pt x="4655464" y="2091179"/>
-                  </a:lnTo>
-                  <a:lnTo>
-                    <a:pt x="4727086" y="2049870"/>
-                  </a:lnTo>
-                  <a:lnTo>
-                    <a:pt x="4798709" y="2007469"/>
-                  </a:lnTo>
-                  <a:lnTo>
-                    <a:pt x="4870331" y="1963946"/>
-                  </a:lnTo>
-                  <a:lnTo>
-                    <a:pt x="4941954" y="1919271"/>
-                  </a:lnTo>
-                  <a:lnTo>
-                    <a:pt x="5013576" y="1873414"/>
-                  </a:lnTo>
-                  <a:lnTo>
-                    <a:pt x="5085199" y="1826345"/>
-                  </a:lnTo>
-                  <a:lnTo>
-                    <a:pt x="5156821" y="1778030"/>
-                  </a:lnTo>
-                  <a:lnTo>
-                    <a:pt x="5228444" y="1728437"/>
-                  </a:lnTo>
-                  <a:lnTo>
-                    <a:pt x="5300066" y="1677532"/>
-                  </a:lnTo>
-                  <a:lnTo>
-                    <a:pt x="5371689" y="1625280"/>
-                  </a:lnTo>
-                  <a:lnTo>
-                    <a:pt x="5443311" y="1571646"/>
-                  </a:lnTo>
-                  <a:lnTo>
-                    <a:pt x="5514934" y="1516593"/>
-                  </a:lnTo>
-                  <a:lnTo>
-                    <a:pt x="5586557" y="1460084"/>
-                  </a:lnTo>
-                  <a:lnTo>
-                    <a:pt x="5658179" y="1402079"/>
-                  </a:lnTo>
-                  <a:lnTo>
-                    <a:pt x="5729802" y="1342541"/>
-                  </a:lnTo>
-                  <a:lnTo>
-                    <a:pt x="5801424" y="1281427"/>
-                  </a:lnTo>
-                  <a:lnTo>
-                    <a:pt x="5873047" y="1218696"/>
-                  </a:lnTo>
-                  <a:lnTo>
-                    <a:pt x="5944669" y="1154306"/>
-                  </a:lnTo>
-                  <a:lnTo>
-                    <a:pt x="6016292" y="1088212"/>
-                  </a:lnTo>
-                  <a:lnTo>
-                    <a:pt x="6087914" y="1020370"/>
-                  </a:lnTo>
-                  <a:lnTo>
-                    <a:pt x="6159537" y="950733"/>
-                  </a:lnTo>
-                  <a:lnTo>
-                    <a:pt x="6231159" y="879253"/>
-                  </a:lnTo>
-                  <a:lnTo>
-                    <a:pt x="6302782" y="805883"/>
-                  </a:lnTo>
-                  <a:lnTo>
-                    <a:pt x="6374404" y="730572"/>
-                  </a:lnTo>
-                  <a:lnTo>
-                    <a:pt x="6446027" y="653268"/>
-                  </a:lnTo>
-                  <a:lnTo>
-                    <a:pt x="6517649" y="573919"/>
-                  </a:lnTo>
-                  <a:lnTo>
-                    <a:pt x="6589272" y="492471"/>
-                  </a:lnTo>
-                  <a:lnTo>
-                    <a:pt x="6660894" y="408869"/>
-                  </a:lnTo>
-                  <a:lnTo>
-                    <a:pt x="6732517" y="323055"/>
-                  </a:lnTo>
-                  <a:lnTo>
-                    <a:pt x="6804139" y="234970"/>
-                  </a:lnTo>
-                  <a:lnTo>
-                    <a:pt x="6875762" y="144555"/>
-                  </a:lnTo>
-                  <a:lnTo>
-                    <a:pt x="6947385" y="51748"/>
+                    <a:pt x="71622" y="2340887"/>
+                  </a:lnTo>
+                  <a:lnTo>
+                    <a:pt x="143245" y="2349661"/>
+                  </a:lnTo>
+                  <a:lnTo>
+                    <a:pt x="214867" y="2358368"/>
+                  </a:lnTo>
+                  <a:lnTo>
+                    <a:pt x="286490" y="2367008"/>
+                  </a:lnTo>
+                  <a:lnTo>
+                    <a:pt x="358112" y="2375582"/>
+                  </a:lnTo>
+                  <a:lnTo>
+                    <a:pt x="429735" y="2384090"/>
+                  </a:lnTo>
+                  <a:lnTo>
+                    <a:pt x="501357" y="2392533"/>
+                  </a:lnTo>
+                  <a:lnTo>
+                    <a:pt x="572980" y="2400910"/>
+                  </a:lnTo>
+                  <a:lnTo>
+                    <a:pt x="644602" y="2409224"/>
+                  </a:lnTo>
+                  <a:lnTo>
+                    <a:pt x="716225" y="2417474"/>
+                  </a:lnTo>
+                  <a:lnTo>
+                    <a:pt x="787847" y="2425660"/>
+                  </a:lnTo>
+                  <a:lnTo>
+                    <a:pt x="859470" y="2433784"/>
+                  </a:lnTo>
+                  <a:lnTo>
+                    <a:pt x="931092" y="2441845"/>
+                  </a:lnTo>
+                  <a:lnTo>
+                    <a:pt x="1002715" y="2449844"/>
+                  </a:lnTo>
+                  <a:lnTo>
+                    <a:pt x="1074337" y="2457782"/>
+                  </a:lnTo>
+                  <a:lnTo>
+                    <a:pt x="1145960" y="2465659"/>
+                  </a:lnTo>
+                  <a:lnTo>
+                    <a:pt x="1217582" y="2473475"/>
+                  </a:lnTo>
+                  <a:lnTo>
+                    <a:pt x="1289205" y="2481231"/>
+                  </a:lnTo>
+                  <a:lnTo>
+                    <a:pt x="1360827" y="2488928"/>
+                  </a:lnTo>
+                  <a:lnTo>
+                    <a:pt x="1432450" y="2496566"/>
+                  </a:lnTo>
+                  <a:lnTo>
+                    <a:pt x="1504073" y="2504145"/>
+                  </a:lnTo>
+                  <a:lnTo>
+                    <a:pt x="1575695" y="2511666"/>
+                  </a:lnTo>
+                  <a:lnTo>
+                    <a:pt x="1647318" y="2519129"/>
+                  </a:lnTo>
+                  <a:lnTo>
+                    <a:pt x="1718940" y="2526535"/>
+                  </a:lnTo>
+                  <a:lnTo>
+                    <a:pt x="1790563" y="2533884"/>
+                  </a:lnTo>
+                  <a:lnTo>
+                    <a:pt x="1862185" y="2541177"/>
+                  </a:lnTo>
+                  <a:lnTo>
+                    <a:pt x="1933808" y="2548413"/>
+                  </a:lnTo>
+                  <a:lnTo>
+                    <a:pt x="2005430" y="2555594"/>
+                  </a:lnTo>
+                  <a:lnTo>
+                    <a:pt x="2077053" y="2562720"/>
+                  </a:lnTo>
+                  <a:lnTo>
+                    <a:pt x="2148675" y="2569792"/>
+                  </a:lnTo>
+                  <a:lnTo>
+                    <a:pt x="2220298" y="2576808"/>
+                  </a:lnTo>
+                  <a:lnTo>
+                    <a:pt x="2291920" y="2583771"/>
+                  </a:lnTo>
+                  <a:lnTo>
+                    <a:pt x="2363543" y="2590681"/>
+                  </a:lnTo>
+                  <a:lnTo>
+                    <a:pt x="2435165" y="2597538"/>
+                  </a:lnTo>
+                  <a:lnTo>
+                    <a:pt x="2506788" y="2604342"/>
+                  </a:lnTo>
+                  <a:lnTo>
+                    <a:pt x="2578410" y="2611093"/>
+                  </a:lnTo>
+                  <a:lnTo>
+                    <a:pt x="2650033" y="2617793"/>
+                  </a:lnTo>
+                  <a:lnTo>
+                    <a:pt x="2721655" y="2624441"/>
+                  </a:lnTo>
+                  <a:lnTo>
+                    <a:pt x="2793278" y="2631039"/>
+                  </a:lnTo>
+                  <a:lnTo>
+                    <a:pt x="2864901" y="2637585"/>
+                  </a:lnTo>
+                  <a:lnTo>
+                    <a:pt x="2936523" y="2644082"/>
+                  </a:lnTo>
+                  <a:lnTo>
+                    <a:pt x="3008146" y="2650528"/>
+                  </a:lnTo>
+                  <a:lnTo>
+                    <a:pt x="3079768" y="2645267"/>
+                  </a:lnTo>
+                  <a:lnTo>
+                    <a:pt x="3151391" y="2623085"/>
+                  </a:lnTo>
+                  <a:lnTo>
+                    <a:pt x="3223013" y="2600316"/>
+                  </a:lnTo>
+                  <a:lnTo>
+                    <a:pt x="3294636" y="2576945"/>
+                  </a:lnTo>
+                  <a:lnTo>
+                    <a:pt x="3366258" y="2552955"/>
+                  </a:lnTo>
+                  <a:lnTo>
+                    <a:pt x="3437881" y="2528331"/>
+                  </a:lnTo>
+                  <a:lnTo>
+                    <a:pt x="3509503" y="2503056"/>
+                  </a:lnTo>
+                  <a:lnTo>
+                    <a:pt x="3581126" y="2477111"/>
+                  </a:lnTo>
+                  <a:lnTo>
+                    <a:pt x="3652748" y="2450481"/>
+                  </a:lnTo>
+                  <a:lnTo>
+                    <a:pt x="3724371" y="2423146"/>
+                  </a:lnTo>
+                  <a:lnTo>
+                    <a:pt x="3795993" y="2395087"/>
+                  </a:lnTo>
+                  <a:lnTo>
+                    <a:pt x="3867616" y="2366287"/>
+                  </a:lnTo>
+                  <a:lnTo>
+                    <a:pt x="3939238" y="2336724"/>
+                  </a:lnTo>
+                  <a:lnTo>
+                    <a:pt x="4010861" y="2306380"/>
+                  </a:lnTo>
+                  <a:lnTo>
+                    <a:pt x="4082483" y="2275232"/>
+                  </a:lnTo>
+                  <a:lnTo>
+                    <a:pt x="4154106" y="2243261"/>
+                  </a:lnTo>
+                  <a:lnTo>
+                    <a:pt x="4225729" y="2210444"/>
+                  </a:lnTo>
+                  <a:lnTo>
+                    <a:pt x="4297351" y="2176758"/>
+                  </a:lnTo>
+                  <a:lnTo>
+                    <a:pt x="4368974" y="2142182"/>
+                  </a:lnTo>
+                  <a:lnTo>
+                    <a:pt x="4440596" y="2106691"/>
+                  </a:lnTo>
+                  <a:lnTo>
+                    <a:pt x="4512219" y="2070261"/>
+                  </a:lnTo>
+                  <a:lnTo>
+                    <a:pt x="4583841" y="2032867"/>
+                  </a:lnTo>
+                  <a:lnTo>
+                    <a:pt x="4655464" y="1994484"/>
+                  </a:lnTo>
+                  <a:lnTo>
+                    <a:pt x="4727086" y="1955085"/>
+                  </a:lnTo>
+                  <a:lnTo>
+                    <a:pt x="4798709" y="1914644"/>
+                  </a:lnTo>
+                  <a:lnTo>
+                    <a:pt x="4870331" y="1873133"/>
+                  </a:lnTo>
+                  <a:lnTo>
+                    <a:pt x="4941954" y="1830525"/>
+                  </a:lnTo>
+                  <a:lnTo>
+                    <a:pt x="5013576" y="1786788"/>
+                  </a:lnTo>
+                  <a:lnTo>
+                    <a:pt x="5085199" y="1741895"/>
+                  </a:lnTo>
+                  <a:lnTo>
+                    <a:pt x="5156821" y="1695814"/>
+                  </a:lnTo>
+                  <a:lnTo>
+                    <a:pt x="5228444" y="1648515"/>
+                  </a:lnTo>
+                  <a:lnTo>
+                    <a:pt x="5300066" y="1599963"/>
+                  </a:lnTo>
+                  <a:lnTo>
+                    <a:pt x="5371689" y="1550128"/>
+                  </a:lnTo>
+                  <a:lnTo>
+                    <a:pt x="5443311" y="1498974"/>
+                  </a:lnTo>
+                  <a:lnTo>
+                    <a:pt x="5514934" y="1446466"/>
+                  </a:lnTo>
+                  <a:lnTo>
+                    <a:pt x="5586557" y="1392570"/>
+                  </a:lnTo>
+                  <a:lnTo>
+                    <a:pt x="5658179" y="1337248"/>
+                  </a:lnTo>
+                  <a:lnTo>
+                    <a:pt x="5729802" y="1280462"/>
+                  </a:lnTo>
+                  <a:lnTo>
+                    <a:pt x="5801424" y="1222174"/>
+                  </a:lnTo>
+                  <a:lnTo>
+                    <a:pt x="5873047" y="1162344"/>
+                  </a:lnTo>
+                  <a:lnTo>
+                    <a:pt x="5944669" y="1100931"/>
+                  </a:lnTo>
+                  <a:lnTo>
+                    <a:pt x="6016292" y="1037893"/>
+                  </a:lnTo>
+                  <a:lnTo>
+                    <a:pt x="6087914" y="973188"/>
+                  </a:lnTo>
+                  <a:lnTo>
+                    <a:pt x="6159537" y="906771"/>
+                  </a:lnTo>
+                  <a:lnTo>
+                    <a:pt x="6231159" y="838597"/>
+                  </a:lnTo>
+                  <a:lnTo>
+                    <a:pt x="6302782" y="768619"/>
+                  </a:lnTo>
+                  <a:lnTo>
+                    <a:pt x="6374404" y="696790"/>
+                  </a:lnTo>
+                  <a:lnTo>
+                    <a:pt x="6446027" y="623061"/>
+                  </a:lnTo>
+                  <a:lnTo>
+                    <a:pt x="6517649" y="547381"/>
+                  </a:lnTo>
+                  <a:lnTo>
+                    <a:pt x="6589272" y="469700"/>
+                  </a:lnTo>
+                  <a:lnTo>
+                    <a:pt x="6660894" y="389963"/>
+                  </a:lnTo>
+                  <a:lnTo>
+                    <a:pt x="6732517" y="308117"/>
+                  </a:lnTo>
+                  <a:lnTo>
+                    <a:pt x="6804139" y="224105"/>
+                  </a:lnTo>
+                  <a:lnTo>
+                    <a:pt x="6875762" y="137871"/>
+                  </a:lnTo>
+                  <a:lnTo>
+                    <a:pt x="6947385" y="49356"/>
                   </a:lnTo>
                   <a:lnTo>
                     <a:pt x="6986292" y="0"/>
@@ -3439,304 +3439,304 @@
                     <a:pt x="7090630" y="0"/>
                   </a:lnTo>
                   <a:lnTo>
-                    <a:pt x="7090630" y="3089615"/>
-                  </a:lnTo>
-                  <a:lnTo>
-                    <a:pt x="7019007" y="3085259"/>
-                  </a:lnTo>
-                  <a:lnTo>
-                    <a:pt x="6947385" y="3080869"/>
-                  </a:lnTo>
-                  <a:lnTo>
-                    <a:pt x="6875762" y="3076445"/>
-                  </a:lnTo>
-                  <a:lnTo>
-                    <a:pt x="6804139" y="3071987"/>
-                  </a:lnTo>
-                  <a:lnTo>
-                    <a:pt x="6732517" y="3067495"/>
-                  </a:lnTo>
-                  <a:lnTo>
-                    <a:pt x="6660894" y="3062967"/>
-                  </a:lnTo>
-                  <a:lnTo>
-                    <a:pt x="6589272" y="3058405"/>
-                  </a:lnTo>
-                  <a:lnTo>
-                    <a:pt x="6517649" y="3053808"/>
-                  </a:lnTo>
-                  <a:lnTo>
-                    <a:pt x="6446027" y="3049174"/>
-                  </a:lnTo>
-                  <a:lnTo>
-                    <a:pt x="6374404" y="3044505"/>
-                  </a:lnTo>
-                  <a:lnTo>
-                    <a:pt x="6302782" y="3039800"/>
-                  </a:lnTo>
-                  <a:lnTo>
-                    <a:pt x="6231159" y="3035059"/>
-                  </a:lnTo>
-                  <a:lnTo>
-                    <a:pt x="6159537" y="3030281"/>
-                  </a:lnTo>
-                  <a:lnTo>
-                    <a:pt x="6087914" y="3025465"/>
-                  </a:lnTo>
-                  <a:lnTo>
-                    <a:pt x="6016292" y="3020613"/>
-                  </a:lnTo>
-                  <a:lnTo>
-                    <a:pt x="5944669" y="3015723"/>
-                  </a:lnTo>
-                  <a:lnTo>
-                    <a:pt x="5873047" y="3010795"/>
-                  </a:lnTo>
-                  <a:lnTo>
-                    <a:pt x="5801424" y="3005829"/>
-                  </a:lnTo>
-                  <a:lnTo>
-                    <a:pt x="5729802" y="3000825"/>
-                  </a:lnTo>
-                  <a:lnTo>
-                    <a:pt x="5658179" y="2995782"/>
-                  </a:lnTo>
-                  <a:lnTo>
-                    <a:pt x="5586557" y="2990700"/>
-                  </a:lnTo>
-                  <a:lnTo>
-                    <a:pt x="5514934" y="2985578"/>
-                  </a:lnTo>
-                  <a:lnTo>
-                    <a:pt x="5443311" y="2980417"/>
-                  </a:lnTo>
-                  <a:lnTo>
-                    <a:pt x="5371689" y="2975216"/>
-                  </a:lnTo>
-                  <a:lnTo>
-                    <a:pt x="5300066" y="2969975"/>
-                  </a:lnTo>
-                  <a:lnTo>
-                    <a:pt x="5228444" y="2964693"/>
-                  </a:lnTo>
-                  <a:lnTo>
-                    <a:pt x="5156821" y="2959371"/>
-                  </a:lnTo>
-                  <a:lnTo>
-                    <a:pt x="5085199" y="2954007"/>
-                  </a:lnTo>
-                  <a:lnTo>
-                    <a:pt x="5013576" y="2948602"/>
-                  </a:lnTo>
-                  <a:lnTo>
-                    <a:pt x="4941954" y="2943154"/>
-                  </a:lnTo>
-                  <a:lnTo>
-                    <a:pt x="4870331" y="2937665"/>
-                  </a:lnTo>
-                  <a:lnTo>
-                    <a:pt x="4798709" y="2932133"/>
-                  </a:lnTo>
-                  <a:lnTo>
-                    <a:pt x="4727086" y="2926559"/>
-                  </a:lnTo>
-                  <a:lnTo>
-                    <a:pt x="4655464" y="2920941"/>
-                  </a:lnTo>
-                  <a:lnTo>
-                    <a:pt x="4583841" y="2915280"/>
-                  </a:lnTo>
-                  <a:lnTo>
-                    <a:pt x="4512219" y="2909575"/>
-                  </a:lnTo>
-                  <a:lnTo>
-                    <a:pt x="4440596" y="2903826"/>
-                  </a:lnTo>
-                  <a:lnTo>
-                    <a:pt x="4368974" y="2898033"/>
-                  </a:lnTo>
-                  <a:lnTo>
-                    <a:pt x="4297351" y="2892194"/>
-                  </a:lnTo>
-                  <a:lnTo>
-                    <a:pt x="4225729" y="2886311"/>
-                  </a:lnTo>
-                  <a:lnTo>
-                    <a:pt x="4154106" y="2880382"/>
-                  </a:lnTo>
-                  <a:lnTo>
-                    <a:pt x="4082483" y="2874407"/>
-                  </a:lnTo>
-                  <a:lnTo>
-                    <a:pt x="4010861" y="2868385"/>
-                  </a:lnTo>
-                  <a:lnTo>
-                    <a:pt x="3939238" y="2862318"/>
-                  </a:lnTo>
-                  <a:lnTo>
-                    <a:pt x="3867616" y="2856203"/>
-                  </a:lnTo>
-                  <a:lnTo>
-                    <a:pt x="3795993" y="2850041"/>
-                  </a:lnTo>
-                  <a:lnTo>
-                    <a:pt x="3724371" y="2843831"/>
-                  </a:lnTo>
-                  <a:lnTo>
-                    <a:pt x="3652748" y="2837574"/>
-                  </a:lnTo>
-                  <a:lnTo>
-                    <a:pt x="3581126" y="2831267"/>
-                  </a:lnTo>
-                  <a:lnTo>
-                    <a:pt x="3509503" y="2824912"/>
-                  </a:lnTo>
-                  <a:lnTo>
-                    <a:pt x="3437881" y="2818508"/>
-                  </a:lnTo>
-                  <a:lnTo>
-                    <a:pt x="3366258" y="2812055"/>
-                  </a:lnTo>
-                  <a:lnTo>
-                    <a:pt x="3294636" y="2805551"/>
-                  </a:lnTo>
-                  <a:lnTo>
-                    <a:pt x="3223013" y="2798997"/>
-                  </a:lnTo>
-                  <a:lnTo>
-                    <a:pt x="3151391" y="2792393"/>
-                  </a:lnTo>
-                  <a:lnTo>
-                    <a:pt x="3079768" y="2785737"/>
-                  </a:lnTo>
-                  <a:lnTo>
-                    <a:pt x="3008146" y="2796171"/>
-                  </a:lnTo>
-                  <a:lnTo>
-                    <a:pt x="2936523" y="2818245"/>
-                  </a:lnTo>
-                  <a:lnTo>
-                    <a:pt x="2864901" y="2839750"/>
-                  </a:lnTo>
-                  <a:lnTo>
-                    <a:pt x="2793278" y="2860701"/>
-                  </a:lnTo>
-                  <a:lnTo>
-                    <a:pt x="2721655" y="2881112"/>
-                  </a:lnTo>
-                  <a:lnTo>
-                    <a:pt x="2650033" y="2900997"/>
-                  </a:lnTo>
-                  <a:lnTo>
-                    <a:pt x="2578410" y="2920369"/>
-                  </a:lnTo>
-                  <a:lnTo>
-                    <a:pt x="2506788" y="2939243"/>
-                  </a:lnTo>
-                  <a:lnTo>
-                    <a:pt x="2435165" y="2957629"/>
-                  </a:lnTo>
-                  <a:lnTo>
-                    <a:pt x="2363543" y="2975542"/>
-                  </a:lnTo>
-                  <a:lnTo>
-                    <a:pt x="2291920" y="2992993"/>
-                  </a:lnTo>
-                  <a:lnTo>
-                    <a:pt x="2220298" y="3009994"/>
-                  </a:lnTo>
-                  <a:lnTo>
-                    <a:pt x="2148675" y="3026558"/>
-                  </a:lnTo>
-                  <a:lnTo>
-                    <a:pt x="2077053" y="3042694"/>
-                  </a:lnTo>
-                  <a:lnTo>
-                    <a:pt x="2005430" y="3058414"/>
-                  </a:lnTo>
-                  <a:lnTo>
-                    <a:pt x="1933808" y="3073729"/>
-                  </a:lnTo>
-                  <a:lnTo>
-                    <a:pt x="1862185" y="3088650"/>
-                  </a:lnTo>
-                  <a:lnTo>
-                    <a:pt x="1790563" y="3103186"/>
-                  </a:lnTo>
-                  <a:lnTo>
-                    <a:pt x="1718940" y="3117347"/>
-                  </a:lnTo>
-                  <a:lnTo>
-                    <a:pt x="1647318" y="3131143"/>
-                  </a:lnTo>
-                  <a:lnTo>
-                    <a:pt x="1575695" y="3144584"/>
-                  </a:lnTo>
-                  <a:lnTo>
-                    <a:pt x="1504073" y="3157679"/>
-                  </a:lnTo>
-                  <a:lnTo>
-                    <a:pt x="1432450" y="3170435"/>
-                  </a:lnTo>
-                  <a:lnTo>
-                    <a:pt x="1360827" y="3182863"/>
-                  </a:lnTo>
-                  <a:lnTo>
-                    <a:pt x="1289205" y="3194971"/>
-                  </a:lnTo>
-                  <a:lnTo>
-                    <a:pt x="1217582" y="3206767"/>
-                  </a:lnTo>
-                  <a:lnTo>
-                    <a:pt x="1145960" y="3218259"/>
-                  </a:lnTo>
-                  <a:lnTo>
-                    <a:pt x="1074337" y="3229454"/>
-                  </a:lnTo>
-                  <a:lnTo>
-                    <a:pt x="1002715" y="3240361"/>
-                  </a:lnTo>
-                  <a:lnTo>
-                    <a:pt x="931092" y="3250987"/>
-                  </a:lnTo>
-                  <a:lnTo>
-                    <a:pt x="859470" y="3261339"/>
-                  </a:lnTo>
-                  <a:lnTo>
-                    <a:pt x="787847" y="3271424"/>
-                  </a:lnTo>
-                  <a:lnTo>
-                    <a:pt x="716225" y="3281249"/>
-                  </a:lnTo>
-                  <a:lnTo>
-                    <a:pt x="644602" y="3290821"/>
-                  </a:lnTo>
-                  <a:lnTo>
-                    <a:pt x="572980" y="3300147"/>
-                  </a:lnTo>
-                  <a:lnTo>
-                    <a:pt x="501357" y="3309232"/>
-                  </a:lnTo>
-                  <a:lnTo>
-                    <a:pt x="429735" y="3318083"/>
-                  </a:lnTo>
-                  <a:lnTo>
-                    <a:pt x="358112" y="3326705"/>
-                  </a:lnTo>
-                  <a:lnTo>
-                    <a:pt x="286490" y="3335106"/>
-                  </a:lnTo>
-                  <a:lnTo>
-                    <a:pt x="214867" y="3343290"/>
-                  </a:lnTo>
-                  <a:lnTo>
-                    <a:pt x="143245" y="3351263"/>
-                  </a:lnTo>
-                  <a:lnTo>
-                    <a:pt x="71622" y="3359030"/>
-                  </a:lnTo>
-                  <a:lnTo>
-                    <a:pt x="0" y="3366598"/>
+                    <a:pt x="7090630" y="2946752"/>
+                  </a:lnTo>
+                  <a:lnTo>
+                    <a:pt x="7019007" y="2942598"/>
+                  </a:lnTo>
+                  <a:lnTo>
+                    <a:pt x="6947385" y="2938411"/>
+                  </a:lnTo>
+                  <a:lnTo>
+                    <a:pt x="6875762" y="2934192"/>
+                  </a:lnTo>
+                  <a:lnTo>
+                    <a:pt x="6804139" y="2929940"/>
+                  </a:lnTo>
+                  <a:lnTo>
+                    <a:pt x="6732517" y="2925655"/>
+                  </a:lnTo>
+                  <a:lnTo>
+                    <a:pt x="6660894" y="2921337"/>
+                  </a:lnTo>
+                  <a:lnTo>
+                    <a:pt x="6589272" y="2916986"/>
+                  </a:lnTo>
+                  <a:lnTo>
+                    <a:pt x="6517649" y="2912601"/>
+                  </a:lnTo>
+                  <a:lnTo>
+                    <a:pt x="6446027" y="2908182"/>
+                  </a:lnTo>
+                  <a:lnTo>
+                    <a:pt x="6374404" y="2903729"/>
+                  </a:lnTo>
+                  <a:lnTo>
+                    <a:pt x="6302782" y="2899241"/>
+                  </a:lnTo>
+                  <a:lnTo>
+                    <a:pt x="6231159" y="2894719"/>
+                  </a:lnTo>
+                  <a:lnTo>
+                    <a:pt x="6159537" y="2890162"/>
+                  </a:lnTo>
+                  <a:lnTo>
+                    <a:pt x="6087914" y="2885569"/>
+                  </a:lnTo>
+                  <a:lnTo>
+                    <a:pt x="6016292" y="2880941"/>
+                  </a:lnTo>
+                  <a:lnTo>
+                    <a:pt x="5944669" y="2876277"/>
+                  </a:lnTo>
+                  <a:lnTo>
+                    <a:pt x="5873047" y="2871577"/>
+                  </a:lnTo>
+                  <a:lnTo>
+                    <a:pt x="5801424" y="2866841"/>
+                  </a:lnTo>
+                  <a:lnTo>
+                    <a:pt x="5729802" y="2862068"/>
+                  </a:lnTo>
+                  <a:lnTo>
+                    <a:pt x="5658179" y="2857258"/>
+                  </a:lnTo>
+                  <a:lnTo>
+                    <a:pt x="5586557" y="2852411"/>
+                  </a:lnTo>
+                  <a:lnTo>
+                    <a:pt x="5514934" y="2847526"/>
+                  </a:lnTo>
+                  <a:lnTo>
+                    <a:pt x="5443311" y="2842604"/>
+                  </a:lnTo>
+                  <a:lnTo>
+                    <a:pt x="5371689" y="2837643"/>
+                  </a:lnTo>
+                  <a:lnTo>
+                    <a:pt x="5300066" y="2832645"/>
+                  </a:lnTo>
+                  <a:lnTo>
+                    <a:pt x="5228444" y="2827607"/>
+                  </a:lnTo>
+                  <a:lnTo>
+                    <a:pt x="5156821" y="2822530"/>
+                  </a:lnTo>
+                  <a:lnTo>
+                    <a:pt x="5085199" y="2817415"/>
+                  </a:lnTo>
+                  <a:lnTo>
+                    <a:pt x="5013576" y="2812259"/>
+                  </a:lnTo>
+                  <a:lnTo>
+                    <a:pt x="4941954" y="2807064"/>
+                  </a:lnTo>
+                  <a:lnTo>
+                    <a:pt x="4870331" y="2801829"/>
+                  </a:lnTo>
+                  <a:lnTo>
+                    <a:pt x="4798709" y="2796553"/>
+                  </a:lnTo>
+                  <a:lnTo>
+                    <a:pt x="4727086" y="2791236"/>
+                  </a:lnTo>
+                  <a:lnTo>
+                    <a:pt x="4655464" y="2785878"/>
+                  </a:lnTo>
+                  <a:lnTo>
+                    <a:pt x="4583841" y="2780479"/>
+                  </a:lnTo>
+                  <a:lnTo>
+                    <a:pt x="4512219" y="2775037"/>
+                  </a:lnTo>
+                  <a:lnTo>
+                    <a:pt x="4440596" y="2769554"/>
+                  </a:lnTo>
+                  <a:lnTo>
+                    <a:pt x="4368974" y="2764029"/>
+                  </a:lnTo>
+                  <a:lnTo>
+                    <a:pt x="4297351" y="2758460"/>
+                  </a:lnTo>
+                  <a:lnTo>
+                    <a:pt x="4225729" y="2752849"/>
+                  </a:lnTo>
+                  <a:lnTo>
+                    <a:pt x="4154106" y="2747194"/>
+                  </a:lnTo>
+                  <a:lnTo>
+                    <a:pt x="4082483" y="2741495"/>
+                  </a:lnTo>
+                  <a:lnTo>
+                    <a:pt x="4010861" y="2735752"/>
+                  </a:lnTo>
+                  <a:lnTo>
+                    <a:pt x="3939238" y="2729965"/>
+                  </a:lnTo>
+                  <a:lnTo>
+                    <a:pt x="3867616" y="2724133"/>
+                  </a:lnTo>
+                  <a:lnTo>
+                    <a:pt x="3795993" y="2718256"/>
+                  </a:lnTo>
+                  <a:lnTo>
+                    <a:pt x="3724371" y="2712334"/>
+                  </a:lnTo>
+                  <a:lnTo>
+                    <a:pt x="3652748" y="2706365"/>
+                  </a:lnTo>
+                  <a:lnTo>
+                    <a:pt x="3581126" y="2700351"/>
+                  </a:lnTo>
+                  <a:lnTo>
+                    <a:pt x="3509503" y="2694290"/>
+                  </a:lnTo>
+                  <a:lnTo>
+                    <a:pt x="3437881" y="2688182"/>
+                  </a:lnTo>
+                  <a:lnTo>
+                    <a:pt x="3366258" y="2682026"/>
+                  </a:lnTo>
+                  <a:lnTo>
+                    <a:pt x="3294636" y="2675823"/>
+                  </a:lnTo>
+                  <a:lnTo>
+                    <a:pt x="3223013" y="2669573"/>
+                  </a:lnTo>
+                  <a:lnTo>
+                    <a:pt x="3151391" y="2663273"/>
+                  </a:lnTo>
+                  <a:lnTo>
+                    <a:pt x="3079768" y="2656925"/>
+                  </a:lnTo>
+                  <a:lnTo>
+                    <a:pt x="3008146" y="2666877"/>
+                  </a:lnTo>
+                  <a:lnTo>
+                    <a:pt x="2936523" y="2687931"/>
+                  </a:lnTo>
+                  <a:lnTo>
+                    <a:pt x="2864901" y="2708441"/>
+                  </a:lnTo>
+                  <a:lnTo>
+                    <a:pt x="2793278" y="2728424"/>
+                  </a:lnTo>
+                  <a:lnTo>
+                    <a:pt x="2721655" y="2747891"/>
+                  </a:lnTo>
+                  <a:lnTo>
+                    <a:pt x="2650033" y="2766856"/>
+                  </a:lnTo>
+                  <a:lnTo>
+                    <a:pt x="2578410" y="2785333"/>
+                  </a:lnTo>
+                  <a:lnTo>
+                    <a:pt x="2506788" y="2803333"/>
+                  </a:lnTo>
+                  <a:lnTo>
+                    <a:pt x="2435165" y="2820869"/>
+                  </a:lnTo>
+                  <a:lnTo>
+                    <a:pt x="2363543" y="2837954"/>
+                  </a:lnTo>
+                  <a:lnTo>
+                    <a:pt x="2291920" y="2854598"/>
+                  </a:lnTo>
+                  <a:lnTo>
+                    <a:pt x="2220298" y="2870813"/>
+                  </a:lnTo>
+                  <a:lnTo>
+                    <a:pt x="2148675" y="2886611"/>
+                  </a:lnTo>
+                  <a:lnTo>
+                    <a:pt x="2077053" y="2902001"/>
+                  </a:lnTo>
+                  <a:lnTo>
+                    <a:pt x="2005430" y="2916994"/>
+                  </a:lnTo>
+                  <a:lnTo>
+                    <a:pt x="1933808" y="2931601"/>
+                  </a:lnTo>
+                  <a:lnTo>
+                    <a:pt x="1862185" y="2945832"/>
+                  </a:lnTo>
+                  <a:lnTo>
+                    <a:pt x="1790563" y="2959696"/>
+                  </a:lnTo>
+                  <a:lnTo>
+                    <a:pt x="1718940" y="2973202"/>
+                  </a:lnTo>
+                  <a:lnTo>
+                    <a:pt x="1647318" y="2986361"/>
+                  </a:lnTo>
+                  <a:lnTo>
+                    <a:pt x="1575695" y="2999180"/>
+                  </a:lnTo>
+                  <a:lnTo>
+                    <a:pt x="1504073" y="3011669"/>
+                  </a:lnTo>
+                  <a:lnTo>
+                    <a:pt x="1432450" y="3023836"/>
+                  </a:lnTo>
+                  <a:lnTo>
+                    <a:pt x="1360827" y="3035689"/>
+                  </a:lnTo>
+                  <a:lnTo>
+                    <a:pt x="1289205" y="3047237"/>
+                  </a:lnTo>
+                  <a:lnTo>
+                    <a:pt x="1217582" y="3058487"/>
+                  </a:lnTo>
+                  <a:lnTo>
+                    <a:pt x="1145960" y="3069447"/>
+                  </a:lnTo>
+                  <a:lnTo>
+                    <a:pt x="1074337" y="3080125"/>
+                  </a:lnTo>
+                  <a:lnTo>
+                    <a:pt x="1002715" y="3090528"/>
+                  </a:lnTo>
+                  <a:lnTo>
+                    <a:pt x="931092" y="3100662"/>
+                  </a:lnTo>
+                  <a:lnTo>
+                    <a:pt x="859470" y="3110536"/>
+                  </a:lnTo>
+                  <a:lnTo>
+                    <a:pt x="787847" y="3120155"/>
+                  </a:lnTo>
+                  <a:lnTo>
+                    <a:pt x="716225" y="3129526"/>
+                  </a:lnTo>
+                  <a:lnTo>
+                    <a:pt x="644602" y="3138655"/>
+                  </a:lnTo>
+                  <a:lnTo>
+                    <a:pt x="572980" y="3147549"/>
+                  </a:lnTo>
+                  <a:lnTo>
+                    <a:pt x="501357" y="3156214"/>
+                  </a:lnTo>
+                  <a:lnTo>
+                    <a:pt x="429735" y="3164656"/>
+                  </a:lnTo>
+                  <a:lnTo>
+                    <a:pt x="358112" y="3172880"/>
+                  </a:lnTo>
+                  <a:lnTo>
+                    <a:pt x="286490" y="3180892"/>
+                  </a:lnTo>
+                  <a:lnTo>
+                    <a:pt x="214867" y="3188697"/>
+                  </a:lnTo>
+                  <a:lnTo>
+                    <a:pt x="143245" y="3196302"/>
+                  </a:lnTo>
+                  <a:lnTo>
+                    <a:pt x="71622" y="3203710"/>
+                  </a:lnTo>
+                  <a:lnTo>
+                    <a:pt x="0" y="3210927"/>
                   </a:lnTo>
                   <a:close/>
                 </a:path>
@@ -3762,306 +3762,306 @@
           </p:nvSpPr>
           <p:spPr>
             <a:xfrm>
-              <a:off x="1172049" y="1896563"/>
-              <a:ext cx="6986292" cy="2779030"/>
+              <a:off x="1172049" y="2073503"/>
+              <a:ext cx="6986292" cy="2650528"/>
             </a:xfrm>
             <a:custGeom>
               <a:avLst/>
               <a:pathLst>
-                <a:path w="6986292" h="2779030">
+                <a:path w="6986292" h="2650528">
                   <a:moveTo>
-                    <a:pt x="0" y="2445105"/>
+                    <a:pt x="0" y="2332045"/>
                   </a:moveTo>
                   <a:lnTo>
-                    <a:pt x="71622" y="2454376"/>
-                  </a:lnTo>
-                  <a:lnTo>
-                    <a:pt x="143245" y="2463576"/>
-                  </a:lnTo>
-                  <a:lnTo>
-                    <a:pt x="214867" y="2472705"/>
-                  </a:lnTo>
-                  <a:lnTo>
-                    <a:pt x="286490" y="2481764"/>
-                  </a:lnTo>
-                  <a:lnTo>
-                    <a:pt x="358112" y="2490754"/>
-                  </a:lnTo>
-                  <a:lnTo>
-                    <a:pt x="429735" y="2499674"/>
-                  </a:lnTo>
-                  <a:lnTo>
-                    <a:pt x="501357" y="2508526"/>
-                  </a:lnTo>
-                  <a:lnTo>
-                    <a:pt x="572980" y="2517310"/>
-                  </a:lnTo>
-                  <a:lnTo>
-                    <a:pt x="644602" y="2526027"/>
-                  </a:lnTo>
-                  <a:lnTo>
-                    <a:pt x="716225" y="2534676"/>
-                  </a:lnTo>
-                  <a:lnTo>
-                    <a:pt x="787847" y="2543259"/>
-                  </a:lnTo>
-                  <a:lnTo>
-                    <a:pt x="859470" y="2551777"/>
-                  </a:lnTo>
-                  <a:lnTo>
-                    <a:pt x="931092" y="2560229"/>
-                  </a:lnTo>
-                  <a:lnTo>
-                    <a:pt x="1002715" y="2568616"/>
-                  </a:lnTo>
-                  <a:lnTo>
-                    <a:pt x="1074337" y="2576938"/>
-                  </a:lnTo>
-                  <a:lnTo>
-                    <a:pt x="1145960" y="2585197"/>
-                  </a:lnTo>
-                  <a:lnTo>
-                    <a:pt x="1217582" y="2593393"/>
-                  </a:lnTo>
-                  <a:lnTo>
-                    <a:pt x="1289205" y="2601525"/>
-                  </a:lnTo>
-                  <a:lnTo>
-                    <a:pt x="1360827" y="2609595"/>
-                  </a:lnTo>
-                  <a:lnTo>
-                    <a:pt x="1432450" y="2617603"/>
-                  </a:lnTo>
-                  <a:lnTo>
-                    <a:pt x="1504073" y="2625550"/>
-                  </a:lnTo>
-                  <a:lnTo>
-                    <a:pt x="1575695" y="2633435"/>
-                  </a:lnTo>
-                  <a:lnTo>
-                    <a:pt x="1647318" y="2641260"/>
-                  </a:lnTo>
-                  <a:lnTo>
-                    <a:pt x="1718940" y="2649025"/>
-                  </a:lnTo>
-                  <a:lnTo>
-                    <a:pt x="1790563" y="2656730"/>
-                  </a:lnTo>
-                  <a:lnTo>
-                    <a:pt x="1862185" y="2664377"/>
-                  </a:lnTo>
-                  <a:lnTo>
-                    <a:pt x="1933808" y="2671964"/>
-                  </a:lnTo>
-                  <a:lnTo>
-                    <a:pt x="2005430" y="2679493"/>
-                  </a:lnTo>
-                  <a:lnTo>
-                    <a:pt x="2077053" y="2686965"/>
-                  </a:lnTo>
-                  <a:lnTo>
-                    <a:pt x="2148675" y="2694379"/>
-                  </a:lnTo>
-                  <a:lnTo>
-                    <a:pt x="2220298" y="2701736"/>
-                  </a:lnTo>
-                  <a:lnTo>
-                    <a:pt x="2291920" y="2709036"/>
-                  </a:lnTo>
-                  <a:lnTo>
-                    <a:pt x="2363543" y="2716281"/>
-                  </a:lnTo>
-                  <a:lnTo>
-                    <a:pt x="2435165" y="2723470"/>
-                  </a:lnTo>
-                  <a:lnTo>
-                    <a:pt x="2506788" y="2730604"/>
-                  </a:lnTo>
-                  <a:lnTo>
-                    <a:pt x="2578410" y="2737683"/>
-                  </a:lnTo>
-                  <a:lnTo>
-                    <a:pt x="2650033" y="2744707"/>
-                  </a:lnTo>
-                  <a:lnTo>
-                    <a:pt x="2721655" y="2751678"/>
-                  </a:lnTo>
-                  <a:lnTo>
-                    <a:pt x="2793278" y="2758595"/>
-                  </a:lnTo>
-                  <a:lnTo>
-                    <a:pt x="2864901" y="2765459"/>
-                  </a:lnTo>
-                  <a:lnTo>
-                    <a:pt x="2936523" y="2772271"/>
-                  </a:lnTo>
-                  <a:lnTo>
-                    <a:pt x="3008146" y="2779030"/>
-                  </a:lnTo>
-                  <a:lnTo>
-                    <a:pt x="3079768" y="2773513"/>
-                  </a:lnTo>
-                  <a:lnTo>
-                    <a:pt x="3151391" y="2750256"/>
-                  </a:lnTo>
-                  <a:lnTo>
-                    <a:pt x="3223013" y="2726383"/>
-                  </a:lnTo>
-                  <a:lnTo>
-                    <a:pt x="3294636" y="2701879"/>
-                  </a:lnTo>
-                  <a:lnTo>
-                    <a:pt x="3366258" y="2676726"/>
-                  </a:lnTo>
-                  <a:lnTo>
-                    <a:pt x="3437881" y="2650908"/>
-                  </a:lnTo>
-                  <a:lnTo>
-                    <a:pt x="3509503" y="2624407"/>
-                  </a:lnTo>
-                  <a:lnTo>
-                    <a:pt x="3581126" y="2597205"/>
-                  </a:lnTo>
-                  <a:lnTo>
-                    <a:pt x="3652748" y="2569283"/>
-                  </a:lnTo>
-                  <a:lnTo>
-                    <a:pt x="3724371" y="2540623"/>
-                  </a:lnTo>
-                  <a:lnTo>
-                    <a:pt x="3795993" y="2511204"/>
-                  </a:lnTo>
-                  <a:lnTo>
-                    <a:pt x="3867616" y="2481008"/>
-                  </a:lnTo>
-                  <a:lnTo>
-                    <a:pt x="3939238" y="2450012"/>
-                  </a:lnTo>
-                  <a:lnTo>
-                    <a:pt x="4010861" y="2418196"/>
-                  </a:lnTo>
-                  <a:lnTo>
-                    <a:pt x="4082483" y="2385539"/>
-                  </a:lnTo>
-                  <a:lnTo>
-                    <a:pt x="4154106" y="2352017"/>
-                  </a:lnTo>
-                  <a:lnTo>
-                    <a:pt x="4225729" y="2317609"/>
-                  </a:lnTo>
-                  <a:lnTo>
-                    <a:pt x="4297351" y="2282291"/>
-                  </a:lnTo>
-                  <a:lnTo>
-                    <a:pt x="4368974" y="2246038"/>
-                  </a:lnTo>
-                  <a:lnTo>
-                    <a:pt x="4440596" y="2208826"/>
-                  </a:lnTo>
-                  <a:lnTo>
-                    <a:pt x="4512219" y="2170630"/>
-                  </a:lnTo>
-                  <a:lnTo>
-                    <a:pt x="4583841" y="2131423"/>
-                  </a:lnTo>
-                  <a:lnTo>
-                    <a:pt x="4655464" y="2091179"/>
-                  </a:lnTo>
-                  <a:lnTo>
-                    <a:pt x="4727086" y="2049870"/>
-                  </a:lnTo>
-                  <a:lnTo>
-                    <a:pt x="4798709" y="2007469"/>
-                  </a:lnTo>
-                  <a:lnTo>
-                    <a:pt x="4870331" y="1963946"/>
-                  </a:lnTo>
-                  <a:lnTo>
-                    <a:pt x="4941954" y="1919271"/>
-                  </a:lnTo>
-                  <a:lnTo>
-                    <a:pt x="5013576" y="1873414"/>
-                  </a:lnTo>
-                  <a:lnTo>
-                    <a:pt x="5085199" y="1826345"/>
-                  </a:lnTo>
-                  <a:lnTo>
-                    <a:pt x="5156821" y="1778030"/>
-                  </a:lnTo>
-                  <a:lnTo>
-                    <a:pt x="5228444" y="1728437"/>
-                  </a:lnTo>
-                  <a:lnTo>
-                    <a:pt x="5300066" y="1677532"/>
-                  </a:lnTo>
-                  <a:lnTo>
-                    <a:pt x="5371689" y="1625280"/>
-                  </a:lnTo>
-                  <a:lnTo>
-                    <a:pt x="5443311" y="1571646"/>
-                  </a:lnTo>
-                  <a:lnTo>
-                    <a:pt x="5514934" y="1516593"/>
-                  </a:lnTo>
-                  <a:lnTo>
-                    <a:pt x="5586557" y="1460084"/>
-                  </a:lnTo>
-                  <a:lnTo>
-                    <a:pt x="5658179" y="1402079"/>
-                  </a:lnTo>
-                  <a:lnTo>
-                    <a:pt x="5729802" y="1342541"/>
-                  </a:lnTo>
-                  <a:lnTo>
-                    <a:pt x="5801424" y="1281427"/>
-                  </a:lnTo>
-                  <a:lnTo>
-                    <a:pt x="5873047" y="1218696"/>
-                  </a:lnTo>
-                  <a:lnTo>
-                    <a:pt x="5944669" y="1154306"/>
-                  </a:lnTo>
-                  <a:lnTo>
-                    <a:pt x="6016292" y="1088212"/>
-                  </a:lnTo>
-                  <a:lnTo>
-                    <a:pt x="6087914" y="1020370"/>
-                  </a:lnTo>
-                  <a:lnTo>
-                    <a:pt x="6159537" y="950733"/>
-                  </a:lnTo>
-                  <a:lnTo>
-                    <a:pt x="6231159" y="879253"/>
-                  </a:lnTo>
-                  <a:lnTo>
-                    <a:pt x="6302782" y="805883"/>
-                  </a:lnTo>
-                  <a:lnTo>
-                    <a:pt x="6374404" y="730572"/>
-                  </a:lnTo>
-                  <a:lnTo>
-                    <a:pt x="6446027" y="653268"/>
-                  </a:lnTo>
-                  <a:lnTo>
-                    <a:pt x="6517649" y="573919"/>
-                  </a:lnTo>
-                  <a:lnTo>
-                    <a:pt x="6589272" y="492471"/>
-                  </a:lnTo>
-                  <a:lnTo>
-                    <a:pt x="6660894" y="408869"/>
-                  </a:lnTo>
-                  <a:lnTo>
-                    <a:pt x="6732517" y="323055"/>
-                  </a:lnTo>
-                  <a:lnTo>
-                    <a:pt x="6804139" y="234970"/>
-                  </a:lnTo>
-                  <a:lnTo>
-                    <a:pt x="6875762" y="144555"/>
-                  </a:lnTo>
-                  <a:lnTo>
-                    <a:pt x="6947385" y="51748"/>
+                    <a:pt x="71622" y="2340887"/>
+                  </a:lnTo>
+                  <a:lnTo>
+                    <a:pt x="143245" y="2349661"/>
+                  </a:lnTo>
+                  <a:lnTo>
+                    <a:pt x="214867" y="2358368"/>
+                  </a:lnTo>
+                  <a:lnTo>
+                    <a:pt x="286490" y="2367008"/>
+                  </a:lnTo>
+                  <a:lnTo>
+                    <a:pt x="358112" y="2375582"/>
+                  </a:lnTo>
+                  <a:lnTo>
+                    <a:pt x="429735" y="2384090"/>
+                  </a:lnTo>
+                  <a:lnTo>
+                    <a:pt x="501357" y="2392533"/>
+                  </a:lnTo>
+                  <a:lnTo>
+                    <a:pt x="572980" y="2400910"/>
+                  </a:lnTo>
+                  <a:lnTo>
+                    <a:pt x="644602" y="2409224"/>
+                  </a:lnTo>
+                  <a:lnTo>
+                    <a:pt x="716225" y="2417474"/>
+                  </a:lnTo>
+                  <a:lnTo>
+                    <a:pt x="787847" y="2425660"/>
+                  </a:lnTo>
+                  <a:lnTo>
+                    <a:pt x="859470" y="2433784"/>
+                  </a:lnTo>
+                  <a:lnTo>
+                    <a:pt x="931092" y="2441845"/>
+                  </a:lnTo>
+                  <a:lnTo>
+                    <a:pt x="1002715" y="2449844"/>
+                  </a:lnTo>
+                  <a:lnTo>
+                    <a:pt x="1074337" y="2457782"/>
+                  </a:lnTo>
+                  <a:lnTo>
+                    <a:pt x="1145960" y="2465659"/>
+                  </a:lnTo>
+                  <a:lnTo>
+                    <a:pt x="1217582" y="2473475"/>
+                  </a:lnTo>
+                  <a:lnTo>
+                    <a:pt x="1289205" y="2481231"/>
+                  </a:lnTo>
+                  <a:lnTo>
+                    <a:pt x="1360827" y="2488928"/>
+                  </a:lnTo>
+                  <a:lnTo>
+                    <a:pt x="1432450" y="2496566"/>
+                  </a:lnTo>
+                  <a:lnTo>
+                    <a:pt x="1504073" y="2504145"/>
+                  </a:lnTo>
+                  <a:lnTo>
+                    <a:pt x="1575695" y="2511666"/>
+                  </a:lnTo>
+                  <a:lnTo>
+                    <a:pt x="1647318" y="2519129"/>
+                  </a:lnTo>
+                  <a:lnTo>
+                    <a:pt x="1718940" y="2526535"/>
+                  </a:lnTo>
+                  <a:lnTo>
+                    <a:pt x="1790563" y="2533884"/>
+                  </a:lnTo>
+                  <a:lnTo>
+                    <a:pt x="1862185" y="2541177"/>
+                  </a:lnTo>
+                  <a:lnTo>
+                    <a:pt x="1933808" y="2548413"/>
+                  </a:lnTo>
+                  <a:lnTo>
+                    <a:pt x="2005430" y="2555594"/>
+                  </a:lnTo>
+                  <a:lnTo>
+                    <a:pt x="2077053" y="2562720"/>
+                  </a:lnTo>
+                  <a:lnTo>
+                    <a:pt x="2148675" y="2569792"/>
+                  </a:lnTo>
+                  <a:lnTo>
+                    <a:pt x="2220298" y="2576808"/>
+                  </a:lnTo>
+                  <a:lnTo>
+                    <a:pt x="2291920" y="2583771"/>
+                  </a:lnTo>
+                  <a:lnTo>
+                    <a:pt x="2363543" y="2590681"/>
+                  </a:lnTo>
+                  <a:lnTo>
+                    <a:pt x="2435165" y="2597538"/>
+                  </a:lnTo>
+                  <a:lnTo>
+                    <a:pt x="2506788" y="2604342"/>
+                  </a:lnTo>
+                  <a:lnTo>
+                    <a:pt x="2578410" y="2611093"/>
+                  </a:lnTo>
+                  <a:lnTo>
+                    <a:pt x="2650033" y="2617793"/>
+                  </a:lnTo>
+                  <a:lnTo>
+                    <a:pt x="2721655" y="2624441"/>
+                  </a:lnTo>
+                  <a:lnTo>
+                    <a:pt x="2793278" y="2631039"/>
+                  </a:lnTo>
+                  <a:lnTo>
+                    <a:pt x="2864901" y="2637585"/>
+                  </a:lnTo>
+                  <a:lnTo>
+                    <a:pt x="2936523" y="2644082"/>
+                  </a:lnTo>
+                  <a:lnTo>
+                    <a:pt x="3008146" y="2650528"/>
+                  </a:lnTo>
+                  <a:lnTo>
+                    <a:pt x="3079768" y="2645267"/>
+                  </a:lnTo>
+                  <a:lnTo>
+                    <a:pt x="3151391" y="2623085"/>
+                  </a:lnTo>
+                  <a:lnTo>
+                    <a:pt x="3223013" y="2600316"/>
+                  </a:lnTo>
+                  <a:lnTo>
+                    <a:pt x="3294636" y="2576945"/>
+                  </a:lnTo>
+                  <a:lnTo>
+                    <a:pt x="3366258" y="2552955"/>
+                  </a:lnTo>
+                  <a:lnTo>
+                    <a:pt x="3437881" y="2528331"/>
+                  </a:lnTo>
+                  <a:lnTo>
+                    <a:pt x="3509503" y="2503056"/>
+                  </a:lnTo>
+                  <a:lnTo>
+                    <a:pt x="3581126" y="2477111"/>
+                  </a:lnTo>
+                  <a:lnTo>
+                    <a:pt x="3652748" y="2450481"/>
+                  </a:lnTo>
+                  <a:lnTo>
+                    <a:pt x="3724371" y="2423146"/>
+                  </a:lnTo>
+                  <a:lnTo>
+                    <a:pt x="3795993" y="2395087"/>
+                  </a:lnTo>
+                  <a:lnTo>
+                    <a:pt x="3867616" y="2366287"/>
+                  </a:lnTo>
+                  <a:lnTo>
+                    <a:pt x="3939238" y="2336724"/>
+                  </a:lnTo>
+                  <a:lnTo>
+                    <a:pt x="4010861" y="2306380"/>
+                  </a:lnTo>
+                  <a:lnTo>
+                    <a:pt x="4082483" y="2275232"/>
+                  </a:lnTo>
+                  <a:lnTo>
+                    <a:pt x="4154106" y="2243261"/>
+                  </a:lnTo>
+                  <a:lnTo>
+                    <a:pt x="4225729" y="2210444"/>
+                  </a:lnTo>
+                  <a:lnTo>
+                    <a:pt x="4297351" y="2176758"/>
+                  </a:lnTo>
+                  <a:lnTo>
+                    <a:pt x="4368974" y="2142182"/>
+                  </a:lnTo>
+                  <a:lnTo>
+                    <a:pt x="4440596" y="2106691"/>
+                  </a:lnTo>
+                  <a:lnTo>
+                    <a:pt x="4512219" y="2070261"/>
+                  </a:lnTo>
+                  <a:lnTo>
+                    <a:pt x="4583841" y="2032867"/>
+                  </a:lnTo>
+                  <a:lnTo>
+                    <a:pt x="4655464" y="1994484"/>
+                  </a:lnTo>
+                  <a:lnTo>
+                    <a:pt x="4727086" y="1955085"/>
+                  </a:lnTo>
+                  <a:lnTo>
+                    <a:pt x="4798709" y="1914644"/>
+                  </a:lnTo>
+                  <a:lnTo>
+                    <a:pt x="4870331" y="1873133"/>
+                  </a:lnTo>
+                  <a:lnTo>
+                    <a:pt x="4941954" y="1830525"/>
+                  </a:lnTo>
+                  <a:lnTo>
+                    <a:pt x="5013576" y="1786788"/>
+                  </a:lnTo>
+                  <a:lnTo>
+                    <a:pt x="5085199" y="1741895"/>
+                  </a:lnTo>
+                  <a:lnTo>
+                    <a:pt x="5156821" y="1695814"/>
+                  </a:lnTo>
+                  <a:lnTo>
+                    <a:pt x="5228444" y="1648515"/>
+                  </a:lnTo>
+                  <a:lnTo>
+                    <a:pt x="5300066" y="1599963"/>
+                  </a:lnTo>
+                  <a:lnTo>
+                    <a:pt x="5371689" y="1550128"/>
+                  </a:lnTo>
+                  <a:lnTo>
+                    <a:pt x="5443311" y="1498974"/>
+                  </a:lnTo>
+                  <a:lnTo>
+                    <a:pt x="5514934" y="1446466"/>
+                  </a:lnTo>
+                  <a:lnTo>
+                    <a:pt x="5586557" y="1392570"/>
+                  </a:lnTo>
+                  <a:lnTo>
+                    <a:pt x="5658179" y="1337248"/>
+                  </a:lnTo>
+                  <a:lnTo>
+                    <a:pt x="5729802" y="1280462"/>
+                  </a:lnTo>
+                  <a:lnTo>
+                    <a:pt x="5801424" y="1222174"/>
+                  </a:lnTo>
+                  <a:lnTo>
+                    <a:pt x="5873047" y="1162344"/>
+                  </a:lnTo>
+                  <a:lnTo>
+                    <a:pt x="5944669" y="1100931"/>
+                  </a:lnTo>
+                  <a:lnTo>
+                    <a:pt x="6016292" y="1037893"/>
+                  </a:lnTo>
+                  <a:lnTo>
+                    <a:pt x="6087914" y="973188"/>
+                  </a:lnTo>
+                  <a:lnTo>
+                    <a:pt x="6159537" y="906771"/>
+                  </a:lnTo>
+                  <a:lnTo>
+                    <a:pt x="6231159" y="838597"/>
+                  </a:lnTo>
+                  <a:lnTo>
+                    <a:pt x="6302782" y="768619"/>
+                  </a:lnTo>
+                  <a:lnTo>
+                    <a:pt x="6374404" y="696790"/>
+                  </a:lnTo>
+                  <a:lnTo>
+                    <a:pt x="6446027" y="623061"/>
+                  </a:lnTo>
+                  <a:lnTo>
+                    <a:pt x="6517649" y="547381"/>
+                  </a:lnTo>
+                  <a:lnTo>
+                    <a:pt x="6589272" y="469700"/>
+                  </a:lnTo>
+                  <a:lnTo>
+                    <a:pt x="6660894" y="389963"/>
+                  </a:lnTo>
+                  <a:lnTo>
+                    <a:pt x="6732517" y="308117"/>
+                  </a:lnTo>
+                  <a:lnTo>
+                    <a:pt x="6804139" y="224105"/>
+                  </a:lnTo>
+                  <a:lnTo>
+                    <a:pt x="6875762" y="137871"/>
+                  </a:lnTo>
+                  <a:lnTo>
+                    <a:pt x="6947385" y="49356"/>
                   </a:lnTo>
                   <a:lnTo>
                     <a:pt x="6986292" y="0"/>
@@ -4084,312 +4084,312 @@
           </p:nvSpPr>
           <p:spPr>
             <a:xfrm>
-              <a:off x="1172049" y="4682300"/>
-              <a:ext cx="7090630" cy="580860"/>
+              <a:off x="1172049" y="4730429"/>
+              <a:ext cx="7090630" cy="554001"/>
             </a:xfrm>
             <a:custGeom>
               <a:avLst/>
               <a:pathLst>
-                <a:path w="7090630" h="580860">
+                <a:path w="7090630" h="554001">
                   <a:moveTo>
-                    <a:pt x="7090630" y="303878"/>
+                    <a:pt x="7090630" y="289826"/>
                   </a:moveTo>
                   <a:lnTo>
-                    <a:pt x="7019007" y="299521"/>
-                  </a:lnTo>
-                  <a:lnTo>
-                    <a:pt x="6947385" y="295132"/>
-                  </a:lnTo>
-                  <a:lnTo>
-                    <a:pt x="6875762" y="290708"/>
-                  </a:lnTo>
-                  <a:lnTo>
-                    <a:pt x="6804139" y="286250"/>
-                  </a:lnTo>
-                  <a:lnTo>
-                    <a:pt x="6732517" y="281757"/>
-                  </a:lnTo>
-                  <a:lnTo>
-                    <a:pt x="6660894" y="277230"/>
-                  </a:lnTo>
-                  <a:lnTo>
-                    <a:pt x="6589272" y="272668"/>
-                  </a:lnTo>
-                  <a:lnTo>
-                    <a:pt x="6517649" y="268070"/>
-                  </a:lnTo>
-                  <a:lnTo>
-                    <a:pt x="6446027" y="263437"/>
-                  </a:lnTo>
-                  <a:lnTo>
-                    <a:pt x="6374404" y="258768"/>
-                  </a:lnTo>
-                  <a:lnTo>
-                    <a:pt x="6302782" y="254063"/>
-                  </a:lnTo>
-                  <a:lnTo>
-                    <a:pt x="6231159" y="249321"/>
-                  </a:lnTo>
-                  <a:lnTo>
-                    <a:pt x="6159537" y="244543"/>
-                  </a:lnTo>
-                  <a:lnTo>
-                    <a:pt x="6087914" y="239728"/>
-                  </a:lnTo>
-                  <a:lnTo>
-                    <a:pt x="6016292" y="234876"/>
-                  </a:lnTo>
-                  <a:lnTo>
-                    <a:pt x="5944669" y="229986"/>
-                  </a:lnTo>
-                  <a:lnTo>
-                    <a:pt x="5873047" y="225058"/>
-                  </a:lnTo>
-                  <a:lnTo>
-                    <a:pt x="5801424" y="220092"/>
-                  </a:lnTo>
-                  <a:lnTo>
-                    <a:pt x="5729802" y="215087"/>
-                  </a:lnTo>
-                  <a:lnTo>
-                    <a:pt x="5658179" y="210044"/>
-                  </a:lnTo>
-                  <a:lnTo>
-                    <a:pt x="5586557" y="204962"/>
-                  </a:lnTo>
-                  <a:lnTo>
-                    <a:pt x="5514934" y="199841"/>
-                  </a:lnTo>
-                  <a:lnTo>
-                    <a:pt x="5443311" y="194680"/>
-                  </a:lnTo>
-                  <a:lnTo>
-                    <a:pt x="5371689" y="189479"/>
-                  </a:lnTo>
-                  <a:lnTo>
-                    <a:pt x="5300066" y="184238"/>
-                  </a:lnTo>
-                  <a:lnTo>
-                    <a:pt x="5228444" y="178956"/>
-                  </a:lnTo>
-                  <a:lnTo>
-                    <a:pt x="5156821" y="173633"/>
-                  </a:lnTo>
-                  <a:lnTo>
-                    <a:pt x="5085199" y="168269"/>
-                  </a:lnTo>
-                  <a:lnTo>
-                    <a:pt x="5013576" y="162864"/>
-                  </a:lnTo>
-                  <a:lnTo>
-                    <a:pt x="4941954" y="157417"/>
-                  </a:lnTo>
-                  <a:lnTo>
-                    <a:pt x="4870331" y="151928"/>
-                  </a:lnTo>
-                  <a:lnTo>
-                    <a:pt x="4798709" y="146396"/>
-                  </a:lnTo>
-                  <a:lnTo>
-                    <a:pt x="4727086" y="140821"/>
-                  </a:lnTo>
-                  <a:lnTo>
-                    <a:pt x="4655464" y="135204"/>
-                  </a:lnTo>
-                  <a:lnTo>
-                    <a:pt x="4583841" y="129543"/>
-                  </a:lnTo>
-                  <a:lnTo>
-                    <a:pt x="4512219" y="123838"/>
-                  </a:lnTo>
-                  <a:lnTo>
-                    <a:pt x="4440596" y="118089"/>
-                  </a:lnTo>
-                  <a:lnTo>
-                    <a:pt x="4368974" y="112295"/>
-                  </a:lnTo>
-                  <a:lnTo>
-                    <a:pt x="4297351" y="106457"/>
-                  </a:lnTo>
-                  <a:lnTo>
-                    <a:pt x="4225729" y="100573"/>
-                  </a:lnTo>
-                  <a:lnTo>
-                    <a:pt x="4154106" y="94644"/>
-                  </a:lnTo>
-                  <a:lnTo>
-                    <a:pt x="4082483" y="88669"/>
-                  </a:lnTo>
-                  <a:lnTo>
-                    <a:pt x="4010861" y="82648"/>
-                  </a:lnTo>
-                  <a:lnTo>
-                    <a:pt x="3939238" y="76580"/>
-                  </a:lnTo>
-                  <a:lnTo>
-                    <a:pt x="3867616" y="70466"/>
-                  </a:lnTo>
-                  <a:lnTo>
-                    <a:pt x="3795993" y="64304"/>
-                  </a:lnTo>
-                  <a:lnTo>
-                    <a:pt x="3724371" y="58094"/>
-                  </a:lnTo>
-                  <a:lnTo>
-                    <a:pt x="3652748" y="51836"/>
-                  </a:lnTo>
-                  <a:lnTo>
-                    <a:pt x="3581126" y="45530"/>
-                  </a:lnTo>
-                  <a:lnTo>
-                    <a:pt x="3509503" y="39175"/>
-                  </a:lnTo>
-                  <a:lnTo>
-                    <a:pt x="3437881" y="32771"/>
-                  </a:lnTo>
-                  <a:lnTo>
-                    <a:pt x="3366258" y="26317"/>
-                  </a:lnTo>
-                  <a:lnTo>
-                    <a:pt x="3294636" y="19814"/>
-                  </a:lnTo>
-                  <a:lnTo>
-                    <a:pt x="3223013" y="13260"/>
-                  </a:lnTo>
-                  <a:lnTo>
-                    <a:pt x="3151391" y="6655"/>
+                    <a:pt x="7019007" y="285672"/>
+                  </a:lnTo>
+                  <a:lnTo>
+                    <a:pt x="6947385" y="281485"/>
+                  </a:lnTo>
+                  <a:lnTo>
+                    <a:pt x="6875762" y="277266"/>
+                  </a:lnTo>
+                  <a:lnTo>
+                    <a:pt x="6804139" y="273014"/>
+                  </a:lnTo>
+                  <a:lnTo>
+                    <a:pt x="6732517" y="268729"/>
+                  </a:lnTo>
+                  <a:lnTo>
+                    <a:pt x="6660894" y="264411"/>
+                  </a:lnTo>
+                  <a:lnTo>
+                    <a:pt x="6589272" y="260060"/>
+                  </a:lnTo>
+                  <a:lnTo>
+                    <a:pt x="6517649" y="255675"/>
+                  </a:lnTo>
+                  <a:lnTo>
+                    <a:pt x="6446027" y="251256"/>
+                  </a:lnTo>
+                  <a:lnTo>
+                    <a:pt x="6374404" y="246803"/>
+                  </a:lnTo>
+                  <a:lnTo>
+                    <a:pt x="6302782" y="242315"/>
+                  </a:lnTo>
+                  <a:lnTo>
+                    <a:pt x="6231159" y="237793"/>
+                  </a:lnTo>
+                  <a:lnTo>
+                    <a:pt x="6159537" y="233236"/>
+                  </a:lnTo>
+                  <a:lnTo>
+                    <a:pt x="6087914" y="228643"/>
+                  </a:lnTo>
+                  <a:lnTo>
+                    <a:pt x="6016292" y="224015"/>
+                  </a:lnTo>
+                  <a:lnTo>
+                    <a:pt x="5944669" y="219351"/>
+                  </a:lnTo>
+                  <a:lnTo>
+                    <a:pt x="5873047" y="214651"/>
+                  </a:lnTo>
+                  <a:lnTo>
+                    <a:pt x="5801424" y="209915"/>
+                  </a:lnTo>
+                  <a:lnTo>
+                    <a:pt x="5729802" y="205142"/>
+                  </a:lnTo>
+                  <a:lnTo>
+                    <a:pt x="5658179" y="200332"/>
+                  </a:lnTo>
+                  <a:lnTo>
+                    <a:pt x="5586557" y="195485"/>
+                  </a:lnTo>
+                  <a:lnTo>
+                    <a:pt x="5514934" y="190600"/>
+                  </a:lnTo>
+                  <a:lnTo>
+                    <a:pt x="5443311" y="185678"/>
+                  </a:lnTo>
+                  <a:lnTo>
+                    <a:pt x="5371689" y="180717"/>
+                  </a:lnTo>
+                  <a:lnTo>
+                    <a:pt x="5300066" y="175719"/>
+                  </a:lnTo>
+                  <a:lnTo>
+                    <a:pt x="5228444" y="170681"/>
+                  </a:lnTo>
+                  <a:lnTo>
+                    <a:pt x="5156821" y="165604"/>
+                  </a:lnTo>
+                  <a:lnTo>
+                    <a:pt x="5085199" y="160489"/>
+                  </a:lnTo>
+                  <a:lnTo>
+                    <a:pt x="5013576" y="155333"/>
+                  </a:lnTo>
+                  <a:lnTo>
+                    <a:pt x="4941954" y="150138"/>
+                  </a:lnTo>
+                  <a:lnTo>
+                    <a:pt x="4870331" y="144903"/>
+                  </a:lnTo>
+                  <a:lnTo>
+                    <a:pt x="4798709" y="139627"/>
+                  </a:lnTo>
+                  <a:lnTo>
+                    <a:pt x="4727086" y="134310"/>
+                  </a:lnTo>
+                  <a:lnTo>
+                    <a:pt x="4655464" y="128952"/>
+                  </a:lnTo>
+                  <a:lnTo>
+                    <a:pt x="4583841" y="123553"/>
+                  </a:lnTo>
+                  <a:lnTo>
+                    <a:pt x="4512219" y="118111"/>
+                  </a:lnTo>
+                  <a:lnTo>
+                    <a:pt x="4440596" y="112628"/>
+                  </a:lnTo>
+                  <a:lnTo>
+                    <a:pt x="4368974" y="107103"/>
+                  </a:lnTo>
+                  <a:lnTo>
+                    <a:pt x="4297351" y="101534"/>
+                  </a:lnTo>
+                  <a:lnTo>
+                    <a:pt x="4225729" y="95923"/>
+                  </a:lnTo>
+                  <a:lnTo>
+                    <a:pt x="4154106" y="90268"/>
+                  </a:lnTo>
+                  <a:lnTo>
+                    <a:pt x="4082483" y="84569"/>
+                  </a:lnTo>
+                  <a:lnTo>
+                    <a:pt x="4010861" y="78826"/>
+                  </a:lnTo>
+                  <a:lnTo>
+                    <a:pt x="3939238" y="73039"/>
+                  </a:lnTo>
+                  <a:lnTo>
+                    <a:pt x="3867616" y="67207"/>
+                  </a:lnTo>
+                  <a:lnTo>
+                    <a:pt x="3795993" y="61330"/>
+                  </a:lnTo>
+                  <a:lnTo>
+                    <a:pt x="3724371" y="55408"/>
+                  </a:lnTo>
+                  <a:lnTo>
+                    <a:pt x="3652748" y="49439"/>
+                  </a:lnTo>
+                  <a:lnTo>
+                    <a:pt x="3581126" y="43425"/>
+                  </a:lnTo>
+                  <a:lnTo>
+                    <a:pt x="3509503" y="37364"/>
+                  </a:lnTo>
+                  <a:lnTo>
+                    <a:pt x="3437881" y="31256"/>
+                  </a:lnTo>
+                  <a:lnTo>
+                    <a:pt x="3366258" y="25100"/>
+                  </a:lnTo>
+                  <a:lnTo>
+                    <a:pt x="3294636" y="18898"/>
+                  </a:lnTo>
+                  <a:lnTo>
+                    <a:pt x="3223013" y="12647"/>
+                  </a:lnTo>
+                  <a:lnTo>
+                    <a:pt x="3151391" y="6347"/>
                   </a:lnTo>
                   <a:lnTo>
                     <a:pt x="3079768" y="0"/>
                   </a:lnTo>
                   <a:lnTo>
-                    <a:pt x="3008146" y="10434"/>
-                  </a:lnTo>
-                  <a:lnTo>
-                    <a:pt x="2936523" y="32508"/>
-                  </a:lnTo>
-                  <a:lnTo>
-                    <a:pt x="2864901" y="54013"/>
-                  </a:lnTo>
-                  <a:lnTo>
-                    <a:pt x="2793278" y="74964"/>
-                  </a:lnTo>
-                  <a:lnTo>
-                    <a:pt x="2721655" y="95375"/>
-                  </a:lnTo>
-                  <a:lnTo>
-                    <a:pt x="2650033" y="115260"/>
-                  </a:lnTo>
-                  <a:lnTo>
-                    <a:pt x="2578410" y="134632"/>
-                  </a:lnTo>
-                  <a:lnTo>
-                    <a:pt x="2506788" y="153505"/>
-                  </a:lnTo>
-                  <a:lnTo>
-                    <a:pt x="2435165" y="171892"/>
-                  </a:lnTo>
-                  <a:lnTo>
-                    <a:pt x="2363543" y="189805"/>
-                  </a:lnTo>
-                  <a:lnTo>
-                    <a:pt x="2291920" y="207256"/>
-                  </a:lnTo>
-                  <a:lnTo>
-                    <a:pt x="2220298" y="224257"/>
-                  </a:lnTo>
-                  <a:lnTo>
-                    <a:pt x="2148675" y="240820"/>
-                  </a:lnTo>
-                  <a:lnTo>
-                    <a:pt x="2077053" y="256956"/>
-                  </a:lnTo>
-                  <a:lnTo>
-                    <a:pt x="2005430" y="272677"/>
-                  </a:lnTo>
-                  <a:lnTo>
-                    <a:pt x="1933808" y="287992"/>
-                  </a:lnTo>
-                  <a:lnTo>
-                    <a:pt x="1862185" y="302912"/>
-                  </a:lnTo>
-                  <a:lnTo>
-                    <a:pt x="1790563" y="317448"/>
-                  </a:lnTo>
-                  <a:lnTo>
-                    <a:pt x="1718940" y="331610"/>
-                  </a:lnTo>
-                  <a:lnTo>
-                    <a:pt x="1647318" y="345406"/>
-                  </a:lnTo>
-                  <a:lnTo>
-                    <a:pt x="1575695" y="358847"/>
-                  </a:lnTo>
-                  <a:lnTo>
-                    <a:pt x="1504073" y="371941"/>
-                  </a:lnTo>
-                  <a:lnTo>
-                    <a:pt x="1432450" y="384698"/>
-                  </a:lnTo>
-                  <a:lnTo>
-                    <a:pt x="1360827" y="397126"/>
-                  </a:lnTo>
-                  <a:lnTo>
-                    <a:pt x="1289205" y="409234"/>
-                  </a:lnTo>
-                  <a:lnTo>
-                    <a:pt x="1217582" y="421029"/>
-                  </a:lnTo>
-                  <a:lnTo>
-                    <a:pt x="1145960" y="432521"/>
-                  </a:lnTo>
-                  <a:lnTo>
-                    <a:pt x="1074337" y="443717"/>
-                  </a:lnTo>
-                  <a:lnTo>
-                    <a:pt x="1002715" y="454624"/>
-                  </a:lnTo>
-                  <a:lnTo>
-                    <a:pt x="931092" y="465249"/>
-                  </a:lnTo>
-                  <a:lnTo>
-                    <a:pt x="859470" y="475601"/>
-                  </a:lnTo>
-                  <a:lnTo>
-                    <a:pt x="787847" y="485687"/>
-                  </a:lnTo>
-                  <a:lnTo>
-                    <a:pt x="716225" y="495512"/>
-                  </a:lnTo>
-                  <a:lnTo>
-                    <a:pt x="644602" y="505084"/>
-                  </a:lnTo>
-                  <a:lnTo>
-                    <a:pt x="572980" y="514409"/>
-                  </a:lnTo>
-                  <a:lnTo>
-                    <a:pt x="501357" y="523494"/>
-                  </a:lnTo>
-                  <a:lnTo>
-                    <a:pt x="429735" y="532345"/>
-                  </a:lnTo>
-                  <a:lnTo>
-                    <a:pt x="358112" y="540968"/>
-                  </a:lnTo>
-                  <a:lnTo>
-                    <a:pt x="286490" y="549368"/>
-                  </a:lnTo>
-                  <a:lnTo>
-                    <a:pt x="214867" y="557552"/>
-                  </a:lnTo>
-                  <a:lnTo>
-                    <a:pt x="143245" y="565525"/>
-                  </a:lnTo>
-                  <a:lnTo>
-                    <a:pt x="71622" y="573293"/>
-                  </a:lnTo>
-                  <a:lnTo>
-                    <a:pt x="0" y="580860"/>
+                    <a:pt x="3008146" y="9951"/>
+                  </a:lnTo>
+                  <a:lnTo>
+                    <a:pt x="2936523" y="31005"/>
+                  </a:lnTo>
+                  <a:lnTo>
+                    <a:pt x="2864901" y="51515"/>
+                  </a:lnTo>
+                  <a:lnTo>
+                    <a:pt x="2793278" y="71498"/>
+                  </a:lnTo>
+                  <a:lnTo>
+                    <a:pt x="2721655" y="90965"/>
+                  </a:lnTo>
+                  <a:lnTo>
+                    <a:pt x="2650033" y="109930"/>
+                  </a:lnTo>
+                  <a:lnTo>
+                    <a:pt x="2578410" y="128407"/>
+                  </a:lnTo>
+                  <a:lnTo>
+                    <a:pt x="2506788" y="146407"/>
+                  </a:lnTo>
+                  <a:lnTo>
+                    <a:pt x="2435165" y="163944"/>
+                  </a:lnTo>
+                  <a:lnTo>
+                    <a:pt x="2363543" y="181028"/>
+                  </a:lnTo>
+                  <a:lnTo>
+                    <a:pt x="2291920" y="197672"/>
+                  </a:lnTo>
+                  <a:lnTo>
+                    <a:pt x="2220298" y="213887"/>
+                  </a:lnTo>
+                  <a:lnTo>
+                    <a:pt x="2148675" y="229685"/>
+                  </a:lnTo>
+                  <a:lnTo>
+                    <a:pt x="2077053" y="245075"/>
+                  </a:lnTo>
+                  <a:lnTo>
+                    <a:pt x="2005430" y="260068"/>
+                  </a:lnTo>
+                  <a:lnTo>
+                    <a:pt x="1933808" y="274675"/>
+                  </a:lnTo>
+                  <a:lnTo>
+                    <a:pt x="1862185" y="288906"/>
+                  </a:lnTo>
+                  <a:lnTo>
+                    <a:pt x="1790563" y="302770"/>
+                  </a:lnTo>
+                  <a:lnTo>
+                    <a:pt x="1718940" y="316276"/>
+                  </a:lnTo>
+                  <a:lnTo>
+                    <a:pt x="1647318" y="329435"/>
+                  </a:lnTo>
+                  <a:lnTo>
+                    <a:pt x="1575695" y="342254"/>
+                  </a:lnTo>
+                  <a:lnTo>
+                    <a:pt x="1504073" y="354743"/>
+                  </a:lnTo>
+                  <a:lnTo>
+                    <a:pt x="1432450" y="366910"/>
+                  </a:lnTo>
+                  <a:lnTo>
+                    <a:pt x="1360827" y="378763"/>
+                  </a:lnTo>
+                  <a:lnTo>
+                    <a:pt x="1289205" y="390311"/>
+                  </a:lnTo>
+                  <a:lnTo>
+                    <a:pt x="1217582" y="401561"/>
+                  </a:lnTo>
+                  <a:lnTo>
+                    <a:pt x="1145960" y="412522"/>
+                  </a:lnTo>
+                  <a:lnTo>
+                    <a:pt x="1074337" y="423199"/>
+                  </a:lnTo>
+                  <a:lnTo>
+                    <a:pt x="1002715" y="433602"/>
+                  </a:lnTo>
+                  <a:lnTo>
+                    <a:pt x="931092" y="443736"/>
+                  </a:lnTo>
+                  <a:lnTo>
+                    <a:pt x="859470" y="453610"/>
+                  </a:lnTo>
+                  <a:lnTo>
+                    <a:pt x="787847" y="463229"/>
+                  </a:lnTo>
+                  <a:lnTo>
+                    <a:pt x="716225" y="472600"/>
+                  </a:lnTo>
+                  <a:lnTo>
+                    <a:pt x="644602" y="481729"/>
+                  </a:lnTo>
+                  <a:lnTo>
+                    <a:pt x="572980" y="490623"/>
+                  </a:lnTo>
+                  <a:lnTo>
+                    <a:pt x="501357" y="499288"/>
+                  </a:lnTo>
+                  <a:lnTo>
+                    <a:pt x="429735" y="507730"/>
+                  </a:lnTo>
+                  <a:lnTo>
+                    <a:pt x="358112" y="515954"/>
+                  </a:lnTo>
+                  <a:lnTo>
+                    <a:pt x="286490" y="523966"/>
+                  </a:lnTo>
+                  <a:lnTo>
+                    <a:pt x="214867" y="531771"/>
+                  </a:lnTo>
+                  <a:lnTo>
+                    <a:pt x="143245" y="539376"/>
+                  </a:lnTo>
+                  <a:lnTo>
+                    <a:pt x="71622" y="546784"/>
+                  </a:lnTo>
+                  <a:lnTo>
+                    <a:pt x="0" y="554001"/>
                   </a:lnTo>
                 </a:path>
               </a:pathLst>
@@ -4409,309 +4409,309 @@
           </p:nvSpPr>
           <p:spPr>
             <a:xfrm>
-              <a:off x="1172049" y="4087668"/>
-              <a:ext cx="7090630" cy="873821"/>
+              <a:off x="1172049" y="4163292"/>
+              <a:ext cx="7090630" cy="833416"/>
             </a:xfrm>
             <a:custGeom>
               <a:avLst/>
               <a:pathLst>
-                <a:path w="7090630" h="873821">
+                <a:path w="7090630" h="833416">
                   <a:moveTo>
-                    <a:pt x="0" y="873821"/>
+                    <a:pt x="0" y="833416"/>
                   </a:moveTo>
                   <a:lnTo>
-                    <a:pt x="71622" y="868388"/>
-                  </a:lnTo>
-                  <a:lnTo>
-                    <a:pt x="143245" y="862905"/>
-                  </a:lnTo>
-                  <a:lnTo>
-                    <a:pt x="214867" y="857371"/>
-                  </a:lnTo>
-                  <a:lnTo>
-                    <a:pt x="286490" y="851786"/>
-                  </a:lnTo>
-                  <a:lnTo>
-                    <a:pt x="358112" y="846149"/>
-                  </a:lnTo>
-                  <a:lnTo>
-                    <a:pt x="429735" y="840460"/>
-                  </a:lnTo>
-                  <a:lnTo>
-                    <a:pt x="501357" y="834718"/>
-                  </a:lnTo>
-                  <a:lnTo>
-                    <a:pt x="572980" y="828924"/>
-                  </a:lnTo>
-                  <a:lnTo>
-                    <a:pt x="644602" y="823075"/>
-                  </a:lnTo>
-                  <a:lnTo>
-                    <a:pt x="716225" y="817173"/>
-                  </a:lnTo>
-                  <a:lnTo>
-                    <a:pt x="787847" y="811216"/>
-                  </a:lnTo>
-                  <a:lnTo>
-                    <a:pt x="859470" y="805204"/>
-                  </a:lnTo>
-                  <a:lnTo>
-                    <a:pt x="931092" y="799137"/>
-                  </a:lnTo>
-                  <a:lnTo>
-                    <a:pt x="1002715" y="793013"/>
-                  </a:lnTo>
-                  <a:lnTo>
-                    <a:pt x="1074337" y="786833"/>
-                  </a:lnTo>
-                  <a:lnTo>
-                    <a:pt x="1145960" y="780596"/>
-                  </a:lnTo>
-                  <a:lnTo>
-                    <a:pt x="1217582" y="774301"/>
-                  </a:lnTo>
-                  <a:lnTo>
-                    <a:pt x="1289205" y="767948"/>
-                  </a:lnTo>
-                  <a:lnTo>
-                    <a:pt x="1360827" y="761536"/>
-                  </a:lnTo>
-                  <a:lnTo>
-                    <a:pt x="1432450" y="755065"/>
-                  </a:lnTo>
-                  <a:lnTo>
-                    <a:pt x="1504073" y="748534"/>
-                  </a:lnTo>
-                  <a:lnTo>
-                    <a:pt x="1575695" y="741942"/>
-                  </a:lnTo>
-                  <a:lnTo>
-                    <a:pt x="1647318" y="735290"/>
-                  </a:lnTo>
-                  <a:lnTo>
-                    <a:pt x="1718940" y="728576"/>
-                  </a:lnTo>
-                  <a:lnTo>
-                    <a:pt x="1790563" y="721800"/>
-                  </a:lnTo>
-                  <a:lnTo>
-                    <a:pt x="1862185" y="714962"/>
-                  </a:lnTo>
-                  <a:lnTo>
-                    <a:pt x="1933808" y="708060"/>
-                  </a:lnTo>
-                  <a:lnTo>
-                    <a:pt x="2005430" y="701095"/>
-                  </a:lnTo>
-                  <a:lnTo>
-                    <a:pt x="2077053" y="694065"/>
-                  </a:lnTo>
-                  <a:lnTo>
-                    <a:pt x="2148675" y="686970"/>
-                  </a:lnTo>
-                  <a:lnTo>
-                    <a:pt x="2220298" y="679809"/>
-                  </a:lnTo>
-                  <a:lnTo>
-                    <a:pt x="2291920" y="672583"/>
-                  </a:lnTo>
-                  <a:lnTo>
-                    <a:pt x="2363543" y="665289"/>
-                  </a:lnTo>
-                  <a:lnTo>
-                    <a:pt x="2435165" y="657928"/>
-                  </a:lnTo>
-                  <a:lnTo>
-                    <a:pt x="2506788" y="650499"/>
-                  </a:lnTo>
-                  <a:lnTo>
-                    <a:pt x="2578410" y="643002"/>
-                  </a:lnTo>
-                  <a:lnTo>
-                    <a:pt x="2650033" y="635435"/>
-                  </a:lnTo>
-                  <a:lnTo>
-                    <a:pt x="2721655" y="627798"/>
-                  </a:lnTo>
-                  <a:lnTo>
-                    <a:pt x="2793278" y="620090"/>
-                  </a:lnTo>
-                  <a:lnTo>
-                    <a:pt x="2864901" y="612312"/>
-                  </a:lnTo>
-                  <a:lnTo>
-                    <a:pt x="2936523" y="604461"/>
-                  </a:lnTo>
-                  <a:lnTo>
-                    <a:pt x="3008146" y="596538"/>
-                  </a:lnTo>
-                  <a:lnTo>
-                    <a:pt x="3079768" y="588541"/>
-                  </a:lnTo>
-                  <a:lnTo>
-                    <a:pt x="3151391" y="580471"/>
-                  </a:lnTo>
-                  <a:lnTo>
-                    <a:pt x="3223013" y="572326"/>
-                  </a:lnTo>
-                  <a:lnTo>
-                    <a:pt x="3294636" y="564106"/>
-                  </a:lnTo>
-                  <a:lnTo>
-                    <a:pt x="3366258" y="555809"/>
-                  </a:lnTo>
-                  <a:lnTo>
-                    <a:pt x="3437881" y="547436"/>
-                  </a:lnTo>
-                  <a:lnTo>
-                    <a:pt x="3509503" y="538986"/>
-                  </a:lnTo>
-                  <a:lnTo>
-                    <a:pt x="3581126" y="530457"/>
-                  </a:lnTo>
-                  <a:lnTo>
-                    <a:pt x="3652748" y="521850"/>
-                  </a:lnTo>
-                  <a:lnTo>
-                    <a:pt x="3724371" y="513163"/>
-                  </a:lnTo>
-                  <a:lnTo>
-                    <a:pt x="3795993" y="504396"/>
-                  </a:lnTo>
-                  <a:lnTo>
-                    <a:pt x="3867616" y="495547"/>
-                  </a:lnTo>
-                  <a:lnTo>
-                    <a:pt x="3939238" y="486617"/>
-                  </a:lnTo>
-                  <a:lnTo>
-                    <a:pt x="4010861" y="477605"/>
-                  </a:lnTo>
-                  <a:lnTo>
-                    <a:pt x="4082483" y="468509"/>
-                  </a:lnTo>
-                  <a:lnTo>
-                    <a:pt x="4154106" y="459329"/>
-                  </a:lnTo>
-                  <a:lnTo>
-                    <a:pt x="4225729" y="450064"/>
-                  </a:lnTo>
-                  <a:lnTo>
-                    <a:pt x="4297351" y="440713"/>
-                  </a:lnTo>
-                  <a:lnTo>
-                    <a:pt x="4368974" y="431276"/>
-                  </a:lnTo>
-                  <a:lnTo>
-                    <a:pt x="4440596" y="421752"/>
-                  </a:lnTo>
-                  <a:lnTo>
-                    <a:pt x="4512219" y="412140"/>
-                  </a:lnTo>
-                  <a:lnTo>
-                    <a:pt x="4583841" y="402439"/>
-                  </a:lnTo>
-                  <a:lnTo>
-                    <a:pt x="4655464" y="392648"/>
-                  </a:lnTo>
-                  <a:lnTo>
-                    <a:pt x="4727086" y="382766"/>
-                  </a:lnTo>
-                  <a:lnTo>
-                    <a:pt x="4798709" y="372794"/>
-                  </a:lnTo>
-                  <a:lnTo>
-                    <a:pt x="4870331" y="362729"/>
-                  </a:lnTo>
-                  <a:lnTo>
-                    <a:pt x="4941954" y="352571"/>
-                  </a:lnTo>
-                  <a:lnTo>
-                    <a:pt x="5013576" y="342319"/>
-                  </a:lnTo>
-                  <a:lnTo>
-                    <a:pt x="5085199" y="331972"/>
-                  </a:lnTo>
-                  <a:lnTo>
-                    <a:pt x="5156821" y="321530"/>
-                  </a:lnTo>
-                  <a:lnTo>
-                    <a:pt x="5228444" y="310991"/>
-                  </a:lnTo>
-                  <a:lnTo>
-                    <a:pt x="5300066" y="300355"/>
-                  </a:lnTo>
-                  <a:lnTo>
-                    <a:pt x="5371689" y="289621"/>
-                  </a:lnTo>
-                  <a:lnTo>
-                    <a:pt x="5443311" y="278787"/>
-                  </a:lnTo>
-                  <a:lnTo>
-                    <a:pt x="5514934" y="267853"/>
-                  </a:lnTo>
-                  <a:lnTo>
-                    <a:pt x="5586557" y="256818"/>
-                  </a:lnTo>
-                  <a:lnTo>
-                    <a:pt x="5658179" y="245681"/>
-                  </a:lnTo>
-                  <a:lnTo>
-                    <a:pt x="5729802" y="234441"/>
-                  </a:lnTo>
-                  <a:lnTo>
-                    <a:pt x="5801424" y="223097"/>
-                  </a:lnTo>
-                  <a:lnTo>
-                    <a:pt x="5873047" y="211648"/>
-                  </a:lnTo>
-                  <a:lnTo>
-                    <a:pt x="5944669" y="200094"/>
-                  </a:lnTo>
-                  <a:lnTo>
-                    <a:pt x="6016292" y="188432"/>
-                  </a:lnTo>
-                  <a:lnTo>
-                    <a:pt x="6087914" y="176663"/>
-                  </a:lnTo>
-                  <a:lnTo>
-                    <a:pt x="6159537" y="164785"/>
-                  </a:lnTo>
-                  <a:lnTo>
-                    <a:pt x="6231159" y="152797"/>
-                  </a:lnTo>
-                  <a:lnTo>
-                    <a:pt x="6302782" y="140699"/>
-                  </a:lnTo>
-                  <a:lnTo>
-                    <a:pt x="6374404" y="128488"/>
-                  </a:lnTo>
-                  <a:lnTo>
-                    <a:pt x="6446027" y="116165"/>
-                  </a:lnTo>
-                  <a:lnTo>
-                    <a:pt x="6517649" y="103727"/>
-                  </a:lnTo>
-                  <a:lnTo>
-                    <a:pt x="6589272" y="91175"/>
-                  </a:lnTo>
-                  <a:lnTo>
-                    <a:pt x="6660894" y="78507"/>
-                  </a:lnTo>
-                  <a:lnTo>
-                    <a:pt x="6732517" y="65722"/>
-                  </a:lnTo>
-                  <a:lnTo>
-                    <a:pt x="6804139" y="52818"/>
-                  </a:lnTo>
-                  <a:lnTo>
-                    <a:pt x="6875762" y="39795"/>
-                  </a:lnTo>
-                  <a:lnTo>
-                    <a:pt x="6947385" y="26652"/>
-                  </a:lnTo>
-                  <a:lnTo>
-                    <a:pt x="7019007" y="13387"/>
+                    <a:pt x="71622" y="828234"/>
+                  </a:lnTo>
+                  <a:lnTo>
+                    <a:pt x="143245" y="823004"/>
+                  </a:lnTo>
+                  <a:lnTo>
+                    <a:pt x="214867" y="817726"/>
+                  </a:lnTo>
+                  <a:lnTo>
+                    <a:pt x="286490" y="812399"/>
+                  </a:lnTo>
+                  <a:lnTo>
+                    <a:pt x="358112" y="807023"/>
+                  </a:lnTo>
+                  <a:lnTo>
+                    <a:pt x="429735" y="801597"/>
+                  </a:lnTo>
+                  <a:lnTo>
+                    <a:pt x="501357" y="796121"/>
+                  </a:lnTo>
+                  <a:lnTo>
+                    <a:pt x="572980" y="790594"/>
+                  </a:lnTo>
+                  <a:lnTo>
+                    <a:pt x="644602" y="785017"/>
+                  </a:lnTo>
+                  <a:lnTo>
+                    <a:pt x="716225" y="779387"/>
+                  </a:lnTo>
+                  <a:lnTo>
+                    <a:pt x="787847" y="773706"/>
+                  </a:lnTo>
+                  <a:lnTo>
+                    <a:pt x="859470" y="767972"/>
+                  </a:lnTo>
+                  <a:lnTo>
+                    <a:pt x="931092" y="762185"/>
+                  </a:lnTo>
+                  <a:lnTo>
+                    <a:pt x="1002715" y="756345"/>
+                  </a:lnTo>
+                  <a:lnTo>
+                    <a:pt x="1074337" y="750450"/>
+                  </a:lnTo>
+                  <a:lnTo>
+                    <a:pt x="1145960" y="744501"/>
+                  </a:lnTo>
+                  <a:lnTo>
+                    <a:pt x="1217582" y="738498"/>
+                  </a:lnTo>
+                  <a:lnTo>
+                    <a:pt x="1289205" y="732438"/>
+                  </a:lnTo>
+                  <a:lnTo>
+                    <a:pt x="1360827" y="726323"/>
+                  </a:lnTo>
+                  <a:lnTo>
+                    <a:pt x="1432450" y="720151"/>
+                  </a:lnTo>
+                  <a:lnTo>
+                    <a:pt x="1504073" y="713922"/>
+                  </a:lnTo>
+                  <a:lnTo>
+                    <a:pt x="1575695" y="707635"/>
+                  </a:lnTo>
+                  <a:lnTo>
+                    <a:pt x="1647318" y="701291"/>
+                  </a:lnTo>
+                  <a:lnTo>
+                    <a:pt x="1718940" y="694887"/>
+                  </a:lnTo>
+                  <a:lnTo>
+                    <a:pt x="1790563" y="688425"/>
+                  </a:lnTo>
+                  <a:lnTo>
+                    <a:pt x="1862185" y="681902"/>
+                  </a:lnTo>
+                  <a:lnTo>
+                    <a:pt x="1933808" y="675320"/>
+                  </a:lnTo>
+                  <a:lnTo>
+                    <a:pt x="2005430" y="668676"/>
+                  </a:lnTo>
+                  <a:lnTo>
+                    <a:pt x="2077053" y="661972"/>
+                  </a:lnTo>
+                  <a:lnTo>
+                    <a:pt x="2148675" y="655205"/>
+                  </a:lnTo>
+                  <a:lnTo>
+                    <a:pt x="2220298" y="648375"/>
+                  </a:lnTo>
+                  <a:lnTo>
+                    <a:pt x="2291920" y="641483"/>
+                  </a:lnTo>
+                  <a:lnTo>
+                    <a:pt x="2363543" y="634527"/>
+                  </a:lnTo>
+                  <a:lnTo>
+                    <a:pt x="2435165" y="627506"/>
+                  </a:lnTo>
+                  <a:lnTo>
+                    <a:pt x="2506788" y="620421"/>
+                  </a:lnTo>
+                  <a:lnTo>
+                    <a:pt x="2578410" y="613270"/>
+                  </a:lnTo>
+                  <a:lnTo>
+                    <a:pt x="2650033" y="606053"/>
+                  </a:lnTo>
+                  <a:lnTo>
+                    <a:pt x="2721655" y="598769"/>
+                  </a:lnTo>
+                  <a:lnTo>
+                    <a:pt x="2793278" y="591418"/>
+                  </a:lnTo>
+                  <a:lnTo>
+                    <a:pt x="2864901" y="583999"/>
+                  </a:lnTo>
+                  <a:lnTo>
+                    <a:pt x="2936523" y="576511"/>
+                  </a:lnTo>
+                  <a:lnTo>
+                    <a:pt x="3008146" y="568954"/>
+                  </a:lnTo>
+                  <a:lnTo>
+                    <a:pt x="3079768" y="561327"/>
+                  </a:lnTo>
+                  <a:lnTo>
+                    <a:pt x="3151391" y="553630"/>
+                  </a:lnTo>
+                  <a:lnTo>
+                    <a:pt x="3223013" y="545862"/>
+                  </a:lnTo>
+                  <a:lnTo>
+                    <a:pt x="3294636" y="538021"/>
+                  </a:lnTo>
+                  <a:lnTo>
+                    <a:pt x="3366258" y="530109"/>
+                  </a:lnTo>
+                  <a:lnTo>
+                    <a:pt x="3437881" y="522123"/>
+                  </a:lnTo>
+                  <a:lnTo>
+                    <a:pt x="3509503" y="514063"/>
+                  </a:lnTo>
+                  <a:lnTo>
+                    <a:pt x="3581126" y="505929"/>
+                  </a:lnTo>
+                  <a:lnTo>
+                    <a:pt x="3652748" y="497720"/>
+                  </a:lnTo>
+                  <a:lnTo>
+                    <a:pt x="3724371" y="489435"/>
+                  </a:lnTo>
+                  <a:lnTo>
+                    <a:pt x="3795993" y="481073"/>
+                  </a:lnTo>
+                  <a:lnTo>
+                    <a:pt x="3867616" y="472634"/>
+                  </a:lnTo>
+                  <a:lnTo>
+                    <a:pt x="3939238" y="464116"/>
+                  </a:lnTo>
+                  <a:lnTo>
+                    <a:pt x="4010861" y="455520"/>
+                  </a:lnTo>
+                  <a:lnTo>
+                    <a:pt x="4082483" y="446845"/>
+                  </a:lnTo>
+                  <a:lnTo>
+                    <a:pt x="4154106" y="438090"/>
+                  </a:lnTo>
+                  <a:lnTo>
+                    <a:pt x="4225729" y="429253"/>
+                  </a:lnTo>
+                  <a:lnTo>
+                    <a:pt x="4297351" y="420335"/>
+                  </a:lnTo>
+                  <a:lnTo>
+                    <a:pt x="4368974" y="411334"/>
+                  </a:lnTo>
+                  <a:lnTo>
+                    <a:pt x="4440596" y="402250"/>
+                  </a:lnTo>
+                  <a:lnTo>
+                    <a:pt x="4512219" y="393083"/>
+                  </a:lnTo>
+                  <a:lnTo>
+                    <a:pt x="4583841" y="383830"/>
+                  </a:lnTo>
+                  <a:lnTo>
+                    <a:pt x="4655464" y="374492"/>
+                  </a:lnTo>
+                  <a:lnTo>
+                    <a:pt x="4727086" y="365067"/>
+                  </a:lnTo>
+                  <a:lnTo>
+                    <a:pt x="4798709" y="355556"/>
+                  </a:lnTo>
+                  <a:lnTo>
+                    <a:pt x="4870331" y="345956"/>
+                  </a:lnTo>
+                  <a:lnTo>
+                    <a:pt x="4941954" y="336268"/>
+                  </a:lnTo>
+                  <a:lnTo>
+                    <a:pt x="5013576" y="326490"/>
+                  </a:lnTo>
+                  <a:lnTo>
+                    <a:pt x="5085199" y="316622"/>
+                  </a:lnTo>
+                  <a:lnTo>
+                    <a:pt x="5156821" y="306663"/>
+                  </a:lnTo>
+                  <a:lnTo>
+                    <a:pt x="5228444" y="296611"/>
+                  </a:lnTo>
+                  <a:lnTo>
+                    <a:pt x="5300066" y="286467"/>
+                  </a:lnTo>
+                  <a:lnTo>
+                    <a:pt x="5371689" y="276229"/>
+                  </a:lnTo>
+                  <a:lnTo>
+                    <a:pt x="5443311" y="265896"/>
+                  </a:lnTo>
+                  <a:lnTo>
+                    <a:pt x="5514934" y="255468"/>
+                  </a:lnTo>
+                  <a:lnTo>
+                    <a:pt x="5586557" y="244943"/>
+                  </a:lnTo>
+                  <a:lnTo>
+                    <a:pt x="5658179" y="234321"/>
+                  </a:lnTo>
+                  <a:lnTo>
+                    <a:pt x="5729802" y="223600"/>
+                  </a:lnTo>
+                  <a:lnTo>
+                    <a:pt x="5801424" y="212781"/>
+                  </a:lnTo>
+                  <a:lnTo>
+                    <a:pt x="5873047" y="201862"/>
+                  </a:lnTo>
+                  <a:lnTo>
+                    <a:pt x="5944669" y="190841"/>
+                  </a:lnTo>
+                  <a:lnTo>
+                    <a:pt x="6016292" y="179719"/>
+                  </a:lnTo>
+                  <a:lnTo>
+                    <a:pt x="6087914" y="168494"/>
+                  </a:lnTo>
+                  <a:lnTo>
+                    <a:pt x="6159537" y="157165"/>
+                  </a:lnTo>
+                  <a:lnTo>
+                    <a:pt x="6231159" y="145732"/>
+                  </a:lnTo>
+                  <a:lnTo>
+                    <a:pt x="6302782" y="134193"/>
+                  </a:lnTo>
+                  <a:lnTo>
+                    <a:pt x="6374404" y="122547"/>
+                  </a:lnTo>
+                  <a:lnTo>
+                    <a:pt x="6446027" y="110793"/>
+                  </a:lnTo>
+                  <a:lnTo>
+                    <a:pt x="6517649" y="98931"/>
+                  </a:lnTo>
+                  <a:lnTo>
+                    <a:pt x="6589272" y="86959"/>
+                  </a:lnTo>
+                  <a:lnTo>
+                    <a:pt x="6660894" y="74877"/>
+                  </a:lnTo>
+                  <a:lnTo>
+                    <a:pt x="6732517" y="62683"/>
+                  </a:lnTo>
+                  <a:lnTo>
+                    <a:pt x="6804139" y="50376"/>
+                  </a:lnTo>
+                  <a:lnTo>
+                    <a:pt x="6875762" y="37955"/>
+                  </a:lnTo>
+                  <a:lnTo>
+                    <a:pt x="6947385" y="25419"/>
+                  </a:lnTo>
+                  <a:lnTo>
+                    <a:pt x="7019007" y="12768"/>
                   </a:lnTo>
                   <a:lnTo>
                     <a:pt x="7090630" y="0"/>
@@ -4743,7 +4743,7 @@
           </p:nvSpPr>
           <p:spPr>
             <a:xfrm>
-              <a:off x="817517" y="4679530"/>
+              <a:off x="817517" y="4727786"/>
               <a:ext cx="7799693" cy="0"/>
             </a:xfrm>
             <a:custGeom>
@@ -4786,15 +4786,15 @@
           </p:nvSpPr>
           <p:spPr>
             <a:xfrm>
-              <a:off x="4222163" y="1896563"/>
-              <a:ext cx="0" cy="3826579"/>
+              <a:off x="4222163" y="2073503"/>
+              <a:ext cx="0" cy="3649639"/>
             </a:xfrm>
             <a:custGeom>
               <a:avLst/>
               <a:pathLst>
-                <a:path w="0" h="3826579">
+                <a:path w="0" h="3649639">
                   <a:moveTo>
-                    <a:pt x="0" y="3826579"/>
+                    <a:pt x="0" y="3649639"/>
                   </a:moveTo>
                   <a:lnTo>
                     <a:pt x="0" y="0"/>
@@ -4829,7 +4829,7 @@
           </p:nvSpPr>
           <p:spPr>
             <a:xfrm>
-              <a:off x="692708" y="5509156"/>
+              <a:off x="692708" y="5517199"/>
               <a:ext cx="62179" cy="80101"/>
             </a:xfrm>
             <a:prstGeom prst="rect">
@@ -4875,7 +4875,7 @@
           </p:nvSpPr>
           <p:spPr>
             <a:xfrm>
-              <a:off x="692708" y="4639479"/>
+              <a:off x="692708" y="4687735"/>
               <a:ext cx="62179" cy="80101"/>
             </a:xfrm>
             <a:prstGeom prst="rect">
@@ -4921,7 +4921,7 @@
           </p:nvSpPr>
           <p:spPr>
             <a:xfrm>
-              <a:off x="692708" y="3769802"/>
+              <a:off x="692708" y="3858272"/>
               <a:ext cx="62179" cy="80101"/>
             </a:xfrm>
             <a:prstGeom prst="rect">
@@ -4967,7 +4967,7 @@
           </p:nvSpPr>
           <p:spPr>
             <a:xfrm>
-              <a:off x="692708" y="2900125"/>
+              <a:off x="692708" y="3028808"/>
               <a:ext cx="62179" cy="80101"/>
             </a:xfrm>
             <a:prstGeom prst="rect">
@@ -5013,7 +5013,7 @@
           </p:nvSpPr>
           <p:spPr>
             <a:xfrm>
-              <a:off x="692708" y="2030448"/>
+              <a:off x="692708" y="2199345"/>
               <a:ext cx="62179" cy="80101"/>
             </a:xfrm>
             <a:prstGeom prst="rect">
@@ -5381,7 +5381,7 @@
           </p:nvSpPr>
           <p:spPr>
             <a:xfrm rot="-5400000">
-              <a:off x="68446" y="3759743"/>
+              <a:off x="68446" y="3848213"/>
               <a:ext cx="1016904" cy="100218"/>
             </a:xfrm>
             <a:prstGeom prst="rect">
@@ -5422,6 +5422,52 @@
         <p:sp>
           <p:nvSpPr>
             <p:cNvPr id="43" name="tx43"/>
+            <p:cNvSpPr/>
+            <p:nvPr/>
+          </p:nvSpPr>
+          <p:spPr>
+            <a:xfrm>
+              <a:off x="817517" y="1896563"/>
+              <a:ext cx="4433376" cy="82021"/>
+            </a:xfrm>
+            <a:prstGeom prst="rect">
+              <a:avLst/>
+            </a:prstGeom>
+            <a:noFill/>
+          </p:spPr>
+          <p:txBody>
+            <a:bodyPr lIns="0" rIns="0" tIns="0" bIns="0" anchorCtr="1" anchor="ctr" wrap="none"/>
+            <a:lstStyle/>
+            <a:p>
+              <a:pPr algn="l" marL="0" marR="0" indent="0">
+                <a:lnSpc>
+                  <a:spcPts val="900"/>
+                </a:lnSpc>
+                <a:spcBef>
+                  <a:spcPts val="0"/>
+                </a:spcBef>
+                <a:spcAft>
+                  <a:spcPts val="0"/>
+                </a:spcAft>
+              </a:pPr>
+              <a:r>
+                <a:rPr sz="900">
+                  <a:solidFill>
+                    <a:srgbClr val="404040">
+                      <a:alpha val="100000"/>
+                    </a:srgbClr>
+                  </a:solidFill>
+                  <a:latin typeface="Helvetica"/>
+                  <a:cs typeface="Helvetica"/>
+                </a:rPr>
+                <a:t>subHR = 1.09 (95% CI 0.93-1.28), p = 0.286   (per 25 mg increase in dose discrepancy)</a:t>
+              </a:r>
+            </a:p>
+          </p:txBody>
+        </p:sp>
+        <p:sp>
+          <p:nvSpPr>
+            <p:cNvPr id="44" name="tx44"/>
             <p:cNvSpPr/>
             <p:nvPr/>
           </p:nvSpPr>

--- a/docs/plots/carbo/jx_carbo_linsubhr_dosedisc_grade2.pptx
+++ b/docs/plots/carbo/jx_carbo_linsubhr_dosedisc_grade2.pptx
@@ -2271,26 +2271,26 @@
           </p:nvSpPr>
           <p:spPr>
             <a:xfrm>
-              <a:off x="817517" y="5142518"/>
-              <a:ext cx="7799693" cy="0"/>
+              <a:off x="915645" y="5071743"/>
+              <a:ext cx="7682587" cy="0"/>
             </a:xfrm>
             <a:custGeom>
               <a:avLst/>
               <a:pathLst>
-                <a:path w="7799693" h="0">
+                <a:path w="7682587" h="0">
                   <a:moveTo>
                     <a:pt x="0" y="0"/>
                   </a:moveTo>
                   <a:lnTo>
-                    <a:pt x="7799693" y="0"/>
-                  </a:lnTo>
-                  <a:lnTo>
-                    <a:pt x="7799693" y="0"/>
+                    <a:pt x="7682587" y="0"/>
+                  </a:lnTo>
+                  <a:lnTo>
+                    <a:pt x="7682587" y="0"/>
                   </a:lnTo>
                 </a:path>
               </a:pathLst>
             </a:custGeom>
-            <a:ln w="6775" cap="flat">
+            <a:ln w="8623" cap="flat">
               <a:solidFill>
                 <a:srgbClr val="EBEBEB">
                   <a:alpha val="100000"/>
@@ -2314,26 +2314,26 @@
           </p:nvSpPr>
           <p:spPr>
             <a:xfrm>
-              <a:off x="817517" y="4313054"/>
-              <a:ext cx="7799693" cy="0"/>
+              <a:off x="915645" y="4298074"/>
+              <a:ext cx="7682587" cy="0"/>
             </a:xfrm>
             <a:custGeom>
               <a:avLst/>
               <a:pathLst>
-                <a:path w="7799693" h="0">
+                <a:path w="7682587" h="0">
                   <a:moveTo>
                     <a:pt x="0" y="0"/>
                   </a:moveTo>
                   <a:lnTo>
-                    <a:pt x="7799693" y="0"/>
-                  </a:lnTo>
-                  <a:lnTo>
-                    <a:pt x="7799693" y="0"/>
+                    <a:pt x="7682587" y="0"/>
+                  </a:lnTo>
+                  <a:lnTo>
+                    <a:pt x="7682587" y="0"/>
                   </a:lnTo>
                 </a:path>
               </a:pathLst>
             </a:custGeom>
-            <a:ln w="6775" cap="flat">
+            <a:ln w="8623" cap="flat">
               <a:solidFill>
                 <a:srgbClr val="EBEBEB">
                   <a:alpha val="100000"/>
@@ -2357,26 +2357,26 @@
           </p:nvSpPr>
           <p:spPr>
             <a:xfrm>
-              <a:off x="817517" y="3483591"/>
-              <a:ext cx="7799693" cy="0"/>
+              <a:off x="915645" y="3524405"/>
+              <a:ext cx="7682587" cy="0"/>
             </a:xfrm>
             <a:custGeom>
               <a:avLst/>
               <a:pathLst>
-                <a:path w="7799693" h="0">
+                <a:path w="7682587" h="0">
                   <a:moveTo>
                     <a:pt x="0" y="0"/>
                   </a:moveTo>
                   <a:lnTo>
-                    <a:pt x="7799693" y="0"/>
-                  </a:lnTo>
-                  <a:lnTo>
-                    <a:pt x="7799693" y="0"/>
+                    <a:pt x="7682587" y="0"/>
+                  </a:lnTo>
+                  <a:lnTo>
+                    <a:pt x="7682587" y="0"/>
                   </a:lnTo>
                 </a:path>
               </a:pathLst>
             </a:custGeom>
-            <a:ln w="6775" cap="flat">
+            <a:ln w="8623" cap="flat">
               <a:solidFill>
                 <a:srgbClr val="EBEBEB">
                   <a:alpha val="100000"/>
@@ -2400,26 +2400,26 @@
           </p:nvSpPr>
           <p:spPr>
             <a:xfrm>
-              <a:off x="817517" y="2654127"/>
-              <a:ext cx="7799693" cy="0"/>
+              <a:off x="915645" y="2750737"/>
+              <a:ext cx="7682587" cy="0"/>
             </a:xfrm>
             <a:custGeom>
               <a:avLst/>
               <a:pathLst>
-                <a:path w="7799693" h="0">
+                <a:path w="7682587" h="0">
                   <a:moveTo>
                     <a:pt x="0" y="0"/>
                   </a:moveTo>
                   <a:lnTo>
-                    <a:pt x="7799693" y="0"/>
-                  </a:lnTo>
-                  <a:lnTo>
-                    <a:pt x="7799693" y="0"/>
+                    <a:pt x="7682587" y="0"/>
+                  </a:lnTo>
+                  <a:lnTo>
+                    <a:pt x="7682587" y="0"/>
                   </a:lnTo>
                 </a:path>
               </a:pathLst>
             </a:custGeom>
-            <a:ln w="6775" cap="flat">
+            <a:ln w="8623" cap="flat">
               <a:solidFill>
                 <a:srgbClr val="EBEBEB">
                   <a:alpha val="100000"/>
@@ -2443,15 +2443,15 @@
           </p:nvSpPr>
           <p:spPr>
             <a:xfrm>
-              <a:off x="2122745" y="2073503"/>
-              <a:ext cx="0" cy="3649639"/>
+              <a:off x="2201275" y="2209169"/>
+              <a:ext cx="0" cy="3404141"/>
             </a:xfrm>
             <a:custGeom>
               <a:avLst/>
               <a:pathLst>
-                <a:path w="0" h="3649639">
+                <a:path w="0" h="3404141">
                   <a:moveTo>
-                    <a:pt x="0" y="3649639"/>
+                    <a:pt x="0" y="3404141"/>
                   </a:moveTo>
                   <a:lnTo>
                     <a:pt x="0" y="0"/>
@@ -2462,7 +2462,7 @@
                 </a:path>
               </a:pathLst>
             </a:custGeom>
-            <a:ln w="6775" cap="flat">
+            <a:ln w="8623" cap="flat">
               <a:solidFill>
                 <a:srgbClr val="EBEBEB">
                   <a:alpha val="100000"/>
@@ -2486,15 +2486,15 @@
           </p:nvSpPr>
           <p:spPr>
             <a:xfrm>
-              <a:off x="3487174" y="2073503"/>
-              <a:ext cx="0" cy="3649639"/>
+              <a:off x="3545219" y="2209169"/>
+              <a:ext cx="0" cy="3404141"/>
             </a:xfrm>
             <a:custGeom>
               <a:avLst/>
               <a:pathLst>
-                <a:path w="0" h="3649639">
+                <a:path w="0" h="3404141">
                   <a:moveTo>
-                    <a:pt x="0" y="3649639"/>
+                    <a:pt x="0" y="3404141"/>
                   </a:moveTo>
                   <a:lnTo>
                     <a:pt x="0" y="0"/>
@@ -2505,7 +2505,7 @@
                 </a:path>
               </a:pathLst>
             </a:custGeom>
-            <a:ln w="6775" cap="flat">
+            <a:ln w="8623" cap="flat">
               <a:solidFill>
                 <a:srgbClr val="EBEBEB">
                   <a:alpha val="100000"/>
@@ -2529,15 +2529,15 @@
           </p:nvSpPr>
           <p:spPr>
             <a:xfrm>
-              <a:off x="4851604" y="2073503"/>
-              <a:ext cx="0" cy="3649639"/>
+              <a:off x="4889163" y="2209169"/>
+              <a:ext cx="0" cy="3404141"/>
             </a:xfrm>
             <a:custGeom>
               <a:avLst/>
               <a:pathLst>
-                <a:path w="0" h="3649639">
+                <a:path w="0" h="3404141">
                   <a:moveTo>
-                    <a:pt x="0" y="3649639"/>
+                    <a:pt x="0" y="3404141"/>
                   </a:moveTo>
                   <a:lnTo>
                     <a:pt x="0" y="0"/>
@@ -2548,7 +2548,7 @@
                 </a:path>
               </a:pathLst>
             </a:custGeom>
-            <a:ln w="6775" cap="flat">
+            <a:ln w="8623" cap="flat">
               <a:solidFill>
                 <a:srgbClr val="EBEBEB">
                   <a:alpha val="100000"/>
@@ -2572,15 +2572,15 @@
           </p:nvSpPr>
           <p:spPr>
             <a:xfrm>
-              <a:off x="6216034" y="2073503"/>
-              <a:ext cx="0" cy="3649639"/>
+              <a:off x="6233107" y="2209169"/>
+              <a:ext cx="0" cy="3404141"/>
             </a:xfrm>
             <a:custGeom>
               <a:avLst/>
               <a:pathLst>
-                <a:path w="0" h="3649639">
+                <a:path w="0" h="3404141">
                   <a:moveTo>
-                    <a:pt x="0" y="3649639"/>
+                    <a:pt x="0" y="3404141"/>
                   </a:moveTo>
                   <a:lnTo>
                     <a:pt x="0" y="0"/>
@@ -2591,7 +2591,7 @@
                 </a:path>
               </a:pathLst>
             </a:custGeom>
-            <a:ln w="6775" cap="flat">
+            <a:ln w="8623" cap="flat">
               <a:solidFill>
                 <a:srgbClr val="EBEBEB">
                   <a:alpha val="100000"/>
@@ -2615,15 +2615,15 @@
           </p:nvSpPr>
           <p:spPr>
             <a:xfrm>
-              <a:off x="7580464" y="2073503"/>
-              <a:ext cx="0" cy="3649639"/>
+              <a:off x="7577051" y="2209169"/>
+              <a:ext cx="0" cy="3404141"/>
             </a:xfrm>
             <a:custGeom>
               <a:avLst/>
               <a:pathLst>
-                <a:path w="0" h="3649639">
+                <a:path w="0" h="3404141">
                   <a:moveTo>
-                    <a:pt x="0" y="3649639"/>
+                    <a:pt x="0" y="3404141"/>
                   </a:moveTo>
                   <a:lnTo>
                     <a:pt x="0" y="0"/>
@@ -2634,7 +2634,7 @@
                 </a:path>
               </a:pathLst>
             </a:custGeom>
-            <a:ln w="6775" cap="flat">
+            <a:ln w="8623" cap="flat">
               <a:solidFill>
                 <a:srgbClr val="EBEBEB">
                   <a:alpha val="100000"/>
@@ -2658,26 +2658,26 @@
           </p:nvSpPr>
           <p:spPr>
             <a:xfrm>
-              <a:off x="817517" y="5557249"/>
-              <a:ext cx="7799693" cy="0"/>
+              <a:off x="915645" y="5458577"/>
+              <a:ext cx="7682587" cy="0"/>
             </a:xfrm>
             <a:custGeom>
               <a:avLst/>
               <a:pathLst>
-                <a:path w="7799693" h="0">
+                <a:path w="7682587" h="0">
                   <a:moveTo>
                     <a:pt x="0" y="0"/>
                   </a:moveTo>
                   <a:lnTo>
-                    <a:pt x="7799693" y="0"/>
-                  </a:lnTo>
-                  <a:lnTo>
-                    <a:pt x="7799693" y="0"/>
+                    <a:pt x="7682587" y="0"/>
+                  </a:lnTo>
+                  <a:lnTo>
+                    <a:pt x="7682587" y="0"/>
                   </a:lnTo>
                 </a:path>
               </a:pathLst>
             </a:custGeom>
-            <a:ln w="13550" cap="flat">
+            <a:ln w="17246" cap="flat">
               <a:solidFill>
                 <a:srgbClr val="EBEBEB">
                   <a:alpha val="100000"/>
@@ -2701,26 +2701,26 @@
           </p:nvSpPr>
           <p:spPr>
             <a:xfrm>
-              <a:off x="817517" y="4727786"/>
-              <a:ext cx="7799693" cy="0"/>
+              <a:off x="915645" y="4684908"/>
+              <a:ext cx="7682587" cy="0"/>
             </a:xfrm>
             <a:custGeom>
               <a:avLst/>
               <a:pathLst>
-                <a:path w="7799693" h="0">
+                <a:path w="7682587" h="0">
                   <a:moveTo>
                     <a:pt x="0" y="0"/>
                   </a:moveTo>
                   <a:lnTo>
-                    <a:pt x="7799693" y="0"/>
-                  </a:lnTo>
-                  <a:lnTo>
-                    <a:pt x="7799693" y="0"/>
+                    <a:pt x="7682587" y="0"/>
+                  </a:lnTo>
+                  <a:lnTo>
+                    <a:pt x="7682587" y="0"/>
                   </a:lnTo>
                 </a:path>
               </a:pathLst>
             </a:custGeom>
-            <a:ln w="13550" cap="flat">
+            <a:ln w="17246" cap="flat">
               <a:solidFill>
                 <a:srgbClr val="EBEBEB">
                   <a:alpha val="100000"/>
@@ -2744,26 +2744,26 @@
           </p:nvSpPr>
           <p:spPr>
             <a:xfrm>
-              <a:off x="817517" y="3898322"/>
-              <a:ext cx="7799693" cy="0"/>
+              <a:off x="915645" y="3911240"/>
+              <a:ext cx="7682587" cy="0"/>
             </a:xfrm>
             <a:custGeom>
               <a:avLst/>
               <a:pathLst>
-                <a:path w="7799693" h="0">
+                <a:path w="7682587" h="0">
                   <a:moveTo>
                     <a:pt x="0" y="0"/>
                   </a:moveTo>
                   <a:lnTo>
-                    <a:pt x="7799693" y="0"/>
-                  </a:lnTo>
-                  <a:lnTo>
-                    <a:pt x="7799693" y="0"/>
+                    <a:pt x="7682587" y="0"/>
+                  </a:lnTo>
+                  <a:lnTo>
+                    <a:pt x="7682587" y="0"/>
                   </a:lnTo>
                 </a:path>
               </a:pathLst>
             </a:custGeom>
-            <a:ln w="13550" cap="flat">
+            <a:ln w="17246" cap="flat">
               <a:solidFill>
                 <a:srgbClr val="EBEBEB">
                   <a:alpha val="100000"/>
@@ -2787,26 +2787,26 @@
           </p:nvSpPr>
           <p:spPr>
             <a:xfrm>
-              <a:off x="817517" y="3068859"/>
-              <a:ext cx="7799693" cy="0"/>
+              <a:off x="915645" y="3137571"/>
+              <a:ext cx="7682587" cy="0"/>
             </a:xfrm>
             <a:custGeom>
               <a:avLst/>
               <a:pathLst>
-                <a:path w="7799693" h="0">
+                <a:path w="7682587" h="0">
                   <a:moveTo>
                     <a:pt x="0" y="0"/>
                   </a:moveTo>
                   <a:lnTo>
-                    <a:pt x="7799693" y="0"/>
-                  </a:lnTo>
-                  <a:lnTo>
-                    <a:pt x="7799693" y="0"/>
+                    <a:pt x="7682587" y="0"/>
+                  </a:lnTo>
+                  <a:lnTo>
+                    <a:pt x="7682587" y="0"/>
                   </a:lnTo>
                 </a:path>
               </a:pathLst>
             </a:custGeom>
-            <a:ln w="13550" cap="flat">
+            <a:ln w="17246" cap="flat">
               <a:solidFill>
                 <a:srgbClr val="EBEBEB">
                   <a:alpha val="100000"/>
@@ -2830,26 +2830,26 @@
           </p:nvSpPr>
           <p:spPr>
             <a:xfrm>
-              <a:off x="817517" y="2239395"/>
-              <a:ext cx="7799693" cy="0"/>
+              <a:off x="915645" y="2363903"/>
+              <a:ext cx="7682587" cy="0"/>
             </a:xfrm>
             <a:custGeom>
               <a:avLst/>
               <a:pathLst>
-                <a:path w="7799693" h="0">
+                <a:path w="7682587" h="0">
                   <a:moveTo>
                     <a:pt x="0" y="0"/>
                   </a:moveTo>
                   <a:lnTo>
-                    <a:pt x="7799693" y="0"/>
-                  </a:lnTo>
-                  <a:lnTo>
-                    <a:pt x="7799693" y="0"/>
+                    <a:pt x="7682587" y="0"/>
+                  </a:lnTo>
+                  <a:lnTo>
+                    <a:pt x="7682587" y="0"/>
                   </a:lnTo>
                 </a:path>
               </a:pathLst>
             </a:custGeom>
-            <a:ln w="13550" cap="flat">
+            <a:ln w="17246" cap="flat">
               <a:solidFill>
                 <a:srgbClr val="EBEBEB">
                   <a:alpha val="100000"/>
@@ -2873,15 +2873,15 @@
           </p:nvSpPr>
           <p:spPr>
             <a:xfrm>
-              <a:off x="1440530" y="2073503"/>
-              <a:ext cx="0" cy="3649639"/>
+              <a:off x="1529303" y="2209169"/>
+              <a:ext cx="0" cy="3404141"/>
             </a:xfrm>
             <a:custGeom>
               <a:avLst/>
               <a:pathLst>
-                <a:path w="0" h="3649639">
+                <a:path w="0" h="3404141">
                   <a:moveTo>
-                    <a:pt x="0" y="3649639"/>
+                    <a:pt x="0" y="3404141"/>
                   </a:moveTo>
                   <a:lnTo>
                     <a:pt x="0" y="0"/>
@@ -2892,7 +2892,7 @@
                 </a:path>
               </a:pathLst>
             </a:custGeom>
-            <a:ln w="13550" cap="flat">
+            <a:ln w="17246" cap="flat">
               <a:solidFill>
                 <a:srgbClr val="EBEBEB">
                   <a:alpha val="100000"/>
@@ -2916,15 +2916,15 @@
           </p:nvSpPr>
           <p:spPr>
             <a:xfrm>
-              <a:off x="2804959" y="2073503"/>
-              <a:ext cx="0" cy="3649639"/>
+              <a:off x="2873247" y="2209169"/>
+              <a:ext cx="0" cy="3404141"/>
             </a:xfrm>
             <a:custGeom>
               <a:avLst/>
               <a:pathLst>
-                <a:path w="0" h="3649639">
+                <a:path w="0" h="3404141">
                   <a:moveTo>
-                    <a:pt x="0" y="3649639"/>
+                    <a:pt x="0" y="3404141"/>
                   </a:moveTo>
                   <a:lnTo>
                     <a:pt x="0" y="0"/>
@@ -2935,7 +2935,7 @@
                 </a:path>
               </a:pathLst>
             </a:custGeom>
-            <a:ln w="13550" cap="flat">
+            <a:ln w="17246" cap="flat">
               <a:solidFill>
                 <a:srgbClr val="EBEBEB">
                   <a:alpha val="100000"/>
@@ -2959,15 +2959,15 @@
           </p:nvSpPr>
           <p:spPr>
             <a:xfrm>
-              <a:off x="4169389" y="2073503"/>
-              <a:ext cx="0" cy="3649639"/>
+              <a:off x="4217191" y="2209169"/>
+              <a:ext cx="0" cy="3404141"/>
             </a:xfrm>
             <a:custGeom>
               <a:avLst/>
               <a:pathLst>
-                <a:path w="0" h="3649639">
+                <a:path w="0" h="3404141">
                   <a:moveTo>
-                    <a:pt x="0" y="3649639"/>
+                    <a:pt x="0" y="3404141"/>
                   </a:moveTo>
                   <a:lnTo>
                     <a:pt x="0" y="0"/>
@@ -2978,7 +2978,7 @@
                 </a:path>
               </a:pathLst>
             </a:custGeom>
-            <a:ln w="13550" cap="flat">
+            <a:ln w="17246" cap="flat">
               <a:solidFill>
                 <a:srgbClr val="EBEBEB">
                   <a:alpha val="100000"/>
@@ -3002,15 +3002,15 @@
           </p:nvSpPr>
           <p:spPr>
             <a:xfrm>
-              <a:off x="5533819" y="2073503"/>
-              <a:ext cx="0" cy="3649639"/>
+              <a:off x="5561135" y="2209169"/>
+              <a:ext cx="0" cy="3404141"/>
             </a:xfrm>
             <a:custGeom>
               <a:avLst/>
               <a:pathLst>
-                <a:path w="0" h="3649639">
+                <a:path w="0" h="3404141">
                   <a:moveTo>
-                    <a:pt x="0" y="3649639"/>
+                    <a:pt x="0" y="3404141"/>
                   </a:moveTo>
                   <a:lnTo>
                     <a:pt x="0" y="0"/>
@@ -3021,7 +3021,7 @@
                 </a:path>
               </a:pathLst>
             </a:custGeom>
-            <a:ln w="13550" cap="flat">
+            <a:ln w="17246" cap="flat">
               <a:solidFill>
                 <a:srgbClr val="EBEBEB">
                   <a:alpha val="100000"/>
@@ -3045,15 +3045,15 @@
           </p:nvSpPr>
           <p:spPr>
             <a:xfrm>
-              <a:off x="6898249" y="2073503"/>
-              <a:ext cx="0" cy="3649639"/>
+              <a:off x="6905079" y="2209169"/>
+              <a:ext cx="0" cy="3404141"/>
             </a:xfrm>
             <a:custGeom>
               <a:avLst/>
               <a:pathLst>
-                <a:path w="0" h="3649639">
+                <a:path w="0" h="3404141">
                   <a:moveTo>
-                    <a:pt x="0" y="3649639"/>
+                    <a:pt x="0" y="3404141"/>
                   </a:moveTo>
                   <a:lnTo>
                     <a:pt x="0" y="0"/>
@@ -3064,7 +3064,7 @@
                 </a:path>
               </a:pathLst>
             </a:custGeom>
-            <a:ln w="13550" cap="flat">
+            <a:ln w="17246" cap="flat">
               <a:solidFill>
                 <a:srgbClr val="EBEBEB">
                   <a:alpha val="100000"/>
@@ -3088,15 +3088,15 @@
           </p:nvSpPr>
           <p:spPr>
             <a:xfrm>
-              <a:off x="8262679" y="2073503"/>
-              <a:ext cx="0" cy="3649639"/>
+              <a:off x="8249023" y="2209169"/>
+              <a:ext cx="0" cy="3404141"/>
             </a:xfrm>
             <a:custGeom>
               <a:avLst/>
               <a:pathLst>
-                <a:path w="0" h="3649639">
+                <a:path w="0" h="3404141">
                   <a:moveTo>
-                    <a:pt x="0" y="3649639"/>
+                    <a:pt x="0" y="3404141"/>
                   </a:moveTo>
                   <a:lnTo>
                     <a:pt x="0" y="0"/>
@@ -3107,7 +3107,7 @@
                 </a:path>
               </a:pathLst>
             </a:custGeom>
-            <a:ln w="13550" cap="flat">
+            <a:ln w="17246" cap="flat">
               <a:solidFill>
                 <a:srgbClr val="EBEBEB">
                   <a:alpha val="100000"/>
@@ -3131,612 +3131,612 @@
           </p:nvSpPr>
           <p:spPr>
             <a:xfrm>
-              <a:off x="1172049" y="2073503"/>
-              <a:ext cx="7090630" cy="3210927"/>
+              <a:off x="1264853" y="2209169"/>
+              <a:ext cx="6984170" cy="2994940"/>
             </a:xfrm>
             <a:custGeom>
               <a:avLst/>
               <a:pathLst>
-                <a:path w="7090630" h="3210927">
+                <a:path w="6984170" h="2994940">
                   <a:moveTo>
-                    <a:pt x="0" y="2332045"/>
+                    <a:pt x="0" y="2175176"/>
                   </a:moveTo>
                   <a:lnTo>
-                    <a:pt x="71622" y="2340887"/>
-                  </a:lnTo>
-                  <a:lnTo>
-                    <a:pt x="143245" y="2349661"/>
-                  </a:lnTo>
-                  <a:lnTo>
-                    <a:pt x="214867" y="2358368"/>
-                  </a:lnTo>
-                  <a:lnTo>
-                    <a:pt x="286490" y="2367008"/>
-                  </a:lnTo>
-                  <a:lnTo>
-                    <a:pt x="358112" y="2375582"/>
-                  </a:lnTo>
-                  <a:lnTo>
-                    <a:pt x="429735" y="2384090"/>
-                  </a:lnTo>
-                  <a:lnTo>
-                    <a:pt x="501357" y="2392533"/>
-                  </a:lnTo>
-                  <a:lnTo>
-                    <a:pt x="572980" y="2400910"/>
-                  </a:lnTo>
-                  <a:lnTo>
-                    <a:pt x="644602" y="2409224"/>
-                  </a:lnTo>
-                  <a:lnTo>
-                    <a:pt x="716225" y="2417474"/>
-                  </a:lnTo>
-                  <a:lnTo>
-                    <a:pt x="787847" y="2425660"/>
-                  </a:lnTo>
-                  <a:lnTo>
-                    <a:pt x="859470" y="2433784"/>
-                  </a:lnTo>
-                  <a:lnTo>
-                    <a:pt x="931092" y="2441845"/>
-                  </a:lnTo>
-                  <a:lnTo>
-                    <a:pt x="1002715" y="2449844"/>
-                  </a:lnTo>
-                  <a:lnTo>
-                    <a:pt x="1074337" y="2457782"/>
-                  </a:lnTo>
-                  <a:lnTo>
-                    <a:pt x="1145960" y="2465659"/>
-                  </a:lnTo>
-                  <a:lnTo>
-                    <a:pt x="1217582" y="2473475"/>
-                  </a:lnTo>
-                  <a:lnTo>
-                    <a:pt x="1289205" y="2481231"/>
-                  </a:lnTo>
-                  <a:lnTo>
-                    <a:pt x="1360827" y="2488928"/>
-                  </a:lnTo>
-                  <a:lnTo>
-                    <a:pt x="1432450" y="2496566"/>
-                  </a:lnTo>
-                  <a:lnTo>
-                    <a:pt x="1504073" y="2504145"/>
-                  </a:lnTo>
-                  <a:lnTo>
-                    <a:pt x="1575695" y="2511666"/>
-                  </a:lnTo>
-                  <a:lnTo>
-                    <a:pt x="1647318" y="2519129"/>
-                  </a:lnTo>
-                  <a:lnTo>
-                    <a:pt x="1718940" y="2526535"/>
-                  </a:lnTo>
-                  <a:lnTo>
-                    <a:pt x="1790563" y="2533884"/>
-                  </a:lnTo>
-                  <a:lnTo>
-                    <a:pt x="1862185" y="2541177"/>
-                  </a:lnTo>
-                  <a:lnTo>
-                    <a:pt x="1933808" y="2548413"/>
-                  </a:lnTo>
-                  <a:lnTo>
-                    <a:pt x="2005430" y="2555594"/>
-                  </a:lnTo>
-                  <a:lnTo>
-                    <a:pt x="2077053" y="2562720"/>
-                  </a:lnTo>
-                  <a:lnTo>
-                    <a:pt x="2148675" y="2569792"/>
-                  </a:lnTo>
-                  <a:lnTo>
-                    <a:pt x="2220298" y="2576808"/>
-                  </a:lnTo>
-                  <a:lnTo>
-                    <a:pt x="2291920" y="2583771"/>
-                  </a:lnTo>
-                  <a:lnTo>
-                    <a:pt x="2363543" y="2590681"/>
-                  </a:lnTo>
-                  <a:lnTo>
-                    <a:pt x="2435165" y="2597538"/>
-                  </a:lnTo>
-                  <a:lnTo>
-                    <a:pt x="2506788" y="2604342"/>
-                  </a:lnTo>
-                  <a:lnTo>
-                    <a:pt x="2578410" y="2611093"/>
-                  </a:lnTo>
-                  <a:lnTo>
-                    <a:pt x="2650033" y="2617793"/>
-                  </a:lnTo>
-                  <a:lnTo>
-                    <a:pt x="2721655" y="2624441"/>
-                  </a:lnTo>
-                  <a:lnTo>
-                    <a:pt x="2793278" y="2631039"/>
-                  </a:lnTo>
-                  <a:lnTo>
-                    <a:pt x="2864901" y="2637585"/>
-                  </a:lnTo>
-                  <a:lnTo>
-                    <a:pt x="2936523" y="2644082"/>
-                  </a:lnTo>
-                  <a:lnTo>
-                    <a:pt x="3008146" y="2650528"/>
-                  </a:lnTo>
-                  <a:lnTo>
-                    <a:pt x="3079768" y="2645267"/>
-                  </a:lnTo>
-                  <a:lnTo>
-                    <a:pt x="3151391" y="2623085"/>
-                  </a:lnTo>
-                  <a:lnTo>
-                    <a:pt x="3223013" y="2600316"/>
-                  </a:lnTo>
-                  <a:lnTo>
-                    <a:pt x="3294636" y="2576945"/>
-                  </a:lnTo>
-                  <a:lnTo>
-                    <a:pt x="3366258" y="2552955"/>
-                  </a:lnTo>
-                  <a:lnTo>
-                    <a:pt x="3437881" y="2528331"/>
-                  </a:lnTo>
-                  <a:lnTo>
-                    <a:pt x="3509503" y="2503056"/>
-                  </a:lnTo>
-                  <a:lnTo>
-                    <a:pt x="3581126" y="2477111"/>
-                  </a:lnTo>
-                  <a:lnTo>
-                    <a:pt x="3652748" y="2450481"/>
-                  </a:lnTo>
-                  <a:lnTo>
-                    <a:pt x="3724371" y="2423146"/>
-                  </a:lnTo>
-                  <a:lnTo>
-                    <a:pt x="3795993" y="2395087"/>
-                  </a:lnTo>
-                  <a:lnTo>
-                    <a:pt x="3867616" y="2366287"/>
-                  </a:lnTo>
-                  <a:lnTo>
-                    <a:pt x="3939238" y="2336724"/>
-                  </a:lnTo>
-                  <a:lnTo>
-                    <a:pt x="4010861" y="2306380"/>
-                  </a:lnTo>
-                  <a:lnTo>
-                    <a:pt x="4082483" y="2275232"/>
-                  </a:lnTo>
-                  <a:lnTo>
-                    <a:pt x="4154106" y="2243261"/>
-                  </a:lnTo>
-                  <a:lnTo>
-                    <a:pt x="4225729" y="2210444"/>
-                  </a:lnTo>
-                  <a:lnTo>
-                    <a:pt x="4297351" y="2176758"/>
-                  </a:lnTo>
-                  <a:lnTo>
-                    <a:pt x="4368974" y="2142182"/>
-                  </a:lnTo>
-                  <a:lnTo>
-                    <a:pt x="4440596" y="2106691"/>
-                  </a:lnTo>
-                  <a:lnTo>
-                    <a:pt x="4512219" y="2070261"/>
-                  </a:lnTo>
-                  <a:lnTo>
-                    <a:pt x="4583841" y="2032867"/>
-                  </a:lnTo>
-                  <a:lnTo>
-                    <a:pt x="4655464" y="1994484"/>
-                  </a:lnTo>
-                  <a:lnTo>
-                    <a:pt x="4727086" y="1955085"/>
-                  </a:lnTo>
-                  <a:lnTo>
-                    <a:pt x="4798709" y="1914644"/>
-                  </a:lnTo>
-                  <a:lnTo>
-                    <a:pt x="4870331" y="1873133"/>
-                  </a:lnTo>
-                  <a:lnTo>
-                    <a:pt x="4941954" y="1830525"/>
-                  </a:lnTo>
-                  <a:lnTo>
-                    <a:pt x="5013576" y="1786788"/>
-                  </a:lnTo>
-                  <a:lnTo>
-                    <a:pt x="5085199" y="1741895"/>
-                  </a:lnTo>
-                  <a:lnTo>
-                    <a:pt x="5156821" y="1695814"/>
-                  </a:lnTo>
-                  <a:lnTo>
-                    <a:pt x="5228444" y="1648515"/>
-                  </a:lnTo>
-                  <a:lnTo>
-                    <a:pt x="5300066" y="1599963"/>
-                  </a:lnTo>
-                  <a:lnTo>
-                    <a:pt x="5371689" y="1550128"/>
-                  </a:lnTo>
-                  <a:lnTo>
-                    <a:pt x="5443311" y="1498974"/>
-                  </a:lnTo>
-                  <a:lnTo>
-                    <a:pt x="5514934" y="1446466"/>
-                  </a:lnTo>
-                  <a:lnTo>
-                    <a:pt x="5586557" y="1392570"/>
-                  </a:lnTo>
-                  <a:lnTo>
-                    <a:pt x="5658179" y="1337248"/>
-                  </a:lnTo>
-                  <a:lnTo>
-                    <a:pt x="5729802" y="1280462"/>
-                  </a:lnTo>
-                  <a:lnTo>
-                    <a:pt x="5801424" y="1222174"/>
-                  </a:lnTo>
-                  <a:lnTo>
-                    <a:pt x="5873047" y="1162344"/>
-                  </a:lnTo>
-                  <a:lnTo>
-                    <a:pt x="5944669" y="1100931"/>
-                  </a:lnTo>
-                  <a:lnTo>
-                    <a:pt x="6016292" y="1037893"/>
-                  </a:lnTo>
-                  <a:lnTo>
-                    <a:pt x="6087914" y="973188"/>
-                  </a:lnTo>
-                  <a:lnTo>
-                    <a:pt x="6159537" y="906771"/>
-                  </a:lnTo>
-                  <a:lnTo>
-                    <a:pt x="6231159" y="838597"/>
-                  </a:lnTo>
-                  <a:lnTo>
-                    <a:pt x="6302782" y="768619"/>
-                  </a:lnTo>
-                  <a:lnTo>
-                    <a:pt x="6374404" y="696790"/>
-                  </a:lnTo>
-                  <a:lnTo>
-                    <a:pt x="6446027" y="623061"/>
-                  </a:lnTo>
-                  <a:lnTo>
-                    <a:pt x="6517649" y="547381"/>
-                  </a:lnTo>
-                  <a:lnTo>
-                    <a:pt x="6589272" y="469700"/>
-                  </a:lnTo>
-                  <a:lnTo>
-                    <a:pt x="6660894" y="389963"/>
-                  </a:lnTo>
-                  <a:lnTo>
-                    <a:pt x="6732517" y="308117"/>
-                  </a:lnTo>
-                  <a:lnTo>
-                    <a:pt x="6804139" y="224105"/>
-                  </a:lnTo>
-                  <a:lnTo>
-                    <a:pt x="6875762" y="137871"/>
-                  </a:lnTo>
-                  <a:lnTo>
-                    <a:pt x="6947385" y="49356"/>
-                  </a:lnTo>
-                  <a:lnTo>
-                    <a:pt x="6986292" y="0"/>
-                  </a:lnTo>
-                  <a:lnTo>
-                    <a:pt x="7090630" y="0"/>
-                  </a:lnTo>
-                  <a:lnTo>
-                    <a:pt x="7090630" y="2946752"/>
-                  </a:lnTo>
-                  <a:lnTo>
-                    <a:pt x="7019007" y="2942598"/>
-                  </a:lnTo>
-                  <a:lnTo>
-                    <a:pt x="6947385" y="2938411"/>
-                  </a:lnTo>
-                  <a:lnTo>
-                    <a:pt x="6875762" y="2934192"/>
-                  </a:lnTo>
-                  <a:lnTo>
-                    <a:pt x="6804139" y="2929940"/>
-                  </a:lnTo>
-                  <a:lnTo>
-                    <a:pt x="6732517" y="2925655"/>
-                  </a:lnTo>
-                  <a:lnTo>
-                    <a:pt x="6660894" y="2921337"/>
-                  </a:lnTo>
-                  <a:lnTo>
-                    <a:pt x="6589272" y="2916986"/>
-                  </a:lnTo>
-                  <a:lnTo>
-                    <a:pt x="6517649" y="2912601"/>
-                  </a:lnTo>
-                  <a:lnTo>
-                    <a:pt x="6446027" y="2908182"/>
-                  </a:lnTo>
-                  <a:lnTo>
-                    <a:pt x="6374404" y="2903729"/>
-                  </a:lnTo>
-                  <a:lnTo>
-                    <a:pt x="6302782" y="2899241"/>
-                  </a:lnTo>
-                  <a:lnTo>
-                    <a:pt x="6231159" y="2894719"/>
-                  </a:lnTo>
-                  <a:lnTo>
-                    <a:pt x="6159537" y="2890162"/>
-                  </a:lnTo>
-                  <a:lnTo>
-                    <a:pt x="6087914" y="2885569"/>
-                  </a:lnTo>
-                  <a:lnTo>
-                    <a:pt x="6016292" y="2880941"/>
-                  </a:lnTo>
-                  <a:lnTo>
-                    <a:pt x="5944669" y="2876277"/>
-                  </a:lnTo>
-                  <a:lnTo>
-                    <a:pt x="5873047" y="2871577"/>
-                  </a:lnTo>
-                  <a:lnTo>
-                    <a:pt x="5801424" y="2866841"/>
-                  </a:lnTo>
-                  <a:lnTo>
-                    <a:pt x="5729802" y="2862068"/>
-                  </a:lnTo>
-                  <a:lnTo>
-                    <a:pt x="5658179" y="2857258"/>
-                  </a:lnTo>
-                  <a:lnTo>
-                    <a:pt x="5586557" y="2852411"/>
-                  </a:lnTo>
-                  <a:lnTo>
-                    <a:pt x="5514934" y="2847526"/>
-                  </a:lnTo>
-                  <a:lnTo>
-                    <a:pt x="5443311" y="2842604"/>
-                  </a:lnTo>
-                  <a:lnTo>
-                    <a:pt x="5371689" y="2837643"/>
-                  </a:lnTo>
-                  <a:lnTo>
-                    <a:pt x="5300066" y="2832645"/>
-                  </a:lnTo>
-                  <a:lnTo>
-                    <a:pt x="5228444" y="2827607"/>
-                  </a:lnTo>
-                  <a:lnTo>
-                    <a:pt x="5156821" y="2822530"/>
-                  </a:lnTo>
-                  <a:lnTo>
-                    <a:pt x="5085199" y="2817415"/>
-                  </a:lnTo>
-                  <a:lnTo>
-                    <a:pt x="5013576" y="2812259"/>
-                  </a:lnTo>
-                  <a:lnTo>
-                    <a:pt x="4941954" y="2807064"/>
-                  </a:lnTo>
-                  <a:lnTo>
-                    <a:pt x="4870331" y="2801829"/>
-                  </a:lnTo>
-                  <a:lnTo>
-                    <a:pt x="4798709" y="2796553"/>
-                  </a:lnTo>
-                  <a:lnTo>
-                    <a:pt x="4727086" y="2791236"/>
-                  </a:lnTo>
-                  <a:lnTo>
-                    <a:pt x="4655464" y="2785878"/>
-                  </a:lnTo>
-                  <a:lnTo>
-                    <a:pt x="4583841" y="2780479"/>
-                  </a:lnTo>
-                  <a:lnTo>
-                    <a:pt x="4512219" y="2775037"/>
-                  </a:lnTo>
-                  <a:lnTo>
-                    <a:pt x="4440596" y="2769554"/>
-                  </a:lnTo>
-                  <a:lnTo>
-                    <a:pt x="4368974" y="2764029"/>
-                  </a:lnTo>
-                  <a:lnTo>
-                    <a:pt x="4297351" y="2758460"/>
-                  </a:lnTo>
-                  <a:lnTo>
-                    <a:pt x="4225729" y="2752849"/>
-                  </a:lnTo>
-                  <a:lnTo>
-                    <a:pt x="4154106" y="2747194"/>
-                  </a:lnTo>
-                  <a:lnTo>
-                    <a:pt x="4082483" y="2741495"/>
-                  </a:lnTo>
-                  <a:lnTo>
-                    <a:pt x="4010861" y="2735752"/>
-                  </a:lnTo>
-                  <a:lnTo>
-                    <a:pt x="3939238" y="2729965"/>
-                  </a:lnTo>
-                  <a:lnTo>
-                    <a:pt x="3867616" y="2724133"/>
-                  </a:lnTo>
-                  <a:lnTo>
-                    <a:pt x="3795993" y="2718256"/>
-                  </a:lnTo>
-                  <a:lnTo>
-                    <a:pt x="3724371" y="2712334"/>
-                  </a:lnTo>
-                  <a:lnTo>
-                    <a:pt x="3652748" y="2706365"/>
-                  </a:lnTo>
-                  <a:lnTo>
-                    <a:pt x="3581126" y="2700351"/>
-                  </a:lnTo>
-                  <a:lnTo>
-                    <a:pt x="3509503" y="2694290"/>
-                  </a:lnTo>
-                  <a:lnTo>
-                    <a:pt x="3437881" y="2688182"/>
-                  </a:lnTo>
-                  <a:lnTo>
-                    <a:pt x="3366258" y="2682026"/>
-                  </a:lnTo>
-                  <a:lnTo>
-                    <a:pt x="3294636" y="2675823"/>
-                  </a:lnTo>
-                  <a:lnTo>
-                    <a:pt x="3223013" y="2669573"/>
-                  </a:lnTo>
-                  <a:lnTo>
-                    <a:pt x="3151391" y="2663273"/>
-                  </a:lnTo>
-                  <a:lnTo>
-                    <a:pt x="3079768" y="2656925"/>
-                  </a:lnTo>
-                  <a:lnTo>
-                    <a:pt x="3008146" y="2666877"/>
-                  </a:lnTo>
-                  <a:lnTo>
-                    <a:pt x="2936523" y="2687931"/>
-                  </a:lnTo>
-                  <a:lnTo>
-                    <a:pt x="2864901" y="2708441"/>
-                  </a:lnTo>
-                  <a:lnTo>
-                    <a:pt x="2793278" y="2728424"/>
-                  </a:lnTo>
-                  <a:lnTo>
-                    <a:pt x="2721655" y="2747891"/>
-                  </a:lnTo>
-                  <a:lnTo>
-                    <a:pt x="2650033" y="2766856"/>
-                  </a:lnTo>
-                  <a:lnTo>
-                    <a:pt x="2578410" y="2785333"/>
-                  </a:lnTo>
-                  <a:lnTo>
-                    <a:pt x="2506788" y="2803333"/>
-                  </a:lnTo>
-                  <a:lnTo>
-                    <a:pt x="2435165" y="2820869"/>
-                  </a:lnTo>
-                  <a:lnTo>
-                    <a:pt x="2363543" y="2837954"/>
-                  </a:lnTo>
-                  <a:lnTo>
-                    <a:pt x="2291920" y="2854598"/>
-                  </a:lnTo>
-                  <a:lnTo>
-                    <a:pt x="2220298" y="2870813"/>
-                  </a:lnTo>
-                  <a:lnTo>
-                    <a:pt x="2148675" y="2886611"/>
-                  </a:lnTo>
-                  <a:lnTo>
-                    <a:pt x="2077053" y="2902001"/>
-                  </a:lnTo>
-                  <a:lnTo>
-                    <a:pt x="2005430" y="2916994"/>
-                  </a:lnTo>
-                  <a:lnTo>
-                    <a:pt x="1933808" y="2931601"/>
-                  </a:lnTo>
-                  <a:lnTo>
-                    <a:pt x="1862185" y="2945832"/>
-                  </a:lnTo>
-                  <a:lnTo>
-                    <a:pt x="1790563" y="2959696"/>
-                  </a:lnTo>
-                  <a:lnTo>
-                    <a:pt x="1718940" y="2973202"/>
-                  </a:lnTo>
-                  <a:lnTo>
-                    <a:pt x="1647318" y="2986361"/>
-                  </a:lnTo>
-                  <a:lnTo>
-                    <a:pt x="1575695" y="2999180"/>
-                  </a:lnTo>
-                  <a:lnTo>
-                    <a:pt x="1504073" y="3011669"/>
-                  </a:lnTo>
-                  <a:lnTo>
-                    <a:pt x="1432450" y="3023836"/>
-                  </a:lnTo>
-                  <a:lnTo>
-                    <a:pt x="1360827" y="3035689"/>
-                  </a:lnTo>
-                  <a:lnTo>
-                    <a:pt x="1289205" y="3047237"/>
-                  </a:lnTo>
-                  <a:lnTo>
-                    <a:pt x="1217582" y="3058487"/>
-                  </a:lnTo>
-                  <a:lnTo>
-                    <a:pt x="1145960" y="3069447"/>
-                  </a:lnTo>
-                  <a:lnTo>
-                    <a:pt x="1074337" y="3080125"/>
-                  </a:lnTo>
-                  <a:lnTo>
-                    <a:pt x="1002715" y="3090528"/>
-                  </a:lnTo>
-                  <a:lnTo>
-                    <a:pt x="931092" y="3100662"/>
-                  </a:lnTo>
-                  <a:lnTo>
-                    <a:pt x="859470" y="3110536"/>
-                  </a:lnTo>
-                  <a:lnTo>
-                    <a:pt x="787847" y="3120155"/>
-                  </a:lnTo>
-                  <a:lnTo>
-                    <a:pt x="716225" y="3129526"/>
-                  </a:lnTo>
-                  <a:lnTo>
-                    <a:pt x="644602" y="3138655"/>
-                  </a:lnTo>
-                  <a:lnTo>
-                    <a:pt x="572980" y="3147549"/>
-                  </a:lnTo>
-                  <a:lnTo>
-                    <a:pt x="501357" y="3156214"/>
-                  </a:lnTo>
-                  <a:lnTo>
-                    <a:pt x="429735" y="3164656"/>
-                  </a:lnTo>
-                  <a:lnTo>
-                    <a:pt x="358112" y="3172880"/>
-                  </a:lnTo>
-                  <a:lnTo>
-                    <a:pt x="286490" y="3180892"/>
-                  </a:lnTo>
-                  <a:lnTo>
-                    <a:pt x="214867" y="3188697"/>
-                  </a:lnTo>
-                  <a:lnTo>
-                    <a:pt x="143245" y="3196302"/>
-                  </a:lnTo>
-                  <a:lnTo>
-                    <a:pt x="71622" y="3203710"/>
-                  </a:lnTo>
-                  <a:lnTo>
-                    <a:pt x="0" y="3210927"/>
+                    <a:pt x="70547" y="2183424"/>
+                  </a:lnTo>
+                  <a:lnTo>
+                    <a:pt x="141094" y="2191608"/>
+                  </a:lnTo>
+                  <a:lnTo>
+                    <a:pt x="211641" y="2199729"/>
+                  </a:lnTo>
+                  <a:lnTo>
+                    <a:pt x="282188" y="2207788"/>
+                  </a:lnTo>
+                  <a:lnTo>
+                    <a:pt x="352735" y="2215785"/>
+                  </a:lnTo>
+                  <a:lnTo>
+                    <a:pt x="423283" y="2223721"/>
+                  </a:lnTo>
+                  <a:lnTo>
+                    <a:pt x="493830" y="2231596"/>
+                  </a:lnTo>
+                  <a:lnTo>
+                    <a:pt x="564377" y="2239410"/>
+                  </a:lnTo>
+                  <a:lnTo>
+                    <a:pt x="634924" y="2247164"/>
+                  </a:lnTo>
+                  <a:lnTo>
+                    <a:pt x="705471" y="2254859"/>
+                  </a:lnTo>
+                  <a:lnTo>
+                    <a:pt x="776018" y="2262495"/>
+                  </a:lnTo>
+                  <a:lnTo>
+                    <a:pt x="846566" y="2270072"/>
+                  </a:lnTo>
+                  <a:lnTo>
+                    <a:pt x="917113" y="2277591"/>
+                  </a:lnTo>
+                  <a:lnTo>
+                    <a:pt x="987660" y="2285052"/>
+                  </a:lnTo>
+                  <a:lnTo>
+                    <a:pt x="1058207" y="2292456"/>
+                  </a:lnTo>
+                  <a:lnTo>
+                    <a:pt x="1128754" y="2299803"/>
+                  </a:lnTo>
+                  <a:lnTo>
+                    <a:pt x="1199301" y="2307093"/>
+                  </a:lnTo>
+                  <a:lnTo>
+                    <a:pt x="1269849" y="2314328"/>
+                  </a:lnTo>
+                  <a:lnTo>
+                    <a:pt x="1340396" y="2321507"/>
+                  </a:lnTo>
+                  <a:lnTo>
+                    <a:pt x="1410943" y="2328631"/>
+                  </a:lnTo>
+                  <a:lnTo>
+                    <a:pt x="1481490" y="2335700"/>
+                  </a:lnTo>
+                  <a:lnTo>
+                    <a:pt x="1552037" y="2342715"/>
+                  </a:lnTo>
+                  <a:lnTo>
+                    <a:pt x="1622584" y="2349677"/>
+                  </a:lnTo>
+                  <a:lnTo>
+                    <a:pt x="1693132" y="2356584"/>
+                  </a:lnTo>
+                  <a:lnTo>
+                    <a:pt x="1763679" y="2363439"/>
+                  </a:lnTo>
+                  <a:lnTo>
+                    <a:pt x="1834226" y="2370241"/>
+                  </a:lnTo>
+                  <a:lnTo>
+                    <a:pt x="1904773" y="2376991"/>
+                  </a:lnTo>
+                  <a:lnTo>
+                    <a:pt x="1975320" y="2383689"/>
+                  </a:lnTo>
+                  <a:lnTo>
+                    <a:pt x="2045868" y="2390335"/>
+                  </a:lnTo>
+                  <a:lnTo>
+                    <a:pt x="2116415" y="2396931"/>
+                  </a:lnTo>
+                  <a:lnTo>
+                    <a:pt x="2186962" y="2403476"/>
+                  </a:lnTo>
+                  <a:lnTo>
+                    <a:pt x="2257509" y="2409971"/>
+                  </a:lnTo>
+                  <a:lnTo>
+                    <a:pt x="2328056" y="2416415"/>
+                  </a:lnTo>
+                  <a:lnTo>
+                    <a:pt x="2398603" y="2422811"/>
+                  </a:lnTo>
+                  <a:lnTo>
+                    <a:pt x="2469151" y="2429157"/>
+                  </a:lnTo>
+                  <a:lnTo>
+                    <a:pt x="2539698" y="2435455"/>
+                  </a:lnTo>
+                  <a:lnTo>
+                    <a:pt x="2610245" y="2441704"/>
+                  </a:lnTo>
+                  <a:lnTo>
+                    <a:pt x="2680792" y="2447905"/>
+                  </a:lnTo>
+                  <a:lnTo>
+                    <a:pt x="2751339" y="2454058"/>
+                  </a:lnTo>
+                  <a:lnTo>
+                    <a:pt x="2821886" y="2460165"/>
+                  </a:lnTo>
+                  <a:lnTo>
+                    <a:pt x="2892434" y="2466224"/>
+                  </a:lnTo>
+                  <a:lnTo>
+                    <a:pt x="2962981" y="2472237"/>
+                  </a:lnTo>
+                  <a:lnTo>
+                    <a:pt x="3033528" y="2467330"/>
+                  </a:lnTo>
+                  <a:lnTo>
+                    <a:pt x="3104075" y="2446640"/>
+                  </a:lnTo>
+                  <a:lnTo>
+                    <a:pt x="3174622" y="2425402"/>
+                  </a:lnTo>
+                  <a:lnTo>
+                    <a:pt x="3245169" y="2403603"/>
+                  </a:lnTo>
+                  <a:lnTo>
+                    <a:pt x="3315717" y="2381227"/>
+                  </a:lnTo>
+                  <a:lnTo>
+                    <a:pt x="3386264" y="2358260"/>
+                  </a:lnTo>
+                  <a:lnTo>
+                    <a:pt x="3456811" y="2334684"/>
+                  </a:lnTo>
+                  <a:lnTo>
+                    <a:pt x="3527358" y="2310485"/>
+                  </a:lnTo>
+                  <a:lnTo>
+                    <a:pt x="3597905" y="2285646"/>
+                  </a:lnTo>
+                  <a:lnTo>
+                    <a:pt x="3668452" y="2260149"/>
+                  </a:lnTo>
+                  <a:lnTo>
+                    <a:pt x="3739000" y="2233978"/>
+                  </a:lnTo>
+                  <a:lnTo>
+                    <a:pt x="3809547" y="2207115"/>
+                  </a:lnTo>
+                  <a:lnTo>
+                    <a:pt x="3880094" y="2179541"/>
+                  </a:lnTo>
+                  <a:lnTo>
+                    <a:pt x="3950641" y="2151238"/>
+                  </a:lnTo>
+                  <a:lnTo>
+                    <a:pt x="4021188" y="2122186"/>
+                  </a:lnTo>
+                  <a:lnTo>
+                    <a:pt x="4091736" y="2092365"/>
+                  </a:lnTo>
+                  <a:lnTo>
+                    <a:pt x="4162283" y="2061755"/>
+                  </a:lnTo>
+                  <a:lnTo>
+                    <a:pt x="4232830" y="2030336"/>
+                  </a:lnTo>
+                  <a:lnTo>
+                    <a:pt x="4303377" y="1998085"/>
+                  </a:lnTo>
+                  <a:lnTo>
+                    <a:pt x="4373924" y="1964981"/>
+                  </a:lnTo>
+                  <a:lnTo>
+                    <a:pt x="4444471" y="1931002"/>
+                  </a:lnTo>
+                  <a:lnTo>
+                    <a:pt x="4515019" y="1896123"/>
+                  </a:lnTo>
+                  <a:lnTo>
+                    <a:pt x="4585566" y="1860322"/>
+                  </a:lnTo>
+                  <a:lnTo>
+                    <a:pt x="4656113" y="1823574"/>
+                  </a:lnTo>
+                  <a:lnTo>
+                    <a:pt x="4726660" y="1785853"/>
+                  </a:lnTo>
+                  <a:lnTo>
+                    <a:pt x="4797207" y="1747135"/>
+                  </a:lnTo>
+                  <a:lnTo>
+                    <a:pt x="4867754" y="1707392"/>
+                  </a:lnTo>
+                  <a:lnTo>
+                    <a:pt x="4938302" y="1666598"/>
+                  </a:lnTo>
+                  <a:lnTo>
+                    <a:pt x="5008849" y="1624724"/>
+                  </a:lnTo>
+                  <a:lnTo>
+                    <a:pt x="5079396" y="1581743"/>
+                  </a:lnTo>
+                  <a:lnTo>
+                    <a:pt x="5149943" y="1537625"/>
+                  </a:lnTo>
+                  <a:lnTo>
+                    <a:pt x="5220490" y="1492340"/>
+                  </a:lnTo>
+                  <a:lnTo>
+                    <a:pt x="5291037" y="1445856"/>
+                  </a:lnTo>
+                  <a:lnTo>
+                    <a:pt x="5361585" y="1398143"/>
+                  </a:lnTo>
+                  <a:lnTo>
+                    <a:pt x="5432132" y="1349168"/>
+                  </a:lnTo>
+                  <a:lnTo>
+                    <a:pt x="5502679" y="1298897"/>
+                  </a:lnTo>
+                  <a:lnTo>
+                    <a:pt x="5573226" y="1247296"/>
+                  </a:lnTo>
+                  <a:lnTo>
+                    <a:pt x="5643773" y="1194330"/>
+                  </a:lnTo>
+                  <a:lnTo>
+                    <a:pt x="5714320" y="1139963"/>
+                  </a:lnTo>
+                  <a:lnTo>
+                    <a:pt x="5784868" y="1084157"/>
+                  </a:lnTo>
+                  <a:lnTo>
+                    <a:pt x="5855415" y="1026875"/>
+                  </a:lnTo>
+                  <a:lnTo>
+                    <a:pt x="5925962" y="968078"/>
+                  </a:lnTo>
+                  <a:lnTo>
+                    <a:pt x="5996509" y="907725"/>
+                  </a:lnTo>
+                  <a:lnTo>
+                    <a:pt x="6067056" y="845776"/>
+                  </a:lnTo>
+                  <a:lnTo>
+                    <a:pt x="6137604" y="782188"/>
+                  </a:lnTo>
+                  <a:lnTo>
+                    <a:pt x="6208151" y="716917"/>
+                  </a:lnTo>
+                  <a:lnTo>
+                    <a:pt x="6278698" y="649920"/>
+                  </a:lnTo>
+                  <a:lnTo>
+                    <a:pt x="6349245" y="581150"/>
+                  </a:lnTo>
+                  <a:lnTo>
+                    <a:pt x="6419792" y="510561"/>
+                  </a:lnTo>
+                  <a:lnTo>
+                    <a:pt x="6490339" y="438105"/>
+                  </a:lnTo>
+                  <a:lnTo>
+                    <a:pt x="6560887" y="363731"/>
+                  </a:lnTo>
+                  <a:lnTo>
+                    <a:pt x="6631434" y="287391"/>
+                  </a:lnTo>
+                  <a:lnTo>
+                    <a:pt x="6701981" y="209030"/>
+                  </a:lnTo>
+                  <a:lnTo>
+                    <a:pt x="6772528" y="128597"/>
+                  </a:lnTo>
+                  <a:lnTo>
+                    <a:pt x="6843075" y="46036"/>
+                  </a:lnTo>
+                  <a:lnTo>
+                    <a:pt x="6881398" y="0"/>
+                  </a:lnTo>
+                  <a:lnTo>
+                    <a:pt x="6984170" y="0"/>
+                  </a:lnTo>
+                  <a:lnTo>
+                    <a:pt x="6984170" y="2748535"/>
+                  </a:lnTo>
+                  <a:lnTo>
+                    <a:pt x="6913622" y="2744660"/>
+                  </a:lnTo>
+                  <a:lnTo>
+                    <a:pt x="6843075" y="2740755"/>
+                  </a:lnTo>
+                  <a:lnTo>
+                    <a:pt x="6772528" y="2736819"/>
+                  </a:lnTo>
+                  <a:lnTo>
+                    <a:pt x="6701981" y="2732853"/>
+                  </a:lnTo>
+                  <a:lnTo>
+                    <a:pt x="6631434" y="2728857"/>
+                  </a:lnTo>
+                  <a:lnTo>
+                    <a:pt x="6560887" y="2724829"/>
+                  </a:lnTo>
+                  <a:lnTo>
+                    <a:pt x="6490339" y="2720771"/>
+                  </a:lnTo>
+                  <a:lnTo>
+                    <a:pt x="6419792" y="2716681"/>
+                  </a:lnTo>
+                  <a:lnTo>
+                    <a:pt x="6349245" y="2712559"/>
+                  </a:lnTo>
+                  <a:lnTo>
+                    <a:pt x="6278698" y="2708405"/>
+                  </a:lnTo>
+                  <a:lnTo>
+                    <a:pt x="6208151" y="2704220"/>
+                  </a:lnTo>
+                  <a:lnTo>
+                    <a:pt x="6137604" y="2700002"/>
+                  </a:lnTo>
+                  <a:lnTo>
+                    <a:pt x="6067056" y="2695751"/>
+                  </a:lnTo>
+                  <a:lnTo>
+                    <a:pt x="5996509" y="2691467"/>
+                  </a:lnTo>
+                  <a:lnTo>
+                    <a:pt x="5925962" y="2687151"/>
+                  </a:lnTo>
+                  <a:lnTo>
+                    <a:pt x="5855415" y="2682800"/>
+                  </a:lnTo>
+                  <a:lnTo>
+                    <a:pt x="5784868" y="2678417"/>
+                  </a:lnTo>
+                  <a:lnTo>
+                    <a:pt x="5714320" y="2673999"/>
+                  </a:lnTo>
+                  <a:lnTo>
+                    <a:pt x="5643773" y="2669547"/>
+                  </a:lnTo>
+                  <a:lnTo>
+                    <a:pt x="5573226" y="2665061"/>
+                  </a:lnTo>
+                  <a:lnTo>
+                    <a:pt x="5502679" y="2660540"/>
+                  </a:lnTo>
+                  <a:lnTo>
+                    <a:pt x="5432132" y="2655984"/>
+                  </a:lnTo>
+                  <a:lnTo>
+                    <a:pt x="5361585" y="2651392"/>
+                  </a:lnTo>
+                  <a:lnTo>
+                    <a:pt x="5291037" y="2646766"/>
+                  </a:lnTo>
+                  <a:lnTo>
+                    <a:pt x="5220490" y="2642103"/>
+                  </a:lnTo>
+                  <a:lnTo>
+                    <a:pt x="5149943" y="2637404"/>
+                  </a:lnTo>
+                  <a:lnTo>
+                    <a:pt x="5079396" y="2632669"/>
+                  </a:lnTo>
+                  <a:lnTo>
+                    <a:pt x="5008849" y="2627898"/>
+                  </a:lnTo>
+                  <a:lnTo>
+                    <a:pt x="4938302" y="2623089"/>
+                  </a:lnTo>
+                  <a:lnTo>
+                    <a:pt x="4867754" y="2618243"/>
+                  </a:lnTo>
+                  <a:lnTo>
+                    <a:pt x="4797207" y="2613360"/>
+                  </a:lnTo>
+                  <a:lnTo>
+                    <a:pt x="4726660" y="2608439"/>
+                  </a:lnTo>
+                  <a:lnTo>
+                    <a:pt x="4656113" y="2603480"/>
+                  </a:lnTo>
+                  <a:lnTo>
+                    <a:pt x="4585566" y="2598482"/>
+                  </a:lnTo>
+                  <a:lnTo>
+                    <a:pt x="4515019" y="2593446"/>
+                  </a:lnTo>
+                  <a:lnTo>
+                    <a:pt x="4444471" y="2588371"/>
+                  </a:lnTo>
+                  <a:lnTo>
+                    <a:pt x="4373924" y="2583256"/>
+                  </a:lnTo>
+                  <a:lnTo>
+                    <a:pt x="4303377" y="2578102"/>
+                  </a:lnTo>
+                  <a:lnTo>
+                    <a:pt x="4232830" y="2572909"/>
+                  </a:lnTo>
+                  <a:lnTo>
+                    <a:pt x="4162283" y="2567675"/>
+                  </a:lnTo>
+                  <a:lnTo>
+                    <a:pt x="4091736" y="2562400"/>
+                  </a:lnTo>
+                  <a:lnTo>
+                    <a:pt x="4021188" y="2557085"/>
+                  </a:lnTo>
+                  <a:lnTo>
+                    <a:pt x="3950641" y="2551728"/>
+                  </a:lnTo>
+                  <a:lnTo>
+                    <a:pt x="3880094" y="2546330"/>
+                  </a:lnTo>
+                  <a:lnTo>
+                    <a:pt x="3809547" y="2540891"/>
+                  </a:lnTo>
+                  <a:lnTo>
+                    <a:pt x="3739000" y="2535409"/>
+                  </a:lnTo>
+                  <a:lnTo>
+                    <a:pt x="3668452" y="2529885"/>
+                  </a:lnTo>
+                  <a:lnTo>
+                    <a:pt x="3597905" y="2524318"/>
+                  </a:lnTo>
+                  <a:lnTo>
+                    <a:pt x="3527358" y="2518708"/>
+                  </a:lnTo>
+                  <a:lnTo>
+                    <a:pt x="3456811" y="2513055"/>
+                  </a:lnTo>
+                  <a:lnTo>
+                    <a:pt x="3386264" y="2507357"/>
+                  </a:lnTo>
+                  <a:lnTo>
+                    <a:pt x="3315717" y="2501616"/>
+                  </a:lnTo>
+                  <a:lnTo>
+                    <a:pt x="3245169" y="2495831"/>
+                  </a:lnTo>
+                  <a:lnTo>
+                    <a:pt x="3174622" y="2490000"/>
+                  </a:lnTo>
+                  <a:lnTo>
+                    <a:pt x="3104075" y="2484125"/>
+                  </a:lnTo>
+                  <a:lnTo>
+                    <a:pt x="3033528" y="2478204"/>
+                  </a:lnTo>
+                  <a:lnTo>
+                    <a:pt x="2962981" y="2487486"/>
+                  </a:lnTo>
+                  <a:lnTo>
+                    <a:pt x="2892434" y="2507123"/>
+                  </a:lnTo>
+                  <a:lnTo>
+                    <a:pt x="2821886" y="2526254"/>
+                  </a:lnTo>
+                  <a:lnTo>
+                    <a:pt x="2751339" y="2544892"/>
+                  </a:lnTo>
+                  <a:lnTo>
+                    <a:pt x="2680792" y="2563050"/>
+                  </a:lnTo>
+                  <a:lnTo>
+                    <a:pt x="2610245" y="2580740"/>
+                  </a:lnTo>
+                  <a:lnTo>
+                    <a:pt x="2539698" y="2597974"/>
+                  </a:lnTo>
+                  <a:lnTo>
+                    <a:pt x="2469151" y="2614763"/>
+                  </a:lnTo>
+                  <a:lnTo>
+                    <a:pt x="2398603" y="2631120"/>
+                  </a:lnTo>
+                  <a:lnTo>
+                    <a:pt x="2328056" y="2647055"/>
+                  </a:lnTo>
+                  <a:lnTo>
+                    <a:pt x="2257509" y="2662580"/>
+                  </a:lnTo>
+                  <a:lnTo>
+                    <a:pt x="2186962" y="2677704"/>
+                  </a:lnTo>
+                  <a:lnTo>
+                    <a:pt x="2116415" y="2692439"/>
+                  </a:lnTo>
+                  <a:lnTo>
+                    <a:pt x="2045868" y="2706794"/>
+                  </a:lnTo>
+                  <a:lnTo>
+                    <a:pt x="1975320" y="2720779"/>
+                  </a:lnTo>
+                  <a:lnTo>
+                    <a:pt x="1904773" y="2734403"/>
+                  </a:lnTo>
+                  <a:lnTo>
+                    <a:pt x="1834226" y="2747677"/>
+                  </a:lnTo>
+                  <a:lnTo>
+                    <a:pt x="1763679" y="2760608"/>
+                  </a:lnTo>
+                  <a:lnTo>
+                    <a:pt x="1693132" y="2773206"/>
+                  </a:lnTo>
+                  <a:lnTo>
+                    <a:pt x="1622584" y="2785479"/>
+                  </a:lnTo>
+                  <a:lnTo>
+                    <a:pt x="1552037" y="2797436"/>
+                  </a:lnTo>
+                  <a:lnTo>
+                    <a:pt x="1481490" y="2809085"/>
+                  </a:lnTo>
+                  <a:lnTo>
+                    <a:pt x="1410943" y="2820433"/>
+                  </a:lnTo>
+                  <a:lnTo>
+                    <a:pt x="1340396" y="2831489"/>
+                  </a:lnTo>
+                  <a:lnTo>
+                    <a:pt x="1269849" y="2842260"/>
+                  </a:lnTo>
+                  <a:lnTo>
+                    <a:pt x="1199301" y="2852754"/>
+                  </a:lnTo>
+                  <a:lnTo>
+                    <a:pt x="1128754" y="2862977"/>
+                  </a:lnTo>
+                  <a:lnTo>
+                    <a:pt x="1058207" y="2872937"/>
+                  </a:lnTo>
+                  <a:lnTo>
+                    <a:pt x="987660" y="2882639"/>
+                  </a:lnTo>
+                  <a:lnTo>
+                    <a:pt x="917113" y="2892092"/>
+                  </a:lnTo>
+                  <a:lnTo>
+                    <a:pt x="846566" y="2901301"/>
+                  </a:lnTo>
+                  <a:lnTo>
+                    <a:pt x="776018" y="2910273"/>
+                  </a:lnTo>
+                  <a:lnTo>
+                    <a:pt x="705471" y="2919014"/>
+                  </a:lnTo>
+                  <a:lnTo>
+                    <a:pt x="634924" y="2927529"/>
+                  </a:lnTo>
+                  <a:lnTo>
+                    <a:pt x="564377" y="2935825"/>
+                  </a:lnTo>
+                  <a:lnTo>
+                    <a:pt x="493830" y="2943907"/>
+                  </a:lnTo>
+                  <a:lnTo>
+                    <a:pt x="423283" y="2951781"/>
+                  </a:lnTo>
+                  <a:lnTo>
+                    <a:pt x="352735" y="2959452"/>
+                  </a:lnTo>
+                  <a:lnTo>
+                    <a:pt x="282188" y="2966925"/>
+                  </a:lnTo>
+                  <a:lnTo>
+                    <a:pt x="211641" y="2974205"/>
+                  </a:lnTo>
+                  <a:lnTo>
+                    <a:pt x="141094" y="2981298"/>
+                  </a:lnTo>
+                  <a:lnTo>
+                    <a:pt x="70547" y="2988208"/>
+                  </a:lnTo>
+                  <a:lnTo>
+                    <a:pt x="0" y="2994940"/>
                   </a:lnTo>
                   <a:close/>
                 </a:path>
@@ -3762,309 +3762,309 @@
           </p:nvSpPr>
           <p:spPr>
             <a:xfrm>
-              <a:off x="1172049" y="2073503"/>
-              <a:ext cx="6986292" cy="2650528"/>
+              <a:off x="1264853" y="2209169"/>
+              <a:ext cx="6881398" cy="2472237"/>
             </a:xfrm>
             <a:custGeom>
               <a:avLst/>
               <a:pathLst>
-                <a:path w="6986292" h="2650528">
+                <a:path w="6881398" h="2472237">
                   <a:moveTo>
-                    <a:pt x="0" y="2332045"/>
+                    <a:pt x="0" y="2175176"/>
                   </a:moveTo>
                   <a:lnTo>
-                    <a:pt x="71622" y="2340887"/>
-                  </a:lnTo>
-                  <a:lnTo>
-                    <a:pt x="143245" y="2349661"/>
-                  </a:lnTo>
-                  <a:lnTo>
-                    <a:pt x="214867" y="2358368"/>
-                  </a:lnTo>
-                  <a:lnTo>
-                    <a:pt x="286490" y="2367008"/>
-                  </a:lnTo>
-                  <a:lnTo>
-                    <a:pt x="358112" y="2375582"/>
-                  </a:lnTo>
-                  <a:lnTo>
-                    <a:pt x="429735" y="2384090"/>
-                  </a:lnTo>
-                  <a:lnTo>
-                    <a:pt x="501357" y="2392533"/>
-                  </a:lnTo>
-                  <a:lnTo>
-                    <a:pt x="572980" y="2400910"/>
-                  </a:lnTo>
-                  <a:lnTo>
-                    <a:pt x="644602" y="2409224"/>
-                  </a:lnTo>
-                  <a:lnTo>
-                    <a:pt x="716225" y="2417474"/>
-                  </a:lnTo>
-                  <a:lnTo>
-                    <a:pt x="787847" y="2425660"/>
-                  </a:lnTo>
-                  <a:lnTo>
-                    <a:pt x="859470" y="2433784"/>
-                  </a:lnTo>
-                  <a:lnTo>
-                    <a:pt x="931092" y="2441845"/>
-                  </a:lnTo>
-                  <a:lnTo>
-                    <a:pt x="1002715" y="2449844"/>
-                  </a:lnTo>
-                  <a:lnTo>
-                    <a:pt x="1074337" y="2457782"/>
-                  </a:lnTo>
-                  <a:lnTo>
-                    <a:pt x="1145960" y="2465659"/>
-                  </a:lnTo>
-                  <a:lnTo>
-                    <a:pt x="1217582" y="2473475"/>
-                  </a:lnTo>
-                  <a:lnTo>
-                    <a:pt x="1289205" y="2481231"/>
-                  </a:lnTo>
-                  <a:lnTo>
-                    <a:pt x="1360827" y="2488928"/>
-                  </a:lnTo>
-                  <a:lnTo>
-                    <a:pt x="1432450" y="2496566"/>
-                  </a:lnTo>
-                  <a:lnTo>
-                    <a:pt x="1504073" y="2504145"/>
-                  </a:lnTo>
-                  <a:lnTo>
-                    <a:pt x="1575695" y="2511666"/>
-                  </a:lnTo>
-                  <a:lnTo>
-                    <a:pt x="1647318" y="2519129"/>
-                  </a:lnTo>
-                  <a:lnTo>
-                    <a:pt x="1718940" y="2526535"/>
-                  </a:lnTo>
-                  <a:lnTo>
-                    <a:pt x="1790563" y="2533884"/>
-                  </a:lnTo>
-                  <a:lnTo>
-                    <a:pt x="1862185" y="2541177"/>
-                  </a:lnTo>
-                  <a:lnTo>
-                    <a:pt x="1933808" y="2548413"/>
-                  </a:lnTo>
-                  <a:lnTo>
-                    <a:pt x="2005430" y="2555594"/>
-                  </a:lnTo>
-                  <a:lnTo>
-                    <a:pt x="2077053" y="2562720"/>
-                  </a:lnTo>
-                  <a:lnTo>
-                    <a:pt x="2148675" y="2569792"/>
-                  </a:lnTo>
-                  <a:lnTo>
-                    <a:pt x="2220298" y="2576808"/>
-                  </a:lnTo>
-                  <a:lnTo>
-                    <a:pt x="2291920" y="2583771"/>
-                  </a:lnTo>
-                  <a:lnTo>
-                    <a:pt x="2363543" y="2590681"/>
-                  </a:lnTo>
-                  <a:lnTo>
-                    <a:pt x="2435165" y="2597538"/>
-                  </a:lnTo>
-                  <a:lnTo>
-                    <a:pt x="2506788" y="2604342"/>
-                  </a:lnTo>
-                  <a:lnTo>
-                    <a:pt x="2578410" y="2611093"/>
-                  </a:lnTo>
-                  <a:lnTo>
-                    <a:pt x="2650033" y="2617793"/>
-                  </a:lnTo>
-                  <a:lnTo>
-                    <a:pt x="2721655" y="2624441"/>
-                  </a:lnTo>
-                  <a:lnTo>
-                    <a:pt x="2793278" y="2631039"/>
-                  </a:lnTo>
-                  <a:lnTo>
-                    <a:pt x="2864901" y="2637585"/>
-                  </a:lnTo>
-                  <a:lnTo>
-                    <a:pt x="2936523" y="2644082"/>
-                  </a:lnTo>
-                  <a:lnTo>
-                    <a:pt x="3008146" y="2650528"/>
-                  </a:lnTo>
-                  <a:lnTo>
-                    <a:pt x="3079768" y="2645267"/>
-                  </a:lnTo>
-                  <a:lnTo>
-                    <a:pt x="3151391" y="2623085"/>
-                  </a:lnTo>
-                  <a:lnTo>
-                    <a:pt x="3223013" y="2600316"/>
-                  </a:lnTo>
-                  <a:lnTo>
-                    <a:pt x="3294636" y="2576945"/>
-                  </a:lnTo>
-                  <a:lnTo>
-                    <a:pt x="3366258" y="2552955"/>
-                  </a:lnTo>
-                  <a:lnTo>
-                    <a:pt x="3437881" y="2528331"/>
-                  </a:lnTo>
-                  <a:lnTo>
-                    <a:pt x="3509503" y="2503056"/>
-                  </a:lnTo>
-                  <a:lnTo>
-                    <a:pt x="3581126" y="2477111"/>
-                  </a:lnTo>
-                  <a:lnTo>
-                    <a:pt x="3652748" y="2450481"/>
-                  </a:lnTo>
-                  <a:lnTo>
-                    <a:pt x="3724371" y="2423146"/>
-                  </a:lnTo>
-                  <a:lnTo>
-                    <a:pt x="3795993" y="2395087"/>
-                  </a:lnTo>
-                  <a:lnTo>
-                    <a:pt x="3867616" y="2366287"/>
-                  </a:lnTo>
-                  <a:lnTo>
-                    <a:pt x="3939238" y="2336724"/>
-                  </a:lnTo>
-                  <a:lnTo>
-                    <a:pt x="4010861" y="2306380"/>
-                  </a:lnTo>
-                  <a:lnTo>
-                    <a:pt x="4082483" y="2275232"/>
-                  </a:lnTo>
-                  <a:lnTo>
-                    <a:pt x="4154106" y="2243261"/>
-                  </a:lnTo>
-                  <a:lnTo>
-                    <a:pt x="4225729" y="2210444"/>
-                  </a:lnTo>
-                  <a:lnTo>
-                    <a:pt x="4297351" y="2176758"/>
-                  </a:lnTo>
-                  <a:lnTo>
-                    <a:pt x="4368974" y="2142182"/>
-                  </a:lnTo>
-                  <a:lnTo>
-                    <a:pt x="4440596" y="2106691"/>
-                  </a:lnTo>
-                  <a:lnTo>
-                    <a:pt x="4512219" y="2070261"/>
-                  </a:lnTo>
-                  <a:lnTo>
-                    <a:pt x="4583841" y="2032867"/>
-                  </a:lnTo>
-                  <a:lnTo>
-                    <a:pt x="4655464" y="1994484"/>
-                  </a:lnTo>
-                  <a:lnTo>
-                    <a:pt x="4727086" y="1955085"/>
-                  </a:lnTo>
-                  <a:lnTo>
-                    <a:pt x="4798709" y="1914644"/>
-                  </a:lnTo>
-                  <a:lnTo>
-                    <a:pt x="4870331" y="1873133"/>
-                  </a:lnTo>
-                  <a:lnTo>
-                    <a:pt x="4941954" y="1830525"/>
-                  </a:lnTo>
-                  <a:lnTo>
-                    <a:pt x="5013576" y="1786788"/>
-                  </a:lnTo>
-                  <a:lnTo>
-                    <a:pt x="5085199" y="1741895"/>
-                  </a:lnTo>
-                  <a:lnTo>
-                    <a:pt x="5156821" y="1695814"/>
-                  </a:lnTo>
-                  <a:lnTo>
-                    <a:pt x="5228444" y="1648515"/>
-                  </a:lnTo>
-                  <a:lnTo>
-                    <a:pt x="5300066" y="1599963"/>
-                  </a:lnTo>
-                  <a:lnTo>
-                    <a:pt x="5371689" y="1550128"/>
-                  </a:lnTo>
-                  <a:lnTo>
-                    <a:pt x="5443311" y="1498974"/>
-                  </a:lnTo>
-                  <a:lnTo>
-                    <a:pt x="5514934" y="1446466"/>
-                  </a:lnTo>
-                  <a:lnTo>
-                    <a:pt x="5586557" y="1392570"/>
-                  </a:lnTo>
-                  <a:lnTo>
-                    <a:pt x="5658179" y="1337248"/>
-                  </a:lnTo>
-                  <a:lnTo>
-                    <a:pt x="5729802" y="1280462"/>
-                  </a:lnTo>
-                  <a:lnTo>
-                    <a:pt x="5801424" y="1222174"/>
-                  </a:lnTo>
-                  <a:lnTo>
-                    <a:pt x="5873047" y="1162344"/>
-                  </a:lnTo>
-                  <a:lnTo>
-                    <a:pt x="5944669" y="1100931"/>
-                  </a:lnTo>
-                  <a:lnTo>
-                    <a:pt x="6016292" y="1037893"/>
-                  </a:lnTo>
-                  <a:lnTo>
-                    <a:pt x="6087914" y="973188"/>
-                  </a:lnTo>
-                  <a:lnTo>
-                    <a:pt x="6159537" y="906771"/>
-                  </a:lnTo>
-                  <a:lnTo>
-                    <a:pt x="6231159" y="838597"/>
-                  </a:lnTo>
-                  <a:lnTo>
-                    <a:pt x="6302782" y="768619"/>
-                  </a:lnTo>
-                  <a:lnTo>
-                    <a:pt x="6374404" y="696790"/>
-                  </a:lnTo>
-                  <a:lnTo>
-                    <a:pt x="6446027" y="623061"/>
-                  </a:lnTo>
-                  <a:lnTo>
-                    <a:pt x="6517649" y="547381"/>
-                  </a:lnTo>
-                  <a:lnTo>
-                    <a:pt x="6589272" y="469700"/>
-                  </a:lnTo>
-                  <a:lnTo>
-                    <a:pt x="6660894" y="389963"/>
-                  </a:lnTo>
-                  <a:lnTo>
-                    <a:pt x="6732517" y="308117"/>
-                  </a:lnTo>
-                  <a:lnTo>
-                    <a:pt x="6804139" y="224105"/>
-                  </a:lnTo>
-                  <a:lnTo>
-                    <a:pt x="6875762" y="137871"/>
-                  </a:lnTo>
-                  <a:lnTo>
-                    <a:pt x="6947385" y="49356"/>
-                  </a:lnTo>
-                  <a:lnTo>
-                    <a:pt x="6986292" y="0"/>
+                    <a:pt x="70547" y="2183424"/>
+                  </a:lnTo>
+                  <a:lnTo>
+                    <a:pt x="141094" y="2191608"/>
+                  </a:lnTo>
+                  <a:lnTo>
+                    <a:pt x="211641" y="2199729"/>
+                  </a:lnTo>
+                  <a:lnTo>
+                    <a:pt x="282188" y="2207788"/>
+                  </a:lnTo>
+                  <a:lnTo>
+                    <a:pt x="352735" y="2215785"/>
+                  </a:lnTo>
+                  <a:lnTo>
+                    <a:pt x="423283" y="2223721"/>
+                  </a:lnTo>
+                  <a:lnTo>
+                    <a:pt x="493830" y="2231596"/>
+                  </a:lnTo>
+                  <a:lnTo>
+                    <a:pt x="564377" y="2239410"/>
+                  </a:lnTo>
+                  <a:lnTo>
+                    <a:pt x="634924" y="2247164"/>
+                  </a:lnTo>
+                  <a:lnTo>
+                    <a:pt x="705471" y="2254859"/>
+                  </a:lnTo>
+                  <a:lnTo>
+                    <a:pt x="776018" y="2262495"/>
+                  </a:lnTo>
+                  <a:lnTo>
+                    <a:pt x="846566" y="2270072"/>
+                  </a:lnTo>
+                  <a:lnTo>
+                    <a:pt x="917113" y="2277591"/>
+                  </a:lnTo>
+                  <a:lnTo>
+                    <a:pt x="987660" y="2285052"/>
+                  </a:lnTo>
+                  <a:lnTo>
+                    <a:pt x="1058207" y="2292456"/>
+                  </a:lnTo>
+                  <a:lnTo>
+                    <a:pt x="1128754" y="2299803"/>
+                  </a:lnTo>
+                  <a:lnTo>
+                    <a:pt x="1199301" y="2307093"/>
+                  </a:lnTo>
+                  <a:lnTo>
+                    <a:pt x="1269849" y="2314328"/>
+                  </a:lnTo>
+                  <a:lnTo>
+                    <a:pt x="1340396" y="2321507"/>
+                  </a:lnTo>
+                  <a:lnTo>
+                    <a:pt x="1410943" y="2328631"/>
+                  </a:lnTo>
+                  <a:lnTo>
+                    <a:pt x="1481490" y="2335700"/>
+                  </a:lnTo>
+                  <a:lnTo>
+                    <a:pt x="1552037" y="2342715"/>
+                  </a:lnTo>
+                  <a:lnTo>
+                    <a:pt x="1622584" y="2349677"/>
+                  </a:lnTo>
+                  <a:lnTo>
+                    <a:pt x="1693132" y="2356584"/>
+                  </a:lnTo>
+                  <a:lnTo>
+                    <a:pt x="1763679" y="2363439"/>
+                  </a:lnTo>
+                  <a:lnTo>
+                    <a:pt x="1834226" y="2370241"/>
+                  </a:lnTo>
+                  <a:lnTo>
+                    <a:pt x="1904773" y="2376991"/>
+                  </a:lnTo>
+                  <a:lnTo>
+                    <a:pt x="1975320" y="2383689"/>
+                  </a:lnTo>
+                  <a:lnTo>
+                    <a:pt x="2045868" y="2390335"/>
+                  </a:lnTo>
+                  <a:lnTo>
+                    <a:pt x="2116415" y="2396931"/>
+                  </a:lnTo>
+                  <a:lnTo>
+                    <a:pt x="2186962" y="2403476"/>
+                  </a:lnTo>
+                  <a:lnTo>
+                    <a:pt x="2257509" y="2409971"/>
+                  </a:lnTo>
+                  <a:lnTo>
+                    <a:pt x="2328056" y="2416415"/>
+                  </a:lnTo>
+                  <a:lnTo>
+                    <a:pt x="2398603" y="2422811"/>
+                  </a:lnTo>
+                  <a:lnTo>
+                    <a:pt x="2469151" y="2429157"/>
+                  </a:lnTo>
+                  <a:lnTo>
+                    <a:pt x="2539698" y="2435455"/>
+                  </a:lnTo>
+                  <a:lnTo>
+                    <a:pt x="2610245" y="2441704"/>
+                  </a:lnTo>
+                  <a:lnTo>
+                    <a:pt x="2680792" y="2447905"/>
+                  </a:lnTo>
+                  <a:lnTo>
+                    <a:pt x="2751339" y="2454058"/>
+                  </a:lnTo>
+                  <a:lnTo>
+                    <a:pt x="2821886" y="2460165"/>
+                  </a:lnTo>
+                  <a:lnTo>
+                    <a:pt x="2892434" y="2466224"/>
+                  </a:lnTo>
+                  <a:lnTo>
+                    <a:pt x="2962981" y="2472237"/>
+                  </a:lnTo>
+                  <a:lnTo>
+                    <a:pt x="3033528" y="2467330"/>
+                  </a:lnTo>
+                  <a:lnTo>
+                    <a:pt x="3104075" y="2446640"/>
+                  </a:lnTo>
+                  <a:lnTo>
+                    <a:pt x="3174622" y="2425402"/>
+                  </a:lnTo>
+                  <a:lnTo>
+                    <a:pt x="3245169" y="2403603"/>
+                  </a:lnTo>
+                  <a:lnTo>
+                    <a:pt x="3315717" y="2381227"/>
+                  </a:lnTo>
+                  <a:lnTo>
+                    <a:pt x="3386264" y="2358260"/>
+                  </a:lnTo>
+                  <a:lnTo>
+                    <a:pt x="3456811" y="2334684"/>
+                  </a:lnTo>
+                  <a:lnTo>
+                    <a:pt x="3527358" y="2310485"/>
+                  </a:lnTo>
+                  <a:lnTo>
+                    <a:pt x="3597905" y="2285646"/>
+                  </a:lnTo>
+                  <a:lnTo>
+                    <a:pt x="3668452" y="2260149"/>
+                  </a:lnTo>
+                  <a:lnTo>
+                    <a:pt x="3739000" y="2233978"/>
+                  </a:lnTo>
+                  <a:lnTo>
+                    <a:pt x="3809547" y="2207115"/>
+                  </a:lnTo>
+                  <a:lnTo>
+                    <a:pt x="3880094" y="2179541"/>
+                  </a:lnTo>
+                  <a:lnTo>
+                    <a:pt x="3950641" y="2151238"/>
+                  </a:lnTo>
+                  <a:lnTo>
+                    <a:pt x="4021188" y="2122186"/>
+                  </a:lnTo>
+                  <a:lnTo>
+                    <a:pt x="4091736" y="2092365"/>
+                  </a:lnTo>
+                  <a:lnTo>
+                    <a:pt x="4162283" y="2061755"/>
+                  </a:lnTo>
+                  <a:lnTo>
+                    <a:pt x="4232830" y="2030336"/>
+                  </a:lnTo>
+                  <a:lnTo>
+                    <a:pt x="4303377" y="1998085"/>
+                  </a:lnTo>
+                  <a:lnTo>
+                    <a:pt x="4373924" y="1964981"/>
+                  </a:lnTo>
+                  <a:lnTo>
+                    <a:pt x="4444471" y="1931002"/>
+                  </a:lnTo>
+                  <a:lnTo>
+                    <a:pt x="4515019" y="1896123"/>
+                  </a:lnTo>
+                  <a:lnTo>
+                    <a:pt x="4585566" y="1860322"/>
+                  </a:lnTo>
+                  <a:lnTo>
+                    <a:pt x="4656113" y="1823574"/>
+                  </a:lnTo>
+                  <a:lnTo>
+                    <a:pt x="4726660" y="1785853"/>
+                  </a:lnTo>
+                  <a:lnTo>
+                    <a:pt x="4797207" y="1747135"/>
+                  </a:lnTo>
+                  <a:lnTo>
+                    <a:pt x="4867754" y="1707392"/>
+                  </a:lnTo>
+                  <a:lnTo>
+                    <a:pt x="4938302" y="1666598"/>
+                  </a:lnTo>
+                  <a:lnTo>
+                    <a:pt x="5008849" y="1624724"/>
+                  </a:lnTo>
+                  <a:lnTo>
+                    <a:pt x="5079396" y="1581743"/>
+                  </a:lnTo>
+                  <a:lnTo>
+                    <a:pt x="5149943" y="1537625"/>
+                  </a:lnTo>
+                  <a:lnTo>
+                    <a:pt x="5220490" y="1492340"/>
+                  </a:lnTo>
+                  <a:lnTo>
+                    <a:pt x="5291037" y="1445856"/>
+                  </a:lnTo>
+                  <a:lnTo>
+                    <a:pt x="5361585" y="1398143"/>
+                  </a:lnTo>
+                  <a:lnTo>
+                    <a:pt x="5432132" y="1349168"/>
+                  </a:lnTo>
+                  <a:lnTo>
+                    <a:pt x="5502679" y="1298897"/>
+                  </a:lnTo>
+                  <a:lnTo>
+                    <a:pt x="5573226" y="1247296"/>
+                  </a:lnTo>
+                  <a:lnTo>
+                    <a:pt x="5643773" y="1194330"/>
+                  </a:lnTo>
+                  <a:lnTo>
+                    <a:pt x="5714320" y="1139963"/>
+                  </a:lnTo>
+                  <a:lnTo>
+                    <a:pt x="5784868" y="1084157"/>
+                  </a:lnTo>
+                  <a:lnTo>
+                    <a:pt x="5855415" y="1026875"/>
+                  </a:lnTo>
+                  <a:lnTo>
+                    <a:pt x="5925962" y="968078"/>
+                  </a:lnTo>
+                  <a:lnTo>
+                    <a:pt x="5996509" y="907725"/>
+                  </a:lnTo>
+                  <a:lnTo>
+                    <a:pt x="6067056" y="845776"/>
+                  </a:lnTo>
+                  <a:lnTo>
+                    <a:pt x="6137604" y="782188"/>
+                  </a:lnTo>
+                  <a:lnTo>
+                    <a:pt x="6208151" y="716917"/>
+                  </a:lnTo>
+                  <a:lnTo>
+                    <a:pt x="6278698" y="649920"/>
+                  </a:lnTo>
+                  <a:lnTo>
+                    <a:pt x="6349245" y="581150"/>
+                  </a:lnTo>
+                  <a:lnTo>
+                    <a:pt x="6419792" y="510561"/>
+                  </a:lnTo>
+                  <a:lnTo>
+                    <a:pt x="6490339" y="438105"/>
+                  </a:lnTo>
+                  <a:lnTo>
+                    <a:pt x="6560887" y="363731"/>
+                  </a:lnTo>
+                  <a:lnTo>
+                    <a:pt x="6631434" y="287391"/>
+                  </a:lnTo>
+                  <a:lnTo>
+                    <a:pt x="6701981" y="209030"/>
+                  </a:lnTo>
+                  <a:lnTo>
+                    <a:pt x="6772528" y="128597"/>
+                  </a:lnTo>
+                  <a:lnTo>
+                    <a:pt x="6843075" y="46036"/>
+                  </a:lnTo>
+                  <a:lnTo>
+                    <a:pt x="6881398" y="0"/>
                   </a:lnTo>
                 </a:path>
               </a:pathLst>
@@ -4084,312 +4084,312 @@
           </p:nvSpPr>
           <p:spPr>
             <a:xfrm>
-              <a:off x="1172049" y="4730429"/>
-              <a:ext cx="7090630" cy="554001"/>
+              <a:off x="1264853" y="4687373"/>
+              <a:ext cx="6984170" cy="516736"/>
             </a:xfrm>
             <a:custGeom>
               <a:avLst/>
               <a:pathLst>
-                <a:path w="7090630" h="554001">
+                <a:path w="6984170" h="516736">
                   <a:moveTo>
-                    <a:pt x="7090630" y="289826"/>
+                    <a:pt x="6984170" y="270331"/>
                   </a:moveTo>
                   <a:lnTo>
-                    <a:pt x="7019007" y="285672"/>
-                  </a:lnTo>
-                  <a:lnTo>
-                    <a:pt x="6947385" y="281485"/>
-                  </a:lnTo>
-                  <a:lnTo>
-                    <a:pt x="6875762" y="277266"/>
-                  </a:lnTo>
-                  <a:lnTo>
-                    <a:pt x="6804139" y="273014"/>
-                  </a:lnTo>
-                  <a:lnTo>
-                    <a:pt x="6732517" y="268729"/>
-                  </a:lnTo>
-                  <a:lnTo>
-                    <a:pt x="6660894" y="264411"/>
-                  </a:lnTo>
-                  <a:lnTo>
-                    <a:pt x="6589272" y="260060"/>
-                  </a:lnTo>
-                  <a:lnTo>
-                    <a:pt x="6517649" y="255675"/>
-                  </a:lnTo>
-                  <a:lnTo>
-                    <a:pt x="6446027" y="251256"/>
-                  </a:lnTo>
-                  <a:lnTo>
-                    <a:pt x="6374404" y="246803"/>
-                  </a:lnTo>
-                  <a:lnTo>
-                    <a:pt x="6302782" y="242315"/>
-                  </a:lnTo>
-                  <a:lnTo>
-                    <a:pt x="6231159" y="237793"/>
-                  </a:lnTo>
-                  <a:lnTo>
-                    <a:pt x="6159537" y="233236"/>
-                  </a:lnTo>
-                  <a:lnTo>
-                    <a:pt x="6087914" y="228643"/>
-                  </a:lnTo>
-                  <a:lnTo>
-                    <a:pt x="6016292" y="224015"/>
-                  </a:lnTo>
-                  <a:lnTo>
-                    <a:pt x="5944669" y="219351"/>
-                  </a:lnTo>
-                  <a:lnTo>
-                    <a:pt x="5873047" y="214651"/>
-                  </a:lnTo>
-                  <a:lnTo>
-                    <a:pt x="5801424" y="209915"/>
-                  </a:lnTo>
-                  <a:lnTo>
-                    <a:pt x="5729802" y="205142"/>
-                  </a:lnTo>
-                  <a:lnTo>
-                    <a:pt x="5658179" y="200332"/>
-                  </a:lnTo>
-                  <a:lnTo>
-                    <a:pt x="5586557" y="195485"/>
-                  </a:lnTo>
-                  <a:lnTo>
-                    <a:pt x="5514934" y="190600"/>
-                  </a:lnTo>
-                  <a:lnTo>
-                    <a:pt x="5443311" y="185678"/>
-                  </a:lnTo>
-                  <a:lnTo>
-                    <a:pt x="5371689" y="180717"/>
-                  </a:lnTo>
-                  <a:lnTo>
-                    <a:pt x="5300066" y="175719"/>
-                  </a:lnTo>
-                  <a:lnTo>
-                    <a:pt x="5228444" y="170681"/>
-                  </a:lnTo>
-                  <a:lnTo>
-                    <a:pt x="5156821" y="165604"/>
-                  </a:lnTo>
-                  <a:lnTo>
-                    <a:pt x="5085199" y="160489"/>
-                  </a:lnTo>
-                  <a:lnTo>
-                    <a:pt x="5013576" y="155333"/>
-                  </a:lnTo>
-                  <a:lnTo>
-                    <a:pt x="4941954" y="150138"/>
-                  </a:lnTo>
-                  <a:lnTo>
-                    <a:pt x="4870331" y="144903"/>
-                  </a:lnTo>
-                  <a:lnTo>
-                    <a:pt x="4798709" y="139627"/>
-                  </a:lnTo>
-                  <a:lnTo>
-                    <a:pt x="4727086" y="134310"/>
-                  </a:lnTo>
-                  <a:lnTo>
-                    <a:pt x="4655464" y="128952"/>
-                  </a:lnTo>
-                  <a:lnTo>
-                    <a:pt x="4583841" y="123553"/>
-                  </a:lnTo>
-                  <a:lnTo>
-                    <a:pt x="4512219" y="118111"/>
-                  </a:lnTo>
-                  <a:lnTo>
-                    <a:pt x="4440596" y="112628"/>
-                  </a:lnTo>
-                  <a:lnTo>
-                    <a:pt x="4368974" y="107103"/>
-                  </a:lnTo>
-                  <a:lnTo>
-                    <a:pt x="4297351" y="101534"/>
-                  </a:lnTo>
-                  <a:lnTo>
-                    <a:pt x="4225729" y="95923"/>
-                  </a:lnTo>
-                  <a:lnTo>
-                    <a:pt x="4154106" y="90268"/>
-                  </a:lnTo>
-                  <a:lnTo>
-                    <a:pt x="4082483" y="84569"/>
-                  </a:lnTo>
-                  <a:lnTo>
-                    <a:pt x="4010861" y="78826"/>
-                  </a:lnTo>
-                  <a:lnTo>
-                    <a:pt x="3939238" y="73039"/>
-                  </a:lnTo>
-                  <a:lnTo>
-                    <a:pt x="3867616" y="67207"/>
-                  </a:lnTo>
-                  <a:lnTo>
-                    <a:pt x="3795993" y="61330"/>
-                  </a:lnTo>
-                  <a:lnTo>
-                    <a:pt x="3724371" y="55408"/>
-                  </a:lnTo>
-                  <a:lnTo>
-                    <a:pt x="3652748" y="49439"/>
-                  </a:lnTo>
-                  <a:lnTo>
-                    <a:pt x="3581126" y="43425"/>
-                  </a:lnTo>
-                  <a:lnTo>
-                    <a:pt x="3509503" y="37364"/>
-                  </a:lnTo>
-                  <a:lnTo>
-                    <a:pt x="3437881" y="31256"/>
-                  </a:lnTo>
-                  <a:lnTo>
-                    <a:pt x="3366258" y="25100"/>
-                  </a:lnTo>
-                  <a:lnTo>
-                    <a:pt x="3294636" y="18898"/>
-                  </a:lnTo>
-                  <a:lnTo>
-                    <a:pt x="3223013" y="12647"/>
-                  </a:lnTo>
-                  <a:lnTo>
-                    <a:pt x="3151391" y="6347"/>
-                  </a:lnTo>
-                  <a:lnTo>
-                    <a:pt x="3079768" y="0"/>
-                  </a:lnTo>
-                  <a:lnTo>
-                    <a:pt x="3008146" y="9951"/>
-                  </a:lnTo>
-                  <a:lnTo>
-                    <a:pt x="2936523" y="31005"/>
-                  </a:lnTo>
-                  <a:lnTo>
-                    <a:pt x="2864901" y="51515"/>
-                  </a:lnTo>
-                  <a:lnTo>
-                    <a:pt x="2793278" y="71498"/>
-                  </a:lnTo>
-                  <a:lnTo>
-                    <a:pt x="2721655" y="90965"/>
-                  </a:lnTo>
-                  <a:lnTo>
-                    <a:pt x="2650033" y="109930"/>
-                  </a:lnTo>
-                  <a:lnTo>
-                    <a:pt x="2578410" y="128407"/>
-                  </a:lnTo>
-                  <a:lnTo>
-                    <a:pt x="2506788" y="146407"/>
-                  </a:lnTo>
-                  <a:lnTo>
-                    <a:pt x="2435165" y="163944"/>
-                  </a:lnTo>
-                  <a:lnTo>
-                    <a:pt x="2363543" y="181028"/>
-                  </a:lnTo>
-                  <a:lnTo>
-                    <a:pt x="2291920" y="197672"/>
-                  </a:lnTo>
-                  <a:lnTo>
-                    <a:pt x="2220298" y="213887"/>
-                  </a:lnTo>
-                  <a:lnTo>
-                    <a:pt x="2148675" y="229685"/>
-                  </a:lnTo>
-                  <a:lnTo>
-                    <a:pt x="2077053" y="245075"/>
-                  </a:lnTo>
-                  <a:lnTo>
-                    <a:pt x="2005430" y="260068"/>
-                  </a:lnTo>
-                  <a:lnTo>
-                    <a:pt x="1933808" y="274675"/>
-                  </a:lnTo>
-                  <a:lnTo>
-                    <a:pt x="1862185" y="288906"/>
-                  </a:lnTo>
-                  <a:lnTo>
-                    <a:pt x="1790563" y="302770"/>
-                  </a:lnTo>
-                  <a:lnTo>
-                    <a:pt x="1718940" y="316276"/>
-                  </a:lnTo>
-                  <a:lnTo>
-                    <a:pt x="1647318" y="329435"/>
-                  </a:lnTo>
-                  <a:lnTo>
-                    <a:pt x="1575695" y="342254"/>
-                  </a:lnTo>
-                  <a:lnTo>
-                    <a:pt x="1504073" y="354743"/>
-                  </a:lnTo>
-                  <a:lnTo>
-                    <a:pt x="1432450" y="366910"/>
-                  </a:lnTo>
-                  <a:lnTo>
-                    <a:pt x="1360827" y="378763"/>
-                  </a:lnTo>
-                  <a:lnTo>
-                    <a:pt x="1289205" y="390311"/>
-                  </a:lnTo>
-                  <a:lnTo>
-                    <a:pt x="1217582" y="401561"/>
-                  </a:lnTo>
-                  <a:lnTo>
-                    <a:pt x="1145960" y="412522"/>
-                  </a:lnTo>
-                  <a:lnTo>
-                    <a:pt x="1074337" y="423199"/>
-                  </a:lnTo>
-                  <a:lnTo>
-                    <a:pt x="1002715" y="433602"/>
-                  </a:lnTo>
-                  <a:lnTo>
-                    <a:pt x="931092" y="443736"/>
-                  </a:lnTo>
-                  <a:lnTo>
-                    <a:pt x="859470" y="453610"/>
-                  </a:lnTo>
-                  <a:lnTo>
-                    <a:pt x="787847" y="463229"/>
-                  </a:lnTo>
-                  <a:lnTo>
-                    <a:pt x="716225" y="472600"/>
-                  </a:lnTo>
-                  <a:lnTo>
-                    <a:pt x="644602" y="481729"/>
-                  </a:lnTo>
-                  <a:lnTo>
-                    <a:pt x="572980" y="490623"/>
-                  </a:lnTo>
-                  <a:lnTo>
-                    <a:pt x="501357" y="499288"/>
-                  </a:lnTo>
-                  <a:lnTo>
-                    <a:pt x="429735" y="507730"/>
-                  </a:lnTo>
-                  <a:lnTo>
-                    <a:pt x="358112" y="515954"/>
-                  </a:lnTo>
-                  <a:lnTo>
-                    <a:pt x="286490" y="523966"/>
-                  </a:lnTo>
-                  <a:lnTo>
-                    <a:pt x="214867" y="531771"/>
-                  </a:lnTo>
-                  <a:lnTo>
-                    <a:pt x="143245" y="539376"/>
-                  </a:lnTo>
-                  <a:lnTo>
-                    <a:pt x="71622" y="546784"/>
-                  </a:lnTo>
-                  <a:lnTo>
-                    <a:pt x="0" y="554001"/>
+                    <a:pt x="6913622" y="266456"/>
+                  </a:lnTo>
+                  <a:lnTo>
+                    <a:pt x="6843075" y="262550"/>
+                  </a:lnTo>
+                  <a:lnTo>
+                    <a:pt x="6772528" y="258615"/>
+                  </a:lnTo>
+                  <a:lnTo>
+                    <a:pt x="6701981" y="254649"/>
+                  </a:lnTo>
+                  <a:lnTo>
+                    <a:pt x="6631434" y="250652"/>
+                  </a:lnTo>
+                  <a:lnTo>
+                    <a:pt x="6560887" y="246625"/>
+                  </a:lnTo>
+                  <a:lnTo>
+                    <a:pt x="6490339" y="242566"/>
+                  </a:lnTo>
+                  <a:lnTo>
+                    <a:pt x="6419792" y="238476"/>
+                  </a:lnTo>
+                  <a:lnTo>
+                    <a:pt x="6349245" y="234355"/>
+                  </a:lnTo>
+                  <a:lnTo>
+                    <a:pt x="6278698" y="230201"/>
+                  </a:lnTo>
+                  <a:lnTo>
+                    <a:pt x="6208151" y="226015"/>
+                  </a:lnTo>
+                  <a:lnTo>
+                    <a:pt x="6137604" y="221797"/>
+                  </a:lnTo>
+                  <a:lnTo>
+                    <a:pt x="6067056" y="217547"/>
+                  </a:lnTo>
+                  <a:lnTo>
+                    <a:pt x="5996509" y="213263"/>
+                  </a:lnTo>
+                  <a:lnTo>
+                    <a:pt x="5925962" y="208946"/>
+                  </a:lnTo>
+                  <a:lnTo>
+                    <a:pt x="5855415" y="204596"/>
+                  </a:lnTo>
+                  <a:lnTo>
+                    <a:pt x="5784868" y="200212"/>
+                  </a:lnTo>
+                  <a:lnTo>
+                    <a:pt x="5714320" y="195795"/>
+                  </a:lnTo>
+                  <a:lnTo>
+                    <a:pt x="5643773" y="191343"/>
+                  </a:lnTo>
+                  <a:lnTo>
+                    <a:pt x="5573226" y="186856"/>
+                  </a:lnTo>
+                  <a:lnTo>
+                    <a:pt x="5502679" y="182335"/>
+                  </a:lnTo>
+                  <a:lnTo>
+                    <a:pt x="5432132" y="177779"/>
+                  </a:lnTo>
+                  <a:lnTo>
+                    <a:pt x="5361585" y="173188"/>
+                  </a:lnTo>
+                  <a:lnTo>
+                    <a:pt x="5291037" y="168561"/>
+                  </a:lnTo>
+                  <a:lnTo>
+                    <a:pt x="5220490" y="163899"/>
+                  </a:lnTo>
+                  <a:lnTo>
+                    <a:pt x="5149943" y="159200"/>
+                  </a:lnTo>
+                  <a:lnTo>
+                    <a:pt x="5079396" y="154465"/>
+                  </a:lnTo>
+                  <a:lnTo>
+                    <a:pt x="5008849" y="149693"/>
+                  </a:lnTo>
+                  <a:lnTo>
+                    <a:pt x="4938302" y="144885"/>
+                  </a:lnTo>
+                  <a:lnTo>
+                    <a:pt x="4867754" y="140039"/>
+                  </a:lnTo>
+                  <a:lnTo>
+                    <a:pt x="4797207" y="135156"/>
+                  </a:lnTo>
+                  <a:lnTo>
+                    <a:pt x="4726660" y="130234"/>
+                  </a:lnTo>
+                  <a:lnTo>
+                    <a:pt x="4656113" y="125275"/>
+                  </a:lnTo>
+                  <a:lnTo>
+                    <a:pt x="4585566" y="120278"/>
+                  </a:lnTo>
+                  <a:lnTo>
+                    <a:pt x="4515019" y="115242"/>
+                  </a:lnTo>
+                  <a:lnTo>
+                    <a:pt x="4444471" y="110167"/>
+                  </a:lnTo>
+                  <a:lnTo>
+                    <a:pt x="4373924" y="105052"/>
+                  </a:lnTo>
+                  <a:lnTo>
+                    <a:pt x="4303377" y="99898"/>
+                  </a:lnTo>
+                  <a:lnTo>
+                    <a:pt x="4232830" y="94704"/>
+                  </a:lnTo>
+                  <a:lnTo>
+                    <a:pt x="4162283" y="89470"/>
+                  </a:lnTo>
+                  <a:lnTo>
+                    <a:pt x="4091736" y="84196"/>
+                  </a:lnTo>
+                  <a:lnTo>
+                    <a:pt x="4021188" y="78880"/>
+                  </a:lnTo>
+                  <a:lnTo>
+                    <a:pt x="3950641" y="73524"/>
+                  </a:lnTo>
+                  <a:lnTo>
+                    <a:pt x="3880094" y="68126"/>
+                  </a:lnTo>
+                  <a:lnTo>
+                    <a:pt x="3809547" y="62686"/>
+                  </a:lnTo>
+                  <a:lnTo>
+                    <a:pt x="3739000" y="57205"/>
+                  </a:lnTo>
+                  <a:lnTo>
+                    <a:pt x="3668452" y="51680"/>
+                  </a:lnTo>
+                  <a:lnTo>
+                    <a:pt x="3597905" y="46114"/>
+                  </a:lnTo>
+                  <a:lnTo>
+                    <a:pt x="3527358" y="40504"/>
+                  </a:lnTo>
+                  <a:lnTo>
+                    <a:pt x="3456811" y="34850"/>
+                  </a:lnTo>
+                  <a:lnTo>
+                    <a:pt x="3386264" y="29153"/>
+                  </a:lnTo>
+                  <a:lnTo>
+                    <a:pt x="3315717" y="23412"/>
+                  </a:lnTo>
+                  <a:lnTo>
+                    <a:pt x="3245169" y="17626"/>
+                  </a:lnTo>
+                  <a:lnTo>
+                    <a:pt x="3174622" y="11796"/>
+                  </a:lnTo>
+                  <a:lnTo>
+                    <a:pt x="3104075" y="5920"/>
+                  </a:lnTo>
+                  <a:lnTo>
+                    <a:pt x="3033528" y="0"/>
+                  </a:lnTo>
+                  <a:lnTo>
+                    <a:pt x="2962981" y="9282"/>
+                  </a:lnTo>
+                  <a:lnTo>
+                    <a:pt x="2892434" y="28919"/>
+                  </a:lnTo>
+                  <a:lnTo>
+                    <a:pt x="2821886" y="48050"/>
+                  </a:lnTo>
+                  <a:lnTo>
+                    <a:pt x="2751339" y="66688"/>
+                  </a:lnTo>
+                  <a:lnTo>
+                    <a:pt x="2680792" y="84846"/>
+                  </a:lnTo>
+                  <a:lnTo>
+                    <a:pt x="2610245" y="102535"/>
+                  </a:lnTo>
+                  <a:lnTo>
+                    <a:pt x="2539698" y="119769"/>
+                  </a:lnTo>
+                  <a:lnTo>
+                    <a:pt x="2469151" y="136559"/>
+                  </a:lnTo>
+                  <a:lnTo>
+                    <a:pt x="2398603" y="152916"/>
+                  </a:lnTo>
+                  <a:lnTo>
+                    <a:pt x="2328056" y="168851"/>
+                  </a:lnTo>
+                  <a:lnTo>
+                    <a:pt x="2257509" y="184375"/>
+                  </a:lnTo>
+                  <a:lnTo>
+                    <a:pt x="2186962" y="199500"/>
+                  </a:lnTo>
+                  <a:lnTo>
+                    <a:pt x="2116415" y="214235"/>
+                  </a:lnTo>
+                  <a:lnTo>
+                    <a:pt x="2045868" y="228589"/>
+                  </a:lnTo>
+                  <a:lnTo>
+                    <a:pt x="1975320" y="242574"/>
+                  </a:lnTo>
+                  <a:lnTo>
+                    <a:pt x="1904773" y="256199"/>
+                  </a:lnTo>
+                  <a:lnTo>
+                    <a:pt x="1834226" y="269472"/>
+                  </a:lnTo>
+                  <a:lnTo>
+                    <a:pt x="1763679" y="282403"/>
+                  </a:lnTo>
+                  <a:lnTo>
+                    <a:pt x="1693132" y="295001"/>
+                  </a:lnTo>
+                  <a:lnTo>
+                    <a:pt x="1622584" y="307275"/>
+                  </a:lnTo>
+                  <a:lnTo>
+                    <a:pt x="1552037" y="319232"/>
+                  </a:lnTo>
+                  <a:lnTo>
+                    <a:pt x="1481490" y="330880"/>
+                  </a:lnTo>
+                  <a:lnTo>
+                    <a:pt x="1410943" y="342229"/>
+                  </a:lnTo>
+                  <a:lnTo>
+                    <a:pt x="1340396" y="353285"/>
+                  </a:lnTo>
+                  <a:lnTo>
+                    <a:pt x="1269849" y="364056"/>
+                  </a:lnTo>
+                  <a:lnTo>
+                    <a:pt x="1199301" y="374550"/>
+                  </a:lnTo>
+                  <a:lnTo>
+                    <a:pt x="1128754" y="384773"/>
+                  </a:lnTo>
+                  <a:lnTo>
+                    <a:pt x="1058207" y="394732"/>
+                  </a:lnTo>
+                  <a:lnTo>
+                    <a:pt x="987660" y="404435"/>
+                  </a:lnTo>
+                  <a:lnTo>
+                    <a:pt x="917113" y="413888"/>
+                  </a:lnTo>
+                  <a:lnTo>
+                    <a:pt x="846566" y="423097"/>
+                  </a:lnTo>
+                  <a:lnTo>
+                    <a:pt x="776018" y="432069"/>
+                  </a:lnTo>
+                  <a:lnTo>
+                    <a:pt x="705471" y="440810"/>
+                  </a:lnTo>
+                  <a:lnTo>
+                    <a:pt x="634924" y="449325"/>
+                  </a:lnTo>
+                  <a:lnTo>
+                    <a:pt x="564377" y="457621"/>
+                  </a:lnTo>
+                  <a:lnTo>
+                    <a:pt x="493830" y="465703"/>
+                  </a:lnTo>
+                  <a:lnTo>
+                    <a:pt x="423283" y="473576"/>
+                  </a:lnTo>
+                  <a:lnTo>
+                    <a:pt x="352735" y="481247"/>
+                  </a:lnTo>
+                  <a:lnTo>
+                    <a:pt x="282188" y="488720"/>
+                  </a:lnTo>
+                  <a:lnTo>
+                    <a:pt x="211641" y="496001"/>
+                  </a:lnTo>
+                  <a:lnTo>
+                    <a:pt x="141094" y="503094"/>
+                  </a:lnTo>
+                  <a:lnTo>
+                    <a:pt x="70547" y="510004"/>
+                  </a:lnTo>
+                  <a:lnTo>
+                    <a:pt x="0" y="516736"/>
                   </a:lnTo>
                 </a:path>
               </a:pathLst>
@@ -4409,312 +4409,312 @@
           </p:nvSpPr>
           <p:spPr>
             <a:xfrm>
-              <a:off x="1172049" y="4163292"/>
-              <a:ext cx="7090630" cy="833416"/>
+              <a:off x="1264853" y="4158386"/>
+              <a:ext cx="6984170" cy="777355"/>
             </a:xfrm>
             <a:custGeom>
               <a:avLst/>
               <a:pathLst>
-                <a:path w="7090630" h="833416">
+                <a:path w="6984170" h="777355">
                   <a:moveTo>
-                    <a:pt x="0" y="833416"/>
+                    <a:pt x="0" y="777355"/>
                   </a:moveTo>
                   <a:lnTo>
-                    <a:pt x="71622" y="828234"/>
-                  </a:lnTo>
-                  <a:lnTo>
-                    <a:pt x="143245" y="823004"/>
-                  </a:lnTo>
-                  <a:lnTo>
-                    <a:pt x="214867" y="817726"/>
-                  </a:lnTo>
-                  <a:lnTo>
-                    <a:pt x="286490" y="812399"/>
-                  </a:lnTo>
-                  <a:lnTo>
-                    <a:pt x="358112" y="807023"/>
-                  </a:lnTo>
-                  <a:lnTo>
-                    <a:pt x="429735" y="801597"/>
-                  </a:lnTo>
-                  <a:lnTo>
-                    <a:pt x="501357" y="796121"/>
-                  </a:lnTo>
-                  <a:lnTo>
-                    <a:pt x="572980" y="790594"/>
-                  </a:lnTo>
-                  <a:lnTo>
-                    <a:pt x="644602" y="785017"/>
-                  </a:lnTo>
-                  <a:lnTo>
-                    <a:pt x="716225" y="779387"/>
-                  </a:lnTo>
-                  <a:lnTo>
-                    <a:pt x="787847" y="773706"/>
-                  </a:lnTo>
-                  <a:lnTo>
-                    <a:pt x="859470" y="767972"/>
-                  </a:lnTo>
-                  <a:lnTo>
-                    <a:pt x="931092" y="762185"/>
-                  </a:lnTo>
-                  <a:lnTo>
-                    <a:pt x="1002715" y="756345"/>
-                  </a:lnTo>
-                  <a:lnTo>
-                    <a:pt x="1074337" y="750450"/>
-                  </a:lnTo>
-                  <a:lnTo>
-                    <a:pt x="1145960" y="744501"/>
-                  </a:lnTo>
-                  <a:lnTo>
-                    <a:pt x="1217582" y="738498"/>
-                  </a:lnTo>
-                  <a:lnTo>
-                    <a:pt x="1289205" y="732438"/>
-                  </a:lnTo>
-                  <a:lnTo>
-                    <a:pt x="1360827" y="726323"/>
-                  </a:lnTo>
-                  <a:lnTo>
-                    <a:pt x="1432450" y="720151"/>
-                  </a:lnTo>
-                  <a:lnTo>
-                    <a:pt x="1504073" y="713922"/>
-                  </a:lnTo>
-                  <a:lnTo>
-                    <a:pt x="1575695" y="707635"/>
-                  </a:lnTo>
-                  <a:lnTo>
-                    <a:pt x="1647318" y="701291"/>
-                  </a:lnTo>
-                  <a:lnTo>
-                    <a:pt x="1718940" y="694887"/>
-                  </a:lnTo>
-                  <a:lnTo>
-                    <a:pt x="1790563" y="688425"/>
-                  </a:lnTo>
-                  <a:lnTo>
-                    <a:pt x="1862185" y="681902"/>
-                  </a:lnTo>
-                  <a:lnTo>
-                    <a:pt x="1933808" y="675320"/>
-                  </a:lnTo>
-                  <a:lnTo>
-                    <a:pt x="2005430" y="668676"/>
-                  </a:lnTo>
-                  <a:lnTo>
-                    <a:pt x="2077053" y="661972"/>
-                  </a:lnTo>
-                  <a:lnTo>
-                    <a:pt x="2148675" y="655205"/>
-                  </a:lnTo>
-                  <a:lnTo>
-                    <a:pt x="2220298" y="648375"/>
-                  </a:lnTo>
-                  <a:lnTo>
-                    <a:pt x="2291920" y="641483"/>
-                  </a:lnTo>
-                  <a:lnTo>
-                    <a:pt x="2363543" y="634527"/>
-                  </a:lnTo>
-                  <a:lnTo>
-                    <a:pt x="2435165" y="627506"/>
-                  </a:lnTo>
-                  <a:lnTo>
-                    <a:pt x="2506788" y="620421"/>
-                  </a:lnTo>
-                  <a:lnTo>
-                    <a:pt x="2578410" y="613270"/>
-                  </a:lnTo>
-                  <a:lnTo>
-                    <a:pt x="2650033" y="606053"/>
-                  </a:lnTo>
-                  <a:lnTo>
-                    <a:pt x="2721655" y="598769"/>
-                  </a:lnTo>
-                  <a:lnTo>
-                    <a:pt x="2793278" y="591418"/>
-                  </a:lnTo>
-                  <a:lnTo>
-                    <a:pt x="2864901" y="583999"/>
-                  </a:lnTo>
-                  <a:lnTo>
-                    <a:pt x="2936523" y="576511"/>
-                  </a:lnTo>
-                  <a:lnTo>
-                    <a:pt x="3008146" y="568954"/>
-                  </a:lnTo>
-                  <a:lnTo>
-                    <a:pt x="3079768" y="561327"/>
-                  </a:lnTo>
-                  <a:lnTo>
-                    <a:pt x="3151391" y="553630"/>
-                  </a:lnTo>
-                  <a:lnTo>
-                    <a:pt x="3223013" y="545862"/>
-                  </a:lnTo>
-                  <a:lnTo>
-                    <a:pt x="3294636" y="538021"/>
-                  </a:lnTo>
-                  <a:lnTo>
-                    <a:pt x="3366258" y="530109"/>
-                  </a:lnTo>
-                  <a:lnTo>
-                    <a:pt x="3437881" y="522123"/>
-                  </a:lnTo>
-                  <a:lnTo>
-                    <a:pt x="3509503" y="514063"/>
-                  </a:lnTo>
-                  <a:lnTo>
-                    <a:pt x="3581126" y="505929"/>
-                  </a:lnTo>
-                  <a:lnTo>
-                    <a:pt x="3652748" y="497720"/>
-                  </a:lnTo>
-                  <a:lnTo>
-                    <a:pt x="3724371" y="489435"/>
-                  </a:lnTo>
-                  <a:lnTo>
-                    <a:pt x="3795993" y="481073"/>
-                  </a:lnTo>
-                  <a:lnTo>
-                    <a:pt x="3867616" y="472634"/>
-                  </a:lnTo>
-                  <a:lnTo>
-                    <a:pt x="3939238" y="464116"/>
-                  </a:lnTo>
-                  <a:lnTo>
-                    <a:pt x="4010861" y="455520"/>
-                  </a:lnTo>
-                  <a:lnTo>
-                    <a:pt x="4082483" y="446845"/>
-                  </a:lnTo>
-                  <a:lnTo>
-                    <a:pt x="4154106" y="438090"/>
-                  </a:lnTo>
-                  <a:lnTo>
-                    <a:pt x="4225729" y="429253"/>
-                  </a:lnTo>
-                  <a:lnTo>
-                    <a:pt x="4297351" y="420335"/>
-                  </a:lnTo>
-                  <a:lnTo>
-                    <a:pt x="4368974" y="411334"/>
-                  </a:lnTo>
-                  <a:lnTo>
-                    <a:pt x="4440596" y="402250"/>
-                  </a:lnTo>
-                  <a:lnTo>
-                    <a:pt x="4512219" y="393083"/>
-                  </a:lnTo>
-                  <a:lnTo>
-                    <a:pt x="4583841" y="383830"/>
-                  </a:lnTo>
-                  <a:lnTo>
-                    <a:pt x="4655464" y="374492"/>
-                  </a:lnTo>
-                  <a:lnTo>
-                    <a:pt x="4727086" y="365067"/>
-                  </a:lnTo>
-                  <a:lnTo>
-                    <a:pt x="4798709" y="355556"/>
-                  </a:lnTo>
-                  <a:lnTo>
-                    <a:pt x="4870331" y="345956"/>
-                  </a:lnTo>
-                  <a:lnTo>
-                    <a:pt x="4941954" y="336268"/>
-                  </a:lnTo>
-                  <a:lnTo>
-                    <a:pt x="5013576" y="326490"/>
-                  </a:lnTo>
-                  <a:lnTo>
-                    <a:pt x="5085199" y="316622"/>
-                  </a:lnTo>
-                  <a:lnTo>
-                    <a:pt x="5156821" y="306663"/>
-                  </a:lnTo>
-                  <a:lnTo>
-                    <a:pt x="5228444" y="296611"/>
-                  </a:lnTo>
-                  <a:lnTo>
-                    <a:pt x="5300066" y="286467"/>
-                  </a:lnTo>
-                  <a:lnTo>
-                    <a:pt x="5371689" y="276229"/>
-                  </a:lnTo>
-                  <a:lnTo>
-                    <a:pt x="5443311" y="265896"/>
-                  </a:lnTo>
-                  <a:lnTo>
-                    <a:pt x="5514934" y="255468"/>
-                  </a:lnTo>
-                  <a:lnTo>
-                    <a:pt x="5586557" y="244943"/>
-                  </a:lnTo>
-                  <a:lnTo>
-                    <a:pt x="5658179" y="234321"/>
-                  </a:lnTo>
-                  <a:lnTo>
-                    <a:pt x="5729802" y="223600"/>
-                  </a:lnTo>
-                  <a:lnTo>
-                    <a:pt x="5801424" y="212781"/>
-                  </a:lnTo>
-                  <a:lnTo>
-                    <a:pt x="5873047" y="201862"/>
-                  </a:lnTo>
-                  <a:lnTo>
-                    <a:pt x="5944669" y="190841"/>
-                  </a:lnTo>
-                  <a:lnTo>
-                    <a:pt x="6016292" y="179719"/>
-                  </a:lnTo>
-                  <a:lnTo>
-                    <a:pt x="6087914" y="168494"/>
-                  </a:lnTo>
-                  <a:lnTo>
-                    <a:pt x="6159537" y="157165"/>
-                  </a:lnTo>
-                  <a:lnTo>
-                    <a:pt x="6231159" y="145732"/>
-                  </a:lnTo>
-                  <a:lnTo>
-                    <a:pt x="6302782" y="134193"/>
-                  </a:lnTo>
-                  <a:lnTo>
-                    <a:pt x="6374404" y="122547"/>
-                  </a:lnTo>
-                  <a:lnTo>
-                    <a:pt x="6446027" y="110793"/>
-                  </a:lnTo>
-                  <a:lnTo>
-                    <a:pt x="6517649" y="98931"/>
-                  </a:lnTo>
-                  <a:lnTo>
-                    <a:pt x="6589272" y="86959"/>
-                  </a:lnTo>
-                  <a:lnTo>
-                    <a:pt x="6660894" y="74877"/>
-                  </a:lnTo>
-                  <a:lnTo>
-                    <a:pt x="6732517" y="62683"/>
-                  </a:lnTo>
-                  <a:lnTo>
-                    <a:pt x="6804139" y="50376"/>
-                  </a:lnTo>
-                  <a:lnTo>
-                    <a:pt x="6875762" y="37955"/>
-                  </a:lnTo>
-                  <a:lnTo>
-                    <a:pt x="6947385" y="25419"/>
-                  </a:lnTo>
-                  <a:lnTo>
-                    <a:pt x="7019007" y="12768"/>
-                  </a:lnTo>
-                  <a:lnTo>
-                    <a:pt x="7090630" y="0"/>
+                    <a:pt x="70547" y="772522"/>
+                  </a:lnTo>
+                  <a:lnTo>
+                    <a:pt x="141094" y="767644"/>
+                  </a:lnTo>
+                  <a:lnTo>
+                    <a:pt x="211641" y="762721"/>
+                  </a:lnTo>
+                  <a:lnTo>
+                    <a:pt x="282188" y="757752"/>
+                  </a:lnTo>
+                  <a:lnTo>
+                    <a:pt x="352735" y="752738"/>
+                  </a:lnTo>
+                  <a:lnTo>
+                    <a:pt x="423283" y="747677"/>
+                  </a:lnTo>
+                  <a:lnTo>
+                    <a:pt x="493830" y="742569"/>
+                  </a:lnTo>
+                  <a:lnTo>
+                    <a:pt x="564377" y="737414"/>
+                  </a:lnTo>
+                  <a:lnTo>
+                    <a:pt x="634924" y="732211"/>
+                  </a:lnTo>
+                  <a:lnTo>
+                    <a:pt x="705471" y="726961"/>
+                  </a:lnTo>
+                  <a:lnTo>
+                    <a:pt x="776018" y="721662"/>
+                  </a:lnTo>
+                  <a:lnTo>
+                    <a:pt x="846566" y="716313"/>
+                  </a:lnTo>
+                  <a:lnTo>
+                    <a:pt x="917113" y="710916"/>
+                  </a:lnTo>
+                  <a:lnTo>
+                    <a:pt x="987660" y="705468"/>
+                  </a:lnTo>
+                  <a:lnTo>
+                    <a:pt x="1058207" y="699970"/>
+                  </a:lnTo>
+                  <a:lnTo>
+                    <a:pt x="1128754" y="694422"/>
+                  </a:lnTo>
+                  <a:lnTo>
+                    <a:pt x="1199301" y="688822"/>
+                  </a:lnTo>
+                  <a:lnTo>
+                    <a:pt x="1269849" y="683170"/>
+                  </a:lnTo>
+                  <a:lnTo>
+                    <a:pt x="1340396" y="677466"/>
+                  </a:lnTo>
+                  <a:lnTo>
+                    <a:pt x="1410943" y="671709"/>
+                  </a:lnTo>
+                  <a:lnTo>
+                    <a:pt x="1481490" y="665899"/>
+                  </a:lnTo>
+                  <a:lnTo>
+                    <a:pt x="1552037" y="660035"/>
+                  </a:lnTo>
+                  <a:lnTo>
+                    <a:pt x="1622584" y="654117"/>
+                  </a:lnTo>
+                  <a:lnTo>
+                    <a:pt x="1693132" y="648145"/>
+                  </a:lnTo>
+                  <a:lnTo>
+                    <a:pt x="1763679" y="642117"/>
+                  </a:lnTo>
+                  <a:lnTo>
+                    <a:pt x="1834226" y="636033"/>
+                  </a:lnTo>
+                  <a:lnTo>
+                    <a:pt x="1904773" y="629893"/>
+                  </a:lnTo>
+                  <a:lnTo>
+                    <a:pt x="1975320" y="623697"/>
+                  </a:lnTo>
+                  <a:lnTo>
+                    <a:pt x="2045868" y="617443"/>
+                  </a:lnTo>
+                  <a:lnTo>
+                    <a:pt x="2116415" y="611131"/>
+                  </a:lnTo>
+                  <a:lnTo>
+                    <a:pt x="2186962" y="604761"/>
+                  </a:lnTo>
+                  <a:lnTo>
+                    <a:pt x="2257509" y="598333"/>
+                  </a:lnTo>
+                  <a:lnTo>
+                    <a:pt x="2328056" y="591844"/>
+                  </a:lnTo>
+                  <a:lnTo>
+                    <a:pt x="2398603" y="585296"/>
+                  </a:lnTo>
+                  <a:lnTo>
+                    <a:pt x="2469151" y="578687"/>
+                  </a:lnTo>
+                  <a:lnTo>
+                    <a:pt x="2539698" y="572017"/>
+                  </a:lnTo>
+                  <a:lnTo>
+                    <a:pt x="2610245" y="565286"/>
+                  </a:lnTo>
+                  <a:lnTo>
+                    <a:pt x="2680792" y="558492"/>
+                  </a:lnTo>
+                  <a:lnTo>
+                    <a:pt x="2751339" y="551635"/>
+                  </a:lnTo>
+                  <a:lnTo>
+                    <a:pt x="2821886" y="544715"/>
+                  </a:lnTo>
+                  <a:lnTo>
+                    <a:pt x="2892434" y="537731"/>
+                  </a:lnTo>
+                  <a:lnTo>
+                    <a:pt x="2962981" y="530683"/>
+                  </a:lnTo>
+                  <a:lnTo>
+                    <a:pt x="3033528" y="523569"/>
+                  </a:lnTo>
+                  <a:lnTo>
+                    <a:pt x="3104075" y="516389"/>
+                  </a:lnTo>
+                  <a:lnTo>
+                    <a:pt x="3174622" y="509144"/>
+                  </a:lnTo>
+                  <a:lnTo>
+                    <a:pt x="3245169" y="501831"/>
+                  </a:lnTo>
+                  <a:lnTo>
+                    <a:pt x="3315717" y="494450"/>
+                  </a:lnTo>
+                  <a:lnTo>
+                    <a:pt x="3386264" y="487002"/>
+                  </a:lnTo>
+                  <a:lnTo>
+                    <a:pt x="3456811" y="479484"/>
+                  </a:lnTo>
+                  <a:lnTo>
+                    <a:pt x="3527358" y="471897"/>
+                  </a:lnTo>
+                  <a:lnTo>
+                    <a:pt x="3597905" y="464240"/>
+                  </a:lnTo>
+                  <a:lnTo>
+                    <a:pt x="3668452" y="456512"/>
+                  </a:lnTo>
+                  <a:lnTo>
+                    <a:pt x="3739000" y="448713"/>
+                  </a:lnTo>
+                  <a:lnTo>
+                    <a:pt x="3809547" y="440841"/>
+                  </a:lnTo>
+                  <a:lnTo>
+                    <a:pt x="3880094" y="432897"/>
+                  </a:lnTo>
+                  <a:lnTo>
+                    <a:pt x="3950641" y="424879"/>
+                  </a:lnTo>
+                  <a:lnTo>
+                    <a:pt x="4021188" y="416787"/>
+                  </a:lnTo>
+                  <a:lnTo>
+                    <a:pt x="4091736" y="408621"/>
+                  </a:lnTo>
+                  <a:lnTo>
+                    <a:pt x="4162283" y="400379"/>
+                  </a:lnTo>
+                  <a:lnTo>
+                    <a:pt x="4232830" y="392060"/>
+                  </a:lnTo>
+                  <a:lnTo>
+                    <a:pt x="4303377" y="383665"/>
+                  </a:lnTo>
+                  <a:lnTo>
+                    <a:pt x="4373924" y="375192"/>
+                  </a:lnTo>
+                  <a:lnTo>
+                    <a:pt x="4444471" y="366641"/>
+                  </a:lnTo>
+                  <a:lnTo>
+                    <a:pt x="4515019" y="358011"/>
+                  </a:lnTo>
+                  <a:lnTo>
+                    <a:pt x="4585566" y="349301"/>
+                  </a:lnTo>
+                  <a:lnTo>
+                    <a:pt x="4656113" y="340511"/>
+                  </a:lnTo>
+                  <a:lnTo>
+                    <a:pt x="4726660" y="331639"/>
+                  </a:lnTo>
+                  <a:lnTo>
+                    <a:pt x="4797207" y="322685"/>
+                  </a:lnTo>
+                  <a:lnTo>
+                    <a:pt x="4867754" y="313649"/>
+                  </a:lnTo>
+                  <a:lnTo>
+                    <a:pt x="4938302" y="304528"/>
+                  </a:lnTo>
+                  <a:lnTo>
+                    <a:pt x="5008849" y="295324"/>
+                  </a:lnTo>
+                  <a:lnTo>
+                    <a:pt x="5079396" y="286035"/>
+                  </a:lnTo>
+                  <a:lnTo>
+                    <a:pt x="5149943" y="276659"/>
+                  </a:lnTo>
+                  <a:lnTo>
+                    <a:pt x="5220490" y="267197"/>
+                  </a:lnTo>
+                  <a:lnTo>
+                    <a:pt x="5291037" y="257648"/>
+                  </a:lnTo>
+                  <a:lnTo>
+                    <a:pt x="5361585" y="248010"/>
+                  </a:lnTo>
+                  <a:lnTo>
+                    <a:pt x="5432132" y="238283"/>
+                  </a:lnTo>
+                  <a:lnTo>
+                    <a:pt x="5502679" y="228466"/>
+                  </a:lnTo>
+                  <a:lnTo>
+                    <a:pt x="5573226" y="218559"/>
+                  </a:lnTo>
+                  <a:lnTo>
+                    <a:pt x="5643773" y="208560"/>
+                  </a:lnTo>
+                  <a:lnTo>
+                    <a:pt x="5714320" y="198468"/>
+                  </a:lnTo>
+                  <a:lnTo>
+                    <a:pt x="5784868" y="188283"/>
+                  </a:lnTo>
+                  <a:lnTo>
+                    <a:pt x="5855415" y="178004"/>
+                  </a:lnTo>
+                  <a:lnTo>
+                    <a:pt x="5925962" y="167630"/>
+                  </a:lnTo>
+                  <a:lnTo>
+                    <a:pt x="5996509" y="157160"/>
+                  </a:lnTo>
+                  <a:lnTo>
+                    <a:pt x="6067056" y="146593"/>
+                  </a:lnTo>
+                  <a:lnTo>
+                    <a:pt x="6137604" y="135929"/>
+                  </a:lnTo>
+                  <a:lnTo>
+                    <a:pt x="6208151" y="125166"/>
+                  </a:lnTo>
+                  <a:lnTo>
+                    <a:pt x="6278698" y="114304"/>
+                  </a:lnTo>
+                  <a:lnTo>
+                    <a:pt x="6349245" y="103341"/>
+                  </a:lnTo>
+                  <a:lnTo>
+                    <a:pt x="6419792" y="92276"/>
+                  </a:lnTo>
+                  <a:lnTo>
+                    <a:pt x="6490339" y="81110"/>
+                  </a:lnTo>
+                  <a:lnTo>
+                    <a:pt x="6560887" y="69840"/>
+                  </a:lnTo>
+                  <a:lnTo>
+                    <a:pt x="6631434" y="58466"/>
+                  </a:lnTo>
+                  <a:lnTo>
+                    <a:pt x="6701981" y="46987"/>
+                  </a:lnTo>
+                  <a:lnTo>
+                    <a:pt x="6772528" y="35402"/>
+                  </a:lnTo>
+                  <a:lnTo>
+                    <a:pt x="6843075" y="23709"/>
+                  </a:lnTo>
+                  <a:lnTo>
+                    <a:pt x="6913622" y="11909"/>
+                  </a:lnTo>
+                  <a:lnTo>
+                    <a:pt x="6984170" y="0"/>
                   </a:lnTo>
                 </a:path>
               </a:pathLst>
@@ -4743,21 +4743,21 @@
           </p:nvSpPr>
           <p:spPr>
             <a:xfrm>
-              <a:off x="817517" y="4727786"/>
-              <a:ext cx="7799693" cy="0"/>
+              <a:off x="915645" y="4684908"/>
+              <a:ext cx="7682587" cy="0"/>
             </a:xfrm>
             <a:custGeom>
               <a:avLst/>
               <a:pathLst>
-                <a:path w="7799693" h="0">
+                <a:path w="7682587" h="0">
                   <a:moveTo>
                     <a:pt x="0" y="0"/>
                   </a:moveTo>
                   <a:lnTo>
-                    <a:pt x="7799693" y="0"/>
-                  </a:lnTo>
-                  <a:lnTo>
-                    <a:pt x="7799693" y="0"/>
+                    <a:pt x="7682587" y="0"/>
+                  </a:lnTo>
+                  <a:lnTo>
+                    <a:pt x="7682587" y="0"/>
                   </a:lnTo>
                 </a:path>
               </a:pathLst>
@@ -4786,15 +4786,15 @@
           </p:nvSpPr>
           <p:spPr>
             <a:xfrm>
-              <a:off x="4222163" y="2073503"/>
-              <a:ext cx="0" cy="3649639"/>
+              <a:off x="4269172" y="2209169"/>
+              <a:ext cx="0" cy="3404141"/>
             </a:xfrm>
             <a:custGeom>
               <a:avLst/>
               <a:pathLst>
-                <a:path w="0" h="3649639">
+                <a:path w="0" h="3404141">
                   <a:moveTo>
-                    <a:pt x="0" y="3649639"/>
+                    <a:pt x="0" y="3404141"/>
                   </a:moveTo>
                   <a:lnTo>
                     <a:pt x="0" y="0"/>
@@ -4829,8 +4829,8 @@
           </p:nvSpPr>
           <p:spPr>
             <a:xfrm>
-              <a:off x="692708" y="5517199"/>
-              <a:ext cx="62179" cy="80101"/>
+              <a:off x="756929" y="5407599"/>
+              <a:ext cx="79004" cy="101955"/>
             </a:xfrm>
             <a:prstGeom prst="rect">
               <a:avLst/>
@@ -4843,7 +4843,7 @@
             <a:p>
               <a:pPr algn="l" marL="0" marR="0" indent="0">
                 <a:lnSpc>
-                  <a:spcPts val="880"/>
+                  <a:spcPts val="1120"/>
                 </a:lnSpc>
                 <a:spcBef>
                   <a:spcPts val="0"/>
@@ -4853,7 +4853,7 @@
                 </a:spcAft>
               </a:pPr>
               <a:r>
-                <a:rPr sz="880">
+                <a:rPr sz="1120">
                   <a:solidFill>
                     <a:srgbClr val="4D4D4D">
                       <a:alpha val="100000"/>
@@ -4875,8 +4875,8 @@
           </p:nvSpPr>
           <p:spPr>
             <a:xfrm>
-              <a:off x="692708" y="4687735"/>
-              <a:ext cx="62179" cy="80101"/>
+              <a:off x="756929" y="4633931"/>
+              <a:ext cx="79004" cy="101955"/>
             </a:xfrm>
             <a:prstGeom prst="rect">
               <a:avLst/>
@@ -4889,7 +4889,7 @@
             <a:p>
               <a:pPr algn="l" marL="0" marR="0" indent="0">
                 <a:lnSpc>
-                  <a:spcPts val="880"/>
+                  <a:spcPts val="1120"/>
                 </a:lnSpc>
                 <a:spcBef>
                   <a:spcPts val="0"/>
@@ -4899,7 +4899,7 @@
                 </a:spcAft>
               </a:pPr>
               <a:r>
-                <a:rPr sz="880">
+                <a:rPr sz="1120">
                   <a:solidFill>
                     <a:srgbClr val="4D4D4D">
                       <a:alpha val="100000"/>
@@ -4921,8 +4921,8 @@
           </p:nvSpPr>
           <p:spPr>
             <a:xfrm>
-              <a:off x="692708" y="3858272"/>
-              <a:ext cx="62179" cy="80101"/>
+              <a:off x="756929" y="3860262"/>
+              <a:ext cx="79004" cy="101955"/>
             </a:xfrm>
             <a:prstGeom prst="rect">
               <a:avLst/>
@@ -4935,7 +4935,7 @@
             <a:p>
               <a:pPr algn="l" marL="0" marR="0" indent="0">
                 <a:lnSpc>
-                  <a:spcPts val="880"/>
+                  <a:spcPts val="1120"/>
                 </a:lnSpc>
                 <a:spcBef>
                   <a:spcPts val="0"/>
@@ -4945,7 +4945,7 @@
                 </a:spcAft>
               </a:pPr>
               <a:r>
-                <a:rPr sz="880">
+                <a:rPr sz="1120">
                   <a:solidFill>
                     <a:srgbClr val="4D4D4D">
                       <a:alpha val="100000"/>
@@ -4967,8 +4967,8 @@
           </p:nvSpPr>
           <p:spPr>
             <a:xfrm>
-              <a:off x="692708" y="3028808"/>
-              <a:ext cx="62179" cy="80101"/>
+              <a:off x="756929" y="3086593"/>
+              <a:ext cx="79004" cy="101955"/>
             </a:xfrm>
             <a:prstGeom prst="rect">
               <a:avLst/>
@@ -4981,7 +4981,7 @@
             <a:p>
               <a:pPr algn="l" marL="0" marR="0" indent="0">
                 <a:lnSpc>
-                  <a:spcPts val="880"/>
+                  <a:spcPts val="1120"/>
                 </a:lnSpc>
                 <a:spcBef>
                   <a:spcPts val="0"/>
@@ -4991,7 +4991,7 @@
                 </a:spcAft>
               </a:pPr>
               <a:r>
-                <a:rPr sz="880">
+                <a:rPr sz="1120">
                   <a:solidFill>
                     <a:srgbClr val="4D4D4D">
                       <a:alpha val="100000"/>
@@ -5013,8 +5013,8 @@
           </p:nvSpPr>
           <p:spPr>
             <a:xfrm>
-              <a:off x="692708" y="2199345"/>
-              <a:ext cx="62179" cy="80101"/>
+              <a:off x="756929" y="2312925"/>
+              <a:ext cx="79004" cy="101955"/>
             </a:xfrm>
             <a:prstGeom prst="rect">
               <a:avLst/>
@@ -5027,7 +5027,7 @@
             <a:p>
               <a:pPr algn="l" marL="0" marR="0" indent="0">
                 <a:lnSpc>
-                  <a:spcPts val="880"/>
+                  <a:spcPts val="1120"/>
                 </a:lnSpc>
                 <a:spcBef>
                   <a:spcPts val="0"/>
@@ -5037,7 +5037,7 @@
                 </a:spcAft>
               </a:pPr>
               <a:r>
-                <a:rPr sz="880">
+                <a:rPr sz="1120">
                   <a:solidFill>
                     <a:srgbClr val="4D4D4D">
                       <a:alpha val="100000"/>
@@ -5059,8 +5059,8 @@
           </p:nvSpPr>
           <p:spPr>
             <a:xfrm>
-              <a:off x="1328653" y="5785772"/>
-              <a:ext cx="223753" cy="80101"/>
+              <a:off x="1387159" y="5693022"/>
+              <a:ext cx="284286" cy="101955"/>
             </a:xfrm>
             <a:prstGeom prst="rect">
               <a:avLst/>
@@ -5073,7 +5073,7 @@
             <a:p>
               <a:pPr algn="l" marL="0" marR="0" indent="0">
                 <a:lnSpc>
-                  <a:spcPts val="880"/>
+                  <a:spcPts val="1120"/>
                 </a:lnSpc>
                 <a:spcBef>
                   <a:spcPts val="0"/>
@@ -5083,7 +5083,7 @@
                 </a:spcAft>
               </a:pPr>
               <a:r>
-                <a:rPr sz="880">
+                <a:rPr sz="1120">
                   <a:solidFill>
                     <a:srgbClr val="4D4D4D">
                       <a:alpha val="100000"/>
@@ -5105,8 +5105,8 @@
           </p:nvSpPr>
           <p:spPr>
             <a:xfrm>
-              <a:off x="2724172" y="5785772"/>
-              <a:ext cx="161574" cy="80101"/>
+              <a:off x="2770605" y="5693022"/>
+              <a:ext cx="205282" cy="101955"/>
             </a:xfrm>
             <a:prstGeom prst="rect">
               <a:avLst/>
@@ -5119,7 +5119,7 @@
             <a:p>
               <a:pPr algn="l" marL="0" marR="0" indent="0">
                 <a:lnSpc>
-                  <a:spcPts val="880"/>
+                  <a:spcPts val="1120"/>
                 </a:lnSpc>
                 <a:spcBef>
                   <a:spcPts val="0"/>
@@ -5129,7 +5129,7 @@
                 </a:spcAft>
               </a:pPr>
               <a:r>
-                <a:rPr sz="880">
+                <a:rPr sz="1120">
                   <a:solidFill>
                     <a:srgbClr val="4D4D4D">
                       <a:alpha val="100000"/>
@@ -5151,8 +5151,8 @@
           </p:nvSpPr>
           <p:spPr>
             <a:xfrm>
-              <a:off x="4138300" y="5785772"/>
-              <a:ext cx="62179" cy="80101"/>
+              <a:off x="4177689" y="5693022"/>
+              <a:ext cx="79004" cy="101955"/>
             </a:xfrm>
             <a:prstGeom prst="rect">
               <a:avLst/>
@@ -5165,7 +5165,7 @@
             <a:p>
               <a:pPr algn="l" marL="0" marR="0" indent="0">
                 <a:lnSpc>
-                  <a:spcPts val="880"/>
+                  <a:spcPts val="1120"/>
                 </a:lnSpc>
                 <a:spcBef>
                   <a:spcPts val="0"/>
@@ -5175,7 +5175,7 @@
                 </a:spcAft>
               </a:pPr>
               <a:r>
-                <a:rPr sz="880">
+                <a:rPr sz="1120">
                   <a:solidFill>
                     <a:srgbClr val="4D4D4D">
                       <a:alpha val="100000"/>
@@ -5197,8 +5197,8 @@
           </p:nvSpPr>
           <p:spPr>
             <a:xfrm>
-              <a:off x="5471640" y="5785772"/>
-              <a:ext cx="124358" cy="80101"/>
+              <a:off x="5482131" y="5693022"/>
+              <a:ext cx="158008" cy="101955"/>
             </a:xfrm>
             <a:prstGeom prst="rect">
               <a:avLst/>
@@ -5211,7 +5211,7 @@
             <a:p>
               <a:pPr algn="l" marL="0" marR="0" indent="0">
                 <a:lnSpc>
-                  <a:spcPts val="880"/>
+                  <a:spcPts val="1120"/>
                 </a:lnSpc>
                 <a:spcBef>
                   <a:spcPts val="0"/>
@@ -5221,7 +5221,7 @@
                 </a:spcAft>
               </a:pPr>
               <a:r>
-                <a:rPr sz="880">
+                <a:rPr sz="1120">
                   <a:solidFill>
                     <a:srgbClr val="4D4D4D">
                       <a:alpha val="100000"/>
@@ -5243,8 +5243,8 @@
           </p:nvSpPr>
           <p:spPr>
             <a:xfrm>
-              <a:off x="6804980" y="5785772"/>
-              <a:ext cx="186537" cy="80101"/>
+              <a:off x="6786573" y="5693022"/>
+              <a:ext cx="237012" cy="101955"/>
             </a:xfrm>
             <a:prstGeom prst="rect">
               <a:avLst/>
@@ -5257,7 +5257,7 @@
             <a:p>
               <a:pPr algn="l" marL="0" marR="0" indent="0">
                 <a:lnSpc>
-                  <a:spcPts val="880"/>
+                  <a:spcPts val="1120"/>
                 </a:lnSpc>
                 <a:spcBef>
                   <a:spcPts val="0"/>
@@ -5267,7 +5267,7 @@
                 </a:spcAft>
               </a:pPr>
               <a:r>
-                <a:rPr sz="880">
+                <a:rPr sz="1120">
                   <a:solidFill>
                     <a:srgbClr val="4D4D4D">
                       <a:alpha val="100000"/>
@@ -5289,8 +5289,8 @@
           </p:nvSpPr>
           <p:spPr>
             <a:xfrm>
-              <a:off x="8169410" y="5785772"/>
-              <a:ext cx="186537" cy="80101"/>
+              <a:off x="8130517" y="5693022"/>
+              <a:ext cx="237012" cy="101955"/>
             </a:xfrm>
             <a:prstGeom prst="rect">
               <a:avLst/>
@@ -5303,7 +5303,7 @@
             <a:p>
               <a:pPr algn="l" marL="0" marR="0" indent="0">
                 <a:lnSpc>
-                  <a:spcPts val="880"/>
+                  <a:spcPts val="1120"/>
                 </a:lnSpc>
                 <a:spcBef>
                   <a:spcPts val="0"/>
@@ -5313,7 +5313,7 @@
                 </a:spcAft>
               </a:pPr>
               <a:r>
-                <a:rPr sz="880">
+                <a:rPr sz="1120">
                   <a:solidFill>
                     <a:srgbClr val="4D4D4D">
                       <a:alpha val="100000"/>
@@ -5335,8 +5335,8 @@
           </p:nvSpPr>
           <p:spPr>
             <a:xfrm>
-              <a:off x="3987536" y="5925448"/>
-              <a:ext cx="1459656" cy="100218"/>
+              <a:off x="3828319" y="5870717"/>
+              <a:ext cx="1857237" cy="127558"/>
             </a:xfrm>
             <a:prstGeom prst="rect">
               <a:avLst/>
@@ -5349,7 +5349,7 @@
             <a:p>
               <a:pPr algn="l" marL="0" marR="0" indent="0">
                 <a:lnSpc>
-                  <a:spcPts val="1100"/>
+                  <a:spcPts val="1400"/>
                 </a:lnSpc>
                 <a:spcBef>
                   <a:spcPts val="0"/>
@@ -5359,7 +5359,7 @@
                 </a:spcAft>
               </a:pPr>
               <a:r>
-                <a:rPr sz="1100">
+                <a:rPr sz="1400">
                   <a:solidFill>
                     <a:srgbClr val="000000">
                       <a:alpha val="100000"/>
@@ -5381,8 +5381,8 @@
           </p:nvSpPr>
           <p:spPr>
             <a:xfrm rot="-5400000">
-              <a:off x="68446" y="3848213"/>
-              <a:ext cx="1016904" cy="100218"/>
+              <a:off x="-37527" y="3847460"/>
+              <a:ext cx="1294150" cy="127558"/>
             </a:xfrm>
             <a:prstGeom prst="rect">
               <a:avLst/>
@@ -5395,7 +5395,7 @@
             <a:p>
               <a:pPr algn="l" marL="0" marR="0" indent="0">
                 <a:lnSpc>
-                  <a:spcPts val="1100"/>
+                  <a:spcPts val="1400"/>
                 </a:lnSpc>
                 <a:spcBef>
                   <a:spcPts val="0"/>
@@ -5405,7 +5405,7 @@
                 </a:spcAft>
               </a:pPr>
               <a:r>
-                <a:rPr sz="1100">
+                <a:rPr sz="1400">
                   <a:solidFill>
                     <a:srgbClr val="000000">
                       <a:alpha val="100000"/>
@@ -5427,8 +5427,8 @@
           </p:nvSpPr>
           <p:spPr>
             <a:xfrm>
-              <a:off x="817517" y="1896563"/>
-              <a:ext cx="4433376" cy="82021"/>
+              <a:off x="915645" y="1977589"/>
+              <a:ext cx="5912784" cy="109362"/>
             </a:xfrm>
             <a:prstGeom prst="rect">
               <a:avLst/>
@@ -5441,7 +5441,7 @@
             <a:p>
               <a:pPr algn="l" marL="0" marR="0" indent="0">
                 <a:lnSpc>
-                  <a:spcPts val="900"/>
+                  <a:spcPts val="1200"/>
                 </a:lnSpc>
                 <a:spcBef>
                   <a:spcPts val="0"/>
@@ -5451,7 +5451,7 @@
                 </a:spcAft>
               </a:pPr>
               <a:r>
-                <a:rPr sz="900">
+                <a:rPr sz="1200">
                   <a:solidFill>
                     <a:srgbClr val="404040">
                       <a:alpha val="100000"/>
@@ -5473,8 +5473,8 @@
           </p:nvSpPr>
           <p:spPr>
             <a:xfrm>
-              <a:off x="817517" y="1669789"/>
-              <a:ext cx="2821289" cy="120152"/>
+              <a:off x="915645" y="1688767"/>
+              <a:ext cx="3591763" cy="153070"/>
             </a:xfrm>
             <a:prstGeom prst="rect">
               <a:avLst/>
@@ -5487,7 +5487,7 @@
             <a:p>
               <a:pPr algn="l" marL="0" marR="0" indent="0">
                 <a:lnSpc>
-                  <a:spcPts val="1320"/>
+                  <a:spcPts val="1680"/>
                 </a:lnSpc>
                 <a:spcBef>
                   <a:spcPts val="0"/>
@@ -5497,7 +5497,7 @@
                 </a:spcAft>
               </a:pPr>
               <a:r>
-                <a:rPr sz="1320">
+                <a:rPr sz="1680">
                   <a:solidFill>
                     <a:srgbClr val="000000">
                       <a:alpha val="100000"/>
